--- a/seminario/seminario-analise-de-artigo.pptx
+++ b/seminario/seminario-analise-de-artigo.pptx
@@ -1396,7 +1396,7 @@
           <a:p>
             <a:r>
               <a:rPr lang="en-US" dirty="0"/>
-              <a:t>Diga que em Computação a conferência é o veículo principal, diferente de outras áreas. Isso justifica usar h5 e CORE em vez de JCR e Scopus.</a:t>
+              <a:t>Destaque que e de 2025 - estado da arte - e que e acesso aberto. Se perguntarem por artigos mais antigos, explique a diferenca entre precedente metodologico e estado da arte.</a:t>
             </a:r>
             <a:endParaRPr lang="en-US" dirty="0"/>
           </a:p>
@@ -7440,7 +7440,7 @@
                 <a:ea typeface="Cambria" pitchFamily="34" charset="-122"/>
                 <a:cs typeface="Cambria" pitchFamily="34" charset="-120"/>
               </a:rPr>
-              <a:t>Betrayed by the Guardian: Security and Privacy Risks of Parental Control Solutions</a:t>
+              <a:t>Privacy Settings of Third-Party Libraries in Android Apps: A Study of Facebook SDKs</a:t>
             </a:r>
             <a:endParaRPr lang="en-US" sz="1800" dirty="0"/>
           </a:p>
@@ -7479,7 +7479,24 @@
                 <a:ea typeface="Calibri" pitchFamily="34" charset="-122"/>
                 <a:cs typeface="Calibri" pitchFamily="34" charset="-120"/>
               </a:rPr>
-              <a:t>ALI, S.; ELGHARABAWY, M.; DUCHAUSSOY, Q.; MANNAN, M.; YOUSSEF, A.  In: Proceedings of the 36th Annual Computer Security Applications Conference (ACSAC '20), 2020, p. 69–83.  DOI: 10.1145/3427228.3427287</a:t>
+              <a:t>Proceedings on Privacy Enhancing Technologies (PoPETs), v. 2025, n. 1.   Acesso aberto: petsymposium.org/popets/2025/popets-2025-0056.php</a:t>
+            </a:r>
+            <a:endParaRPr lang="en-US" sz="1150" dirty="0"/>
+          </a:p>
+          <a:p>
+            <a:pPr indent="0" marL="0">
+              <a:buNone/>
+            </a:pPr>
+            <a:r>
+              <a:rPr lang="en-US" sz="1150" dirty="0">
+                <a:solidFill>
+                  <a:srgbClr val="9FC5DA"/>
+                </a:solidFill>
+                <a:latin typeface="Calibri" pitchFamily="34" charset="0"/>
+                <a:ea typeface="Calibri" pitchFamily="34" charset="-122"/>
+                <a:cs typeface="Calibri" pitchFamily="34" charset="-120"/>
+              </a:rPr>
+              <a:t>[ confirme autores e paginação ao baixar o PDF ]</a:t>
             </a:r>
             <a:endParaRPr lang="en-US" sz="1150" dirty="0"/>
           </a:p>
@@ -7587,7 +7604,7 @@
                 <a:ea typeface="Calibri" pitchFamily="34" charset="-122"/>
                 <a:cs typeface="Calibri" pitchFamily="34" charset="-120"/>
               </a:rPr>
-              <a:t>Coleta e análise próprias: 8 dispositivos de rede, 29 apps Android (13 soluções), 10 extensões Chrome e 8 aplicações Windows, entre mar/2019 e mai/2020 — mais análise automatizada de 153 apps.</a:t>
+              <a:t>Coleta e análise próprias: mais de 6.000 apps populares examinados para detectar SDKs, verificar como o desenvolvedor configurou as opções de privacidade e confrontar isso com o que o app declara.</a:t>
             </a:r>
             <a:endParaRPr lang="en-US" sz="1150" dirty="0"/>
           </a:p>
@@ -7696,7 +7713,7 @@
                 <a:ea typeface="Calibri" pitchFamily="34" charset="-122"/>
                 <a:cs typeface="Calibri" pitchFamily="34" charset="-120"/>
               </a:rPr>
-              <a:t>Página exata onde os autores descrevem a coleta própria</a:t>
+              <a:t>Autores, paginação e número da edição</a:t>
             </a:r>
             <a:endParaRPr lang="en-US" sz="1150" dirty="0"/>
           </a:p>
@@ -7717,7 +7734,28 @@
                 <a:ea typeface="Calibri" pitchFamily="34" charset="-122"/>
                 <a:cs typeface="Calibri" pitchFamily="34" charset="-120"/>
               </a:rPr>
-              <a:t>Confirme a paginação e o DOI na versão da ACM DL</a:t>
+              <a:t>Página onde os autores descrevem a coleta própria</a:t>
+            </a:r>
+            <a:endParaRPr lang="en-US" sz="1150" dirty="0"/>
+          </a:p>
+          <a:p>
+            <a:pPr marL="342900" indent="-342900">
+              <a:spcAft>
+                <a:spcPts val="500"/>
+              </a:spcAft>
+              <a:buSzPct val="100000"/>
+              <a:buChar char="•"/>
+            </a:pPr>
+            <a:r>
+              <a:rPr lang="en-US" sz="1150" dirty="0">
+                <a:solidFill>
+                  <a:srgbClr val="5A6472"/>
+                </a:solidFill>
+                <a:latin typeface="Calibri" pitchFamily="34" charset="0"/>
+                <a:ea typeface="Calibri" pitchFamily="34" charset="-122"/>
+                <a:cs typeface="Calibri" pitchFamily="34" charset="-120"/>
+              </a:rPr>
+              <a:t>Tamanho exato do corpus analisado</a:t>
             </a:r>
             <a:endParaRPr lang="en-US" sz="1150" dirty="0"/>
           </a:p>
@@ -7756,7 +7794,7 @@
                 <a:ea typeface="Calibri" pitchFamily="34" charset="-122"/>
                 <a:cs typeface="Calibri" pitchFamily="34" charset="-120"/>
               </a:rPr>
-              <a:t>1 minuto  ·  artigo de CONFERÊNCIA — define quais métricas levantar</a:t>
+              <a:t>1 minuto  ·  PoPETs é PERIÓDICO — use JCR + Scopus, não h5/CORE</a:t>
             </a:r>
             <a:endParaRPr lang="en-US" sz="950" dirty="0"/>
           </a:p>
@@ -9085,7 +9123,7 @@
                 <a:ea typeface="Calibri" pitchFamily="34" charset="-122"/>
                 <a:cs typeface="Calibri" pitchFamily="34" charset="-120"/>
               </a:rPr>
-              <a:t>A PREENCHER  ·  levantar — artigo de conferência</a:t>
+              <a:t>A PREENCHER  ·  levantar — PoPETs é PERIÓDICO</a:t>
             </a:r>
             <a:endParaRPr lang="en-US" sz="1000" dirty="0"/>
           </a:p>
@@ -9128,7 +9166,7 @@
                 <a:ea typeface="Calibri" pitchFamily="34" charset="-122"/>
                 <a:cs typeface="Calibri" pitchFamily="34" charset="-120"/>
               </a:rPr>
-              <a:t>h5-index (Google Scholar → Metrics):  ______</a:t>
+              <a:t>JIF Percentile (Web of Science → JCR):  ______</a:t>
             </a:r>
             <a:endParaRPr lang="en-US" sz="1150" dirty="0"/>
           </a:p>
@@ -9149,7 +9187,7 @@
                 <a:ea typeface="Calibri" pitchFamily="34" charset="-122"/>
                 <a:cs typeface="Calibri" pitchFamily="34" charset="-120"/>
               </a:rPr>
-              <a:t>h5-mediana:  ______</a:t>
+              <a:t>Highest Percentile (Scopus → Sources):  ______</a:t>
             </a:r>
             <a:endParaRPr lang="en-US" sz="1150" dirty="0"/>
           </a:p>
@@ -9170,7 +9208,7 @@
                 <a:ea typeface="Calibri" pitchFamily="34" charset="-122"/>
                 <a:cs typeface="Calibri" pitchFamily="34" charset="-120"/>
               </a:rPr>
-              <a:t>Estrato Qualis correspondente:  ______</a:t>
+              <a:t>Estrato Qualis de cada um:  ______  /  ______</a:t>
             </a:r>
             <a:endParaRPr lang="en-US" sz="1150" dirty="0"/>
           </a:p>
@@ -9191,7 +9229,7 @@
                 <a:ea typeface="Calibri" pitchFamily="34" charset="-122"/>
                 <a:cs typeface="Calibri" pitchFamily="34" charset="-120"/>
               </a:rPr>
-              <a:t>CORE Rank (portal.core.edu.au — aberto):  ______  (ano: ____)</a:t>
+              <a:t>Se não estiver no JCR, reporte a ausência — é achado, não falha</a:t>
             </a:r>
             <a:endParaRPr lang="en-US" sz="1150" dirty="0"/>
           </a:p>

--- a/seminario/seminario-analise-de-artigo.pptx
+++ b/seminario/seminario-analise-de-artigo.pptx
@@ -1396,7 +1396,7 @@
           <a:p>
             <a:r>
               <a:rPr lang="en-US" dirty="0"/>
-              <a:t>Destaque que e de 2025 - estado da arte - e que e acesso aberto. Se perguntarem por artigos mais antigos, explique a diferenca entre precedente metodologico e estado da arte.</a:t>
+              <a:t>Destaque a escala - 239 mil apps - e que CCS e uma das quatro principais conferencias de seguranca do mundo. O PDF e aberto e o artefato esta no GitHub.</a:t>
             </a:r>
             <a:endParaRPr lang="en-US" dirty="0"/>
           </a:p>
@@ -7432,7 +7432,7 @@
               <a:buNone/>
             </a:pPr>
             <a:r>
-              <a:rPr lang="en-US" sz="1800" b="1" dirty="0">
+              <a:rPr lang="en-US" sz="1650" b="1" dirty="0">
                 <a:solidFill>
                   <a:srgbClr val="FFFFFF"/>
                 </a:solidFill>
@@ -7440,9 +7440,9 @@
                 <a:ea typeface="Cambria" pitchFamily="34" charset="-122"/>
                 <a:cs typeface="Cambria" pitchFamily="34" charset="-120"/>
               </a:rPr>
-              <a:t>Privacy Settings of Third-Party Libraries in Android Apps: A Study of Facebook SDKs</a:t>
-            </a:r>
-            <a:endParaRPr lang="en-US" sz="1800" dirty="0"/>
+              <a:t>Freely Given Consent? Studying Consent Notice of Third-Party Tracking and Its Violations of GDPR in Android Apps</a:t>
+            </a:r>
+            <a:endParaRPr lang="en-US" sz="1650" dirty="0"/>
           </a:p>
         </p:txBody>
       </p:sp>
@@ -7479,7 +7479,7 @@
                 <a:ea typeface="Calibri" pitchFamily="34" charset="-122"/>
                 <a:cs typeface="Calibri" pitchFamily="34" charset="-120"/>
               </a:rPr>
-              <a:t>Proceedings on Privacy Enhancing Technologies (PoPETs), v. 2025, n. 1.   Acesso aberto: petsymposium.org/popets/2025/popets-2025-0056.php</a:t>
+              <a:t>NGUYEN, T. T.; BACKES, M.; STOCK, B.   In: Proceedings of the 2022 ACM SIGSAC Conference on Computer and Communications Security (CCS '22), 2022.   DOI: 10.1145/3548606.3560564</a:t>
             </a:r>
             <a:endParaRPr lang="en-US" sz="1150" dirty="0"/>
           </a:p>
@@ -7496,7 +7496,7 @@
                 <a:ea typeface="Calibri" pitchFamily="34" charset="-122"/>
                 <a:cs typeface="Calibri" pitchFamily="34" charset="-120"/>
               </a:rPr>
-              <a:t>[ confirme autores e paginação ao baixar o PDF ]</a:t>
+              <a:t>PDF aberto: swag.cispa.saarland   ·   artefato: github.com/cispa/consent-notices</a:t>
             </a:r>
             <a:endParaRPr lang="en-US" sz="1150" dirty="0"/>
           </a:p>
@@ -7604,7 +7604,7 @@
                 <a:ea typeface="Calibri" pitchFamily="34" charset="-122"/>
                 <a:cs typeface="Calibri" pitchFamily="34" charset="-120"/>
               </a:rPr>
-              <a:t>Coleta e análise próprias: mais de 6.000 apps populares examinados para detectar SDKs, verificar como o desenvolvedor configurou as opções de privacidade e confrontar isso com o que o app declara.</a:t>
+              <a:t>Coleta e análise próprias em larga escala: 239.381 aplicativos Android analisados, 13.082 com mecanismo de consentimento identificado. Primeiro estudo em escala sobre avisos de consentimento no Android.</a:t>
             </a:r>
             <a:endParaRPr lang="en-US" sz="1150" dirty="0"/>
           </a:p>
@@ -7713,7 +7713,7 @@
                 <a:ea typeface="Calibri" pitchFamily="34" charset="-122"/>
                 <a:cs typeface="Calibri" pitchFamily="34" charset="-120"/>
               </a:rPr>
-              <a:t>Autores, paginação e número da edição</a:t>
+              <a:t>Paginação exata nos anais do CCS '22</a:t>
             </a:r>
             <a:endParaRPr lang="en-US" sz="1150" dirty="0"/>
           </a:p>
@@ -7734,7 +7734,7 @@
                 <a:ea typeface="Calibri" pitchFamily="34" charset="-122"/>
                 <a:cs typeface="Calibri" pitchFamily="34" charset="-120"/>
               </a:rPr>
-              <a:t>Página onde os autores descrevem a coleta própria</a:t>
+              <a:t>Como o corpus afunilou de 239.381 para 13.082</a:t>
             </a:r>
             <a:endParaRPr lang="en-US" sz="1150" dirty="0"/>
           </a:p>
@@ -7755,7 +7755,7 @@
                 <a:ea typeface="Calibri" pitchFamily="34" charset="-122"/>
                 <a:cs typeface="Calibri" pitchFamily="34" charset="-120"/>
               </a:rPr>
-              <a:t>Tamanho exato do corpus analisado</a:t>
+              <a:t>Onde o artefato é citado no texto</a:t>
             </a:r>
             <a:endParaRPr lang="en-US" sz="1150" dirty="0"/>
           </a:p>
@@ -7794,7 +7794,7 @@
                 <a:ea typeface="Calibri" pitchFamily="34" charset="-122"/>
                 <a:cs typeface="Calibri" pitchFamily="34" charset="-120"/>
               </a:rPr>
-              <a:t>1 minuto  ·  PoPETs é PERIÓDICO — use JCR + Scopus, não h5/CORE</a:t>
+              <a:t>1 minuto  ·  CCS é CONFERÊNCIA — use h5 + Qualis + CORE Rank</a:t>
             </a:r>
             <a:endParaRPr lang="en-US" sz="950" dirty="0"/>
           </a:p>
@@ -8027,7 +8027,7 @@
                 <a:ea typeface="Calibri" pitchFamily="34" charset="-122"/>
                 <a:cs typeface="Calibri" pitchFamily="34" charset="-120"/>
               </a:rPr>
-              <a:t>Data da consulta: ____/____/2026   ·   Ano de publicação do artigo: 2020</a:t>
+              <a:t>Data da consulta: ____/____/2026   ·   Ano de publicação do artigo: 2022</a:t>
             </a:r>
             <a:endParaRPr lang="en-US" sz="1150" dirty="0"/>
           </a:p>
@@ -8230,7 +8230,7 @@
                 <a:ea typeface="Calibri" pitchFamily="34" charset="-122"/>
                 <a:cs typeface="Calibri" pitchFamily="34" charset="-120"/>
               </a:rPr>
-              <a:t>Contexto que valoriza a citação</a:t>
+              <a:t>Recência × citações: a troca</a:t>
             </a:r>
             <a:endParaRPr lang="en-US" sz="1300" dirty="0"/>
           </a:p>
@@ -8272,7 +8272,7 @@
                 <a:ea typeface="Calibri" pitchFamily="34" charset="-122"/>
                 <a:cs typeface="Calibri" pitchFamily="34" charset="-120"/>
               </a:rPr>
-              <a:t>Artigo de 2020 em conferência de segurança de primeira linha.</a:t>
+              <a:t>Um artigo de 2025 teve um ano para ser citado; um muito citado é antigo por construção.</a:t>
             </a:r>
             <a:endParaRPr lang="en-US" sz="1150" dirty="0"/>
           </a:p>
@@ -8301,7 +8301,7 @@
                 <a:ea typeface="Calibri" pitchFamily="34" charset="-122"/>
                 <a:cs typeface="Calibri" pitchFamily="34" charset="-120"/>
               </a:rPr>
-              <a:t>Compare com a média de citações da área, se conseguir o dado — contextualizar vale mais que o número cru.</a:t>
+              <a:t>2022 em CCS é o ponto de equilíbrio — e 239 mil apps é critério quantitativo por si só.</a:t>
             </a:r>
             <a:endParaRPr lang="en-US" sz="1150" dirty="0"/>
           </a:p>
@@ -9123,7 +9123,7 @@
                 <a:ea typeface="Calibri" pitchFamily="34" charset="-122"/>
                 <a:cs typeface="Calibri" pitchFamily="34" charset="-120"/>
               </a:rPr>
-              <a:t>A PREENCHER  ·  levantar — PoPETs é PERIÓDICO</a:t>
+              <a:t>A PREENCHER  ·  levantar — CCS é CONFERÊNCIA</a:t>
             </a:r>
             <a:endParaRPr lang="en-US" sz="1000" dirty="0"/>
           </a:p>
@@ -9166,7 +9166,7 @@
                 <a:ea typeface="Calibri" pitchFamily="34" charset="-122"/>
                 <a:cs typeface="Calibri" pitchFamily="34" charset="-120"/>
               </a:rPr>
-              <a:t>JIF Percentile (Web of Science → JCR):  ______</a:t>
+              <a:t>h5-index do CCS (Google Scholar → Metrics):  ______</a:t>
             </a:r>
             <a:endParaRPr lang="en-US" sz="1150" dirty="0"/>
           </a:p>
@@ -9187,7 +9187,7 @@
                 <a:ea typeface="Calibri" pitchFamily="34" charset="-122"/>
                 <a:cs typeface="Calibri" pitchFamily="34" charset="-120"/>
               </a:rPr>
-              <a:t>Highest Percentile (Scopus → Sources):  ______</a:t>
+              <a:t>h5-mediana:  ______</a:t>
             </a:r>
             <a:endParaRPr lang="en-US" sz="1150" dirty="0"/>
           </a:p>
@@ -9208,7 +9208,7 @@
                 <a:ea typeface="Calibri" pitchFamily="34" charset="-122"/>
                 <a:cs typeface="Calibri" pitchFamily="34" charset="-120"/>
               </a:rPr>
-              <a:t>Estrato Qualis de cada um:  ______  /  ______</a:t>
+              <a:t>Estrato Qualis correspondente ao h5:  ______</a:t>
             </a:r>
             <a:endParaRPr lang="en-US" sz="1150" dirty="0"/>
           </a:p>
@@ -9229,7 +9229,7 @@
                 <a:ea typeface="Calibri" pitchFamily="34" charset="-122"/>
                 <a:cs typeface="Calibri" pitchFamily="34" charset="-120"/>
               </a:rPr>
-              <a:t>Se não estiver no JCR, reporte a ausência — é achado, não falha</a:t>
+              <a:t>CORE Rank (portal.core.edu.au — aberto):  ______</a:t>
             </a:r>
             <a:endParaRPr lang="en-US" sz="1150" dirty="0"/>
           </a:p>

--- a/seminario/seminario-analise-de-artigo.pptx
+++ b/seminario/seminario-analise-de-artigo.pptx
@@ -1572,7 +1572,7 @@
           <a:p>
             <a:r>
               <a:rPr lang="en-US" dirty="0"/>
-              <a:t>O terceiro cartão é o diferencial: você não está supondo que o recorte existe, você mediu. Enfatize isso.</a:t>
+              <a:t>O terceiro cartão é o diferencial: não é hipótese, é medida própria. Zero em 396 é um resultado limpo. Diga que isso descarta o enquadramento de que o governo vende dados e deixa a questão mais difícil: por que o rastreador está lá, então?</a:t>
             </a:r>
             <a:endParaRPr lang="en-US" dirty="0"/>
           </a:p>
@@ -5796,7 +5796,7 @@
                 <a:ea typeface="Calibri" pitchFamily="34" charset="-122"/>
                 <a:cs typeface="Calibri" pitchFamily="34" charset="-120"/>
               </a:rPr>
-              <a:t>Tema de trabalho assumido</a:t>
+              <a:t>Tema do TCC</a:t>
             </a:r>
             <a:endParaRPr lang="en-US" sz="1300" dirty="0"/>
           </a:p>
@@ -5838,7 +5838,7 @@
                 <a:ea typeface="Calibri" pitchFamily="34" charset="-122"/>
                 <a:cs typeface="Calibri" pitchFamily="34" charset="-120"/>
               </a:rPr>
-              <a:t>Rastreadores de terceiros e soberania de dados em aplicativos móveis governamentais brasileiros.</a:t>
+              <a:t>Rastreamento por terceiros e soberania de dados em aplicativos móveis governamentais brasileiros.</a:t>
             </a:r>
             <a:endParaRPr lang="en-US" sz="1150" dirty="0"/>
           </a:p>
@@ -5867,7 +5867,7 @@
                 <a:ea typeface="Calibri" pitchFamily="34" charset="-122"/>
                 <a:cs typeface="Calibri" pitchFamily="34" charset="-120"/>
               </a:rPr>
-              <a:t>Corpus já verificado: 396 aplicativos, 71 publicadores públicos distintos.</a:t>
+              <a:t>Quando o cidadão usa o Meu SUS ou o Meu INSS, quais empresas além do governo recebem dados dele?</a:t>
             </a:r>
             <a:endParaRPr lang="en-US" sz="1150" dirty="0"/>
           </a:p>
@@ -5882,21 +5882,21 @@
         <p:spPr>
           <a:xfrm>
             <a:off x="502920" y="2788920"/>
-            <a:ext cx="8138160" cy="1737360"/>
+            <a:ext cx="1897380" cy="1417320"/>
           </a:xfrm>
           <a:prstGeom prst="roundRect">
             <a:avLst>
-              <a:gd name="adj" fmla="val 3158"/>
+              <a:gd name="adj" fmla="val 3871"/>
             </a:avLst>
           </a:prstGeom>
           <a:solidFill>
-            <a:srgbClr val="FDF4E0"/>
+            <a:srgbClr val="F4F6F9"/>
           </a:solidFill>
           <a:ln w="12700">
             <a:solidFill>
-              <a:srgbClr val="C8860D"/>
+              <a:srgbClr val="DDE3EA"/>
             </a:solidFill>
-            <a:prstDash val="dash"/>
+            <a:prstDash val="solid"/>
           </a:ln>
         </p:spPr>
       </p:sp>
@@ -5908,8 +5908,8 @@
         </p:nvSpPr>
         <p:spPr>
           <a:xfrm>
-            <a:off x="667512" y="2898648"/>
-            <a:ext cx="7808976" cy="237744"/>
+            <a:off x="685800" y="2916936"/>
+            <a:ext cx="1531620" cy="274320"/>
           </a:xfrm>
           <a:prstGeom prst="rect">
             <a:avLst/>
@@ -5925,17 +5925,17 @@
               <a:buNone/>
             </a:pPr>
             <a:r>
-              <a:rPr lang="en-US" sz="1000" b="1" spc="100" kern="0" dirty="0">
-                <a:solidFill>
-                  <a:srgbClr val="C8860D"/>
-                </a:solidFill>
-                <a:latin typeface="Calibri" pitchFamily="34" charset="0"/>
-                <a:ea typeface="Calibri" pitchFamily="34" charset="-122"/>
-                <a:cs typeface="Calibri" pitchFamily="34" charset="-120"/>
-              </a:rPr>
-              <a:t>A PREENCHER  ·  ajuste conforme a conversa com o orientador</a:t>
-            </a:r>
-            <a:endParaRPr lang="en-US" sz="1000" dirty="0"/>
+              <a:rPr lang="en-US" sz="1300" b="1" dirty="0">
+                <a:solidFill>
+                  <a:srgbClr val="2E86A8"/>
+                </a:solidFill>
+                <a:latin typeface="Calibri" pitchFamily="34" charset="0"/>
+                <a:ea typeface="Calibri" pitchFamily="34" charset="-122"/>
+                <a:cs typeface="Calibri" pitchFamily="34" charset="-120"/>
+              </a:rPr>
+              <a:t>Corpus</a:t>
+            </a:r>
+            <a:endParaRPr lang="en-US" sz="1300" dirty="0"/>
           </a:p>
         </p:txBody>
       </p:sp>
@@ -5947,8 +5947,8 @@
         </p:nvSpPr>
         <p:spPr>
           <a:xfrm>
-            <a:off x="667512" y="3172968"/>
-            <a:ext cx="7808976" cy="1225296"/>
+            <a:off x="685800" y="3227832"/>
+            <a:ext cx="1531620" cy="832104"/>
           </a:xfrm>
           <a:prstGeom prst="rect">
             <a:avLst/>
@@ -5960,12 +5960,11 @@
           <a:bodyPr wrap="square" lIns="0" tIns="0" rIns="0" bIns="0" rtlCol="0" anchor="t"/>
           <a:lstStyle/>
           <a:p>
-            <a:pPr marL="342900" indent="-342900">
+            <a:pPr indent="0" marL="0">
               <a:spcAft>
-                <a:spcPts val="500"/>
+                <a:spcPts val="400"/>
               </a:spcAft>
-              <a:buSzPct val="100000"/>
-              <a:buChar char="•"/>
+              <a:buNone/>
             </a:pPr>
             <a:r>
               <a:rPr lang="en-US" sz="1150" dirty="0">
@@ -5976,17 +5975,16 @@
                 <a:ea typeface="Calibri" pitchFamily="34" charset="-122"/>
                 <a:cs typeface="Calibri" pitchFamily="34" charset="-120"/>
               </a:rPr>
-              <a:t>Se o orientador apontar outra direção, troque o artigo — ainda há tempo.</a:t>
+              <a:t>396 aplicativos</a:t>
             </a:r>
             <a:endParaRPr lang="en-US" sz="1150" dirty="0"/>
           </a:p>
           <a:p>
-            <a:pPr marL="342900" indent="-342900">
+            <a:pPr indent="0" marL="0">
               <a:spcAft>
-                <a:spcPts val="500"/>
+                <a:spcPts val="400"/>
               </a:spcAft>
-              <a:buSzPct val="100000"/>
-              <a:buChar char="•"/>
+              <a:buNone/>
             </a:pPr>
             <a:r>
               <a:rPr lang="en-US" sz="1150" dirty="0">
@@ -5997,17 +5995,16 @@
                 <a:ea typeface="Calibri" pitchFamily="34" charset="-122"/>
                 <a:cs typeface="Calibri" pitchFamily="34" charset="-120"/>
               </a:rPr>
-              <a:t>Diga em uma frase por que o tema ainda é 'de trabalho' e não definitivo: isso é honesto e antecipa a pergunta.</a:t>
+              <a:t>71 publicadores públicos</a:t>
             </a:r>
             <a:endParaRPr lang="en-US" sz="1150" dirty="0"/>
           </a:p>
           <a:p>
-            <a:pPr marL="342900" indent="-342900">
+            <a:pPr indent="0" marL="0">
               <a:spcAft>
-                <a:spcPts val="500"/>
+                <a:spcPts val="400"/>
               </a:spcAft>
-              <a:buSzPct val="100000"/>
-              <a:buChar char="•"/>
+              <a:buNone/>
             </a:pPr>
             <a:r>
               <a:rPr lang="en-US" sz="1150" dirty="0">
@@ -6018,7 +6015,7 @@
                 <a:ea typeface="Calibri" pitchFamily="34" charset="-122"/>
                 <a:cs typeface="Calibri" pitchFamily="34" charset="-120"/>
               </a:rPr>
-              <a:t>Se já houver termo de aceite assinado, mencione o nome do orientador aqui.</a:t>
+              <a:t>três esferas</a:t>
             </a:r>
             <a:endParaRPr lang="en-US" sz="1150" dirty="0"/>
           </a:p>
@@ -6026,7 +6023,460 @@
       </p:sp>
       <p:sp>
         <p:nvSpPr>
-          <p:cNvPr id="13" name="Text 11"/>
+          <p:cNvPr id="13" name="Shape 11"/>
+          <p:cNvSpPr/>
+          <p:nvPr/>
+        </p:nvSpPr>
+        <p:spPr>
+          <a:xfrm>
+            <a:off x="2583180" y="2788920"/>
+            <a:ext cx="1897380" cy="1417320"/>
+          </a:xfrm>
+          <a:prstGeom prst="roundRect">
+            <a:avLst>
+              <a:gd name="adj" fmla="val 3871"/>
+            </a:avLst>
+          </a:prstGeom>
+          <a:solidFill>
+            <a:srgbClr val="F4F6F9"/>
+          </a:solidFill>
+          <a:ln w="12700">
+            <a:solidFill>
+              <a:srgbClr val="DDE3EA"/>
+            </a:solidFill>
+            <a:prstDash val="solid"/>
+          </a:ln>
+        </p:spPr>
+      </p:sp>
+      <p:sp>
+        <p:nvSpPr>
+          <p:cNvPr id="14" name="Text 12"/>
+          <p:cNvSpPr txBox="1"/>
+          <p:nvPr/>
+        </p:nvSpPr>
+        <p:spPr>
+          <a:xfrm>
+            <a:off x="2766060" y="2916936"/>
+            <a:ext cx="1531620" cy="274320"/>
+          </a:xfrm>
+          <a:prstGeom prst="rect">
+            <a:avLst/>
+          </a:prstGeom>
+          <a:noFill/>
+          <a:ln/>
+        </p:spPr>
+        <p:txBody>
+          <a:bodyPr wrap="square" lIns="0" tIns="0" rIns="0" bIns="0" rtlCol="0" anchor="ctr"/>
+          <a:lstStyle/>
+          <a:p>
+            <a:pPr indent="0" marL="0">
+              <a:buNone/>
+            </a:pPr>
+            <a:r>
+              <a:rPr lang="en-US" sz="1300" b="1" dirty="0">
+                <a:solidFill>
+                  <a:srgbClr val="2E86A8"/>
+                </a:solidFill>
+                <a:latin typeface="Calibri" pitchFamily="34" charset="0"/>
+                <a:ea typeface="Calibri" pitchFamily="34" charset="-122"/>
+                <a:cs typeface="Calibri" pitchFamily="34" charset="-120"/>
+              </a:rPr>
+              <a:t>Dado sensível — Art. 11</a:t>
+            </a:r>
+            <a:endParaRPr lang="en-US" sz="1300" dirty="0"/>
+          </a:p>
+        </p:txBody>
+      </p:sp>
+      <p:sp>
+        <p:nvSpPr>
+          <p:cNvPr id="15" name="Text 13"/>
+          <p:cNvSpPr txBox="1"/>
+          <p:nvPr/>
+        </p:nvSpPr>
+        <p:spPr>
+          <a:xfrm>
+            <a:off x="2766060" y="3227832"/>
+            <a:ext cx="1531620" cy="832104"/>
+          </a:xfrm>
+          <a:prstGeom prst="rect">
+            <a:avLst/>
+          </a:prstGeom>
+          <a:noFill/>
+          <a:ln/>
+        </p:spPr>
+        <p:txBody>
+          <a:bodyPr wrap="square" lIns="0" tIns="0" rIns="0" bIns="0" rtlCol="0" anchor="t"/>
+          <a:lstStyle/>
+          <a:p>
+            <a:pPr indent="0" marL="0">
+              <a:spcAft>
+                <a:spcPts val="400"/>
+              </a:spcAft>
+              <a:buNone/>
+            </a:pPr>
+            <a:r>
+              <a:rPr lang="en-US" sz="1150" dirty="0">
+                <a:solidFill>
+                  <a:srgbClr val="5A6472"/>
+                </a:solidFill>
+                <a:latin typeface="Calibri" pitchFamily="34" charset="0"/>
+                <a:ea typeface="Calibri" pitchFamily="34" charset="-122"/>
+                <a:cs typeface="Calibri" pitchFamily="34" charset="-120"/>
+              </a:rPr>
+              <a:t>152 aplicativos</a:t>
+            </a:r>
+            <a:endParaRPr lang="en-US" sz="1150" dirty="0"/>
+          </a:p>
+          <a:p>
+            <a:pPr indent="0" marL="0">
+              <a:spcAft>
+                <a:spcPts val="400"/>
+              </a:spcAft>
+              <a:buNone/>
+            </a:pPr>
+            <a:r>
+              <a:rPr lang="en-US" sz="1150" dirty="0">
+                <a:solidFill>
+                  <a:srgbClr val="5A6472"/>
+                </a:solidFill>
+                <a:latin typeface="Calibri" pitchFamily="34" charset="0"/>
+                <a:ea typeface="Calibri" pitchFamily="34" charset="-122"/>
+                <a:cs typeface="Calibri" pitchFamily="34" charset="-120"/>
+              </a:rPr>
+              <a:t>saúde 125 · previdência 28</a:t>
+            </a:r>
+            <a:endParaRPr lang="en-US" sz="1150" dirty="0"/>
+          </a:p>
+          <a:p>
+            <a:pPr indent="0" marL="0">
+              <a:spcAft>
+                <a:spcPts val="400"/>
+              </a:spcAft>
+              <a:buNone/>
+            </a:pPr>
+            <a:r>
+              <a:rPr lang="en-US" sz="1150" dirty="0">
+                <a:solidFill>
+                  <a:srgbClr val="5A6472"/>
+                </a:solidFill>
+                <a:latin typeface="Calibri" pitchFamily="34" charset="0"/>
+                <a:ea typeface="Calibri" pitchFamily="34" charset="-122"/>
+                <a:cs typeface="Calibri" pitchFamily="34" charset="-120"/>
+              </a:rPr>
+              <a:t>biometria 17</a:t>
+            </a:r>
+            <a:endParaRPr lang="en-US" sz="1150" dirty="0"/>
+          </a:p>
+        </p:txBody>
+      </p:sp>
+      <p:sp>
+        <p:nvSpPr>
+          <p:cNvPr id="16" name="Shape 14"/>
+          <p:cNvSpPr/>
+          <p:nvPr/>
+        </p:nvSpPr>
+        <p:spPr>
+          <a:xfrm>
+            <a:off x="4663440" y="2788920"/>
+            <a:ext cx="1897380" cy="1417320"/>
+          </a:xfrm>
+          <a:prstGeom prst="roundRect">
+            <a:avLst>
+              <a:gd name="adj" fmla="val 3871"/>
+            </a:avLst>
+          </a:prstGeom>
+          <a:solidFill>
+            <a:srgbClr val="F4F6F9"/>
+          </a:solidFill>
+          <a:ln w="12700">
+            <a:solidFill>
+              <a:srgbClr val="DDE3EA"/>
+            </a:solidFill>
+            <a:prstDash val="solid"/>
+          </a:ln>
+        </p:spPr>
+      </p:sp>
+      <p:sp>
+        <p:nvSpPr>
+          <p:cNvPr id="17" name="Text 15"/>
+          <p:cNvSpPr txBox="1"/>
+          <p:nvPr/>
+        </p:nvSpPr>
+        <p:spPr>
+          <a:xfrm>
+            <a:off x="4846320" y="2916936"/>
+            <a:ext cx="1531620" cy="274320"/>
+          </a:xfrm>
+          <a:prstGeom prst="rect">
+            <a:avLst/>
+          </a:prstGeom>
+          <a:noFill/>
+          <a:ln/>
+        </p:spPr>
+        <p:txBody>
+          <a:bodyPr wrap="square" lIns="0" tIns="0" rIns="0" bIns="0" rtlCol="0" anchor="ctr"/>
+          <a:lstStyle/>
+          <a:p>
+            <a:pPr indent="0" marL="0">
+              <a:buNone/>
+            </a:pPr>
+            <a:r>
+              <a:rPr lang="en-US" sz="1300" b="1" dirty="0">
+                <a:solidFill>
+                  <a:srgbClr val="2E86A8"/>
+                </a:solidFill>
+                <a:latin typeface="Calibri" pitchFamily="34" charset="0"/>
+                <a:ea typeface="Calibri" pitchFamily="34" charset="-122"/>
+                <a:cs typeface="Calibri" pitchFamily="34" charset="-120"/>
+              </a:rPr>
+              <a:t>Instrumento</a:t>
+            </a:r>
+            <a:endParaRPr lang="en-US" sz="1300" dirty="0"/>
+          </a:p>
+        </p:txBody>
+      </p:sp>
+      <p:sp>
+        <p:nvSpPr>
+          <p:cNvPr id="18" name="Text 16"/>
+          <p:cNvSpPr txBox="1"/>
+          <p:nvPr/>
+        </p:nvSpPr>
+        <p:spPr>
+          <a:xfrm>
+            <a:off x="4846320" y="3227832"/>
+            <a:ext cx="1531620" cy="832104"/>
+          </a:xfrm>
+          <a:prstGeom prst="rect">
+            <a:avLst/>
+          </a:prstGeom>
+          <a:noFill/>
+          <a:ln/>
+        </p:spPr>
+        <p:txBody>
+          <a:bodyPr wrap="square" lIns="0" tIns="0" rIns="0" bIns="0" rtlCol="0" anchor="t"/>
+          <a:lstStyle/>
+          <a:p>
+            <a:pPr indent="0" marL="0">
+              <a:spcAft>
+                <a:spcPts val="400"/>
+              </a:spcAft>
+              <a:buNone/>
+            </a:pPr>
+            <a:r>
+              <a:rPr lang="en-US" sz="1150" dirty="0">
+                <a:solidFill>
+                  <a:srgbClr val="5A6472"/>
+                </a:solidFill>
+                <a:latin typeface="Calibri" pitchFamily="34" charset="0"/>
+                <a:ea typeface="Calibri" pitchFamily="34" charset="-122"/>
+                <a:cs typeface="Calibri" pitchFamily="34" charset="-120"/>
+              </a:rPr>
+              <a:t>81,6% das políticas</a:t>
+            </a:r>
+            <a:endParaRPr lang="en-US" sz="1150" dirty="0"/>
+          </a:p>
+          <a:p>
+            <a:pPr indent="0" marL="0">
+              <a:spcAft>
+                <a:spcPts val="400"/>
+              </a:spcAft>
+              <a:buNone/>
+            </a:pPr>
+            <a:r>
+              <a:rPr lang="en-US" sz="1150" dirty="0">
+                <a:solidFill>
+                  <a:srgbClr val="5A6472"/>
+                </a:solidFill>
+                <a:latin typeface="Calibri" pitchFamily="34" charset="0"/>
+                <a:ea typeface="Calibri" pitchFamily="34" charset="-122"/>
+                <a:cs typeface="Calibri" pitchFamily="34" charset="-120"/>
+              </a:rPr>
+              <a:t>acessíveis</a:t>
+            </a:r>
+            <a:endParaRPr lang="en-US" sz="1150" dirty="0"/>
+          </a:p>
+          <a:p>
+            <a:pPr indent="0" marL="0">
+              <a:spcAft>
+                <a:spcPts val="400"/>
+              </a:spcAft>
+              <a:buNone/>
+            </a:pPr>
+            <a:endParaRPr lang="en-US" sz="1150" dirty="0"/>
+          </a:p>
+          <a:p>
+            <a:pPr indent="0" marL="0">
+              <a:spcAft>
+                <a:spcPts val="400"/>
+              </a:spcAft>
+              <a:buNone/>
+            </a:pPr>
+            <a:r>
+              <a:rPr lang="en-US" sz="1150" dirty="0">
+                <a:solidFill>
+                  <a:srgbClr val="5A6472"/>
+                </a:solidFill>
+                <a:latin typeface="Calibri" pitchFamily="34" charset="0"/>
+                <a:ea typeface="Calibri" pitchFamily="34" charset="-122"/>
+                <a:cs typeface="Calibri" pitchFamily="34" charset="-120"/>
+              </a:rPr>
+              <a:t>potência: 5,1 p.p.</a:t>
+            </a:r>
+            <a:endParaRPr lang="en-US" sz="1150" dirty="0"/>
+          </a:p>
+        </p:txBody>
+      </p:sp>
+      <p:sp>
+        <p:nvSpPr>
+          <p:cNvPr id="19" name="Shape 17"/>
+          <p:cNvSpPr/>
+          <p:nvPr/>
+        </p:nvSpPr>
+        <p:spPr>
+          <a:xfrm>
+            <a:off x="6743700" y="2788920"/>
+            <a:ext cx="1897380" cy="1417320"/>
+          </a:xfrm>
+          <a:prstGeom prst="roundRect">
+            <a:avLst>
+              <a:gd name="adj" fmla="val 3871"/>
+            </a:avLst>
+          </a:prstGeom>
+          <a:solidFill>
+            <a:srgbClr val="F4F6F9"/>
+          </a:solidFill>
+          <a:ln w="12700">
+            <a:solidFill>
+              <a:srgbClr val="DDE3EA"/>
+            </a:solidFill>
+            <a:prstDash val="solid"/>
+          </a:ln>
+        </p:spPr>
+      </p:sp>
+      <p:sp>
+        <p:nvSpPr>
+          <p:cNvPr id="20" name="Text 18"/>
+          <p:cNvSpPr txBox="1"/>
+          <p:nvPr/>
+        </p:nvSpPr>
+        <p:spPr>
+          <a:xfrm>
+            <a:off x="6926580" y="2916936"/>
+            <a:ext cx="1531620" cy="274320"/>
+          </a:xfrm>
+          <a:prstGeom prst="rect">
+            <a:avLst/>
+          </a:prstGeom>
+          <a:noFill/>
+          <a:ln/>
+        </p:spPr>
+        <p:txBody>
+          <a:bodyPr wrap="square" lIns="0" tIns="0" rIns="0" bIns="0" rtlCol="0" anchor="ctr"/>
+          <a:lstStyle/>
+          <a:p>
+            <a:pPr indent="0" marL="0">
+              <a:buNone/>
+            </a:pPr>
+            <a:r>
+              <a:rPr lang="en-US" sz="1300" b="1" dirty="0">
+                <a:solidFill>
+                  <a:srgbClr val="1E6B3A"/>
+                </a:solidFill>
+                <a:latin typeface="Calibri" pitchFamily="34" charset="0"/>
+                <a:ea typeface="Calibri" pitchFamily="34" charset="-122"/>
+                <a:cs typeface="Calibri" pitchFamily="34" charset="-120"/>
+              </a:rPr>
+              <a:t>Fonte de APKs</a:t>
+            </a:r>
+            <a:endParaRPr lang="en-US" sz="1300" dirty="0"/>
+          </a:p>
+        </p:txBody>
+      </p:sp>
+      <p:sp>
+        <p:nvSpPr>
+          <p:cNvPr id="21" name="Text 19"/>
+          <p:cNvSpPr txBox="1"/>
+          <p:nvPr/>
+        </p:nvSpPr>
+        <p:spPr>
+          <a:xfrm>
+            <a:off x="6926580" y="3227832"/>
+            <a:ext cx="1531620" cy="832104"/>
+          </a:xfrm>
+          <a:prstGeom prst="rect">
+            <a:avLst/>
+          </a:prstGeom>
+          <a:noFill/>
+          <a:ln/>
+        </p:spPr>
+        <p:txBody>
+          <a:bodyPr wrap="square" lIns="0" tIns="0" rIns="0" bIns="0" rtlCol="0" anchor="t"/>
+          <a:lstStyle/>
+          <a:p>
+            <a:pPr indent="0" marL="0">
+              <a:spcAft>
+                <a:spcPts val="400"/>
+              </a:spcAft>
+              <a:buNone/>
+            </a:pPr>
+            <a:r>
+              <a:rPr lang="en-US" sz="1150" dirty="0">
+                <a:solidFill>
+                  <a:srgbClr val="5A6472"/>
+                </a:solidFill>
+                <a:latin typeface="Calibri" pitchFamily="34" charset="0"/>
+                <a:ea typeface="Calibri" pitchFamily="34" charset="-122"/>
+                <a:cs typeface="Calibri" pitchFamily="34" charset="-120"/>
+              </a:rPr>
+              <a:t>AndroZoo</a:t>
+            </a:r>
+            <a:endParaRPr lang="en-US" sz="1150" dirty="0"/>
+          </a:p>
+          <a:p>
+            <a:pPr indent="0" marL="0">
+              <a:spcAft>
+                <a:spcPts val="400"/>
+              </a:spcAft>
+              <a:buNone/>
+            </a:pPr>
+            <a:r>
+              <a:rPr lang="en-US" sz="1150" dirty="0">
+                <a:solidFill>
+                  <a:srgbClr val="5A6472"/>
+                </a:solidFill>
+                <a:latin typeface="Calibri" pitchFamily="34" charset="0"/>
+                <a:ea typeface="Calibri" pitchFamily="34" charset="-122"/>
+                <a:cs typeface="Calibri" pitchFamily="34" charset="-120"/>
+              </a:rPr>
+              <a:t>acesso concedido</a:t>
+            </a:r>
+            <a:endParaRPr lang="en-US" sz="1150" dirty="0"/>
+          </a:p>
+          <a:p>
+            <a:pPr indent="0" marL="0">
+              <a:spcAft>
+                <a:spcPts val="400"/>
+              </a:spcAft>
+              <a:buNone/>
+            </a:pPr>
+            <a:r>
+              <a:rPr lang="en-US" sz="1150" dirty="0">
+                <a:solidFill>
+                  <a:srgbClr val="5A6472"/>
+                </a:solidFill>
+                <a:latin typeface="Calibri" pitchFamily="34" charset="0"/>
+                <a:ea typeface="Calibri" pitchFamily="34" charset="-122"/>
+                <a:cs typeface="Calibri" pitchFamily="34" charset="-120"/>
+              </a:rPr>
+              <a:t>17/09/2026</a:t>
+            </a:r>
+            <a:endParaRPr lang="en-US" sz="1150" dirty="0"/>
+          </a:p>
+        </p:txBody>
+      </p:sp>
+      <p:sp>
+        <p:nvSpPr>
+          <p:cNvPr id="22" name="Text 20"/>
           <p:cNvSpPr txBox="1"/>
           <p:nvPr/>
         </p:nvSpPr>
@@ -6199,7 +6649,7 @@
                 <a:ea typeface="Calibri" pitchFamily="34" charset="-122"/>
                 <a:cs typeface="Calibri" pitchFamily="34" charset="-120"/>
               </a:rPr>
-              <a:t>Três candidatos passaram por teste de viabilidade antes de virar projeto. Dois caíram.</a:t>
+              <a:t>Seis temas passaram por teste de viabilidade antes de virar projeto. Três caíram, um ficou inconclusivo.</a:t>
             </a:r>
             <a:endParaRPr lang="en-US" sz="1250" dirty="0"/>
           </a:p>
@@ -6214,11 +6664,11 @@
         <p:spPr>
           <a:xfrm>
             <a:off x="502920" y="1325880"/>
-            <a:ext cx="2590800" cy="2331720"/>
+            <a:ext cx="1897380" cy="2331720"/>
           </a:xfrm>
           <a:prstGeom prst="roundRect">
             <a:avLst>
-              <a:gd name="adj" fmla="val 2353"/>
+              <a:gd name="adj" fmla="val 2892"/>
             </a:avLst>
           </a:prstGeom>
           <a:solidFill>
@@ -6241,7 +6691,7 @@
         <p:spPr>
           <a:xfrm>
             <a:off x="685800" y="1453896"/>
-            <a:ext cx="2225040" cy="274320"/>
+            <a:ext cx="1531620" cy="274320"/>
           </a:xfrm>
           <a:prstGeom prst="rect">
             <a:avLst/>
@@ -6280,7 +6730,7 @@
         <p:spPr>
           <a:xfrm>
             <a:off x="685800" y="1764792"/>
-            <a:ext cx="2225040" cy="1746504"/>
+            <a:ext cx="1531620" cy="1746504"/>
           </a:xfrm>
           <a:prstGeom prst="rect">
             <a:avLst/>
@@ -6350,12 +6800,12 @@
         </p:nvSpPr>
         <p:spPr>
           <a:xfrm>
-            <a:off x="3276600" y="1325880"/>
-            <a:ext cx="2590800" cy="2331720"/>
+            <a:off x="2583180" y="1325880"/>
+            <a:ext cx="1897380" cy="2331720"/>
           </a:xfrm>
           <a:prstGeom prst="roundRect">
             <a:avLst>
-              <a:gd name="adj" fmla="val 2353"/>
+              <a:gd name="adj" fmla="val 2892"/>
             </a:avLst>
           </a:prstGeom>
           <a:solidFill>
@@ -6377,8 +6827,8 @@
         </p:nvSpPr>
         <p:spPr>
           <a:xfrm>
-            <a:off x="3459480" y="1453896"/>
-            <a:ext cx="2225040" cy="274320"/>
+            <a:off x="2766060" y="1453896"/>
+            <a:ext cx="1531620" cy="274320"/>
           </a:xfrm>
           <a:prstGeom prst="rect">
             <a:avLst/>
@@ -6416,8 +6866,8 @@
         </p:nvSpPr>
         <p:spPr>
           <a:xfrm>
-            <a:off x="3459480" y="1764792"/>
-            <a:ext cx="2225040" cy="1746504"/>
+            <a:off x="2766060" y="1764792"/>
+            <a:ext cx="1531620" cy="1746504"/>
           </a:xfrm>
           <a:prstGeom prst="rect">
             <a:avLst/>
@@ -6487,12 +6937,12 @@
         </p:nvSpPr>
         <p:spPr>
           <a:xfrm>
-            <a:off x="6050280" y="1325880"/>
-            <a:ext cx="2590800" cy="2331720"/>
+            <a:off x="4663440" y="1325880"/>
+            <a:ext cx="1897380" cy="2331720"/>
           </a:xfrm>
           <a:prstGeom prst="roundRect">
             <a:avLst>
-              <a:gd name="adj" fmla="val 2353"/>
+              <a:gd name="adj" fmla="val 2892"/>
             </a:avLst>
           </a:prstGeom>
           <a:solidFill>
@@ -6514,8 +6964,8 @@
         </p:nvSpPr>
         <p:spPr>
           <a:xfrm>
-            <a:off x="6233160" y="1453896"/>
-            <a:ext cx="2225040" cy="274320"/>
+            <a:off x="4846320" y="1453896"/>
+            <a:ext cx="1531620" cy="274320"/>
           </a:xfrm>
           <a:prstGeom prst="rect">
             <a:avLst/>
@@ -6533,13 +6983,13 @@
             <a:r>
               <a:rPr lang="en-US" sz="1300" b="1" dirty="0">
                 <a:solidFill>
-                  <a:srgbClr val="1E6B3A"/>
-                </a:solidFill>
-                <a:latin typeface="Calibri" pitchFamily="34" charset="0"/>
-                <a:ea typeface="Calibri" pitchFamily="34" charset="-122"/>
-                <a:cs typeface="Calibri" pitchFamily="34" charset="-120"/>
-              </a:rPr>
-              <a:t>Confirmado — apps de governo</a:t>
+                  <a:srgbClr val="8A6D1F"/>
+                </a:solidFill>
+                <a:latin typeface="Calibri" pitchFamily="34" charset="0"/>
+                <a:ea typeface="Calibri" pitchFamily="34" charset="-122"/>
+                <a:cs typeface="Calibri" pitchFamily="34" charset="-120"/>
+              </a:rPr>
+              <a:t>Inconclusivo — malware bancário</a:t>
             </a:r>
             <a:endParaRPr lang="en-US" sz="1300" dirty="0"/>
           </a:p>
@@ -6553,8 +7003,8 @@
         </p:nvSpPr>
         <p:spPr>
           <a:xfrm>
-            <a:off x="6233160" y="1764792"/>
-            <a:ext cx="2225040" cy="1746504"/>
+            <a:off x="4846320" y="1764792"/>
+            <a:ext cx="1531620" cy="1746504"/>
           </a:xfrm>
           <a:prstGeom prst="rect">
             <a:avLst/>
@@ -6581,7 +7031,7 @@
                 <a:ea typeface="Calibri" pitchFamily="34" charset="-122"/>
                 <a:cs typeface="Calibri" pitchFamily="34" charset="-120"/>
               </a:rPr>
-              <a:t>396 aplicativos de 71 publicadores públicos.</a:t>
+              <a:t>O repositório rotula a CAMPANHA, não o payload.</a:t>
             </a:r>
             <a:endParaRPr lang="en-US" sz="1150" dirty="0"/>
           </a:p>
@@ -6610,7 +7060,7 @@
                 <a:ea typeface="Calibri" pitchFamily="34" charset="-122"/>
                 <a:cs typeface="Calibri" pitchFamily="34" charset="-120"/>
               </a:rPr>
-              <a:t>As três esferas representadas e o publicador identificado na origem — sem trabalho de atribuição.</a:t>
+              <a:t>85% do acervo brasileiro são containers, onde a métrica que eu usava nem existe. Erro meu, registrado.</a:t>
             </a:r>
             <a:endParaRPr lang="en-US" sz="1150" dirty="0"/>
           </a:p>
@@ -6618,7 +7068,144 @@
       </p:sp>
       <p:sp>
         <p:nvSpPr>
-          <p:cNvPr id="14" name="Text 12"/>
+          <p:cNvPr id="14" name="Shape 12"/>
+          <p:cNvSpPr/>
+          <p:nvPr/>
+        </p:nvSpPr>
+        <p:spPr>
+          <a:xfrm>
+            <a:off x="6743700" y="1325880"/>
+            <a:ext cx="1897380" cy="2331720"/>
+          </a:xfrm>
+          <a:prstGeom prst="roundRect">
+            <a:avLst>
+              <a:gd name="adj" fmla="val 2892"/>
+            </a:avLst>
+          </a:prstGeom>
+          <a:solidFill>
+            <a:srgbClr val="F4F6F9"/>
+          </a:solidFill>
+          <a:ln w="12700">
+            <a:solidFill>
+              <a:srgbClr val="DDE3EA"/>
+            </a:solidFill>
+            <a:prstDash val="solid"/>
+          </a:ln>
+        </p:spPr>
+      </p:sp>
+      <p:sp>
+        <p:nvSpPr>
+          <p:cNvPr id="15" name="Text 13"/>
+          <p:cNvSpPr txBox="1"/>
+          <p:nvPr/>
+        </p:nvSpPr>
+        <p:spPr>
+          <a:xfrm>
+            <a:off x="6926580" y="1453896"/>
+            <a:ext cx="1531620" cy="274320"/>
+          </a:xfrm>
+          <a:prstGeom prst="rect">
+            <a:avLst/>
+          </a:prstGeom>
+          <a:noFill/>
+          <a:ln/>
+        </p:spPr>
+        <p:txBody>
+          <a:bodyPr wrap="square" lIns="0" tIns="0" rIns="0" bIns="0" rtlCol="0" anchor="ctr"/>
+          <a:lstStyle/>
+          <a:p>
+            <a:pPr indent="0" marL="0">
+              <a:buNone/>
+            </a:pPr>
+            <a:r>
+              <a:rPr lang="en-US" sz="1300" b="1" dirty="0">
+                <a:solidFill>
+                  <a:srgbClr val="1E6B3A"/>
+                </a:solidFill>
+                <a:latin typeface="Calibri" pitchFamily="34" charset="0"/>
+                <a:ea typeface="Calibri" pitchFamily="34" charset="-122"/>
+                <a:cs typeface="Calibri" pitchFamily="34" charset="-120"/>
+              </a:rPr>
+              <a:t>Confirmado — apps de governo</a:t>
+            </a:r>
+            <a:endParaRPr lang="en-US" sz="1300" dirty="0"/>
+          </a:p>
+        </p:txBody>
+      </p:sp>
+      <p:sp>
+        <p:nvSpPr>
+          <p:cNvPr id="16" name="Text 14"/>
+          <p:cNvSpPr txBox="1"/>
+          <p:nvPr/>
+        </p:nvSpPr>
+        <p:spPr>
+          <a:xfrm>
+            <a:off x="6926580" y="1764792"/>
+            <a:ext cx="1531620" cy="1746504"/>
+          </a:xfrm>
+          <a:prstGeom prst="rect">
+            <a:avLst/>
+          </a:prstGeom>
+          <a:noFill/>
+          <a:ln/>
+        </p:spPr>
+        <p:txBody>
+          <a:bodyPr wrap="square" lIns="0" tIns="0" rIns="0" bIns="0" rtlCol="0" anchor="t"/>
+          <a:lstStyle/>
+          <a:p>
+            <a:pPr indent="0" marL="0">
+              <a:spcAft>
+                <a:spcPts val="400"/>
+              </a:spcAft>
+              <a:buNone/>
+            </a:pPr>
+            <a:r>
+              <a:rPr lang="en-US" sz="1150" dirty="0">
+                <a:solidFill>
+                  <a:srgbClr val="5A6472"/>
+                </a:solidFill>
+                <a:latin typeface="Calibri" pitchFamily="34" charset="0"/>
+                <a:ea typeface="Calibri" pitchFamily="34" charset="-122"/>
+                <a:cs typeface="Calibri" pitchFamily="34" charset="-120"/>
+              </a:rPr>
+              <a:t>396 aplicativos, 71 publicadores públicos, três esferas.</a:t>
+            </a:r>
+            <a:endParaRPr lang="en-US" sz="1150" dirty="0"/>
+          </a:p>
+          <a:p>
+            <a:pPr indent="0" marL="0">
+              <a:spcAft>
+                <a:spcPts val="400"/>
+              </a:spcAft>
+              <a:buNone/>
+            </a:pPr>
+            <a:endParaRPr lang="en-US" sz="1150" dirty="0"/>
+          </a:p>
+          <a:p>
+            <a:pPr indent="0" marL="0">
+              <a:spcAft>
+                <a:spcPts val="400"/>
+              </a:spcAft>
+              <a:buNone/>
+            </a:pPr>
+            <a:r>
+              <a:rPr lang="en-US" sz="1150" dirty="0">
+                <a:solidFill>
+                  <a:srgbClr val="5A6472"/>
+                </a:solidFill>
+                <a:latin typeface="Calibri" pitchFamily="34" charset="0"/>
+                <a:ea typeface="Calibri" pitchFamily="34" charset="-122"/>
+                <a:cs typeface="Calibri" pitchFamily="34" charset="-120"/>
+              </a:rPr>
+              <a:t>Publicador identificado na origem: sem trabalho de atribuição — que foi o que matou o primeiro tema.</a:t>
+            </a:r>
+            <a:endParaRPr lang="en-US" sz="1150" dirty="0"/>
+          </a:p>
+        </p:txBody>
+      </p:sp>
+      <p:sp>
+        <p:nvSpPr>
+          <p:cNvPr id="17" name="Text 15"/>
           <p:cNvSpPr txBox="1"/>
           <p:nvPr/>
         </p:nvSpPr>
@@ -6657,7 +7244,7 @@
       </p:sp>
       <p:sp>
         <p:nvSpPr>
-          <p:cNvPr id="15" name="Text 13"/>
+          <p:cNvPr id="18" name="Text 16"/>
           <p:cNvSpPr txBox="1"/>
           <p:nvPr/>
         </p:nvSpPr>
@@ -8777,13 +9364,13 @@
             <a:r>
               <a:rPr lang="en-US" sz="1300" b="1" dirty="0">
                 <a:solidFill>
-                  <a:srgbClr val="2E86A8"/>
-                </a:solidFill>
-                <a:latin typeface="Calibri" pitchFamily="34" charset="0"/>
-                <a:ea typeface="Calibri" pitchFamily="34" charset="-122"/>
-                <a:cs typeface="Calibri" pitchFamily="34" charset="-120"/>
-              </a:rPr>
-              <a:t>3 · O recorte já é viável</a:t>
+                  <a:srgbClr val="1E6B3A"/>
+                </a:solidFill>
+                <a:latin typeface="Calibri" pitchFamily="34" charset="0"/>
+                <a:ea typeface="Calibri" pitchFamily="34" charset="-122"/>
+                <a:cs typeface="Calibri" pitchFamily="34" charset="-120"/>
+              </a:rPr>
+              <a:t>3 · Já tenho um resultado</a:t>
             </a:r>
             <a:endParaRPr lang="en-US" sz="1300" dirty="0"/>
           </a:p>
@@ -8825,7 +9412,7 @@
                 <a:ea typeface="Calibri" pitchFamily="34" charset="-122"/>
                 <a:cs typeface="Calibri" pitchFamily="34" charset="-120"/>
               </a:rPr>
-              <a:t>Não é hipótese: eu medi.</a:t>
+              <a:t>0 de 396 apps de governo exibem anúncio. No controle comercial, 33,2%.</a:t>
             </a:r>
             <a:endParaRPr lang="en-US" sz="1150" dirty="0"/>
           </a:p>
@@ -8854,7 +9441,7 @@
                 <a:ea typeface="Calibri" pitchFamily="34" charset="-122"/>
                 <a:cs typeface="Calibri" pitchFamily="34" charset="-120"/>
               </a:rPr>
-              <a:t>396 aplicativos governamentais de 71 publicadores públicos distintos, cobrindo as esferas federal, estadual e municipal.</a:t>
+              <a:t>IC95% [0,000; 0,010] contra [0,269; 0,401] — não se sobrepõem.</a:t>
             </a:r>
             <a:endParaRPr lang="en-US" sz="1150" dirty="0"/>
           </a:p>
@@ -8915,7 +9502,7 @@
                 <a:ea typeface="Cambria" pitchFamily="34" charset="-122"/>
                 <a:cs typeface="Cambria" pitchFamily="34" charset="-120"/>
               </a:rPr>
-              <a:t>O artigo me dá o método; o meu recorte dá o que ele não cobriu. E o corpus para cobri-lo já foi verificado.</a:t>
+              <a:t>Se o app de governo não monetiza, o rastreador que houver não é de publicidade — é dependência técnica. Isso muda a pergunta.</a:t>
             </a:r>
             <a:endParaRPr lang="en-US" sz="1450" dirty="0"/>
           </a:p>

--- a/seminario/seminario-analise-de-artigo.pptx
+++ b/seminario/seminario-analise-de-artigo.pptx
@@ -9659,11 +9659,11 @@
         <p:spPr>
           <a:xfrm>
             <a:off x="502920" y="932688"/>
-            <a:ext cx="3954780" cy="1828800"/>
+            <a:ext cx="3954780" cy="2057400"/>
           </a:xfrm>
           <a:prstGeom prst="roundRect">
             <a:avLst>
-              <a:gd name="adj" fmla="val 3000"/>
+              <a:gd name="adj" fmla="val 2667"/>
             </a:avLst>
           </a:prstGeom>
           <a:solidFill>
@@ -9710,7 +9710,7 @@
                 <a:ea typeface="Calibri" pitchFamily="34" charset="-122"/>
                 <a:cs typeface="Calibri" pitchFamily="34" charset="-120"/>
               </a:rPr>
-              <a:t>A PREENCHER  ·  levantar — CCS é CONFERÊNCIA</a:t>
+              <a:t>A PREENCHER  ·  OS TRÊS ITENS OBRIGATÓRIOS — CCS é conferência</a:t>
             </a:r>
             <a:endParaRPr lang="en-US" sz="1000" dirty="0"/>
           </a:p>
@@ -9725,7 +9725,7 @@
         <p:spPr>
           <a:xfrm>
             <a:off x="667512" y="1316736"/>
-            <a:ext cx="3625596" cy="1316736"/>
+            <a:ext cx="3625596" cy="1545336"/>
           </a:xfrm>
           <a:prstGeom prst="rect">
             <a:avLst/>
@@ -9753,7 +9753,7 @@
                 <a:ea typeface="Calibri" pitchFamily="34" charset="-122"/>
                 <a:cs typeface="Calibri" pitchFamily="34" charset="-120"/>
               </a:rPr>
-              <a:t>h5-index do CCS (Google Scholar → Metrics):  ______</a:t>
+              <a:t>1 · h5-index (Google Scholar → Metrics):  ______</a:t>
             </a:r>
             <a:endParaRPr lang="en-US" sz="1150" dirty="0"/>
           </a:p>
@@ -9774,7 +9774,7 @@
                 <a:ea typeface="Calibri" pitchFamily="34" charset="-122"/>
                 <a:cs typeface="Calibri" pitchFamily="34" charset="-120"/>
               </a:rPr>
-              <a:t>h5-mediana:  ______</a:t>
+              <a:t>2 · Qualis correspondente ao h5:  ______</a:t>
             </a:r>
             <a:endParaRPr lang="en-US" sz="1150" dirty="0"/>
           </a:p>
@@ -9795,7 +9795,7 @@
                 <a:ea typeface="Calibri" pitchFamily="34" charset="-122"/>
                 <a:cs typeface="Calibri" pitchFamily="34" charset="-120"/>
               </a:rPr>
-              <a:t>Estrato Qualis correspondente ao h5:  ______</a:t>
+              <a:t>      posição ___ de ___  →  percentil ___  →  estrato ___</a:t>
             </a:r>
             <a:endParaRPr lang="en-US" sz="1150" dirty="0"/>
           </a:p>
@@ -9816,7 +9816,7 @@
                 <a:ea typeface="Calibri" pitchFamily="34" charset="-122"/>
                 <a:cs typeface="Calibri" pitchFamily="34" charset="-120"/>
               </a:rPr>
-              <a:t>CORE Rank (portal.core.edu.au — aberto):  ______</a:t>
+              <a:t>3 · CORE Rank (portal.core.edu.au):  ______</a:t>
             </a:r>
             <a:endParaRPr lang="en-US" sz="1150" dirty="0"/>
           </a:p>
@@ -9830,12 +9830,12 @@
         </p:nvSpPr>
         <p:spPr>
           <a:xfrm>
-            <a:off x="502920" y="2926080"/>
-            <a:ext cx="3954780" cy="1481328"/>
+            <a:off x="502920" y="3154680"/>
+            <a:ext cx="3954780" cy="1280160"/>
           </a:xfrm>
           <a:prstGeom prst="roundRect">
             <a:avLst>
-              <a:gd name="adj" fmla="val 3704"/>
+              <a:gd name="adj" fmla="val 4286"/>
             </a:avLst>
           </a:prstGeom>
           <a:solidFill>
@@ -9857,7 +9857,7 @@
         </p:nvSpPr>
         <p:spPr>
           <a:xfrm>
-            <a:off x="685800" y="3054096"/>
+            <a:off x="685800" y="3282696"/>
             <a:ext cx="3589020" cy="274320"/>
           </a:xfrm>
           <a:prstGeom prst="rect">
@@ -9882,7 +9882,7 @@
                 <a:ea typeface="Calibri" pitchFamily="34" charset="-122"/>
                 <a:cs typeface="Calibri" pitchFamily="34" charset="-120"/>
               </a:rPr>
-              <a:t>Ressalva que rende ponto</a:t>
+              <a:t>De onde vem esse percentil</a:t>
             </a:r>
             <a:endParaRPr lang="en-US" sz="1300" dirty="0"/>
           </a:p>
@@ -9896,8 +9896,8 @@
         </p:nvSpPr>
         <p:spPr>
           <a:xfrm>
-            <a:off x="685800" y="3364992"/>
-            <a:ext cx="3589020" cy="896112"/>
+            <a:off x="685800" y="3593592"/>
+            <a:ext cx="3589020" cy="694944"/>
           </a:xfrm>
           <a:prstGeom prst="rect">
             <a:avLst/>
@@ -9924,7 +9924,7 @@
                 <a:ea typeface="Calibri" pitchFamily="34" charset="-122"/>
                 <a:cs typeface="Calibri" pitchFamily="34" charset="-120"/>
               </a:rPr>
-              <a:t>O Documento Técnico (p. 12) diz que, para veículos sem CiteScore/JCR, o percentil é ESTIMADO por regressão CiteScore–h5.</a:t>
+              <a:t>Documento Técnico, p. 12: a base do Google Scholar NÃO fornece percentis dentro dos agrupamentos temáticos. A CAPES contorna com uma base ampliada por área, o "Universo".</a:t>
             </a:r>
             <a:endParaRPr lang="en-US" sz="1150" dirty="0"/>
           </a:p>
@@ -9953,7 +9953,7 @@
                 <a:ea typeface="Calibri" pitchFamily="34" charset="-122"/>
                 <a:cs typeface="Calibri" pitchFamily="34" charset="-120"/>
               </a:rPr>
-              <a:t>O estrato obtido por essa via é aproximação — diga isso.</a:t>
+              <a:t>Sem acesso a ele, use a lista da subárea — e DECLARE qual foi.</a:t>
             </a:r>
             <a:endParaRPr lang="en-US" sz="1150" dirty="0"/>
           </a:p>

--- a/seminario/seminario-analise-de-artigo.pptx
+++ b/seminario/seminario-analise-de-artigo.pptx
@@ -20,9 +20,10 @@
     <p:sldId id="268" r:id="rId14"/>
     <p:sldId id="269" r:id="rId15"/>
     <p:sldId id="270" r:id="rId16"/>
+    <p:sldId id="271" r:id="rId17"/>
   </p:sldIdLst>
   <p:notesMasterIdLst>
-    <p:notesMasterId r:id="rId17"/>
+    <p:notesMasterId r:id="rId18"/>
   </p:notesMasterIdLst>
   <p:sldSz cx="9144000" cy="5143500"/>
   <p:notesSz cx="5143500" cy="9144000"/>
@@ -1044,7 +1045,7 @@
           <a:p>
             <a:r>
               <a:rPr lang="en-US" dirty="0"/>
-              <a:t>Feche conectando o artigo ao seu próximo passo concreto. Deixe claro que há trabalho já feito, não só plano.</a:t>
+              <a:t>Não leia o texto colado em voz alta. Aponte os rótulos e explique a função de cada trecho.</a:t>
             </a:r>
             <a:endParaRPr lang="en-US" dirty="0"/>
           </a:p>
@@ -1068,6 +1069,94 @@
             <a:fld id="{F7021451-1387-4CA6-816F-3879F97B5CBC}" type="slidenum">
               <a:rPr lang="en-US"/>
               <a:t>15</a:t>
+            </a:fld>
+            <a:endParaRPr lang="en-US"/>
+          </a:p>
+        </p:txBody>
+      </p:sp>
+    </p:spTree>
+    <p:extLst>
+      <p:ext uri="{BB962C8B-B14F-4D97-AF65-F5344CB8AC3E}">
+        <p14:creationId xmlns:p14="http://schemas.microsoft.com/office/powerpoint/2010/main" val="1024086991"/>
+      </p:ext>
+    </p:extLst>
+  </p:cSld>
+  <p:clrMapOvr>
+    <a:masterClrMapping/>
+  </p:clrMapOvr>
+</p:notes>
+</file>
+
+<file path=ppt/notesSlides/notesSlide16.xml><?xml version="1.0" encoding="utf-8"?>
+<p:notes xmlns:a="http://schemas.openxmlformats.org/drawingml/2006/main" xmlns:r="http://schemas.openxmlformats.org/officeDocument/2006/relationships" xmlns:p="http://schemas.openxmlformats.org/presentationml/2006/main">
+  <p:cSld>
+    <p:spTree>
+      <p:nvGrpSpPr>
+        <p:cNvPr id="1" name=""/>
+        <p:cNvGrpSpPr/>
+        <p:nvPr/>
+      </p:nvGrpSpPr>
+      <p:grpSpPr>
+        <a:xfrm>
+          <a:off x="0" y="0"/>
+          <a:ext cx="0" cy="0"/>
+          <a:chOff x="0" y="0"/>
+          <a:chExt cx="0" cy="0"/>
+        </a:xfrm>
+      </p:grpSpPr>
+      <p:sp>
+        <p:nvSpPr>
+          <p:cNvPr id="2" name="Slide Image Placeholder 1"/>
+          <p:cNvSpPr>
+            <a:spLocks noGrp="1" noRot="1" noChangeAspect="1"/>
+          </p:cNvSpPr>
+          <p:nvPr>
+            <p:ph type="sldImg"/>
+          </p:nvPr>
+        </p:nvSpPr>
+        <p:spPr/>
+      </p:sp>
+      <p:sp>
+        <p:nvSpPr>
+          <p:cNvPr id="3" name="Notes Placeholder 2"/>
+          <p:cNvSpPr>
+            <a:spLocks noGrp="1"/>
+          </p:cNvSpPr>
+          <p:nvPr>
+            <p:ph type="body" idx="1"/>
+          </p:nvPr>
+        </p:nvSpPr>
+        <p:spPr/>
+        <p:txBody>
+          <a:bodyPr/>
+          <a:lstStyle/>
+          <a:p>
+            <a:r>
+              <a:rPr lang="en-US" dirty="0"/>
+              <a:t>Feche conectando o artigo ao seu próximo passo concreto. Deixe claro que há trabalho já feito, não só plano.</a:t>
+            </a:r>
+            <a:endParaRPr lang="en-US" dirty="0"/>
+          </a:p>
+        </p:txBody>
+      </p:sp>
+      <p:sp>
+        <p:nvSpPr>
+          <p:cNvPr id="4" name="Slide Number Placeholder 3"/>
+          <p:cNvSpPr>
+            <a:spLocks noGrp="1"/>
+          </p:cNvSpPr>
+          <p:nvPr>
+            <p:ph type="sldNum" sz="quarter" idx="10"/>
+          </p:nvPr>
+        </p:nvSpPr>
+        <p:spPr/>
+        <p:txBody>
+          <a:bodyPr/>
+          <a:lstStyle/>
+          <a:p>
+            <a:fld id="{F7021451-1387-4CA6-816F-3879F97B5CBC}" type="slidenum">
+              <a:rPr lang="en-US"/>
+              <a:t>16</a:t>
             </a:fld>
             <a:endParaRPr lang="en-US"/>
           </a:p>
@@ -4554,7 +4643,7 @@
                 <a:ea typeface="Cambria" pitchFamily="34" charset="-122"/>
                 <a:cs typeface="Cambria" pitchFamily="34" charset="-120"/>
               </a:rPr>
-              <a:t>Análise da conclusão</a:t>
+              <a:t>Análise da discussão</a:t>
             </a:r>
             <a:endParaRPr lang="en-US" sz="2500" dirty="0"/>
           </a:p>
@@ -4593,7 +4682,7 @@
                 <a:ea typeface="Calibri" pitchFamily="34" charset="-122"/>
                 <a:cs typeface="Calibri" pitchFamily="34" charset="-120"/>
               </a:rPr>
-              <a:t>Cole a conclusão e marque o que os autores inferem.</a:t>
+              <a:t>O enunciado nomeia a discussão. É o que separa o medido do que ele significa.</a:t>
             </a:r>
             <a:endParaRPr lang="en-US" sz="1200" dirty="0"/>
           </a:p>
@@ -4780,7 +4869,7 @@
                 <a:ea typeface="Calibri" pitchFamily="34" charset="-122"/>
                 <a:cs typeface="Calibri" pitchFamily="34" charset="-120"/>
               </a:rPr>
-              <a:t>Inferência a partir dos dados obtidos</a:t>
+              <a:t>Interpretação do resultado</a:t>
             </a:r>
             <a:endParaRPr lang="en-US" sz="1100" dirty="0"/>
           </a:p>
@@ -4801,7 +4890,7 @@
                 <a:ea typeface="Calibri" pitchFamily="34" charset="-122"/>
                 <a:cs typeface="Calibri" pitchFamily="34" charset="-120"/>
               </a:rPr>
-              <a:t>Trabalhos futuros</a:t>
+              <a:t>Confronto com a literatura anterior</a:t>
             </a:r>
             <a:endParaRPr lang="en-US" sz="1100" dirty="0"/>
           </a:p>
@@ -4822,7 +4911,28 @@
                 <a:ea typeface="Calibri" pitchFamily="34" charset="-122"/>
                 <a:cs typeface="Calibri" pitchFamily="34" charset="-120"/>
               </a:rPr>
-              <a:t>O que ficou fora do escopo</a:t>
+              <a:t>Implicação prática ou normativa</a:t>
+            </a:r>
+            <a:endParaRPr lang="en-US" sz="1100" dirty="0"/>
+          </a:p>
+          <a:p>
+            <a:pPr marL="342900" indent="-342900">
+              <a:spcAft>
+                <a:spcPts val="700"/>
+              </a:spcAft>
+              <a:buSzPct val="100000"/>
+              <a:buChar char="•"/>
+            </a:pPr>
+            <a:r>
+              <a:rPr lang="en-US" sz="1100" dirty="0">
+                <a:solidFill>
+                  <a:srgbClr val="1B2A4A"/>
+                </a:solidFill>
+                <a:latin typeface="Calibri" pitchFamily="34" charset="0"/>
+                <a:ea typeface="Calibri" pitchFamily="34" charset="-122"/>
+                <a:cs typeface="Calibri" pitchFamily="34" charset="-120"/>
+              </a:rPr>
+              <a:t>Ameaças à validade</a:t>
             </a:r>
             <a:endParaRPr lang="en-US" sz="1100" dirty="0"/>
           </a:p>
@@ -4930,7 +5040,7 @@
                 <a:ea typeface="Calibri" pitchFamily="34" charset="-122"/>
                 <a:cs typeface="Calibri" pitchFamily="34" charset="-120"/>
               </a:rPr>
-              <a:t>Pergunta clássica de banca: a conclusão vai além do que os dados sustentam? Ter uma opinião formada aqui te protege.</a:t>
+              <a:t>Artigo de segurança com frequência funde discussão e resultados, ou a chama de Implications. Se não houver seção autônoma, DIGA — apontar isso é análise de estrutura.</a:t>
             </a:r>
             <a:endParaRPr lang="en-US" sz="1150" dirty="0"/>
           </a:p>
@@ -4986,6 +5096,524 @@
 <file path=ppt/slides/slide15.xml><?xml version="1.0" encoding="utf-8"?>
 <p:sld xmlns:a="http://schemas.openxmlformats.org/drawingml/2006/main" xmlns:r="http://schemas.openxmlformats.org/officeDocument/2006/relationships" xmlns:p="http://schemas.openxmlformats.org/presentationml/2006/main">
   <p:cSld name="Slide 15">
+    <p:spTree>
+      <p:nvGrpSpPr>
+        <p:cNvPr id="1" name=""/>
+        <p:cNvGrpSpPr/>
+        <p:nvPr/>
+      </p:nvGrpSpPr>
+      <p:grpSpPr>
+        <a:xfrm>
+          <a:off x="0" y="0"/>
+          <a:ext cx="0" cy="0"/>
+          <a:chOff x="0" y="0"/>
+          <a:chExt cx="0" cy="0"/>
+        </a:xfrm>
+      </p:grpSpPr>
+      <p:sp>
+        <p:nvSpPr>
+          <p:cNvPr id="2" name="Text 0"/>
+          <p:cNvSpPr txBox="1"/>
+          <p:nvPr/>
+        </p:nvSpPr>
+        <p:spPr>
+          <a:xfrm>
+            <a:off x="502920" y="292608"/>
+            <a:ext cx="457200" cy="365760"/>
+          </a:xfrm>
+          <a:prstGeom prst="rect">
+            <a:avLst/>
+          </a:prstGeom>
+          <a:noFill/>
+          <a:ln/>
+        </p:spPr>
+        <p:txBody>
+          <a:bodyPr wrap="square" lIns="0" tIns="0" rIns="0" bIns="0" rtlCol="0" anchor="ctr"/>
+          <a:lstStyle/>
+          <a:p>
+            <a:pPr algn="l" indent="0" marL="0">
+              <a:buNone/>
+            </a:pPr>
+            <a:r>
+              <a:rPr lang="en-US" sz="1500" b="1" dirty="0">
+                <a:solidFill>
+                  <a:srgbClr val="2E86A8"/>
+                </a:solidFill>
+                <a:latin typeface="Cambria" pitchFamily="34" charset="0"/>
+                <a:ea typeface="Cambria" pitchFamily="34" charset="-122"/>
+                <a:cs typeface="Cambria" pitchFamily="34" charset="-120"/>
+              </a:rPr>
+              <a:t>14</a:t>
+            </a:r>
+            <a:endParaRPr lang="en-US" sz="1500" dirty="0"/>
+          </a:p>
+        </p:txBody>
+      </p:sp>
+      <p:sp>
+        <p:nvSpPr>
+          <p:cNvPr id="3" name="Text 1"/>
+          <p:cNvSpPr txBox="1"/>
+          <p:nvPr/>
+        </p:nvSpPr>
+        <p:spPr>
+          <a:xfrm>
+            <a:off x="978408" y="256032"/>
+            <a:ext cx="7662672" cy="457200"/>
+          </a:xfrm>
+          <a:prstGeom prst="rect">
+            <a:avLst/>
+          </a:prstGeom>
+          <a:noFill/>
+          <a:ln/>
+        </p:spPr>
+        <p:txBody>
+          <a:bodyPr wrap="square" lIns="0" tIns="0" rIns="0" bIns="0" rtlCol="0" anchor="ctr"/>
+          <a:lstStyle/>
+          <a:p>
+            <a:pPr algn="l" indent="0" marL="0">
+              <a:buNone/>
+            </a:pPr>
+            <a:r>
+              <a:rPr lang="en-US" sz="2500" b="1" dirty="0">
+                <a:solidFill>
+                  <a:srgbClr val="1B2A4A"/>
+                </a:solidFill>
+                <a:latin typeface="Cambria" pitchFamily="34" charset="0"/>
+                <a:ea typeface="Cambria" pitchFamily="34" charset="-122"/>
+                <a:cs typeface="Cambria" pitchFamily="34" charset="-120"/>
+              </a:rPr>
+              <a:t>Análise da conclusão</a:t>
+            </a:r>
+            <a:endParaRPr lang="en-US" sz="2500" dirty="0"/>
+          </a:p>
+        </p:txBody>
+      </p:sp>
+      <p:sp>
+        <p:nvSpPr>
+          <p:cNvPr id="4" name="Text 2"/>
+          <p:cNvSpPr txBox="1"/>
+          <p:nvPr/>
+        </p:nvSpPr>
+        <p:spPr>
+          <a:xfrm>
+            <a:off x="502920" y="896112"/>
+            <a:ext cx="8138160" cy="274320"/>
+          </a:xfrm>
+          <a:prstGeom prst="rect">
+            <a:avLst/>
+          </a:prstGeom>
+          <a:noFill/>
+          <a:ln/>
+        </p:spPr>
+        <p:txBody>
+          <a:bodyPr wrap="square" lIns="0" tIns="0" rIns="0" bIns="0" rtlCol="0" anchor="ctr"/>
+          <a:lstStyle/>
+          <a:p>
+            <a:pPr indent="0" marL="0">
+              <a:buNone/>
+            </a:pPr>
+            <a:r>
+              <a:rPr lang="en-US" sz="1200" dirty="0">
+                <a:solidFill>
+                  <a:srgbClr val="5A6472"/>
+                </a:solidFill>
+                <a:latin typeface="Calibri" pitchFamily="34" charset="0"/>
+                <a:ea typeface="Calibri" pitchFamily="34" charset="-122"/>
+                <a:cs typeface="Calibri" pitchFamily="34" charset="-120"/>
+              </a:rPr>
+              <a:t>Cole a conclusão e marque o que os autores inferem.</a:t>
+            </a:r>
+            <a:endParaRPr lang="en-US" sz="1200" dirty="0"/>
+          </a:p>
+        </p:txBody>
+      </p:sp>
+      <p:sp>
+        <p:nvSpPr>
+          <p:cNvPr id="5" name="Shape 3"/>
+          <p:cNvSpPr/>
+          <p:nvPr/>
+        </p:nvSpPr>
+        <p:spPr>
+          <a:xfrm>
+            <a:off x="502920" y="1261872"/>
+            <a:ext cx="5532120" cy="2212848"/>
+          </a:xfrm>
+          <a:prstGeom prst="roundRect">
+            <a:avLst>
+              <a:gd name="adj" fmla="val 2479"/>
+            </a:avLst>
+          </a:prstGeom>
+          <a:solidFill>
+            <a:srgbClr val="FDF4E0"/>
+          </a:solidFill>
+          <a:ln w="12700">
+            <a:solidFill>
+              <a:srgbClr val="C8860D"/>
+            </a:solidFill>
+            <a:prstDash val="dash"/>
+          </a:ln>
+        </p:spPr>
+      </p:sp>
+      <p:sp>
+        <p:nvSpPr>
+          <p:cNvPr id="6" name="Text 4"/>
+          <p:cNvSpPr txBox="1"/>
+          <p:nvPr/>
+        </p:nvSpPr>
+        <p:spPr>
+          <a:xfrm>
+            <a:off x="685800" y="1389888"/>
+            <a:ext cx="5166360" cy="237744"/>
+          </a:xfrm>
+          <a:prstGeom prst="rect">
+            <a:avLst/>
+          </a:prstGeom>
+          <a:noFill/>
+          <a:ln/>
+        </p:spPr>
+        <p:txBody>
+          <a:bodyPr wrap="square" lIns="0" tIns="0" rIns="0" bIns="0" rtlCol="0" anchor="ctr"/>
+          <a:lstStyle/>
+          <a:p>
+            <a:pPr indent="0" marL="0">
+              <a:buNone/>
+            </a:pPr>
+            <a:r>
+              <a:rPr lang="en-US" sz="1000" b="1" spc="100" kern="0" dirty="0">
+                <a:solidFill>
+                  <a:srgbClr val="C8860D"/>
+                </a:solidFill>
+                <a:latin typeface="Calibri" pitchFamily="34" charset="0"/>
+                <a:ea typeface="Calibri" pitchFamily="34" charset="-122"/>
+                <a:cs typeface="Calibri" pitchFamily="34" charset="-120"/>
+              </a:rPr>
+              <a:t>A PREENCHER  ·  cole aqui o texto do artigo</a:t>
+            </a:r>
+            <a:endParaRPr lang="en-US" sz="1000" dirty="0"/>
+          </a:p>
+        </p:txBody>
+      </p:sp>
+      <p:sp>
+        <p:nvSpPr>
+          <p:cNvPr id="7" name="Text 5"/>
+          <p:cNvSpPr txBox="1"/>
+          <p:nvPr/>
+        </p:nvSpPr>
+        <p:spPr>
+          <a:xfrm>
+            <a:off x="685800" y="1691640"/>
+            <a:ext cx="5166360" cy="640080"/>
+          </a:xfrm>
+          <a:prstGeom prst="rect">
+            <a:avLst/>
+          </a:prstGeom>
+          <a:noFill/>
+          <a:ln/>
+        </p:spPr>
+        <p:txBody>
+          <a:bodyPr wrap="square" lIns="0" tIns="0" rIns="0" bIns="0" rtlCol="0" anchor="t"/>
+          <a:lstStyle/>
+          <a:p>
+            <a:pPr indent="0" marL="0">
+              <a:buNone/>
+            </a:pPr>
+            <a:r>
+              <a:rPr lang="en-US" sz="1100" i="1" dirty="0">
+                <a:solidFill>
+                  <a:srgbClr val="5A6472"/>
+                </a:solidFill>
+                <a:latin typeface="Calibri" pitchFamily="34" charset="0"/>
+                <a:ea typeface="Calibri" pitchFamily="34" charset="-122"/>
+                <a:cs typeface="Calibri" pitchFamily="34" charset="-120"/>
+              </a:rPr>
+              <a:t>Transcreva o trecho real do artigo e posicione os rótulos ao lado, ligando cada anotação ao parágrafo correspondente — como nos dois exemplos fornecidos pela professora.</a:t>
+            </a:r>
+            <a:endParaRPr lang="en-US" sz="1100" dirty="0"/>
+          </a:p>
+        </p:txBody>
+      </p:sp>
+      <p:sp>
+        <p:nvSpPr>
+          <p:cNvPr id="8" name="Text 6"/>
+          <p:cNvSpPr txBox="1"/>
+          <p:nvPr/>
+        </p:nvSpPr>
+        <p:spPr>
+          <a:xfrm>
+            <a:off x="6263640" y="1261872"/>
+            <a:ext cx="2377440" cy="256032"/>
+          </a:xfrm>
+          <a:prstGeom prst="rect">
+            <a:avLst/>
+          </a:prstGeom>
+          <a:noFill/>
+          <a:ln/>
+        </p:spPr>
+        <p:txBody>
+          <a:bodyPr wrap="square" lIns="0" tIns="0" rIns="0" bIns="0" rtlCol="0" anchor="ctr"/>
+          <a:lstStyle/>
+          <a:p>
+            <a:pPr indent="0" marL="0">
+              <a:buNone/>
+            </a:pPr>
+            <a:r>
+              <a:rPr lang="en-US" sz="1050" b="1" spc="100" kern="0" dirty="0">
+                <a:solidFill>
+                  <a:srgbClr val="2E86A8"/>
+                </a:solidFill>
+                <a:latin typeface="Calibri" pitchFamily="34" charset="0"/>
+                <a:ea typeface="Calibri" pitchFamily="34" charset="-122"/>
+                <a:cs typeface="Calibri" pitchFamily="34" charset="-120"/>
+              </a:rPr>
+              <a:t>Rótulos a usar</a:t>
+            </a:r>
+            <a:endParaRPr lang="en-US" sz="1050" dirty="0"/>
+          </a:p>
+        </p:txBody>
+      </p:sp>
+      <p:sp>
+        <p:nvSpPr>
+          <p:cNvPr id="9" name="Text 7"/>
+          <p:cNvSpPr txBox="1"/>
+          <p:nvPr/>
+        </p:nvSpPr>
+        <p:spPr>
+          <a:xfrm>
+            <a:off x="6263640" y="1572768"/>
+            <a:ext cx="2377440" cy="1901952"/>
+          </a:xfrm>
+          <a:prstGeom prst="rect">
+            <a:avLst/>
+          </a:prstGeom>
+          <a:noFill/>
+          <a:ln/>
+        </p:spPr>
+        <p:txBody>
+          <a:bodyPr wrap="square" lIns="0" tIns="0" rIns="0" bIns="0" rtlCol="0" anchor="t"/>
+          <a:lstStyle/>
+          <a:p>
+            <a:pPr marL="342900" indent="-342900">
+              <a:spcAft>
+                <a:spcPts val="700"/>
+              </a:spcAft>
+              <a:buSzPct val="100000"/>
+              <a:buChar char="•"/>
+            </a:pPr>
+            <a:r>
+              <a:rPr lang="en-US" sz="1100" dirty="0">
+                <a:solidFill>
+                  <a:srgbClr val="1B2A4A"/>
+                </a:solidFill>
+                <a:latin typeface="Calibri" pitchFamily="34" charset="0"/>
+                <a:ea typeface="Calibri" pitchFamily="34" charset="-122"/>
+                <a:cs typeface="Calibri" pitchFamily="34" charset="-120"/>
+              </a:rPr>
+              <a:t>Inferência a partir dos dados obtidos</a:t>
+            </a:r>
+            <a:endParaRPr lang="en-US" sz="1100" dirty="0"/>
+          </a:p>
+          <a:p>
+            <a:pPr marL="342900" indent="-342900">
+              <a:spcAft>
+                <a:spcPts val="700"/>
+              </a:spcAft>
+              <a:buSzPct val="100000"/>
+              <a:buChar char="•"/>
+            </a:pPr>
+            <a:r>
+              <a:rPr lang="en-US" sz="1100" dirty="0">
+                <a:solidFill>
+                  <a:srgbClr val="1B2A4A"/>
+                </a:solidFill>
+                <a:latin typeface="Calibri" pitchFamily="34" charset="0"/>
+                <a:ea typeface="Calibri" pitchFamily="34" charset="-122"/>
+                <a:cs typeface="Calibri" pitchFamily="34" charset="-120"/>
+              </a:rPr>
+              <a:t>Trabalhos futuros</a:t>
+            </a:r>
+            <a:endParaRPr lang="en-US" sz="1100" dirty="0"/>
+          </a:p>
+          <a:p>
+            <a:pPr marL="342900" indent="-342900">
+              <a:spcAft>
+                <a:spcPts val="700"/>
+              </a:spcAft>
+              <a:buSzPct val="100000"/>
+              <a:buChar char="•"/>
+            </a:pPr>
+            <a:r>
+              <a:rPr lang="en-US" sz="1100" dirty="0">
+                <a:solidFill>
+                  <a:srgbClr val="1B2A4A"/>
+                </a:solidFill>
+                <a:latin typeface="Calibri" pitchFamily="34" charset="0"/>
+                <a:ea typeface="Calibri" pitchFamily="34" charset="-122"/>
+                <a:cs typeface="Calibri" pitchFamily="34" charset="-120"/>
+              </a:rPr>
+              <a:t>O que ficou fora do escopo</a:t>
+            </a:r>
+            <a:endParaRPr lang="en-US" sz="1100" dirty="0"/>
+          </a:p>
+        </p:txBody>
+      </p:sp>
+      <p:sp>
+        <p:nvSpPr>
+          <p:cNvPr id="10" name="Shape 8"/>
+          <p:cNvSpPr/>
+          <p:nvPr/>
+        </p:nvSpPr>
+        <p:spPr>
+          <a:xfrm>
+            <a:off x="502920" y="3611880"/>
+            <a:ext cx="8138160" cy="1051560"/>
+          </a:xfrm>
+          <a:prstGeom prst="roundRect">
+            <a:avLst>
+              <a:gd name="adj" fmla="val 5217"/>
+            </a:avLst>
+          </a:prstGeom>
+          <a:solidFill>
+            <a:srgbClr val="F4F6F9"/>
+          </a:solidFill>
+          <a:ln w="12700">
+            <a:solidFill>
+              <a:srgbClr val="DDE3EA"/>
+            </a:solidFill>
+            <a:prstDash val="solid"/>
+          </a:ln>
+        </p:spPr>
+      </p:sp>
+      <p:sp>
+        <p:nvSpPr>
+          <p:cNvPr id="11" name="Text 9"/>
+          <p:cNvSpPr txBox="1"/>
+          <p:nvPr/>
+        </p:nvSpPr>
+        <p:spPr>
+          <a:xfrm>
+            <a:off x="685800" y="3739896"/>
+            <a:ext cx="7772400" cy="274320"/>
+          </a:xfrm>
+          <a:prstGeom prst="rect">
+            <a:avLst/>
+          </a:prstGeom>
+          <a:noFill/>
+          <a:ln/>
+        </p:spPr>
+        <p:txBody>
+          <a:bodyPr wrap="square" lIns="0" tIns="0" rIns="0" bIns="0" rtlCol="0" anchor="ctr"/>
+          <a:lstStyle/>
+          <a:p>
+            <a:pPr indent="0" marL="0">
+              <a:buNone/>
+            </a:pPr>
+            <a:r>
+              <a:rPr lang="en-US" sz="1300" b="1" dirty="0">
+                <a:solidFill>
+                  <a:srgbClr val="2E86A8"/>
+                </a:solidFill>
+                <a:latin typeface="Calibri" pitchFamily="34" charset="0"/>
+                <a:ea typeface="Calibri" pitchFamily="34" charset="-122"/>
+                <a:cs typeface="Calibri" pitchFamily="34" charset="-120"/>
+              </a:rPr>
+              <a:t>Observação para esta seção</a:t>
+            </a:r>
+            <a:endParaRPr lang="en-US" sz="1300" dirty="0"/>
+          </a:p>
+        </p:txBody>
+      </p:sp>
+      <p:sp>
+        <p:nvSpPr>
+          <p:cNvPr id="12" name="Text 10"/>
+          <p:cNvSpPr txBox="1"/>
+          <p:nvPr/>
+        </p:nvSpPr>
+        <p:spPr>
+          <a:xfrm>
+            <a:off x="685800" y="4050792"/>
+            <a:ext cx="7772400" cy="466344"/>
+          </a:xfrm>
+          <a:prstGeom prst="rect">
+            <a:avLst/>
+          </a:prstGeom>
+          <a:noFill/>
+          <a:ln/>
+        </p:spPr>
+        <p:txBody>
+          <a:bodyPr wrap="square" lIns="0" tIns="0" rIns="0" bIns="0" rtlCol="0" anchor="t"/>
+          <a:lstStyle/>
+          <a:p>
+            <a:pPr indent="0" marL="0">
+              <a:spcAft>
+                <a:spcPts val="400"/>
+              </a:spcAft>
+              <a:buNone/>
+            </a:pPr>
+            <a:r>
+              <a:rPr lang="en-US" sz="1150" dirty="0">
+                <a:solidFill>
+                  <a:srgbClr val="5A6472"/>
+                </a:solidFill>
+                <a:latin typeface="Calibri" pitchFamily="34" charset="0"/>
+                <a:ea typeface="Calibri" pitchFamily="34" charset="-122"/>
+                <a:cs typeface="Calibri" pitchFamily="34" charset="-120"/>
+              </a:rPr>
+              <a:t>Pergunta clássica de banca: a conclusão vai além do que os dados sustentam? Ter uma opinião formada aqui te protege.</a:t>
+            </a:r>
+            <a:endParaRPr lang="en-US" sz="1150" dirty="0"/>
+          </a:p>
+        </p:txBody>
+      </p:sp>
+      <p:sp>
+        <p:nvSpPr>
+          <p:cNvPr id="13" name="Text 11"/>
+          <p:cNvSpPr txBox="1"/>
+          <p:nvPr/>
+        </p:nvSpPr>
+        <p:spPr>
+          <a:xfrm>
+            <a:off x="502920" y="4718304"/>
+            <a:ext cx="8138160" cy="237744"/>
+          </a:xfrm>
+          <a:prstGeom prst="rect">
+            <a:avLst/>
+          </a:prstGeom>
+          <a:noFill/>
+          <a:ln/>
+        </p:spPr>
+        <p:txBody>
+          <a:bodyPr wrap="square" lIns="0" tIns="0" rIns="0" bIns="0" rtlCol="0" anchor="ctr"/>
+          <a:lstStyle/>
+          <a:p>
+            <a:pPr algn="l" indent="0" marL="0">
+              <a:buNone/>
+            </a:pPr>
+            <a:r>
+              <a:rPr lang="en-US" sz="950" dirty="0">
+                <a:solidFill>
+                  <a:srgbClr val="98A2B3"/>
+                </a:solidFill>
+                <a:latin typeface="Calibri" pitchFamily="34" charset="0"/>
+                <a:ea typeface="Calibri" pitchFamily="34" charset="-122"/>
+                <a:cs typeface="Calibri" pitchFamily="34" charset="-120"/>
+              </a:rPr>
+              <a:t>~50 segundos por slide  ·  a análise da estrutura vale 5 dos 15 minutos</a:t>
+            </a:r>
+            <a:endParaRPr lang="en-US" sz="950" dirty="0"/>
+          </a:p>
+        </p:txBody>
+      </p:sp>
+    </p:spTree>
+  </p:cSld>
+  <p:clrMapOvr>
+    <a:masterClrMapping/>
+  </p:clrMapOvr>
+</p:sld>
+</file>
+
+<file path=ppt/slides/slide16.xml><?xml version="1.0" encoding="utf-8"?>
+<p:sld xmlns:a="http://schemas.openxmlformats.org/drawingml/2006/main" xmlns:r="http://schemas.openxmlformats.org/officeDocument/2006/relationships" xmlns:p="http://schemas.openxmlformats.org/presentationml/2006/main">
+  <p:cSld name="Slide 16">
     <p:bg>
       <p:bgPr>
         <a:solidFill>

--- a/seminario/seminario-analise-de-artigo.pptx
+++ b/seminario/seminario-analise-de-artigo.pptx
@@ -10287,11 +10287,11 @@
         <p:spPr>
           <a:xfrm>
             <a:off x="502920" y="932688"/>
-            <a:ext cx="3954780" cy="2057400"/>
+            <a:ext cx="3954780" cy="2331720"/>
           </a:xfrm>
           <a:prstGeom prst="roundRect">
             <a:avLst>
-              <a:gd name="adj" fmla="val 2667"/>
+              <a:gd name="adj" fmla="val 2353"/>
             </a:avLst>
           </a:prstGeom>
           <a:solidFill>
@@ -10338,7 +10338,7 @@
                 <a:ea typeface="Calibri" pitchFamily="34" charset="-122"/>
                 <a:cs typeface="Calibri" pitchFamily="34" charset="-120"/>
               </a:rPr>
-              <a:t>A PREENCHER  ·  OS TRÊS ITENS OBRIGATÓRIOS — CCS é conferência</a:t>
+              <a:t>A PREENCHER  ·  OS TRÊS OBRIGATÓRIOS — faltam 1 e 2; o CORE já saiu</a:t>
             </a:r>
             <a:endParaRPr lang="en-US" sz="1000" dirty="0"/>
           </a:p>
@@ -10353,7 +10353,7 @@
         <p:spPr>
           <a:xfrm>
             <a:off x="667512" y="1316736"/>
-            <a:ext cx="3625596" cy="1545336"/>
+            <a:ext cx="3625596" cy="1819656"/>
           </a:xfrm>
           <a:prstGeom prst="rect">
             <a:avLst/>
@@ -10444,7 +10444,28 @@
                 <a:ea typeface="Calibri" pitchFamily="34" charset="-122"/>
                 <a:cs typeface="Calibri" pitchFamily="34" charset="-120"/>
               </a:rPr>
-              <a:t>3 · CORE Rank (portal.core.edu.au):  ______</a:t>
+              <a:t>      p. 12: o Scholar não dá percentil; a CAPES usa uma base por área, o "Universo". Sem acesso a ele, declare a lista que você usou.</a:t>
+            </a:r>
+            <a:endParaRPr lang="en-US" sz="1150" dirty="0"/>
+          </a:p>
+          <a:p>
+            <a:pPr marL="342900" indent="-342900">
+              <a:spcAft>
+                <a:spcPts val="500"/>
+              </a:spcAft>
+              <a:buSzPct val="100000"/>
+              <a:buChar char="•"/>
+            </a:pPr>
+            <a:r>
+              <a:rPr lang="en-US" sz="1150" dirty="0">
+                <a:solidFill>
+                  <a:srgbClr val="5A6472"/>
+                </a:solidFill>
+                <a:latin typeface="Calibri" pitchFamily="34" charset="0"/>
+                <a:ea typeface="Calibri" pitchFamily="34" charset="-122"/>
+                <a:cs typeface="Calibri" pitchFamily="34" charset="-120"/>
+              </a:rPr>
+              <a:t>3 · CORE Rank:  A*  ·  ICORE2026  ·  consultado 17/09/2026  ✓</a:t>
             </a:r>
             <a:endParaRPr lang="en-US" sz="1150" dirty="0"/>
           </a:p>
@@ -10458,12 +10479,12 @@
         </p:nvSpPr>
         <p:spPr>
           <a:xfrm>
-            <a:off x="502920" y="3154680"/>
-            <a:ext cx="3954780" cy="1280160"/>
+            <a:off x="502920" y="3401568"/>
+            <a:ext cx="3954780" cy="1051560"/>
           </a:xfrm>
           <a:prstGeom prst="roundRect">
             <a:avLst>
-              <a:gd name="adj" fmla="val 4286"/>
+              <a:gd name="adj" fmla="val 5217"/>
             </a:avLst>
           </a:prstGeom>
           <a:solidFill>
@@ -10485,7 +10506,7 @@
         </p:nvSpPr>
         <p:spPr>
           <a:xfrm>
-            <a:off x="685800" y="3282696"/>
+            <a:off x="685800" y="3529584"/>
             <a:ext cx="3589020" cy="274320"/>
           </a:xfrm>
           <a:prstGeom prst="rect">
@@ -10504,13 +10525,13 @@
             <a:r>
               <a:rPr lang="en-US" sz="1300" b="1" dirty="0">
                 <a:solidFill>
-                  <a:srgbClr val="C8860D"/>
-                </a:solidFill>
-                <a:latin typeface="Calibri" pitchFamily="34" charset="0"/>
-                <a:ea typeface="Calibri" pitchFamily="34" charset="-122"/>
-                <a:cs typeface="Calibri" pitchFamily="34" charset="-120"/>
-              </a:rPr>
-              <a:t>De onde vem esse percentil</a:t>
+                  <a:srgbClr val="1E6B3A"/>
+                </a:solidFill>
+                <a:latin typeface="Calibri" pitchFamily="34" charset="0"/>
+                <a:ea typeface="Calibri" pitchFamily="34" charset="-122"/>
+                <a:cs typeface="Calibri" pitchFamily="34" charset="-120"/>
+              </a:rPr>
+              <a:t>CORE: A* desde 2008</a:t>
             </a:r>
             <a:endParaRPr lang="en-US" sz="1300" dirty="0"/>
           </a:p>
@@ -10524,8 +10545,8 @@
         </p:nvSpPr>
         <p:spPr>
           <a:xfrm>
-            <a:off x="685800" y="3593592"/>
-            <a:ext cx="3589020" cy="694944"/>
+            <a:off x="685800" y="3840480"/>
+            <a:ext cx="3589020" cy="466344"/>
           </a:xfrm>
           <a:prstGeom prst="rect">
             <a:avLst/>
@@ -10552,7 +10573,7 @@
                 <a:ea typeface="Calibri" pitchFamily="34" charset="-122"/>
                 <a:cs typeface="Calibri" pitchFamily="34" charset="-120"/>
               </a:rPr>
-              <a:t>Documento Técnico, p. 12: a base do Google Scholar NÃO fornece percentis dentro dos agrupamentos temáticos. A CAPES contorna com uma base ampliada por área, o "Universo".</a:t>
+              <a:t>A* em ICORE2026, CORE2023, 2021, 2020, 2018, 2017, 2014, 2013 e 2008. Única exceção: ERA2010 (A).</a:t>
             </a:r>
             <a:endParaRPr lang="en-US" sz="1150" dirty="0"/>
           </a:p>
@@ -10581,7 +10602,7 @@
                 <a:ea typeface="Calibri" pitchFamily="34" charset="-122"/>
                 <a:cs typeface="Calibri" pitchFamily="34" charset="-120"/>
               </a:rPr>
-              <a:t>Sem acesso a ele, use a lista da subárea — e DECLARE qual foi.</a:t>
+              <a:t>Field of Research 4604 — Cybersecurity and privacy: o MESMO campo da lista usada para o percentil do h5.</a:t>
             </a:r>
             <a:endParaRPr lang="en-US" sz="1150" dirty="0"/>
           </a:p>

--- a/seminario/seminario-analise-de-artigo.pptx
+++ b/seminario/seminario-analise-de-artigo.pptx
@@ -10444,7 +10444,7 @@
                 <a:ea typeface="Calibri" pitchFamily="34" charset="-122"/>
                 <a:cs typeface="Calibri" pitchFamily="34" charset="-120"/>
               </a:rPr>
-              <a:t>      p. 12: o Scholar não dá percentil; a CAPES usa uma base por área, o "Universo". Sem acesso a ele, declare a lista que você usou.</a:t>
+              <a:t>      ATENÇÃO: o Scholar publica só o TOP 20. Dividir por 20 subestima — é lista truncada, não população (Doc. Técnico, p.12: a CAPES criou o "Universo" por isso).</a:t>
             </a:r>
             <a:endParaRPr lang="en-US" sz="1150" dirty="0"/>
           </a:p>

--- a/seminario/seminario-analise-de-artigo.pptx
+++ b/seminario/seminario-analise-de-artigo.pptx
@@ -10287,204 +10287,11 @@
         <p:spPr>
           <a:xfrm>
             <a:off x="502920" y="932688"/>
-            <a:ext cx="3954780" cy="2331720"/>
+            <a:ext cx="3954780" cy="1481328"/>
           </a:xfrm>
           <a:prstGeom prst="roundRect">
             <a:avLst>
-              <a:gd name="adj" fmla="val 2353"/>
-            </a:avLst>
-          </a:prstGeom>
-          <a:solidFill>
-            <a:srgbClr val="FDF4E0"/>
-          </a:solidFill>
-          <a:ln w="12700">
-            <a:solidFill>
-              <a:srgbClr val="C8860D"/>
-            </a:solidFill>
-            <a:prstDash val="dash"/>
-          </a:ln>
-        </p:spPr>
-      </p:sp>
-      <p:sp>
-        <p:nvSpPr>
-          <p:cNvPr id="5" name="Text 3"/>
-          <p:cNvSpPr txBox="1"/>
-          <p:nvPr/>
-        </p:nvSpPr>
-        <p:spPr>
-          <a:xfrm>
-            <a:off x="667512" y="1042416"/>
-            <a:ext cx="3625596" cy="237744"/>
-          </a:xfrm>
-          <a:prstGeom prst="rect">
-            <a:avLst/>
-          </a:prstGeom>
-          <a:noFill/>
-          <a:ln/>
-        </p:spPr>
-        <p:txBody>
-          <a:bodyPr wrap="square" lIns="0" tIns="0" rIns="0" bIns="0" rtlCol="0" anchor="ctr"/>
-          <a:lstStyle/>
-          <a:p>
-            <a:pPr indent="0" marL="0">
-              <a:buNone/>
-            </a:pPr>
-            <a:r>
-              <a:rPr lang="en-US" sz="1000" b="1" spc="100" kern="0" dirty="0">
-                <a:solidFill>
-                  <a:srgbClr val="C8860D"/>
-                </a:solidFill>
-                <a:latin typeface="Calibri" pitchFamily="34" charset="0"/>
-                <a:ea typeface="Calibri" pitchFamily="34" charset="-122"/>
-                <a:cs typeface="Calibri" pitchFamily="34" charset="-120"/>
-              </a:rPr>
-              <a:t>A PREENCHER  ·  OS TRÊS OBRIGATÓRIOS — faltam 1 e 2; o CORE já saiu</a:t>
-            </a:r>
-            <a:endParaRPr lang="en-US" sz="1000" dirty="0"/>
-          </a:p>
-        </p:txBody>
-      </p:sp>
-      <p:sp>
-        <p:nvSpPr>
-          <p:cNvPr id="6" name="Text 4"/>
-          <p:cNvSpPr txBox="1"/>
-          <p:nvPr/>
-        </p:nvSpPr>
-        <p:spPr>
-          <a:xfrm>
-            <a:off x="667512" y="1316736"/>
-            <a:ext cx="3625596" cy="1819656"/>
-          </a:xfrm>
-          <a:prstGeom prst="rect">
-            <a:avLst/>
-          </a:prstGeom>
-          <a:noFill/>
-          <a:ln/>
-        </p:spPr>
-        <p:txBody>
-          <a:bodyPr wrap="square" lIns="0" tIns="0" rIns="0" bIns="0" rtlCol="0" anchor="t"/>
-          <a:lstStyle/>
-          <a:p>
-            <a:pPr marL="342900" indent="-342900">
-              <a:spcAft>
-                <a:spcPts val="500"/>
-              </a:spcAft>
-              <a:buSzPct val="100000"/>
-              <a:buChar char="•"/>
-            </a:pPr>
-            <a:r>
-              <a:rPr lang="en-US" sz="1150" dirty="0">
-                <a:solidFill>
-                  <a:srgbClr val="5A6472"/>
-                </a:solidFill>
-                <a:latin typeface="Calibri" pitchFamily="34" charset="0"/>
-                <a:ea typeface="Calibri" pitchFamily="34" charset="-122"/>
-                <a:cs typeface="Calibri" pitchFamily="34" charset="-120"/>
-              </a:rPr>
-              <a:t>1 · h5-index (Google Scholar → Metrics):  ______</a:t>
-            </a:r>
-            <a:endParaRPr lang="en-US" sz="1150" dirty="0"/>
-          </a:p>
-          <a:p>
-            <a:pPr marL="342900" indent="-342900">
-              <a:spcAft>
-                <a:spcPts val="500"/>
-              </a:spcAft>
-              <a:buSzPct val="100000"/>
-              <a:buChar char="•"/>
-            </a:pPr>
-            <a:r>
-              <a:rPr lang="en-US" sz="1150" dirty="0">
-                <a:solidFill>
-                  <a:srgbClr val="5A6472"/>
-                </a:solidFill>
-                <a:latin typeface="Calibri" pitchFamily="34" charset="0"/>
-                <a:ea typeface="Calibri" pitchFamily="34" charset="-122"/>
-                <a:cs typeface="Calibri" pitchFamily="34" charset="-120"/>
-              </a:rPr>
-              <a:t>2 · Qualis correspondente ao h5:  ______</a:t>
-            </a:r>
-            <a:endParaRPr lang="en-US" sz="1150" dirty="0"/>
-          </a:p>
-          <a:p>
-            <a:pPr marL="342900" indent="-342900">
-              <a:spcAft>
-                <a:spcPts val="500"/>
-              </a:spcAft>
-              <a:buSzPct val="100000"/>
-              <a:buChar char="•"/>
-            </a:pPr>
-            <a:r>
-              <a:rPr lang="en-US" sz="1150" dirty="0">
-                <a:solidFill>
-                  <a:srgbClr val="5A6472"/>
-                </a:solidFill>
-                <a:latin typeface="Calibri" pitchFamily="34" charset="0"/>
-                <a:ea typeface="Calibri" pitchFamily="34" charset="-122"/>
-                <a:cs typeface="Calibri" pitchFamily="34" charset="-120"/>
-              </a:rPr>
-              <a:t>      posição ___ de ___  →  percentil ___  →  estrato ___</a:t>
-            </a:r>
-            <a:endParaRPr lang="en-US" sz="1150" dirty="0"/>
-          </a:p>
-          <a:p>
-            <a:pPr marL="342900" indent="-342900">
-              <a:spcAft>
-                <a:spcPts val="500"/>
-              </a:spcAft>
-              <a:buSzPct val="100000"/>
-              <a:buChar char="•"/>
-            </a:pPr>
-            <a:r>
-              <a:rPr lang="en-US" sz="1150" dirty="0">
-                <a:solidFill>
-                  <a:srgbClr val="5A6472"/>
-                </a:solidFill>
-                <a:latin typeface="Calibri" pitchFamily="34" charset="0"/>
-                <a:ea typeface="Calibri" pitchFamily="34" charset="-122"/>
-                <a:cs typeface="Calibri" pitchFamily="34" charset="-120"/>
-              </a:rPr>
-              <a:t>      ATENÇÃO: o Scholar publica só o TOP 20. Dividir por 20 subestima — é lista truncada, não população (Doc. Técnico, p.12: a CAPES criou o "Universo" por isso).</a:t>
-            </a:r>
-            <a:endParaRPr lang="en-US" sz="1150" dirty="0"/>
-          </a:p>
-          <a:p>
-            <a:pPr marL="342900" indent="-342900">
-              <a:spcAft>
-                <a:spcPts val="500"/>
-              </a:spcAft>
-              <a:buSzPct val="100000"/>
-              <a:buChar char="•"/>
-            </a:pPr>
-            <a:r>
-              <a:rPr lang="en-US" sz="1150" dirty="0">
-                <a:solidFill>
-                  <a:srgbClr val="5A6472"/>
-                </a:solidFill>
-                <a:latin typeface="Calibri" pitchFamily="34" charset="0"/>
-                <a:ea typeface="Calibri" pitchFamily="34" charset="-122"/>
-                <a:cs typeface="Calibri" pitchFamily="34" charset="-120"/>
-              </a:rPr>
-              <a:t>3 · CORE Rank:  A*  ·  ICORE2026  ·  consultado 17/09/2026  ✓</a:t>
-            </a:r>
-            <a:endParaRPr lang="en-US" sz="1150" dirty="0"/>
-          </a:p>
-        </p:txBody>
-      </p:sp>
-      <p:sp>
-        <p:nvSpPr>
-          <p:cNvPr id="7" name="Shape 5"/>
-          <p:cNvSpPr/>
-          <p:nvPr/>
-        </p:nvSpPr>
-        <p:spPr>
-          <a:xfrm>
-            <a:off x="502920" y="3401568"/>
-            <a:ext cx="3954780" cy="1051560"/>
-          </a:xfrm>
-          <a:prstGeom prst="roundRect">
-            <a:avLst>
-              <a:gd name="adj" fmla="val 5217"/>
+              <a:gd name="adj" fmla="val 3704"/>
             </a:avLst>
           </a:prstGeom>
           <a:solidFill>
@@ -10500,13 +10307,13 @@
       </p:sp>
       <p:sp>
         <p:nvSpPr>
-          <p:cNvPr id="8" name="Text 6"/>
-          <p:cNvSpPr txBox="1"/>
-          <p:nvPr/>
-        </p:nvSpPr>
-        <p:spPr>
-          <a:xfrm>
-            <a:off x="685800" y="3529584"/>
+          <p:cNvPr id="5" name="Text 3"/>
+          <p:cNvSpPr txBox="1"/>
+          <p:nvPr/>
+        </p:nvSpPr>
+        <p:spPr>
+          <a:xfrm>
+            <a:off x="685800" y="1060704"/>
             <a:ext cx="3589020" cy="274320"/>
           </a:xfrm>
           <a:prstGeom prst="rect">
@@ -10531,7 +10338,7 @@
                 <a:ea typeface="Calibri" pitchFamily="34" charset="-122"/>
                 <a:cs typeface="Calibri" pitchFamily="34" charset="-120"/>
               </a:rPr>
-              <a:t>CORE: A* desde 2008</a:t>
+              <a:t>OS TRÊS OBRIGATÓRIOS — todos levantados em 17/09/2026</a:t>
             </a:r>
             <a:endParaRPr lang="en-US" sz="1300" dirty="0"/>
           </a:p>
@@ -10539,14 +10346,14 @@
       </p:sp>
       <p:sp>
         <p:nvSpPr>
-          <p:cNvPr id="9" name="Text 7"/>
-          <p:cNvSpPr txBox="1"/>
-          <p:nvPr/>
-        </p:nvSpPr>
-        <p:spPr>
-          <a:xfrm>
-            <a:off x="685800" y="3840480"/>
-            <a:ext cx="3589020" cy="466344"/>
+          <p:cNvPr id="6" name="Text 4"/>
+          <p:cNvSpPr txBox="1"/>
+          <p:nvPr/>
+        </p:nvSpPr>
+        <p:spPr>
+          <a:xfrm>
+            <a:off x="685800" y="1371600"/>
+            <a:ext cx="3589020" cy="896112"/>
           </a:xfrm>
           <a:prstGeom prst="rect">
             <a:avLst/>
@@ -10573,7 +10380,7 @@
                 <a:ea typeface="Calibri" pitchFamily="34" charset="-122"/>
                 <a:cs typeface="Calibri" pitchFamily="34" charset="-120"/>
               </a:rPr>
-              <a:t>A* em ICORE2026, CORE2023, 2021, 2020, 2018, 2017, 2014, 2013 e 2008. Única exceção: ERA2010 (A).</a:t>
+              <a:t>1 · h5 = 90   (mediana 146)   posição 5 de 20</a:t>
             </a:r>
             <a:endParaRPr lang="en-US" sz="1150" dirty="0"/>
           </a:p>
@@ -10584,6 +10391,17 @@
               </a:spcAft>
               <a:buNone/>
             </a:pPr>
+            <a:r>
+              <a:rPr lang="en-US" sz="1150" dirty="0">
+                <a:solidFill>
+                  <a:srgbClr val="5A6472"/>
+                </a:solidFill>
+                <a:latin typeface="Calibri" pitchFamily="34" charset="0"/>
+                <a:ea typeface="Calibri" pitchFamily="34" charset="-122"/>
+                <a:cs typeface="Calibri" pitchFamily="34" charset="-120"/>
+              </a:rPr>
+              <a:t>2 · Qualis = A1   (ver o limiar ao lado)</a:t>
+            </a:r>
             <a:endParaRPr lang="en-US" sz="1150" dirty="0"/>
           </a:p>
           <a:p>
@@ -10602,7 +10420,164 @@
                 <a:ea typeface="Calibri" pitchFamily="34" charset="-122"/>
                 <a:cs typeface="Calibri" pitchFamily="34" charset="-120"/>
               </a:rPr>
-              <a:t>Field of Research 4604 — Cybersecurity and privacy: o MESMO campo da lista usada para o percentil do h5.</a:t>
+              <a:t>3 · CORE = A*   ICORE2026</a:t>
+            </a:r>
+            <a:endParaRPr lang="en-US" sz="1150" dirty="0"/>
+          </a:p>
+        </p:txBody>
+      </p:sp>
+      <p:sp>
+        <p:nvSpPr>
+          <p:cNvPr id="7" name="Shape 5"/>
+          <p:cNvSpPr/>
+          <p:nvPr/>
+        </p:nvSpPr>
+        <p:spPr>
+          <a:xfrm>
+            <a:off x="502920" y="2560320"/>
+            <a:ext cx="3954780" cy="1874520"/>
+          </a:xfrm>
+          <a:prstGeom prst="roundRect">
+            <a:avLst>
+              <a:gd name="adj" fmla="val 2927"/>
+            </a:avLst>
+          </a:prstGeom>
+          <a:solidFill>
+            <a:srgbClr val="F4F6F9"/>
+          </a:solidFill>
+          <a:ln w="12700">
+            <a:solidFill>
+              <a:srgbClr val="DDE3EA"/>
+            </a:solidFill>
+            <a:prstDash val="solid"/>
+          </a:ln>
+        </p:spPr>
+      </p:sp>
+      <p:sp>
+        <p:nvSpPr>
+          <p:cNvPr id="8" name="Text 6"/>
+          <p:cNvSpPr txBox="1"/>
+          <p:nvPr/>
+        </p:nvSpPr>
+        <p:spPr>
+          <a:xfrm>
+            <a:off x="685800" y="2688336"/>
+            <a:ext cx="3589020" cy="274320"/>
+          </a:xfrm>
+          <a:prstGeom prst="rect">
+            <a:avLst/>
+          </a:prstGeom>
+          <a:noFill/>
+          <a:ln/>
+        </p:spPr>
+        <p:txBody>
+          <a:bodyPr wrap="square" lIns="0" tIns="0" rIns="0" bIns="0" rtlCol="0" anchor="ctr"/>
+          <a:lstStyle/>
+          <a:p>
+            <a:pPr indent="0" marL="0">
+              <a:buNone/>
+            </a:pPr>
+            <a:r>
+              <a:rPr lang="en-US" sz="1300" b="1" dirty="0">
+                <a:solidFill>
+                  <a:srgbClr val="1B2A4A"/>
+                </a:solidFill>
+                <a:latin typeface="Calibri" pitchFamily="34" charset="0"/>
+                <a:ea typeface="Calibri" pitchFamily="34" charset="-122"/>
+                <a:cs typeface="Calibri" pitchFamily="34" charset="-120"/>
+              </a:rPr>
+              <a:t>Por que A1, e não A2</a:t>
+            </a:r>
+            <a:endParaRPr lang="en-US" sz="1300" dirty="0"/>
+          </a:p>
+        </p:txBody>
+      </p:sp>
+      <p:sp>
+        <p:nvSpPr>
+          <p:cNvPr id="9" name="Text 7"/>
+          <p:cNvSpPr txBox="1"/>
+          <p:nvPr/>
+        </p:nvSpPr>
+        <p:spPr>
+          <a:xfrm>
+            <a:off x="685800" y="2999232"/>
+            <a:ext cx="3589020" cy="1289304"/>
+          </a:xfrm>
+          <a:prstGeom prst="rect">
+            <a:avLst/>
+          </a:prstGeom>
+          <a:noFill/>
+          <a:ln/>
+        </p:spPr>
+        <p:txBody>
+          <a:bodyPr wrap="square" lIns="0" tIns="0" rIns="0" bIns="0" rtlCol="0" anchor="t"/>
+          <a:lstStyle/>
+          <a:p>
+            <a:pPr indent="0" marL="0">
+              <a:spcAft>
+                <a:spcPts val="400"/>
+              </a:spcAft>
+              <a:buNone/>
+            </a:pPr>
+            <a:r>
+              <a:rPr lang="en-US" sz="1150" dirty="0">
+                <a:solidFill>
+                  <a:srgbClr val="5A6472"/>
+                </a:solidFill>
+                <a:latin typeface="Calibri" pitchFamily="34" charset="0"/>
+                <a:ea typeface="Calibri" pitchFamily="34" charset="-122"/>
+                <a:cs typeface="Calibri" pitchFamily="34" charset="-120"/>
+              </a:rPr>
+              <a:t>Com N=20 o percentil dá 75 (A2) — mas 20 é lista TRUNCADA, não população. Esse 75 é PISO: universo maior só empurra para cima.</a:t>
+            </a:r>
+            <a:endParaRPr lang="en-US" sz="1150" dirty="0"/>
+          </a:p>
+          <a:p>
+            <a:pPr indent="0" marL="0">
+              <a:spcAft>
+                <a:spcPts val="400"/>
+              </a:spcAft>
+              <a:buNone/>
+            </a:pPr>
+            <a:endParaRPr lang="en-US" sz="1150" dirty="0"/>
+          </a:p>
+          <a:p>
+            <a:pPr indent="0" marL="0">
+              <a:spcAft>
+                <a:spcPts val="400"/>
+              </a:spcAft>
+              <a:buNone/>
+            </a:pPr>
+            <a:r>
+              <a:rPr lang="en-US" sz="1150" dirty="0">
+                <a:solidFill>
+                  <a:srgbClr val="5A6472"/>
+                </a:solidFill>
+                <a:latin typeface="Calibri" pitchFamily="34" charset="0"/>
+                <a:ea typeface="Calibri" pitchFamily="34" charset="-122"/>
+                <a:cs typeface="Calibri" pitchFamily="34" charset="-120"/>
+              </a:rPr>
+              <a:t>A1 exige percentil 87,5.  (N-5)/N &gt;= 0,875  -&gt;  N &gt;= 40.</a:t>
+            </a:r>
+            <a:endParaRPr lang="en-US" sz="1150" dirty="0"/>
+          </a:p>
+          <a:p>
+            <a:pPr indent="0" marL="0">
+              <a:spcAft>
+                <a:spcPts val="400"/>
+              </a:spcAft>
+              <a:buNone/>
+            </a:pPr>
+            <a:r>
+              <a:rPr lang="en-US" sz="1150" dirty="0">
+                <a:solidFill>
+                  <a:srgbClr val="5A6472"/>
+                </a:solidFill>
+                <a:latin typeface="Calibri" pitchFamily="34" charset="0"/>
+                <a:ea typeface="Calibri" pitchFamily="34" charset="-122"/>
+                <a:cs typeface="Calibri" pitchFamily="34" charset="-120"/>
+              </a:rPr>
+              <a:t>Basta a área ter 40 veículos. Tem centenas. Logo A1 — limite, não estimativa.</a:t>
             </a:r>
             <a:endParaRPr lang="en-US" sz="1150" dirty="0"/>
           </a:p>

--- a/seminario/seminario-analise-de-artigo.pptx
+++ b/seminario/seminario-analise-de-artigo.pptx
@@ -10287,11 +10287,11 @@
         <p:spPr>
           <a:xfrm>
             <a:off x="502920" y="932688"/>
-            <a:ext cx="3954780" cy="1481328"/>
+            <a:ext cx="3954780" cy="1691640"/>
           </a:xfrm>
           <a:prstGeom prst="roundRect">
             <a:avLst>
-              <a:gd name="adj" fmla="val 3704"/>
+              <a:gd name="adj" fmla="val 3243"/>
             </a:avLst>
           </a:prstGeom>
           <a:solidFill>
@@ -10353,7 +10353,7 @@
         <p:spPr>
           <a:xfrm>
             <a:off x="685800" y="1371600"/>
-            <a:ext cx="3589020" cy="896112"/>
+            <a:ext cx="3589020" cy="1106424"/>
           </a:xfrm>
           <a:prstGeom prst="rect">
             <a:avLst/>
@@ -10400,7 +10400,7 @@
                 <a:ea typeface="Calibri" pitchFamily="34" charset="-122"/>
                 <a:cs typeface="Calibri" pitchFamily="34" charset="-120"/>
               </a:rPr>
-              <a:t>2 · Qualis = A1   (ver o limiar ao lado)</a:t>
+              <a:t>     (posição 19 = AsiaCCS, h5 41 — outro evento; conferido)</a:t>
             </a:r>
             <a:endParaRPr lang="en-US" sz="1150" dirty="0"/>
           </a:p>
@@ -10420,6 +10420,26 @@
                 <a:ea typeface="Calibri" pitchFamily="34" charset="-122"/>
                 <a:cs typeface="Calibri" pitchFamily="34" charset="-120"/>
               </a:rPr>
+              <a:t>2 · Qualis = A1   (ver o limiar ao lado)</a:t>
+            </a:r>
+            <a:endParaRPr lang="en-US" sz="1150" dirty="0"/>
+          </a:p>
+          <a:p>
+            <a:pPr indent="0" marL="0">
+              <a:spcAft>
+                <a:spcPts val="400"/>
+              </a:spcAft>
+              <a:buNone/>
+            </a:pPr>
+            <a:r>
+              <a:rPr lang="en-US" sz="1150" dirty="0">
+                <a:solidFill>
+                  <a:srgbClr val="5A6472"/>
+                </a:solidFill>
+                <a:latin typeface="Calibri" pitchFamily="34" charset="0"/>
+                <a:ea typeface="Calibri" pitchFamily="34" charset="-122"/>
+                <a:cs typeface="Calibri" pitchFamily="34" charset="-120"/>
+              </a:rPr>
               <a:t>3 · CORE = A*   ICORE2026</a:t>
             </a:r>
             <a:endParaRPr lang="en-US" sz="1150" dirty="0"/>
@@ -10434,12 +10454,12 @@
         </p:nvSpPr>
         <p:spPr>
           <a:xfrm>
-            <a:off x="502920" y="2560320"/>
-            <a:ext cx="3954780" cy="1874520"/>
+            <a:off x="502920" y="2761488"/>
+            <a:ext cx="3954780" cy="1673352"/>
           </a:xfrm>
           <a:prstGeom prst="roundRect">
             <a:avLst>
-              <a:gd name="adj" fmla="val 2927"/>
+              <a:gd name="adj" fmla="val 3279"/>
             </a:avLst>
           </a:prstGeom>
           <a:solidFill>
@@ -10461,7 +10481,7 @@
         </p:nvSpPr>
         <p:spPr>
           <a:xfrm>
-            <a:off x="685800" y="2688336"/>
+            <a:off x="685800" y="2889504"/>
             <a:ext cx="3589020" cy="274320"/>
           </a:xfrm>
           <a:prstGeom prst="rect">
@@ -10500,8 +10520,8 @@
         </p:nvSpPr>
         <p:spPr>
           <a:xfrm>
-            <a:off x="685800" y="2999232"/>
-            <a:ext cx="3589020" cy="1289304"/>
+            <a:off x="685800" y="3200400"/>
+            <a:ext cx="3589020" cy="1088136"/>
           </a:xfrm>
           <a:prstGeom prst="rect">
             <a:avLst/>

--- a/seminario/seminario-analise-de-artigo.pptx
+++ b/seminario/seminario-analise-de-artigo.pptx
@@ -2526,7 +2526,7 @@
                 <a:ea typeface="Calibri" pitchFamily="34" charset="-122"/>
                 <a:cs typeface="Calibri" pitchFamily="34" charset="-120"/>
               </a:rPr>
-              <a:t>Cole o abstract e marque cada trecho com sua função.</a:t>
+              <a:t>Seis movimentos, cada um em uma ou duas frases.</a:t>
             </a:r>
             <a:endParaRPr lang="en-US" sz="1200" dirty="0"/>
           </a:p>
@@ -2549,13 +2549,13 @@
             </a:avLst>
           </a:prstGeom>
           <a:solidFill>
-            <a:srgbClr val="FDF4E0"/>
+            <a:srgbClr val="F4F6F9"/>
           </a:solidFill>
           <a:ln w="12700">
             <a:solidFill>
-              <a:srgbClr val="C8860D"/>
+              <a:srgbClr val="2E86A8"/>
             </a:solidFill>
-            <a:prstDash val="dash"/>
+            <a:prstDash val="solid"/>
           </a:ln>
         </p:spPr>
       </p:sp>
@@ -2567,79 +2567,143 @@
         </p:nvSpPr>
         <p:spPr>
           <a:xfrm>
-            <a:off x="685800" y="1389888"/>
-            <a:ext cx="5166360" cy="237744"/>
-          </a:xfrm>
-          <a:prstGeom prst="rect">
-            <a:avLst/>
-          </a:prstGeom>
-          <a:noFill/>
-          <a:ln/>
-        </p:spPr>
-        <p:txBody>
-          <a:bodyPr wrap="square" lIns="0" tIns="0" rIns="0" bIns="0" rtlCol="0" anchor="ctr"/>
-          <a:lstStyle/>
-          <a:p>
-            <a:pPr indent="0" marL="0">
-              <a:buNone/>
-            </a:pPr>
-            <a:r>
-              <a:rPr lang="en-US" sz="1000" b="1" spc="100" kern="0" dirty="0">
-                <a:solidFill>
-                  <a:srgbClr val="C8860D"/>
-                </a:solidFill>
-                <a:latin typeface="Calibri" pitchFamily="34" charset="0"/>
-                <a:ea typeface="Calibri" pitchFamily="34" charset="-122"/>
-                <a:cs typeface="Calibri" pitchFamily="34" charset="-120"/>
-              </a:rPr>
-              <a:t>A PREENCHER  ·  cole aqui o texto do artigo</a:t>
-            </a:r>
-            <a:endParaRPr lang="en-US" sz="1000" dirty="0"/>
+            <a:off x="667512" y="1371600"/>
+            <a:ext cx="5212080" cy="2011680"/>
+          </a:xfrm>
+          <a:prstGeom prst="rect">
+            <a:avLst/>
+          </a:prstGeom>
+          <a:noFill/>
+          <a:ln/>
+        </p:spPr>
+        <p:txBody>
+          <a:bodyPr wrap="square" lIns="0" tIns="0" rIns="0" bIns="0" rtlCol="0" anchor="t"/>
+          <a:lstStyle/>
+          <a:p>
+            <a:pPr indent="0" marL="0">
+              <a:lnSpc>
+                <a:spcPct val="122000"/>
+              </a:lnSpc>
+              <a:buNone/>
+            </a:pPr>
+            <a:r>
+              <a:rPr lang="en-US" sz="950" dirty="0">
+                <a:solidFill>
+                  <a:srgbClr val="1B2A4A"/>
+                </a:solidFill>
+                <a:latin typeface="Consolas" pitchFamily="34" charset="0"/>
+                <a:ea typeface="Consolas" pitchFamily="34" charset="-122"/>
+                <a:cs typeface="Consolas" pitchFamily="34" charset="-120"/>
+              </a:rPr>
+              <a:t>Contextualiza:  "Adopted in May 2018, the GDPR requires the consent... to be freely given"</a:t>
+            </a:r>
+            <a:endParaRPr lang="en-US" sz="950" dirty="0"/>
+          </a:p>
+          <a:p>
+            <a:pPr indent="0" marL="0">
+              <a:lnSpc>
+                <a:spcPct val="122000"/>
+              </a:lnSpc>
+              <a:buNone/>
+            </a:pPr>
+            <a:r>
+              <a:rPr lang="en-US" sz="950" dirty="0">
+                <a:solidFill>
+                  <a:srgbClr val="1B2A4A"/>
+                </a:solidFill>
+                <a:latin typeface="Consolas" pitchFamily="34" charset="0"/>
+                <a:ea typeface="Consolas" pitchFamily="34" charset="-122"/>
+                <a:cs typeface="Consolas" pitchFamily="34" charset="-120"/>
+              </a:rPr>
+              <a:t>Lacuna:  "no research has systematically studied how consent notices are implemented"</a:t>
+            </a:r>
+            <a:endParaRPr lang="en-US" sz="950" dirty="0"/>
+          </a:p>
+          <a:p>
+            <a:pPr indent="0" marL="0">
+              <a:lnSpc>
+                <a:spcPct val="122000"/>
+              </a:lnSpc>
+              <a:buNone/>
+            </a:pPr>
+            <a:r>
+              <a:rPr lang="en-US" sz="950" dirty="0">
+                <a:solidFill>
+                  <a:srgbClr val="1B2A4A"/>
+                </a:solidFill>
+                <a:latin typeface="Consolas" pitchFamily="34" charset="0"/>
+                <a:ea typeface="Consolas" pitchFamily="34" charset="-122"/>
+                <a:cs typeface="Consolas" pitchFamily="34" charset="-120"/>
+              </a:rPr>
+              <a:t>Objetivo:  "we perform the first large-scale study into consent notices"</a:t>
+            </a:r>
+            <a:endParaRPr lang="en-US" sz="950" dirty="0"/>
+          </a:p>
+          <a:p>
+            <a:pPr indent="0" marL="0">
+              <a:lnSpc>
+                <a:spcPct val="122000"/>
+              </a:lnSpc>
+              <a:buNone/>
+            </a:pPr>
+            <a:r>
+              <a:rPr lang="en-US" sz="950" dirty="0">
+                <a:solidFill>
+                  <a:srgbClr val="1B2A4A"/>
+                </a:solidFill>
+                <a:latin typeface="Consolas" pitchFamily="34" charset="0"/>
+                <a:ea typeface="Consolas" pitchFamily="34" charset="-122"/>
+                <a:cs typeface="Consolas" pitchFamily="34" charset="-120"/>
+              </a:rPr>
+              <a:t>Método:  "a mostly automated and scalable approach... 239,381 Android apps"</a:t>
+            </a:r>
+            <a:endParaRPr lang="en-US" sz="950" dirty="0"/>
+          </a:p>
+          <a:p>
+            <a:pPr indent="0" marL="0">
+              <a:lnSpc>
+                <a:spcPct val="122000"/>
+              </a:lnSpc>
+              <a:buNone/>
+            </a:pPr>
+            <a:r>
+              <a:rPr lang="en-US" sz="950" dirty="0">
+                <a:solidFill>
+                  <a:srgbClr val="1B2A4A"/>
+                </a:solidFill>
+                <a:latin typeface="Consolas" pitchFamily="34" charset="0"/>
+                <a:ea typeface="Consolas" pitchFamily="34" charset="-122"/>
+                <a:cs typeface="Consolas" pitchFamily="34" charset="-120"/>
+              </a:rPr>
+              <a:t>Resultados:  4 mecanismos · 13.082 apps · 30.160 sem aviso · 2.688 (20,54%) violam</a:t>
+            </a:r>
+            <a:endParaRPr lang="en-US" sz="950" dirty="0"/>
+          </a:p>
+          <a:p>
+            <a:pPr indent="0" marL="0">
+              <a:lnSpc>
+                <a:spcPct val="122000"/>
+              </a:lnSpc>
+              <a:buNone/>
+            </a:pPr>
+            <a:r>
+              <a:rPr lang="en-US" sz="950" dirty="0">
+                <a:solidFill>
+                  <a:srgbClr val="1B2A4A"/>
+                </a:solidFill>
+                <a:latin typeface="Consolas" pitchFamily="34" charset="0"/>
+                <a:ea typeface="Consolas" pitchFamily="34" charset="-122"/>
+                <a:cs typeface="Consolas" pitchFamily="34" charset="-120"/>
+              </a:rPr>
+              <a:t>Palavras-chave:  Android Security; Consent; GDPR; User Privacy</a:t>
+            </a:r>
+            <a:endParaRPr lang="en-US" sz="950" dirty="0"/>
           </a:p>
         </p:txBody>
       </p:sp>
       <p:sp>
         <p:nvSpPr>
           <p:cNvPr id="7" name="Text 5"/>
-          <p:cNvSpPr txBox="1"/>
-          <p:nvPr/>
-        </p:nvSpPr>
-        <p:spPr>
-          <a:xfrm>
-            <a:off x="685800" y="1691640"/>
-            <a:ext cx="5166360" cy="640080"/>
-          </a:xfrm>
-          <a:prstGeom prst="rect">
-            <a:avLst/>
-          </a:prstGeom>
-          <a:noFill/>
-          <a:ln/>
-        </p:spPr>
-        <p:txBody>
-          <a:bodyPr wrap="square" lIns="0" tIns="0" rIns="0" bIns="0" rtlCol="0" anchor="t"/>
-          <a:lstStyle/>
-          <a:p>
-            <a:pPr indent="0" marL="0">
-              <a:buNone/>
-            </a:pPr>
-            <a:r>
-              <a:rPr lang="en-US" sz="1100" i="1" dirty="0">
-                <a:solidFill>
-                  <a:srgbClr val="5A6472"/>
-                </a:solidFill>
-                <a:latin typeface="Calibri" pitchFamily="34" charset="0"/>
-                <a:ea typeface="Calibri" pitchFamily="34" charset="-122"/>
-                <a:cs typeface="Calibri" pitchFamily="34" charset="-120"/>
-              </a:rPr>
-              <a:t>Transcreva o trecho real do artigo e posicione os rótulos ao lado, ligando cada anotação ao parágrafo correspondente — como nos dois exemplos fornecidos pela professora.</a:t>
-            </a:r>
-            <a:endParaRPr lang="en-US" sz="1100" dirty="0"/>
-          </a:p>
-        </p:txBody>
-      </p:sp>
-      <p:sp>
-        <p:nvSpPr>
-          <p:cNvPr id="8" name="Text 6"/>
           <p:cNvSpPr txBox="1"/>
           <p:nvPr/>
         </p:nvSpPr>
@@ -2678,7 +2742,7 @@
       </p:sp>
       <p:sp>
         <p:nvSpPr>
-          <p:cNvPr id="9" name="Text 7"/>
+          <p:cNvPr id="8" name="Text 6"/>
           <p:cNvSpPr txBox="1"/>
           <p:nvPr/>
         </p:nvSpPr>
@@ -2713,7 +2777,7 @@
                 <a:ea typeface="Calibri" pitchFamily="34" charset="-122"/>
                 <a:cs typeface="Calibri" pitchFamily="34" charset="-120"/>
               </a:rPr>
-              <a:t>Objetivos</a:t>
+              <a:t>Contextualiza</a:t>
             </a:r>
             <a:endParaRPr lang="en-US" sz="1100" dirty="0"/>
           </a:p>
@@ -2734,7 +2798,7 @@
                 <a:ea typeface="Calibri" pitchFamily="34" charset="-122"/>
                 <a:cs typeface="Calibri" pitchFamily="34" charset="-120"/>
               </a:rPr>
-              <a:t>Método empregado</a:t>
+              <a:t>Declara a lacuna</a:t>
             </a:r>
             <a:endParaRPr lang="en-US" sz="1100" dirty="0"/>
           </a:p>
@@ -2755,7 +2819,7 @@
                 <a:ea typeface="Calibri" pitchFamily="34" charset="-122"/>
                 <a:cs typeface="Calibri" pitchFamily="34" charset="-120"/>
               </a:rPr>
-              <a:t>Apresentação dos resultados</a:t>
+              <a:t>Objetivo</a:t>
             </a:r>
             <a:endParaRPr lang="en-US" sz="1100" dirty="0"/>
           </a:p>
@@ -2776,15 +2840,57 @@
                 <a:ea typeface="Calibri" pitchFamily="34" charset="-122"/>
                 <a:cs typeface="Calibri" pitchFamily="34" charset="-120"/>
               </a:rPr>
-              <a:t>Palavras-chave</a:t>
+              <a:t>Método empregado</a:t>
             </a:r>
             <a:endParaRPr lang="en-US" sz="1100" dirty="0"/>
           </a:p>
-        </p:txBody>
-      </p:sp>
-      <p:sp>
-        <p:nvSpPr>
-          <p:cNvPr id="10" name="Shape 8"/>
+          <a:p>
+            <a:pPr marL="342900" indent="-342900">
+              <a:spcAft>
+                <a:spcPts val="700"/>
+              </a:spcAft>
+              <a:buSzPct val="100000"/>
+              <a:buChar char="•"/>
+            </a:pPr>
+            <a:r>
+              <a:rPr lang="en-US" sz="1100" dirty="0">
+                <a:solidFill>
+                  <a:srgbClr val="1B2A4A"/>
+                </a:solidFill>
+                <a:latin typeface="Calibri" pitchFamily="34" charset="0"/>
+                <a:ea typeface="Calibri" pitchFamily="34" charset="-122"/>
+                <a:cs typeface="Calibri" pitchFamily="34" charset="-120"/>
+              </a:rPr>
+              <a:t>Resultados</a:t>
+            </a:r>
+            <a:endParaRPr lang="en-US" sz="1100" dirty="0"/>
+          </a:p>
+          <a:p>
+            <a:pPr marL="342900" indent="-342900">
+              <a:spcAft>
+                <a:spcPts val="700"/>
+              </a:spcAft>
+              <a:buSzPct val="100000"/>
+              <a:buChar char="•"/>
+            </a:pPr>
+            <a:r>
+              <a:rPr lang="en-US" sz="1100" dirty="0">
+                <a:solidFill>
+                  <a:srgbClr val="1B2A4A"/>
+                </a:solidFill>
+                <a:latin typeface="Calibri" pitchFamily="34" charset="0"/>
+                <a:ea typeface="Calibri" pitchFamily="34" charset="-122"/>
+                <a:cs typeface="Calibri" pitchFamily="34" charset="-120"/>
+              </a:rPr>
+              <a:t>Implicação</a:t>
+            </a:r>
+            <a:endParaRPr lang="en-US" sz="1100" dirty="0"/>
+          </a:p>
+        </p:txBody>
+      </p:sp>
+      <p:sp>
+        <p:nvSpPr>
+          <p:cNvPr id="9" name="Shape 7"/>
           <p:cNvSpPr/>
           <p:nvPr/>
         </p:nvSpPr>
@@ -2811,7 +2917,7 @@
       </p:sp>
       <p:sp>
         <p:nvSpPr>
-          <p:cNvPr id="11" name="Text 9"/>
+          <p:cNvPr id="10" name="Text 8"/>
           <p:cNvSpPr txBox="1"/>
           <p:nvPr/>
         </p:nvSpPr>
@@ -2850,7 +2956,7 @@
       </p:sp>
       <p:sp>
         <p:nvSpPr>
-          <p:cNvPr id="12" name="Text 10"/>
+          <p:cNvPr id="11" name="Text 9"/>
           <p:cNvSpPr txBox="1"/>
           <p:nvPr/>
         </p:nvSpPr>
@@ -2884,7 +2990,7 @@
                 <a:ea typeface="Calibri" pitchFamily="34" charset="-122"/>
                 <a:cs typeface="Calibri" pitchFamily="34" charset="-120"/>
               </a:rPr>
-              <a:t>Verifique se o resumo cobre os quatro elementos. Se faltar algum, APONTE — identificar o que falta também é análise.</a:t>
+              <a:t>As palavras-chave trazem Consent e GDPR, mas NÃO trazem tracking nem third-party — que estão no título. Isso diz como os autores querem ser encontrados.</a:t>
             </a:r>
             <a:endParaRPr lang="en-US" sz="1150" dirty="0"/>
           </a:p>
@@ -2892,7 +2998,7 @@
       </p:sp>
       <p:sp>
         <p:nvSpPr>
-          <p:cNvPr id="13" name="Text 11"/>
+          <p:cNvPr id="12" name="Text 10"/>
           <p:cNvSpPr txBox="1"/>
           <p:nvPr/>
         </p:nvSpPr>
@@ -3065,7 +3171,7 @@
                 <a:ea typeface="Calibri" pitchFamily="34" charset="-122"/>
                 <a:cs typeface="Calibri" pitchFamily="34" charset="-120"/>
               </a:rPr>
-              <a:t>Cole os parágrafos da introdução e marque cada movimento.</a:t>
+              <a:t>Abre pelo fenômeno cotidiano, não pela técnica. E declara 3 questões.</a:t>
             </a:r>
             <a:endParaRPr lang="en-US" sz="1200" dirty="0"/>
           </a:p>
@@ -3088,13 +3194,13 @@
             </a:avLst>
           </a:prstGeom>
           <a:solidFill>
-            <a:srgbClr val="FDF4E0"/>
+            <a:srgbClr val="F4F6F9"/>
           </a:solidFill>
           <a:ln w="12700">
             <a:solidFill>
-              <a:srgbClr val="C8860D"/>
+              <a:srgbClr val="2E86A8"/>
             </a:solidFill>
-            <a:prstDash val="dash"/>
+            <a:prstDash val="solid"/>
           </a:ln>
         </p:spPr>
       </p:sp>
@@ -3106,79 +3212,132 @@
         </p:nvSpPr>
         <p:spPr>
           <a:xfrm>
-            <a:off x="685800" y="1389888"/>
-            <a:ext cx="5166360" cy="237744"/>
-          </a:xfrm>
-          <a:prstGeom prst="rect">
-            <a:avLst/>
-          </a:prstGeom>
-          <a:noFill/>
-          <a:ln/>
-        </p:spPr>
-        <p:txBody>
-          <a:bodyPr wrap="square" lIns="0" tIns="0" rIns="0" bIns="0" rtlCol="0" anchor="ctr"/>
-          <a:lstStyle/>
-          <a:p>
-            <a:pPr indent="0" marL="0">
-              <a:buNone/>
-            </a:pPr>
-            <a:r>
-              <a:rPr lang="en-US" sz="1000" b="1" spc="100" kern="0" dirty="0">
-                <a:solidFill>
-                  <a:srgbClr val="C8860D"/>
-                </a:solidFill>
-                <a:latin typeface="Calibri" pitchFamily="34" charset="0"/>
-                <a:ea typeface="Calibri" pitchFamily="34" charset="-122"/>
-                <a:cs typeface="Calibri" pitchFamily="34" charset="-120"/>
-              </a:rPr>
-              <a:t>A PREENCHER  ·  cole aqui o texto do artigo</a:t>
-            </a:r>
-            <a:endParaRPr lang="en-US" sz="1000" dirty="0"/>
+            <a:off x="667512" y="1371600"/>
+            <a:ext cx="5212080" cy="2011680"/>
+          </a:xfrm>
+          <a:prstGeom prst="rect">
+            <a:avLst/>
+          </a:prstGeom>
+          <a:noFill/>
+          <a:ln/>
+        </p:spPr>
+        <p:txBody>
+          <a:bodyPr wrap="square" lIns="0" tIns="0" rIns="0" bIns="0" rtlCol="0" anchor="t"/>
+          <a:lstStyle/>
+          <a:p>
+            <a:pPr indent="0" marL="0">
+              <a:lnSpc>
+                <a:spcPct val="122000"/>
+              </a:lnSpc>
+              <a:buNone/>
+            </a:pPr>
+            <a:r>
+              <a:rPr lang="en-US" sz="950" dirty="0">
+                <a:solidFill>
+                  <a:srgbClr val="1B2A4A"/>
+                </a:solidFill>
+                <a:latin typeface="Consolas" pitchFamily="34" charset="0"/>
+                <a:ea typeface="Consolas" pitchFamily="34" charset="-122"/>
+                <a:cs typeface="Consolas" pitchFamily="34" charset="-120"/>
+              </a:rPr>
+              <a:t>"Every time we load a page... information about us will be broadcast to large</a:t>
+            </a:r>
+            <a:endParaRPr lang="en-US" sz="950" dirty="0"/>
+          </a:p>
+          <a:p>
+            <a:pPr indent="0" marL="0">
+              <a:lnSpc>
+                <a:spcPct val="122000"/>
+              </a:lnSpc>
+              <a:buNone/>
+            </a:pPr>
+            <a:r>
+              <a:rPr lang="en-US" sz="950" dirty="0">
+                <a:solidFill>
+                  <a:srgbClr val="1B2A4A"/>
+                </a:solidFill>
+                <a:latin typeface="Consolas" pitchFamily="34" charset="0"/>
+                <a:ea typeface="Consolas" pitchFamily="34" charset="-122"/>
+                <a:cs typeface="Consolas" pitchFamily="34" charset="-120"/>
+              </a:rPr>
+              <a:t>numbers of companies, most notably for advertising purposes."</a:t>
+            </a:r>
+            <a:endParaRPr lang="en-US" sz="950" dirty="0"/>
+          </a:p>
+          <a:p>
+            <a:pPr indent="0" marL="0">
+              <a:lnSpc>
+                <a:spcPct val="122000"/>
+              </a:lnSpc>
+              <a:buNone/>
+            </a:pPr>
+            <a:endParaRPr lang="en-US" sz="950" dirty="0"/>
+          </a:p>
+          <a:p>
+            <a:pPr indent="0" marL="0">
+              <a:lnSpc>
+                <a:spcPct val="122000"/>
+              </a:lnSpc>
+              <a:buNone/>
+            </a:pPr>
+            <a:r>
+              <a:rPr lang="en-US" sz="950" dirty="0">
+                <a:solidFill>
+                  <a:srgbClr val="1B2A4A"/>
+                </a:solidFill>
+                <a:latin typeface="Consolas" pitchFamily="34" charset="0"/>
+                <a:ea typeface="Consolas" pitchFamily="34" charset="-122"/>
+                <a:cs typeface="Consolas" pitchFamily="34" charset="-120"/>
+              </a:rPr>
+              <a:t>Q1  Do mobile apps implement any form of consent notices?</a:t>
+            </a:r>
+            <a:endParaRPr lang="en-US" sz="950" dirty="0"/>
+          </a:p>
+          <a:p>
+            <a:pPr indent="0" marL="0">
+              <a:lnSpc>
+                <a:spcPct val="122000"/>
+              </a:lnSpc>
+              <a:buNone/>
+            </a:pPr>
+            <a:r>
+              <a:rPr lang="en-US" sz="950" dirty="0">
+                <a:solidFill>
+                  <a:srgbClr val="1B2A4A"/>
+                </a:solidFill>
+                <a:latin typeface="Consolas" pitchFamily="34" charset="0"/>
+                <a:ea typeface="Consolas" pitchFamily="34" charset="-122"/>
+                <a:cs typeface="Consolas" pitchFamily="34" charset="-120"/>
+              </a:rPr>
+              <a:t>Q2  Can these consent notices be legally justified under GDPR?</a:t>
+            </a:r>
+            <a:endParaRPr lang="en-US" sz="950" dirty="0"/>
+          </a:p>
+          <a:p>
+            <a:pPr indent="0" marL="0">
+              <a:lnSpc>
+                <a:spcPct val="122000"/>
+              </a:lnSpc>
+              <a:buNone/>
+            </a:pPr>
+            <a:r>
+              <a:rPr lang="en-US" sz="950" dirty="0">
+                <a:solidFill>
+                  <a:srgbClr val="1B2A4A"/>
+                </a:solidFill>
+                <a:latin typeface="Consolas" pitchFamily="34" charset="0"/>
+                <a:ea typeface="Consolas" pitchFamily="34" charset="-122"/>
+                <a:cs typeface="Consolas" pitchFamily="34" charset="-120"/>
+              </a:rPr>
+              <a:t>Q3  Are developers aware of the requirements and of their own violations?</a:t>
+            </a:r>
+            <a:endParaRPr lang="en-US" sz="950" dirty="0"/>
           </a:p>
         </p:txBody>
       </p:sp>
       <p:sp>
         <p:nvSpPr>
           <p:cNvPr id="7" name="Text 5"/>
-          <p:cNvSpPr txBox="1"/>
-          <p:nvPr/>
-        </p:nvSpPr>
-        <p:spPr>
-          <a:xfrm>
-            <a:off x="685800" y="1691640"/>
-            <a:ext cx="5166360" cy="640080"/>
-          </a:xfrm>
-          <a:prstGeom prst="rect">
-            <a:avLst/>
-          </a:prstGeom>
-          <a:noFill/>
-          <a:ln/>
-        </p:spPr>
-        <p:txBody>
-          <a:bodyPr wrap="square" lIns="0" tIns="0" rIns="0" bIns="0" rtlCol="0" anchor="t"/>
-          <a:lstStyle/>
-          <a:p>
-            <a:pPr indent="0" marL="0">
-              <a:buNone/>
-            </a:pPr>
-            <a:r>
-              <a:rPr lang="en-US" sz="1100" i="1" dirty="0">
-                <a:solidFill>
-                  <a:srgbClr val="5A6472"/>
-                </a:solidFill>
-                <a:latin typeface="Calibri" pitchFamily="34" charset="0"/>
-                <a:ea typeface="Calibri" pitchFamily="34" charset="-122"/>
-                <a:cs typeface="Calibri" pitchFamily="34" charset="-120"/>
-              </a:rPr>
-              <a:t>Transcreva o trecho real do artigo e posicione os rótulos ao lado, ligando cada anotação ao parágrafo correspondente — como nos dois exemplos fornecidos pela professora.</a:t>
-            </a:r>
-            <a:endParaRPr lang="en-US" sz="1100" dirty="0"/>
-          </a:p>
-        </p:txBody>
-      </p:sp>
-      <p:sp>
-        <p:nvSpPr>
-          <p:cNvPr id="8" name="Text 6"/>
           <p:cNvSpPr txBox="1"/>
           <p:nvPr/>
         </p:nvSpPr>
@@ -3217,7 +3376,7 @@
       </p:sp>
       <p:sp>
         <p:nvSpPr>
-          <p:cNvPr id="9" name="Text 7"/>
+          <p:cNvPr id="8" name="Text 6"/>
           <p:cNvSpPr txBox="1"/>
           <p:nvPr/>
         </p:nvSpPr>
@@ -3252,7 +3411,7 @@
                 <a:ea typeface="Calibri" pitchFamily="34" charset="-122"/>
                 <a:cs typeface="Calibri" pitchFamily="34" charset="-120"/>
               </a:rPr>
-              <a:t>Contextualiza o trabalho</a:t>
+              <a:t>Contextualiza</a:t>
             </a:r>
             <a:endParaRPr lang="en-US" sz="1100" dirty="0"/>
           </a:p>
@@ -3294,7 +3453,7 @@
                 <a:ea typeface="Calibri" pitchFamily="34" charset="-122"/>
                 <a:cs typeface="Calibri" pitchFamily="34" charset="-120"/>
               </a:rPr>
-              <a:t>Objetivo e contribuição da proposta</a:t>
+              <a:t>Posiciona na literatura</a:t>
             </a:r>
             <a:endParaRPr lang="en-US" sz="1100" dirty="0"/>
           </a:p>
@@ -3315,15 +3474,36 @@
                 <a:ea typeface="Calibri" pitchFamily="34" charset="-122"/>
                 <a:cs typeface="Calibri" pitchFamily="34" charset="-120"/>
               </a:rPr>
-              <a:t>Estrutura e organização do artigo</a:t>
+              <a:t>Questões de pesquisa</a:t>
             </a:r>
             <a:endParaRPr lang="en-US" sz="1100" dirty="0"/>
           </a:p>
-        </p:txBody>
-      </p:sp>
-      <p:sp>
-        <p:nvSpPr>
-          <p:cNvPr id="10" name="Shape 8"/>
+          <a:p>
+            <a:pPr marL="342900" indent="-342900">
+              <a:spcAft>
+                <a:spcPts val="700"/>
+              </a:spcAft>
+              <a:buSzPct val="100000"/>
+              <a:buChar char="•"/>
+            </a:pPr>
+            <a:r>
+              <a:rPr lang="en-US" sz="1100" dirty="0">
+                <a:solidFill>
+                  <a:srgbClr val="1B2A4A"/>
+                </a:solidFill>
+                <a:latin typeface="Calibri" pitchFamily="34" charset="0"/>
+                <a:ea typeface="Calibri" pitchFamily="34" charset="-122"/>
+                <a:cs typeface="Calibri" pitchFamily="34" charset="-120"/>
+              </a:rPr>
+              <a:t>Contribuições em lista</a:t>
+            </a:r>
+            <a:endParaRPr lang="en-US" sz="1100" dirty="0"/>
+          </a:p>
+        </p:txBody>
+      </p:sp>
+      <p:sp>
+        <p:nvSpPr>
+          <p:cNvPr id="9" name="Shape 7"/>
           <p:cNvSpPr/>
           <p:nvPr/>
         </p:nvSpPr>
@@ -3350,7 +3530,7 @@
       </p:sp>
       <p:sp>
         <p:nvSpPr>
-          <p:cNvPr id="11" name="Text 9"/>
+          <p:cNvPr id="10" name="Text 8"/>
           <p:cNvSpPr txBox="1"/>
           <p:nvPr/>
         </p:nvSpPr>
@@ -3389,7 +3569,7 @@
       </p:sp>
       <p:sp>
         <p:nvSpPr>
-          <p:cNvPr id="12" name="Text 10"/>
+          <p:cNvPr id="11" name="Text 9"/>
           <p:cNvSpPr txBox="1"/>
           <p:nvPr/>
         </p:nvSpPr>
@@ -3423,7 +3603,7 @@
                 <a:ea typeface="Calibri" pitchFamily="34" charset="-122"/>
                 <a:cs typeface="Calibri" pitchFamily="34" charset="-120"/>
               </a:rPr>
-              <a:t>Quase toda introdução em Computação termina anunciando a organização das seções. Confirme se esta tem, e onde.</a:t>
+              <a:t>Nota de rodapé 1: eles chamam de violação POTENCIAL de propósito, para não emitir juízo jurídico — que seria consultoria legal regulada. Mesmo cuidado que a LGPD exige de mim.</a:t>
             </a:r>
             <a:endParaRPr lang="en-US" sz="1150" dirty="0"/>
           </a:p>
@@ -3431,7 +3611,7 @@
       </p:sp>
       <p:sp>
         <p:nvSpPr>
-          <p:cNvPr id="13" name="Text 11"/>
+          <p:cNvPr id="12" name="Text 10"/>
           <p:cNvSpPr txBox="1"/>
           <p:nvPr/>
         </p:nvSpPr>
@@ -3565,7 +3745,7 @@
                 <a:ea typeface="Cambria" pitchFamily="34" charset="-122"/>
                 <a:cs typeface="Cambria" pitchFamily="34" charset="-120"/>
               </a:rPr>
-              <a:t>Análise do método</a:t>
+              <a:t>Análise do método — o funil</a:t>
             </a:r>
             <a:endParaRPr lang="en-US" sz="2500" dirty="0"/>
           </a:p>
@@ -3604,7 +3784,7 @@
                 <a:ea typeface="Calibri" pitchFamily="34" charset="-122"/>
                 <a:cs typeface="Calibri" pitchFamily="34" charset="-120"/>
               </a:rPr>
-              <a:t>Percorra as seções metodológicas e explique o que cada uma faz.</a:t>
+              <a:t>Corpus do AndroZoo, três critérios de inclusão, dois instrumentos.</a:t>
             </a:r>
             <a:endParaRPr lang="en-US" sz="1200" dirty="0"/>
           </a:p>
@@ -3627,13 +3807,13 @@
             </a:avLst>
           </a:prstGeom>
           <a:solidFill>
-            <a:srgbClr val="FDF4E0"/>
+            <a:srgbClr val="F4F6F9"/>
           </a:solidFill>
           <a:ln w="12700">
             <a:solidFill>
-              <a:srgbClr val="C8860D"/>
+              <a:srgbClr val="2E86A8"/>
             </a:solidFill>
-            <a:prstDash val="dash"/>
+            <a:prstDash val="solid"/>
           </a:ln>
         </p:spPr>
       </p:sp>
@@ -3645,79 +3825,143 @@
         </p:nvSpPr>
         <p:spPr>
           <a:xfrm>
-            <a:off x="685800" y="1389888"/>
-            <a:ext cx="5166360" cy="237744"/>
-          </a:xfrm>
-          <a:prstGeom prst="rect">
-            <a:avLst/>
-          </a:prstGeom>
-          <a:noFill/>
-          <a:ln/>
-        </p:spPr>
-        <p:txBody>
-          <a:bodyPr wrap="square" lIns="0" tIns="0" rIns="0" bIns="0" rtlCol="0" anchor="ctr"/>
-          <a:lstStyle/>
-          <a:p>
-            <a:pPr indent="0" marL="0">
-              <a:buNone/>
-            </a:pPr>
-            <a:r>
-              <a:rPr lang="en-US" sz="1000" b="1" spc="100" kern="0" dirty="0">
-                <a:solidFill>
-                  <a:srgbClr val="C8860D"/>
-                </a:solidFill>
-                <a:latin typeface="Calibri" pitchFamily="34" charset="0"/>
-                <a:ea typeface="Calibri" pitchFamily="34" charset="-122"/>
-                <a:cs typeface="Calibri" pitchFamily="34" charset="-120"/>
-              </a:rPr>
-              <a:t>A PREENCHER  ·  cole aqui o texto do artigo</a:t>
-            </a:r>
-            <a:endParaRPr lang="en-US" sz="1000" dirty="0"/>
+            <a:off x="667512" y="1371600"/>
+            <a:ext cx="5212080" cy="2011680"/>
+          </a:xfrm>
+          <a:prstGeom prst="rect">
+            <a:avLst/>
+          </a:prstGeom>
+          <a:noFill/>
+          <a:ln/>
+        </p:spPr>
+        <p:txBody>
+          <a:bodyPr wrap="square" lIns="0" tIns="0" rIns="0" bIns="0" rtlCol="0" anchor="t"/>
+          <a:lstStyle/>
+          <a:p>
+            <a:pPr indent="0" marL="0">
+              <a:lnSpc>
+                <a:spcPct val="122000"/>
+              </a:lnSpc>
+              <a:buNone/>
+            </a:pPr>
+            <a:r>
+              <a:rPr lang="en-US" sz="950" dirty="0">
+                <a:solidFill>
+                  <a:srgbClr val="1B2A4A"/>
+                </a:solidFill>
+                <a:latin typeface="Consolas" pitchFamily="34" charset="0"/>
+                <a:ea typeface="Consolas" pitchFamily="34" charset="-122"/>
+                <a:cs typeface="Consolas" pitchFamily="34" charset="-120"/>
+              </a:rPr>
+              <a:t>5.800.000   nomes de apps na lista do AndroZoo</a:t>
+            </a:r>
+            <a:endParaRPr lang="en-US" sz="950" dirty="0"/>
+          </a:p>
+          <a:p>
+            <a:pPr indent="0" marL="0">
+              <a:lnSpc>
+                <a:spcPct val="122000"/>
+              </a:lnSpc>
+              <a:buNone/>
+            </a:pPr>
+            <a:r>
+              <a:rPr lang="en-US" sz="950" dirty="0">
+                <a:solidFill>
+                  <a:srgbClr val="1B2A4A"/>
+                </a:solidFill>
+                <a:latin typeface="Consolas" pitchFamily="34" charset="0"/>
+                <a:ea typeface="Consolas" pitchFamily="34" charset="-122"/>
+                <a:cs typeface="Consolas" pitchFamily="34" charset="-120"/>
+              </a:rPr>
+              <a:t>      ↓     ≥10k downloads · permissão sensível · atualizado após maio/2018</a:t>
+            </a:r>
+            <a:endParaRPr lang="en-US" sz="950" dirty="0"/>
+          </a:p>
+          <a:p>
+            <a:pPr indent="0" marL="0">
+              <a:lnSpc>
+                <a:spcPct val="122000"/>
+              </a:lnSpc>
+              <a:buNone/>
+            </a:pPr>
+            <a:r>
+              <a:rPr lang="en-US" sz="950" dirty="0">
+                <a:solidFill>
+                  <a:srgbClr val="1B2A4A"/>
+                </a:solidFill>
+                <a:latin typeface="Consolas" pitchFamily="34" charset="0"/>
+                <a:ea typeface="Consolas" pitchFamily="34" charset="-122"/>
+                <a:cs typeface="Consolas" pitchFamily="34" charset="-120"/>
+              </a:rPr>
+              <a:t>  250.972   aplicativos obtidos</a:t>
+            </a:r>
+            <a:endParaRPr lang="en-US" sz="950" dirty="0"/>
+          </a:p>
+          <a:p>
+            <a:pPr indent="0" marL="0">
+              <a:lnSpc>
+                <a:spcPct val="122000"/>
+              </a:lnSpc>
+              <a:buNone/>
+            </a:pPr>
+            <a:r>
+              <a:rPr lang="en-US" sz="950" dirty="0">
+                <a:solidFill>
+                  <a:srgbClr val="1B2A4A"/>
+                </a:solidFill>
+                <a:latin typeface="Consolas" pitchFamily="34" charset="0"/>
+                <a:ea typeface="Consolas" pitchFamily="34" charset="-122"/>
+                <a:cs typeface="Consolas" pitchFamily="34" charset="-120"/>
+              </a:rPr>
+              <a:t>      ↓     análise dinâmica bem-sucedida em 95,38%</a:t>
+            </a:r>
+            <a:endParaRPr lang="en-US" sz="950" dirty="0"/>
+          </a:p>
+          <a:p>
+            <a:pPr indent="0" marL="0">
+              <a:lnSpc>
+                <a:spcPct val="122000"/>
+              </a:lnSpc>
+              <a:buNone/>
+            </a:pPr>
+            <a:r>
+              <a:rPr lang="en-US" sz="950" dirty="0">
+                <a:solidFill>
+                  <a:srgbClr val="1B2A4A"/>
+                </a:solidFill>
+                <a:latin typeface="Consolas" pitchFamily="34" charset="0"/>
+                <a:ea typeface="Consolas" pitchFamily="34" charset="-122"/>
+                <a:cs typeface="Consolas" pitchFamily="34" charset="-120"/>
+              </a:rPr>
+              <a:t>  239.381   analisados  →  13.082 com aviso  →  2.688 (20,54%) violam</a:t>
+            </a:r>
+            <a:endParaRPr lang="en-US" sz="950" dirty="0"/>
+          </a:p>
+          <a:p>
+            <a:pPr indent="0" marL="0">
+              <a:lnSpc>
+                <a:spcPct val="122000"/>
+              </a:lnSpc>
+              <a:buNone/>
+            </a:pPr>
+            <a:r>
+              <a:rPr lang="en-US" sz="950" dirty="0">
+                <a:solidFill>
+                  <a:srgbClr val="1B2A4A"/>
+                </a:solidFill>
+                <a:latin typeface="Consolas" pitchFamily="34" charset="0"/>
+                <a:ea typeface="Consolas" pitchFamily="34" charset="-122"/>
+                <a:cs typeface="Consolas" pitchFamily="34" charset="-120"/>
+              </a:rPr>
+              <a:t>   30.160   não tentam sequer implementar aviso  ·  1.127 devs notificados</a:t>
+            </a:r>
+            <a:endParaRPr lang="en-US" sz="950" dirty="0"/>
           </a:p>
         </p:txBody>
       </p:sp>
       <p:sp>
         <p:nvSpPr>
           <p:cNvPr id="7" name="Text 5"/>
-          <p:cNvSpPr txBox="1"/>
-          <p:nvPr/>
-        </p:nvSpPr>
-        <p:spPr>
-          <a:xfrm>
-            <a:off x="685800" y="1691640"/>
-            <a:ext cx="5166360" cy="640080"/>
-          </a:xfrm>
-          <a:prstGeom prst="rect">
-            <a:avLst/>
-          </a:prstGeom>
-          <a:noFill/>
-          <a:ln/>
-        </p:spPr>
-        <p:txBody>
-          <a:bodyPr wrap="square" lIns="0" tIns="0" rIns="0" bIns="0" rtlCol="0" anchor="t"/>
-          <a:lstStyle/>
-          <a:p>
-            <a:pPr indent="0" marL="0">
-              <a:buNone/>
-            </a:pPr>
-            <a:r>
-              <a:rPr lang="en-US" sz="1100" i="1" dirty="0">
-                <a:solidFill>
-                  <a:srgbClr val="5A6472"/>
-                </a:solidFill>
-                <a:latin typeface="Calibri" pitchFamily="34" charset="0"/>
-                <a:ea typeface="Calibri" pitchFamily="34" charset="-122"/>
-                <a:cs typeface="Calibri" pitchFamily="34" charset="-120"/>
-              </a:rPr>
-              <a:t>Transcreva o trecho real do artigo e posicione os rótulos ao lado, ligando cada anotação ao parágrafo correspondente — como nos dois exemplos fornecidos pela professora.</a:t>
-            </a:r>
-            <a:endParaRPr lang="en-US" sz="1100" dirty="0"/>
-          </a:p>
-        </p:txBody>
-      </p:sp>
-      <p:sp>
-        <p:nvSpPr>
-          <p:cNvPr id="8" name="Text 6"/>
           <p:cNvSpPr txBox="1"/>
           <p:nvPr/>
         </p:nvSpPr>
@@ -3756,7 +4000,7 @@
       </p:sp>
       <p:sp>
         <p:nvSpPr>
-          <p:cNvPr id="9" name="Text 7"/>
+          <p:cNvPr id="8" name="Text 6"/>
           <p:cNvSpPr txBox="1"/>
           <p:nvPr/>
         </p:nvSpPr>
@@ -3791,7 +4035,7 @@
                 <a:ea typeface="Calibri" pitchFamily="34" charset="-122"/>
                 <a:cs typeface="Calibri" pitchFamily="34" charset="-120"/>
               </a:rPr>
-              <a:t>Como o corpus foi montado</a:t>
+              <a:t>Fonte: AndroZoo — a MESMA do meu TCC</a:t>
             </a:r>
             <a:endParaRPr lang="en-US" sz="1100" dirty="0"/>
           </a:p>
@@ -3812,7 +4056,7 @@
                 <a:ea typeface="Calibri" pitchFamily="34" charset="-122"/>
                 <a:cs typeface="Calibri" pitchFamily="34" charset="-120"/>
               </a:rPr>
-              <a:t>Ferramentas e instrumentos</a:t>
+              <a:t>3 critérios de inclusão explícitos</a:t>
             </a:r>
             <a:endParaRPr lang="en-US" sz="1100" dirty="0"/>
           </a:p>
@@ -3833,7 +4077,7 @@
                 <a:ea typeface="Calibri" pitchFamily="34" charset="-122"/>
                 <a:cs typeface="Calibri" pitchFamily="34" charset="-120"/>
               </a:rPr>
-              <a:t>Análise estática × dinâmica</a:t>
+              <a:t>OCR + PLN + clustering + verificação manual</a:t>
             </a:r>
             <a:endParaRPr lang="en-US" sz="1100" dirty="0"/>
           </a:p>
@@ -3854,15 +4098,36 @@
                 <a:ea typeface="Calibri" pitchFamily="34" charset="-122"/>
                 <a:cs typeface="Calibri" pitchFamily="34" charset="-120"/>
               </a:rPr>
-              <a:t>O que foi manual e o que foi automatizado</a:t>
+              <a:t>Análise dinâmica de tráfego</a:t>
             </a:r>
             <a:endParaRPr lang="en-US" sz="1100" dirty="0"/>
           </a:p>
-        </p:txBody>
-      </p:sp>
-      <p:sp>
-        <p:nvSpPr>
-          <p:cNvPr id="10" name="Shape 8"/>
+          <a:p>
+            <a:pPr marL="342900" indent="-342900">
+              <a:spcAft>
+                <a:spcPts val="700"/>
+              </a:spcAft>
+              <a:buSzPct val="100000"/>
+              <a:buChar char="•"/>
+            </a:pPr>
+            <a:r>
+              <a:rPr lang="en-US" sz="1100" dirty="0">
+                <a:solidFill>
+                  <a:srgbClr val="1B2A4A"/>
+                </a:solidFill>
+                <a:latin typeface="Calibri" pitchFamily="34" charset="0"/>
+                <a:ea typeface="Calibri" pitchFamily="34" charset="-122"/>
+                <a:cs typeface="Calibri" pitchFamily="34" charset="-120"/>
+              </a:rPr>
+              <a:t>Reportam a taxa de sucesso, não só o total</a:t>
+            </a:r>
+            <a:endParaRPr lang="en-US" sz="1100" dirty="0"/>
+          </a:p>
+        </p:txBody>
+      </p:sp>
+      <p:sp>
+        <p:nvSpPr>
+          <p:cNvPr id="9" name="Shape 7"/>
           <p:cNvSpPr/>
           <p:nvPr/>
         </p:nvSpPr>
@@ -3889,7 +4154,7 @@
       </p:sp>
       <p:sp>
         <p:nvSpPr>
-          <p:cNvPr id="11" name="Text 9"/>
+          <p:cNvPr id="10" name="Text 8"/>
           <p:cNvSpPr txBox="1"/>
           <p:nvPr/>
         </p:nvSpPr>
@@ -3928,7 +4193,7 @@
       </p:sp>
       <p:sp>
         <p:nvSpPr>
-          <p:cNvPr id="12" name="Text 10"/>
+          <p:cNvPr id="11" name="Text 9"/>
           <p:cNvSpPr txBox="1"/>
           <p:nvPr/>
         </p:nvSpPr>
@@ -3962,7 +4227,7 @@
                 <a:ea typeface="Calibri" pitchFamily="34" charset="-122"/>
                 <a:cs typeface="Calibri" pitchFamily="34" charset="-120"/>
               </a:rPr>
-              <a:t>No exemplo da professora, o avaliador anotou que o método NÃO estava numa seção explícita e o reconstruiu a partir do texto. Se for o caso aqui, faça o mesmo — é o tipo de observação que rende nota.</a:t>
+              <a:t>O denominador MUDA no meio: os 20,54% são sobre os 13.082 que têm mecanismo, não sobre os 239.381. E os 30.160 são categoria separada — não têm mecanismo nenhum.</a:t>
             </a:r>
             <a:endParaRPr lang="en-US" sz="1150" dirty="0"/>
           </a:p>
@@ -3970,7 +4235,7 @@
       </p:sp>
       <p:sp>
         <p:nvSpPr>
-          <p:cNvPr id="13" name="Text 11"/>
+          <p:cNvPr id="12" name="Text 10"/>
           <p:cNvSpPr txBox="1"/>
           <p:nvPr/>
         </p:nvSpPr>
@@ -4143,7 +4408,7 @@
                 <a:ea typeface="Calibri" pitchFamily="34" charset="-122"/>
                 <a:cs typeface="Calibri" pitchFamily="34" charset="-120"/>
               </a:rPr>
-              <a:t>O que foi encontrado e como os autores sustentam o achado.</a:t>
+              <a:t>Dois instrumentos independentes validam cada afirmação.</a:t>
             </a:r>
             <a:endParaRPr lang="en-US" sz="1200" dirty="0"/>
           </a:p>
@@ -4166,13 +4431,13 @@
             </a:avLst>
           </a:prstGeom>
           <a:solidFill>
-            <a:srgbClr val="FDF4E0"/>
+            <a:srgbClr val="F4F6F9"/>
           </a:solidFill>
           <a:ln w="12700">
             <a:solidFill>
-              <a:srgbClr val="C8860D"/>
+              <a:srgbClr val="2E86A8"/>
             </a:solidFill>
-            <a:prstDash val="dash"/>
+            <a:prstDash val="solid"/>
           </a:ln>
         </p:spPr>
       </p:sp>
@@ -4184,79 +4449,132 @@
         </p:nvSpPr>
         <p:spPr>
           <a:xfrm>
-            <a:off x="685800" y="1389888"/>
-            <a:ext cx="5166360" cy="237744"/>
-          </a:xfrm>
-          <a:prstGeom prst="rect">
-            <a:avLst/>
-          </a:prstGeom>
-          <a:noFill/>
-          <a:ln/>
-        </p:spPr>
-        <p:txBody>
-          <a:bodyPr wrap="square" lIns="0" tIns="0" rIns="0" bIns="0" rtlCol="0" anchor="ctr"/>
-          <a:lstStyle/>
-          <a:p>
-            <a:pPr indent="0" marL="0">
-              <a:buNone/>
-            </a:pPr>
-            <a:r>
-              <a:rPr lang="en-US" sz="1000" b="1" spc="100" kern="0" dirty="0">
-                <a:solidFill>
-                  <a:srgbClr val="C8860D"/>
-                </a:solidFill>
-                <a:latin typeface="Calibri" pitchFamily="34" charset="0"/>
-                <a:ea typeface="Calibri" pitchFamily="34" charset="-122"/>
-                <a:cs typeface="Calibri" pitchFamily="34" charset="-120"/>
-              </a:rPr>
-              <a:t>A PREENCHER  ·  cole aqui o texto do artigo</a:t>
-            </a:r>
-            <a:endParaRPr lang="en-US" sz="1000" dirty="0"/>
+            <a:off x="667512" y="1371600"/>
+            <a:ext cx="5212080" cy="2011680"/>
+          </a:xfrm>
+          <a:prstGeom prst="rect">
+            <a:avLst/>
+          </a:prstGeom>
+          <a:noFill/>
+          <a:ln/>
+        </p:spPr>
+        <p:txBody>
+          <a:bodyPr wrap="square" lIns="0" tIns="0" rIns="0" bIns="0" rtlCol="0" anchor="t"/>
+          <a:lstStyle/>
+          <a:p>
+            <a:pPr indent="0" marL="0">
+              <a:lnSpc>
+                <a:spcPct val="122000"/>
+              </a:lnSpc>
+              <a:buNone/>
+            </a:pPr>
+            <a:r>
+              <a:rPr lang="en-US" sz="950" dirty="0">
+                <a:solidFill>
+                  <a:srgbClr val="1B2A4A"/>
+                </a:solidFill>
+                <a:latin typeface="Consolas" pitchFamily="34" charset="0"/>
+                <a:ea typeface="Consolas" pitchFamily="34" charset="-122"/>
+                <a:cs typeface="Consolas" pitchFamily="34" charset="-120"/>
+              </a:rPr>
+              <a:t>2.181  (16,67%)  enviaram dado ANTES do consentimento explícito</a:t>
+            </a:r>
+            <a:endParaRPr lang="en-US" sz="950" dirty="0"/>
+          </a:p>
+          <a:p>
+            <a:pPr indent="0" marL="0">
+              <a:lnSpc>
+                <a:spcPct val="122000"/>
+              </a:lnSpc>
+              <a:buNone/>
+            </a:pPr>
+            <a:r>
+              <a:rPr lang="en-US" sz="950" dirty="0">
+                <a:solidFill>
+                  <a:srgbClr val="1B2A4A"/>
+                </a:solidFill>
+                <a:latin typeface="Consolas" pitchFamily="34" charset="0"/>
+                <a:ea typeface="Consolas" pitchFamily="34" charset="-122"/>
+                <a:cs typeface="Consolas" pitchFamily="34" charset="-120"/>
+              </a:rPr>
+              <a:t>1.084  ( 8,28%)  sem qualquer forma de recusar</a:t>
+            </a:r>
+            <a:endParaRPr lang="en-US" sz="950" dirty="0"/>
+          </a:p>
+          <a:p>
+            <a:pPr indent="0" marL="0">
+              <a:lnSpc>
+                <a:spcPct val="122000"/>
+              </a:lnSpc>
+              <a:buNone/>
+            </a:pPr>
+            <a:r>
+              <a:rPr lang="en-US" sz="950" dirty="0">
+                <a:solidFill>
+                  <a:srgbClr val="1B2A4A"/>
+                </a:solidFill>
+                <a:latin typeface="Consolas" pitchFamily="34" charset="0"/>
+                <a:ea typeface="Consolas" pitchFamily="34" charset="-122"/>
+                <a:cs typeface="Consolas" pitchFamily="34" charset="-120"/>
+              </a:rPr>
+              <a:t>  134            enviaram dado DEPOIS do opt-out explícito</a:t>
+            </a:r>
+            <a:endParaRPr lang="en-US" sz="950" dirty="0"/>
+          </a:p>
+          <a:p>
+            <a:pPr indent="0" marL="0">
+              <a:lnSpc>
+                <a:spcPct val="122000"/>
+              </a:lnSpc>
+              <a:buNone/>
+            </a:pPr>
+            <a:r>
+              <a:rPr lang="en-US" sz="950" dirty="0">
+                <a:solidFill>
+                  <a:srgbClr val="1B2A4A"/>
+                </a:solidFill>
+                <a:latin typeface="Consolas" pitchFamily="34" charset="0"/>
+                <a:ea typeface="Consolas" pitchFamily="34" charset="-122"/>
+                <a:cs typeface="Consolas" pitchFamily="34" charset="-120"/>
+              </a:rPr>
+              <a:t>  ~99%           das violações envolvem o Android Advertising ID (AAID)</a:t>
+            </a:r>
+            <a:endParaRPr lang="en-US" sz="950" dirty="0"/>
+          </a:p>
+          <a:p>
+            <a:pPr indent="0" marL="0">
+              <a:lnSpc>
+                <a:spcPct val="122000"/>
+              </a:lnSpc>
+              <a:buNone/>
+            </a:pPr>
+            <a:endParaRPr lang="en-US" sz="950" dirty="0"/>
+          </a:p>
+          <a:p>
+            <a:pPr indent="0" marL="0">
+              <a:lnSpc>
+                <a:spcPct val="122000"/>
+              </a:lnSpc>
+              <a:buNone/>
+            </a:pPr>
+            <a:r>
+              <a:rPr lang="en-US" sz="950" dirty="0">
+                <a:solidFill>
+                  <a:srgbClr val="1B2A4A"/>
+                </a:solidFill>
+                <a:latin typeface="Consolas" pitchFamily="34" charset="0"/>
+                <a:ea typeface="Consolas" pitchFamily="34" charset="-122"/>
+                <a:cs typeface="Consolas" pitchFamily="34" charset="-120"/>
+              </a:rPr>
+              <a:t>Validação:  a tela prova que o aviso existe; o tráfego prova que o dado saiu.</a:t>
+            </a:r>
+            <a:endParaRPr lang="en-US" sz="950" dirty="0"/>
           </a:p>
         </p:txBody>
       </p:sp>
       <p:sp>
         <p:nvSpPr>
           <p:cNvPr id="7" name="Text 5"/>
-          <p:cNvSpPr txBox="1"/>
-          <p:nvPr/>
-        </p:nvSpPr>
-        <p:spPr>
-          <a:xfrm>
-            <a:off x="685800" y="1691640"/>
-            <a:ext cx="5166360" cy="640080"/>
-          </a:xfrm>
-          <a:prstGeom prst="rect">
-            <a:avLst/>
-          </a:prstGeom>
-          <a:noFill/>
-          <a:ln/>
-        </p:spPr>
-        <p:txBody>
-          <a:bodyPr wrap="square" lIns="0" tIns="0" rIns="0" bIns="0" rtlCol="0" anchor="t"/>
-          <a:lstStyle/>
-          <a:p>
-            <a:pPr indent="0" marL="0">
-              <a:buNone/>
-            </a:pPr>
-            <a:r>
-              <a:rPr lang="en-US" sz="1100" i="1" dirty="0">
-                <a:solidFill>
-                  <a:srgbClr val="5A6472"/>
-                </a:solidFill>
-                <a:latin typeface="Calibri" pitchFamily="34" charset="0"/>
-                <a:ea typeface="Calibri" pitchFamily="34" charset="-122"/>
-                <a:cs typeface="Calibri" pitchFamily="34" charset="-120"/>
-              </a:rPr>
-              <a:t>Transcreva o trecho real do artigo e posicione os rótulos ao lado, ligando cada anotação ao parágrafo correspondente — como nos dois exemplos fornecidos pela professora.</a:t>
-            </a:r>
-            <a:endParaRPr lang="en-US" sz="1100" dirty="0"/>
-          </a:p>
-        </p:txBody>
-      </p:sp>
-      <p:sp>
-        <p:nvSpPr>
-          <p:cNvPr id="8" name="Text 6"/>
           <p:cNvSpPr txBox="1"/>
           <p:nvPr/>
         </p:nvSpPr>
@@ -4295,7 +4613,7 @@
       </p:sp>
       <p:sp>
         <p:nvSpPr>
-          <p:cNvPr id="9" name="Text 7"/>
+          <p:cNvPr id="8" name="Text 6"/>
           <p:cNvSpPr txBox="1"/>
           <p:nvPr/>
         </p:nvSpPr>
@@ -4330,7 +4648,7 @@
                 <a:ea typeface="Calibri" pitchFamily="34" charset="-122"/>
                 <a:cs typeface="Calibri" pitchFamily="34" charset="-120"/>
               </a:rPr>
-              <a:t>Achados principais</a:t>
+              <a:t>SEM intervalo de confiança</a:t>
             </a:r>
             <a:endParaRPr lang="en-US" sz="1100" dirty="0"/>
           </a:p>
@@ -4351,7 +4669,7 @@
                 <a:ea typeface="Calibri" pitchFamily="34" charset="-122"/>
                 <a:cs typeface="Calibri" pitchFamily="34" charset="-120"/>
               </a:rPr>
-              <a:t>Como foram validados</a:t>
+              <a:t>SEM tamanho de efeito</a:t>
             </a:r>
             <a:endParaRPr lang="en-US" sz="1100" dirty="0"/>
           </a:p>
@@ -4372,7 +4690,7 @@
                 <a:ea typeface="Calibri" pitchFamily="34" charset="-122"/>
                 <a:cs typeface="Calibri" pitchFamily="34" charset="-120"/>
               </a:rPr>
-              <a:t>Tabelas e figuras que sustentam</a:t>
+              <a:t>SEM grupo de controle ← minha lacuna</a:t>
             </a:r>
             <a:endParaRPr lang="en-US" sz="1100" dirty="0"/>
           </a:p>
@@ -4393,7 +4711,7 @@
                 <a:ea typeface="Calibri" pitchFamily="34" charset="-122"/>
                 <a:cs typeface="Calibri" pitchFamily="34" charset="-120"/>
               </a:rPr>
-              <a:t>Limitações reconhecidas</a:t>
+              <a:t>COM artefato público</a:t>
             </a:r>
             <a:endParaRPr lang="en-US" sz="1100" dirty="0"/>
           </a:p>
@@ -4401,7 +4719,7 @@
       </p:sp>
       <p:sp>
         <p:nvSpPr>
-          <p:cNvPr id="10" name="Shape 8"/>
+          <p:cNvPr id="9" name="Shape 7"/>
           <p:cNvSpPr/>
           <p:nvPr/>
         </p:nvSpPr>
@@ -4428,7 +4746,7 @@
       </p:sp>
       <p:sp>
         <p:nvSpPr>
-          <p:cNvPr id="11" name="Text 9"/>
+          <p:cNvPr id="10" name="Text 8"/>
           <p:cNvSpPr txBox="1"/>
           <p:nvPr/>
         </p:nvSpPr>
@@ -4467,7 +4785,7 @@
       </p:sp>
       <p:sp>
         <p:nvSpPr>
-          <p:cNvPr id="12" name="Text 10"/>
+          <p:cNvPr id="11" name="Text 9"/>
           <p:cNvSpPr txBox="1"/>
           <p:nvPr/>
         </p:nvSpPr>
@@ -4501,7 +4819,7 @@
                 <a:ea typeface="Calibri" pitchFamily="34" charset="-122"/>
                 <a:cs typeface="Calibri" pitchFamily="34" charset="-120"/>
               </a:rPr>
-              <a:t>Separe o que é medição do que é interpretação. Essa distinção é exatamente o que você vai precisar fazer no seu próprio trabalho.</a:t>
+              <a:t>Presença não é transmissão. É o mesmo par estático+dinâmico que eu vou precisar no meu trabalho: detectar o SDK não prova que ele enviou dado.</a:t>
             </a:r>
             <a:endParaRPr lang="en-US" sz="1150" dirty="0"/>
           </a:p>
@@ -4509,7 +4827,7 @@
       </p:sp>
       <p:sp>
         <p:nvSpPr>
-          <p:cNvPr id="13" name="Text 11"/>
+          <p:cNvPr id="12" name="Text 10"/>
           <p:cNvSpPr txBox="1"/>
           <p:nvPr/>
         </p:nvSpPr>
@@ -4682,7 +5000,7 @@
                 <a:ea typeface="Calibri" pitchFamily="34" charset="-122"/>
                 <a:cs typeface="Calibri" pitchFamily="34" charset="-120"/>
               </a:rPr>
-              <a:t>O enunciado nomeia a discussão. É o que separa o medido do que ele significa.</a:t>
+              <a:t>Seção 6, autônoma, com três subseções.</a:t>
             </a:r>
             <a:endParaRPr lang="en-US" sz="1200" dirty="0"/>
           </a:p>
@@ -4705,13 +5023,13 @@
             </a:avLst>
           </a:prstGeom>
           <a:solidFill>
-            <a:srgbClr val="FDF4E0"/>
+            <a:srgbClr val="F4F6F9"/>
           </a:solidFill>
           <a:ln w="12700">
             <a:solidFill>
-              <a:srgbClr val="C8860D"/>
+              <a:srgbClr val="2E86A8"/>
             </a:solidFill>
-            <a:prstDash val="dash"/>
+            <a:prstDash val="solid"/>
           </a:ln>
         </p:spPr>
       </p:sp>
@@ -4723,79 +5041,132 @@
         </p:nvSpPr>
         <p:spPr>
           <a:xfrm>
-            <a:off x="685800" y="1389888"/>
-            <a:ext cx="5166360" cy="237744"/>
-          </a:xfrm>
-          <a:prstGeom prst="rect">
-            <a:avLst/>
-          </a:prstGeom>
-          <a:noFill/>
-          <a:ln/>
-        </p:spPr>
-        <p:txBody>
-          <a:bodyPr wrap="square" lIns="0" tIns="0" rIns="0" bIns="0" rtlCol="0" anchor="ctr"/>
-          <a:lstStyle/>
-          <a:p>
-            <a:pPr indent="0" marL="0">
-              <a:buNone/>
-            </a:pPr>
-            <a:r>
-              <a:rPr lang="en-US" sz="1000" b="1" spc="100" kern="0" dirty="0">
-                <a:solidFill>
-                  <a:srgbClr val="C8860D"/>
-                </a:solidFill>
-                <a:latin typeface="Calibri" pitchFamily="34" charset="0"/>
-                <a:ea typeface="Calibri" pitchFamily="34" charset="-122"/>
-                <a:cs typeface="Calibri" pitchFamily="34" charset="-120"/>
-              </a:rPr>
-              <a:t>A PREENCHER  ·  cole aqui o texto do artigo</a:t>
-            </a:r>
-            <a:endParaRPr lang="en-US" sz="1000" dirty="0"/>
+            <a:off x="667512" y="1371600"/>
+            <a:ext cx="5212080" cy="2011680"/>
+          </a:xfrm>
+          <a:prstGeom prst="rect">
+            <a:avLst/>
+          </a:prstGeom>
+          <a:noFill/>
+          <a:ln/>
+        </p:spPr>
+        <p:txBody>
+          <a:bodyPr wrap="square" lIns="0" tIns="0" rIns="0" bIns="0" rtlCol="0" anchor="t"/>
+          <a:lstStyle/>
+          <a:p>
+            <a:pPr indent="0" marL="0">
+              <a:lnSpc>
+                <a:spcPct val="122000"/>
+              </a:lnSpc>
+              <a:buNone/>
+            </a:pPr>
+            <a:r>
+              <a:rPr lang="en-US" sz="950" dirty="0">
+                <a:solidFill>
+                  <a:srgbClr val="1B2A4A"/>
+                </a:solidFill>
+                <a:latin typeface="Consolas" pitchFamily="34" charset="0"/>
+                <a:ea typeface="Consolas" pitchFamily="34" charset="-122"/>
+                <a:cs typeface="Consolas" pitchFamily="34" charset="-120"/>
+              </a:rPr>
+              <a:t>6.1  Widespread Violation of GDPR Consent   →  não é caso isolado, é prática difundida</a:t>
+            </a:r>
+            <a:endParaRPr lang="en-US" sz="950" dirty="0"/>
+          </a:p>
+          <a:p>
+            <a:pPr indent="0" marL="0">
+              <a:lnSpc>
+                <a:spcPct val="122000"/>
+              </a:lnSpc>
+              <a:buNone/>
+            </a:pPr>
+            <a:r>
+              <a:rPr lang="en-US" sz="950" dirty="0">
+                <a:solidFill>
+                  <a:srgbClr val="1B2A4A"/>
+                </a:solidFill>
+                <a:latin typeface="Consolas" pitchFamily="34" charset="0"/>
+                <a:ea typeface="Consolas" pitchFamily="34" charset="-122"/>
+                <a:cs typeface="Consolas" pitchFamily="34" charset="-120"/>
+              </a:rPr>
+              <a:t>6.2  Transparency of Processing Users' Data  →  o problema não é só ilegalidade, é opacidade</a:t>
+            </a:r>
+            <a:endParaRPr lang="en-US" sz="950" dirty="0"/>
+          </a:p>
+          <a:p>
+            <a:pPr indent="0" marL="0">
+              <a:lnSpc>
+                <a:spcPct val="122000"/>
+              </a:lnSpc>
+              <a:buNone/>
+            </a:pPr>
+            <a:r>
+              <a:rPr lang="en-US" sz="950" dirty="0">
+                <a:solidFill>
+                  <a:srgbClr val="1B2A4A"/>
+                </a:solidFill>
+                <a:latin typeface="Consolas" pitchFamily="34" charset="0"/>
+                <a:ea typeface="Consolas" pitchFamily="34" charset="-122"/>
+                <a:cs typeface="Consolas" pitchFamily="34" charset="-120"/>
+              </a:rPr>
+              <a:t>6.3  Lack of Support for Developers          →  falta ferramenta e orientação, não sobra má-fé</a:t>
+            </a:r>
+            <a:endParaRPr lang="en-US" sz="950" dirty="0"/>
+          </a:p>
+          <a:p>
+            <a:pPr indent="0" marL="0">
+              <a:lnSpc>
+                <a:spcPct val="122000"/>
+              </a:lnSpc>
+              <a:buNone/>
+            </a:pPr>
+            <a:endParaRPr lang="en-US" sz="950" dirty="0"/>
+          </a:p>
+          <a:p>
+            <a:pPr indent="0" marL="0">
+              <a:lnSpc>
+                <a:spcPct val="122000"/>
+              </a:lnSpc>
+              <a:buNone/>
+            </a:pPr>
+            <a:r>
+              <a:rPr lang="en-US" sz="950" dirty="0">
+                <a:solidFill>
+                  <a:srgbClr val="1B2A4A"/>
+                </a:solidFill>
+                <a:latin typeface="Consolas" pitchFamily="34" charset="0"/>
+                <a:ea typeface="Consolas" pitchFamily="34" charset="-122"/>
+                <a:cs typeface="Consolas" pitchFamily="34" charset="-120"/>
+              </a:rPr>
+              <a:t>Depois de medir 2.688 violações, eles NÃO concluem que os devs agem de má-fé.</a:t>
+            </a:r>
+            <a:endParaRPr lang="en-US" sz="950" dirty="0"/>
+          </a:p>
+          <a:p>
+            <a:pPr indent="0" marL="0">
+              <a:lnSpc>
+                <a:spcPct val="122000"/>
+              </a:lnSpc>
+              <a:buNone/>
+            </a:pPr>
+            <a:r>
+              <a:rPr lang="en-US" sz="950" dirty="0">
+                <a:solidFill>
+                  <a:srgbClr val="1B2A4A"/>
+                </a:solidFill>
+                <a:latin typeface="Consolas" pitchFamily="34" charset="0"/>
+                <a:ea typeface="Consolas" pitchFamily="34" charset="-122"/>
+                <a:cs typeface="Consolas" pitchFamily="34" charset="-120"/>
+              </a:rPr>
+              <a:t>Usam as respostas coletadas na Seção 5 para reenquadrar a causa.</a:t>
+            </a:r>
+            <a:endParaRPr lang="en-US" sz="950" dirty="0"/>
           </a:p>
         </p:txBody>
       </p:sp>
       <p:sp>
         <p:nvSpPr>
           <p:cNvPr id="7" name="Text 5"/>
-          <p:cNvSpPr txBox="1"/>
-          <p:nvPr/>
-        </p:nvSpPr>
-        <p:spPr>
-          <a:xfrm>
-            <a:off x="685800" y="1691640"/>
-            <a:ext cx="5166360" cy="640080"/>
-          </a:xfrm>
-          <a:prstGeom prst="rect">
-            <a:avLst/>
-          </a:prstGeom>
-          <a:noFill/>
-          <a:ln/>
-        </p:spPr>
-        <p:txBody>
-          <a:bodyPr wrap="square" lIns="0" tIns="0" rIns="0" bIns="0" rtlCol="0" anchor="t"/>
-          <a:lstStyle/>
-          <a:p>
-            <a:pPr indent="0" marL="0">
-              <a:buNone/>
-            </a:pPr>
-            <a:r>
-              <a:rPr lang="en-US" sz="1100" i="1" dirty="0">
-                <a:solidFill>
-                  <a:srgbClr val="5A6472"/>
-                </a:solidFill>
-                <a:latin typeface="Calibri" pitchFamily="34" charset="0"/>
-                <a:ea typeface="Calibri" pitchFamily="34" charset="-122"/>
-                <a:cs typeface="Calibri" pitchFamily="34" charset="-120"/>
-              </a:rPr>
-              <a:t>Transcreva o trecho real do artigo e posicione os rótulos ao lado, ligando cada anotação ao parágrafo correspondente — como nos dois exemplos fornecidos pela professora.</a:t>
-            </a:r>
-            <a:endParaRPr lang="en-US" sz="1100" dirty="0"/>
-          </a:p>
-        </p:txBody>
-      </p:sp>
-      <p:sp>
-        <p:nvSpPr>
-          <p:cNvPr id="8" name="Text 6"/>
           <p:cNvSpPr txBox="1"/>
           <p:nvPr/>
         </p:nvSpPr>
@@ -4834,7 +5205,7 @@
       </p:sp>
       <p:sp>
         <p:nvSpPr>
-          <p:cNvPr id="9" name="Text 7"/>
+          <p:cNvPr id="8" name="Text 6"/>
           <p:cNvSpPr txBox="1"/>
           <p:nvPr/>
         </p:nvSpPr>
@@ -4869,7 +5240,7 @@
                 <a:ea typeface="Calibri" pitchFamily="34" charset="-122"/>
                 <a:cs typeface="Calibri" pitchFamily="34" charset="-120"/>
               </a:rPr>
-              <a:t>Interpretação do resultado</a:t>
+              <a:t>Interpreta o resultado</a:t>
             </a:r>
             <a:endParaRPr lang="en-US" sz="1100" dirty="0"/>
           </a:p>
@@ -4890,7 +5261,7 @@
                 <a:ea typeface="Calibri" pitchFamily="34" charset="-122"/>
                 <a:cs typeface="Calibri" pitchFamily="34" charset="-120"/>
               </a:rPr>
-              <a:t>Confronto com a literatura anterior</a:t>
+              <a:t>Confronta com a literatura</a:t>
             </a:r>
             <a:endParaRPr lang="en-US" sz="1100" dirty="0"/>
           </a:p>
@@ -4911,7 +5282,7 @@
                 <a:ea typeface="Calibri" pitchFamily="34" charset="-122"/>
                 <a:cs typeface="Calibri" pitchFamily="34" charset="-120"/>
               </a:rPr>
-              <a:t>Implicação prática ou normativa</a:t>
+              <a:t>Implicação normativa</a:t>
             </a:r>
             <a:endParaRPr lang="en-US" sz="1100" dirty="0"/>
           </a:p>
@@ -4932,7 +5303,7 @@
                 <a:ea typeface="Calibri" pitchFamily="34" charset="-122"/>
                 <a:cs typeface="Calibri" pitchFamily="34" charset="-120"/>
               </a:rPr>
-              <a:t>Ameaças à validade</a:t>
+              <a:t>Resiste à explicação fácil</a:t>
             </a:r>
             <a:endParaRPr lang="en-US" sz="1100" dirty="0"/>
           </a:p>
@@ -4940,7 +5311,7 @@
       </p:sp>
       <p:sp>
         <p:nvSpPr>
-          <p:cNvPr id="10" name="Shape 8"/>
+          <p:cNvPr id="9" name="Shape 7"/>
           <p:cNvSpPr/>
           <p:nvPr/>
         </p:nvSpPr>
@@ -4967,7 +5338,7 @@
       </p:sp>
       <p:sp>
         <p:nvSpPr>
-          <p:cNvPr id="11" name="Text 9"/>
+          <p:cNvPr id="10" name="Text 8"/>
           <p:cNvSpPr txBox="1"/>
           <p:nvPr/>
         </p:nvSpPr>
@@ -5006,7 +5377,7 @@
       </p:sp>
       <p:sp>
         <p:nvSpPr>
-          <p:cNvPr id="12" name="Text 10"/>
+          <p:cNvPr id="11" name="Text 9"/>
           <p:cNvSpPr txBox="1"/>
           <p:nvPr/>
         </p:nvSpPr>
@@ -5040,7 +5411,7 @@
                 <a:ea typeface="Calibri" pitchFamily="34" charset="-122"/>
                 <a:cs typeface="Calibri" pitchFamily="34" charset="-120"/>
               </a:rPr>
-              <a:t>Artigo de segurança com frequência funde discussão e resultados, ou a chama de Implications. Se não houver seção autônoma, DIGA — apontar isso é análise de estrutura.</a:t>
+              <a:t>É o movimento que o MEU resultado pede: 0 de 396 apps de governo com anúncio. Se houver rastreador, não é monetização — é dependência técnica.</a:t>
             </a:r>
             <a:endParaRPr lang="en-US" sz="1150" dirty="0"/>
           </a:p>
@@ -5048,7 +5419,7 @@
       </p:sp>
       <p:sp>
         <p:nvSpPr>
-          <p:cNvPr id="13" name="Text 11"/>
+          <p:cNvPr id="12" name="Text 10"/>
           <p:cNvSpPr txBox="1"/>
           <p:nvPr/>
         </p:nvSpPr>
@@ -5221,7 +5592,7 @@
                 <a:ea typeface="Calibri" pitchFamily="34" charset="-122"/>
                 <a:cs typeface="Calibri" pitchFamily="34" charset="-120"/>
               </a:rPr>
-              <a:t>Cole a conclusão e marque o que os autores inferem.</a:t>
+              <a:t>Repete o resumo quase palavra por palavra — com UMA diferença.</a:t>
             </a:r>
             <a:endParaRPr lang="en-US" sz="1200" dirty="0"/>
           </a:p>
@@ -5244,13 +5615,13 @@
             </a:avLst>
           </a:prstGeom>
           <a:solidFill>
-            <a:srgbClr val="FDF4E0"/>
+            <a:srgbClr val="F4F6F9"/>
           </a:solidFill>
           <a:ln w="12700">
             <a:solidFill>
-              <a:srgbClr val="C8860D"/>
+              <a:srgbClr val="2E86A8"/>
             </a:solidFill>
-            <a:prstDash val="dash"/>
+            <a:prstDash val="solid"/>
           </a:ln>
         </p:spPr>
       </p:sp>
@@ -5262,79 +5633,112 @@
         </p:nvSpPr>
         <p:spPr>
           <a:xfrm>
-            <a:off x="685800" y="1389888"/>
-            <a:ext cx="5166360" cy="237744"/>
-          </a:xfrm>
-          <a:prstGeom prst="rect">
-            <a:avLst/>
-          </a:prstGeom>
-          <a:noFill/>
-          <a:ln/>
-        </p:spPr>
-        <p:txBody>
-          <a:bodyPr wrap="square" lIns="0" tIns="0" rIns="0" bIns="0" rtlCol="0" anchor="ctr"/>
-          <a:lstStyle/>
-          <a:p>
-            <a:pPr indent="0" marL="0">
-              <a:buNone/>
-            </a:pPr>
-            <a:r>
-              <a:rPr lang="en-US" sz="1000" b="1" spc="100" kern="0" dirty="0">
-                <a:solidFill>
-                  <a:srgbClr val="C8860D"/>
-                </a:solidFill>
-                <a:latin typeface="Calibri" pitchFamily="34" charset="0"/>
-                <a:ea typeface="Calibri" pitchFamily="34" charset="-122"/>
-                <a:cs typeface="Calibri" pitchFamily="34" charset="-120"/>
-              </a:rPr>
-              <a:t>A PREENCHER  ·  cole aqui o texto do artigo</a:t>
-            </a:r>
-            <a:endParaRPr lang="en-US" sz="1000" dirty="0"/>
+            <a:off x="667512" y="1371600"/>
+            <a:ext cx="5212080" cy="2011680"/>
+          </a:xfrm>
+          <a:prstGeom prst="rect">
+            <a:avLst/>
+          </a:prstGeom>
+          <a:noFill/>
+          <a:ln/>
+        </p:spPr>
+        <p:txBody>
+          <a:bodyPr wrap="square" lIns="0" tIns="0" rIns="0" bIns="0" rtlCol="0" anchor="t"/>
+          <a:lstStyle/>
+          <a:p>
+            <a:pPr indent="0" marL="0">
+              <a:lnSpc>
+                <a:spcPct val="122000"/>
+              </a:lnSpc>
+              <a:buNone/>
+            </a:pPr>
+            <a:r>
+              <a:rPr lang="en-US" sz="950" dirty="0">
+                <a:solidFill>
+                  <a:srgbClr val="1B2A4A"/>
+                </a:solidFill>
+                <a:latin typeface="Consolas" pitchFamily="34" charset="0"/>
+                <a:ea typeface="Consolas" pitchFamily="34" charset="-122"/>
+                <a:cs typeface="Consolas" pitchFamily="34" charset="-120"/>
+              </a:rPr>
+              <a:t>RESUMO:      "2,688 (20.54%) apps VIOLATE at least one..."</a:t>
+            </a:r>
+            <a:endParaRPr lang="en-US" sz="950" dirty="0"/>
+          </a:p>
+          <a:p>
+            <a:pPr indent="0" marL="0">
+              <a:lnSpc>
+                <a:spcPct val="122000"/>
+              </a:lnSpc>
+              <a:buNone/>
+            </a:pPr>
+            <a:r>
+              <a:rPr lang="en-US" sz="950" dirty="0">
+                <a:solidFill>
+                  <a:srgbClr val="1B2A4A"/>
+                </a:solidFill>
+                <a:latin typeface="Consolas" pitchFamily="34" charset="0"/>
+                <a:ea typeface="Consolas" pitchFamily="34" charset="-122"/>
+                <a:cs typeface="Consolas" pitchFamily="34" charset="-120"/>
+              </a:rPr>
+              <a:t>CONCLUSÃO:   "2,688 (20.54%) apps POTENTIALLY VIOLATE at least one..."</a:t>
+            </a:r>
+            <a:endParaRPr lang="en-US" sz="950" dirty="0"/>
+          </a:p>
+          <a:p>
+            <a:pPr indent="0" marL="0">
+              <a:lnSpc>
+                <a:spcPct val="122000"/>
+              </a:lnSpc>
+              <a:buNone/>
+            </a:pPr>
+            <a:endParaRPr lang="en-US" sz="950" dirty="0"/>
+          </a:p>
+          <a:p>
+            <a:pPr indent="0" marL="0">
+              <a:lnSpc>
+                <a:spcPct val="122000"/>
+              </a:lnSpc>
+              <a:buNone/>
+            </a:pPr>
+            <a:r>
+              <a:rPr lang="en-US" sz="950" dirty="0">
+                <a:solidFill>
+                  <a:srgbClr val="1B2A4A"/>
+                </a:solidFill>
+                <a:latin typeface="Consolas" pitchFamily="34" charset="0"/>
+                <a:ea typeface="Consolas" pitchFamily="34" charset="-122"/>
+                <a:cs typeface="Consolas" pitchFamily="34" charset="-120"/>
+              </a:rPr>
+              <a:t>A nota de rodapé 1 explica que "potencial" foi escolha deliberada, para não</a:t>
+            </a:r>
+            <a:endParaRPr lang="en-US" sz="950" dirty="0"/>
+          </a:p>
+          <a:p>
+            <a:pPr indent="0" marL="0">
+              <a:lnSpc>
+                <a:spcPct val="122000"/>
+              </a:lnSpc>
+              <a:buNone/>
+            </a:pPr>
+            <a:r>
+              <a:rPr lang="en-US" sz="950" dirty="0">
+                <a:solidFill>
+                  <a:srgbClr val="1B2A4A"/>
+                </a:solidFill>
+                <a:latin typeface="Consolas" pitchFamily="34" charset="0"/>
+                <a:ea typeface="Consolas" pitchFamily="34" charset="-122"/>
+                <a:cs typeface="Consolas" pitchFamily="34" charset="-120"/>
+              </a:rPr>
+              <a:t>emitir juízo jurídico. Logo a CONCLUSÃO está correta e o RESUMO escorrega.</a:t>
+            </a:r>
+            <a:endParaRPr lang="en-US" sz="950" dirty="0"/>
           </a:p>
         </p:txBody>
       </p:sp>
       <p:sp>
         <p:nvSpPr>
           <p:cNvPr id="7" name="Text 5"/>
-          <p:cNvSpPr txBox="1"/>
-          <p:nvPr/>
-        </p:nvSpPr>
-        <p:spPr>
-          <a:xfrm>
-            <a:off x="685800" y="1691640"/>
-            <a:ext cx="5166360" cy="640080"/>
-          </a:xfrm>
-          <a:prstGeom prst="rect">
-            <a:avLst/>
-          </a:prstGeom>
-          <a:noFill/>
-          <a:ln/>
-        </p:spPr>
-        <p:txBody>
-          <a:bodyPr wrap="square" lIns="0" tIns="0" rIns="0" bIns="0" rtlCol="0" anchor="t"/>
-          <a:lstStyle/>
-          <a:p>
-            <a:pPr indent="0" marL="0">
-              <a:buNone/>
-            </a:pPr>
-            <a:r>
-              <a:rPr lang="en-US" sz="1100" i="1" dirty="0">
-                <a:solidFill>
-                  <a:srgbClr val="5A6472"/>
-                </a:solidFill>
-                <a:latin typeface="Calibri" pitchFamily="34" charset="0"/>
-                <a:ea typeface="Calibri" pitchFamily="34" charset="-122"/>
-                <a:cs typeface="Calibri" pitchFamily="34" charset="-120"/>
-              </a:rPr>
-              <a:t>Transcreva o trecho real do artigo e posicione os rótulos ao lado, ligando cada anotação ao parágrafo correspondente — como nos dois exemplos fornecidos pela professora.</a:t>
-            </a:r>
-            <a:endParaRPr lang="en-US" sz="1100" dirty="0"/>
-          </a:p>
-        </p:txBody>
-      </p:sp>
-      <p:sp>
-        <p:nvSpPr>
-          <p:cNvPr id="8" name="Text 6"/>
           <p:cNvSpPr txBox="1"/>
           <p:nvPr/>
         </p:nvSpPr>
@@ -5373,7 +5777,7 @@
       </p:sp>
       <p:sp>
         <p:nvSpPr>
-          <p:cNvPr id="9" name="Text 7"/>
+          <p:cNvPr id="8" name="Text 6"/>
           <p:cNvSpPr txBox="1"/>
           <p:nvPr/>
         </p:nvSpPr>
@@ -5408,7 +5812,7 @@
                 <a:ea typeface="Calibri" pitchFamily="34" charset="-122"/>
                 <a:cs typeface="Calibri" pitchFamily="34" charset="-120"/>
               </a:rPr>
-              <a:t>Inferência a partir dos dados obtidos</a:t>
+              <a:t>Retoma o objetivo</a:t>
             </a:r>
             <a:endParaRPr lang="en-US" sz="1100" dirty="0"/>
           </a:p>
@@ -5429,7 +5833,7 @@
                 <a:ea typeface="Calibri" pitchFamily="34" charset="-122"/>
                 <a:cs typeface="Calibri" pitchFamily="34" charset="-120"/>
               </a:rPr>
-              <a:t>Trabalhos futuros</a:t>
+              <a:t>Infere a partir dos dados</a:t>
             </a:r>
             <a:endParaRPr lang="en-US" sz="1100" dirty="0"/>
           </a:p>
@@ -5450,15 +5854,36 @@
                 <a:ea typeface="Calibri" pitchFamily="34" charset="-122"/>
                 <a:cs typeface="Calibri" pitchFamily="34" charset="-120"/>
               </a:rPr>
-              <a:t>O que ficou fora do escopo</a:t>
+              <a:t>Retoma a 3ª questão de pesquisa</a:t>
             </a:r>
             <a:endParaRPr lang="en-US" sz="1100" dirty="0"/>
           </a:p>
-        </p:txBody>
-      </p:sp>
-      <p:sp>
-        <p:nvSpPr>
-          <p:cNvPr id="10" name="Shape 8"/>
+          <a:p>
+            <a:pPr marL="342900" indent="-342900">
+              <a:spcAft>
+                <a:spcPts val="700"/>
+              </a:spcAft>
+              <a:buSzPct val="100000"/>
+              <a:buChar char="•"/>
+            </a:pPr>
+            <a:r>
+              <a:rPr lang="en-US" sz="1100" dirty="0">
+                <a:solidFill>
+                  <a:srgbClr val="1B2A4A"/>
+                </a:solidFill>
+                <a:latin typeface="Calibri" pitchFamily="34" charset="0"/>
+                <a:ea typeface="Calibri" pitchFamily="34" charset="-122"/>
+                <a:cs typeface="Calibri" pitchFamily="34" charset="-120"/>
+              </a:rPr>
+              <a:t>Implicação normativa</a:t>
+            </a:r>
+            <a:endParaRPr lang="en-US" sz="1100" dirty="0"/>
+          </a:p>
+        </p:txBody>
+      </p:sp>
+      <p:sp>
+        <p:nvSpPr>
+          <p:cNvPr id="9" name="Shape 7"/>
           <p:cNvSpPr/>
           <p:nvPr/>
         </p:nvSpPr>
@@ -5485,7 +5910,7 @@
       </p:sp>
       <p:sp>
         <p:nvSpPr>
-          <p:cNvPr id="11" name="Text 9"/>
+          <p:cNvPr id="10" name="Text 8"/>
           <p:cNvSpPr txBox="1"/>
           <p:nvPr/>
         </p:nvSpPr>
@@ -5524,7 +5949,7 @@
       </p:sp>
       <p:sp>
         <p:nvSpPr>
-          <p:cNvPr id="12" name="Text 10"/>
+          <p:cNvPr id="11" name="Text 9"/>
           <p:cNvSpPr txBox="1"/>
           <p:nvPr/>
         </p:nvSpPr>
@@ -5558,7 +5983,7 @@
                 <a:ea typeface="Calibri" pitchFamily="34" charset="-122"/>
                 <a:cs typeface="Calibri" pitchFamily="34" charset="-120"/>
               </a:rPr>
-              <a:t>Pergunta clássica de banca: a conclusão vai além do que os dados sustentam? Ter uma opinião formada aqui te protege.</a:t>
+              <a:t>Comparar o que o resumo promete com o que a conclusão entrega é análise crítica de verdade — e aqui ela encontra uma inconsistência real num artigo A*.</a:t>
             </a:r>
             <a:endParaRPr lang="en-US" sz="1150" dirty="0"/>
           </a:p>
@@ -5566,7 +5991,7 @@
       </p:sp>
       <p:sp>
         <p:nvSpPr>
-          <p:cNvPr id="13" name="Text 11"/>
+          <p:cNvPr id="12" name="Text 10"/>
           <p:cNvSpPr txBox="1"/>
           <p:nvPr/>
         </p:nvSpPr>
@@ -8694,7 +9119,7 @@
                 <a:ea typeface="Calibri" pitchFamily="34" charset="-122"/>
                 <a:cs typeface="Calibri" pitchFamily="34" charset="-120"/>
               </a:rPr>
-              <a:t>NGUYEN, T. T.; BACKES, M.; STOCK, B.   In: Proceedings of the 2022 ACM SIGSAC Conference on Computer and Communications Security (CCS '22), 2022.   DOI: 10.1145/3548606.3560564</a:t>
+              <a:t>NGUYEN, Trung Tin; BACKES, Michael; STOCK, Ben.   In: CCS '22 — Proceedings of the 2022 ACM SIGSAC Conference on Computer and Communications Security. Los Angeles, 7–11 nov. 2022, p. 2369–2383.   DOI: 10.1145/3548606.3560564</a:t>
             </a:r>
             <a:endParaRPr lang="en-US" sz="1150" dirty="0"/>
           </a:p>
@@ -8711,7 +9136,7 @@
                 <a:ea typeface="Calibri" pitchFamily="34" charset="-122"/>
                 <a:cs typeface="Calibri" pitchFamily="34" charset="-120"/>
               </a:rPr>
-              <a:t>PDF aberto: swag.cispa.saarland   ·   artefato: github.com/cispa/consent-notices</a:t>
+              <a:t>RESEARCH-ARTICLE  ·  FREE ACCESS  ·  15 páginas  ·  artefato: github.com/cispa/gdpr-consent</a:t>
             </a:r>
             <a:endParaRPr lang="en-US" sz="1150" dirty="0"/>
           </a:p>
@@ -8842,13 +9267,13 @@
             </a:avLst>
           </a:prstGeom>
           <a:solidFill>
-            <a:srgbClr val="FDF4E0"/>
+            <a:srgbClr val="F4F6F9"/>
           </a:solidFill>
           <a:ln w="12700">
             <a:solidFill>
-              <a:srgbClr val="C8860D"/>
+              <a:srgbClr val="DDE3EA"/>
             </a:solidFill>
-            <a:prstDash val="dash"/>
+            <a:prstDash val="solid"/>
           </a:ln>
         </p:spPr>
       </p:sp>
@@ -8860,8 +9285,8 @@
         </p:nvSpPr>
         <p:spPr>
           <a:xfrm>
-            <a:off x="4850892" y="2670048"/>
-            <a:ext cx="3625596" cy="237744"/>
+            <a:off x="4869180" y="2688336"/>
+            <a:ext cx="3589020" cy="274320"/>
           </a:xfrm>
           <a:prstGeom prst="rect">
             <a:avLst/>
@@ -8877,17 +9302,17 @@
               <a:buNone/>
             </a:pPr>
             <a:r>
-              <a:rPr lang="en-US" sz="1000" b="1" spc="100" kern="0" dirty="0">
-                <a:solidFill>
-                  <a:srgbClr val="C8860D"/>
-                </a:solidFill>
-                <a:latin typeface="Calibri" pitchFamily="34" charset="0"/>
-                <a:ea typeface="Calibri" pitchFamily="34" charset="-122"/>
-                <a:cs typeface="Calibri" pitchFamily="34" charset="-120"/>
-              </a:rPr>
-              <a:t>A PREENCHER  ·  confirme ao ler o artigo</a:t>
-            </a:r>
-            <a:endParaRPr lang="en-US" sz="1000" dirty="0"/>
+              <a:rPr lang="en-US" sz="1300" b="1" dirty="0">
+                <a:solidFill>
+                  <a:srgbClr val="1E6B3A"/>
+                </a:solidFill>
+                <a:latin typeface="Calibri" pitchFamily="34" charset="0"/>
+                <a:ea typeface="Calibri" pitchFamily="34" charset="-122"/>
+                <a:cs typeface="Calibri" pitchFamily="34" charset="-120"/>
+              </a:rPr>
+              <a:t>Três fontes confirmam que é original</a:t>
+            </a:r>
+            <a:endParaRPr lang="en-US" sz="1300" dirty="0"/>
           </a:p>
         </p:txBody>
       </p:sp>
@@ -8899,8 +9324,8 @@
         </p:nvSpPr>
         <p:spPr>
           <a:xfrm>
-            <a:off x="4850892" y="2944368"/>
-            <a:ext cx="3625596" cy="905256"/>
+            <a:off x="4869180" y="2999232"/>
+            <a:ext cx="3589020" cy="832104"/>
           </a:xfrm>
           <a:prstGeom prst="rect">
             <a:avLst/>
@@ -8912,12 +9337,11 @@
           <a:bodyPr wrap="square" lIns="0" tIns="0" rIns="0" bIns="0" rtlCol="0" anchor="t"/>
           <a:lstStyle/>
           <a:p>
-            <a:pPr marL="342900" indent="-342900">
+            <a:pPr indent="0" marL="0">
               <a:spcAft>
-                <a:spcPts val="500"/>
+                <a:spcPts val="400"/>
               </a:spcAft>
-              <a:buSzPct val="100000"/>
-              <a:buChar char="•"/>
+              <a:buNone/>
             </a:pPr>
             <a:r>
               <a:rPr lang="en-US" sz="1150" dirty="0">
@@ -8928,17 +9352,16 @@
                 <a:ea typeface="Calibri" pitchFamily="34" charset="-122"/>
                 <a:cs typeface="Calibri" pitchFamily="34" charset="-120"/>
               </a:rPr>
-              <a:t>Paginação exata nos anais do CCS '22</a:t>
+              <a:t>ACM Digital Library:  etiqueta RESEARCH-ARTICLE</a:t>
             </a:r>
             <a:endParaRPr lang="en-US" sz="1150" dirty="0"/>
           </a:p>
           <a:p>
-            <a:pPr marL="342900" indent="-342900">
+            <a:pPr indent="0" marL="0">
               <a:spcAft>
-                <a:spcPts val="500"/>
+                <a:spcPts val="400"/>
               </a:spcAft>
-              <a:buSzPct val="100000"/>
-              <a:buChar char="•"/>
+              <a:buNone/>
             </a:pPr>
             <a:r>
               <a:rPr lang="en-US" sz="1150" dirty="0">
@@ -8949,17 +9372,16 @@
                 <a:ea typeface="Calibri" pitchFamily="34" charset="-122"/>
                 <a:cs typeface="Calibri" pitchFamily="34" charset="-120"/>
               </a:rPr>
-              <a:t>Como o corpus afunilou de 239.381 para 13.082</a:t>
+              <a:t>Scopus:  tipo de documento Conference Paper</a:t>
             </a:r>
             <a:endParaRPr lang="en-US" sz="1150" dirty="0"/>
           </a:p>
           <a:p>
-            <a:pPr marL="342900" indent="-342900">
+            <a:pPr indent="0" marL="0">
               <a:spcAft>
-                <a:spcPts val="500"/>
+                <a:spcPts val="400"/>
               </a:spcAft>
-              <a:buSzPct val="100000"/>
-              <a:buChar char="•"/>
+              <a:buNone/>
             </a:pPr>
             <a:r>
               <a:rPr lang="en-US" sz="1150" dirty="0">
@@ -8970,7 +9392,7 @@
                 <a:ea typeface="Calibri" pitchFamily="34" charset="-122"/>
                 <a:cs typeface="Calibri" pitchFamily="34" charset="-120"/>
               </a:rPr>
-              <a:t>Onde o artefato é citado no texto</a:t>
+              <a:t>O próprio artigo:  corpus e ferramenta construídos pelos autores</a:t>
             </a:r>
             <a:endParaRPr lang="en-US" sz="1150" dirty="0"/>
           </a:p>
@@ -9135,13 +9557,13 @@
             </a:avLst>
           </a:prstGeom>
           <a:solidFill>
-            <a:srgbClr val="FDF4E0"/>
+            <a:srgbClr val="F4F6F9"/>
           </a:solidFill>
           <a:ln w="12700">
             <a:solidFill>
-              <a:srgbClr val="C8860D"/>
+              <a:srgbClr val="DDE3EA"/>
             </a:solidFill>
-            <a:prstDash val="dash"/>
+            <a:prstDash val="solid"/>
           </a:ln>
         </p:spPr>
       </p:sp>
@@ -9153,8 +9575,8 @@
         </p:nvSpPr>
         <p:spPr>
           <a:xfrm>
-            <a:off x="667512" y="1069848"/>
-            <a:ext cx="7808976" cy="237744"/>
+            <a:off x="685800" y="1088136"/>
+            <a:ext cx="7772400" cy="274320"/>
           </a:xfrm>
           <a:prstGeom prst="rect">
             <a:avLst/>
@@ -9170,17 +9592,17 @@
               <a:buNone/>
             </a:pPr>
             <a:r>
-              <a:rPr lang="en-US" sz="1000" b="1" spc="100" kern="0" dirty="0">
-                <a:solidFill>
-                  <a:srgbClr val="C8860D"/>
-                </a:solidFill>
-                <a:latin typeface="Calibri" pitchFamily="34" charset="0"/>
-                <a:ea typeface="Calibri" pitchFamily="34" charset="-122"/>
-                <a:cs typeface="Calibri" pitchFamily="34" charset="-120"/>
-              </a:rPr>
-              <a:t>A PREENCHER  ·  citações — anote as três, elas divergem</a:t>
-            </a:r>
-            <a:endParaRPr lang="en-US" sz="1000" dirty="0"/>
+              <a:rPr lang="en-US" sz="1300" b="1" dirty="0">
+                <a:solidFill>
+                  <a:srgbClr val="1E6B3A"/>
+                </a:solidFill>
+                <a:latin typeface="Calibri" pitchFamily="34" charset="0"/>
+                <a:ea typeface="Calibri" pitchFamily="34" charset="-122"/>
+                <a:cs typeface="Calibri" pitchFamily="34" charset="-120"/>
+              </a:rPr>
+              <a:t>CITAÇÕES — levantadas em 17/09/2026, as três nas bases</a:t>
+            </a:r>
+            <a:endParaRPr lang="en-US" sz="1300" dirty="0"/>
           </a:p>
         </p:txBody>
       </p:sp>
@@ -9192,8 +9614,8 @@
         </p:nvSpPr>
         <p:spPr>
           <a:xfrm>
-            <a:off x="667512" y="1344168"/>
-            <a:ext cx="7808976" cy="859536"/>
+            <a:off x="685800" y="1399032"/>
+            <a:ext cx="7772400" cy="786384"/>
           </a:xfrm>
           <a:prstGeom prst="rect">
             <a:avLst/>
@@ -9205,12 +9627,11 @@
           <a:bodyPr wrap="square" lIns="0" tIns="0" rIns="0" bIns="0" rtlCol="0" anchor="t"/>
           <a:lstStyle/>
           <a:p>
-            <a:pPr marL="342900" indent="-342900">
+            <a:pPr indent="0" marL="0">
               <a:spcAft>
-                <a:spcPts val="500"/>
+                <a:spcPts val="400"/>
               </a:spcAft>
-              <a:buSzPct val="100000"/>
-              <a:buChar char="•"/>
+              <a:buNone/>
             </a:pPr>
             <a:r>
               <a:rPr lang="en-US" sz="1150" dirty="0">
@@ -9221,17 +9642,25 @@
                 <a:ea typeface="Calibri" pitchFamily="34" charset="-122"/>
                 <a:cs typeface="Calibri" pitchFamily="34" charset="-120"/>
               </a:rPr>
-              <a:t>Google Scholar:  ______        Scopus:  ______        Web of Science:  ______</a:t>
+              <a:t>ACM Digital Library  42          Scopus  52          Google Acadêmico  99  (9 versões)</a:t>
             </a:r>
             <a:endParaRPr lang="en-US" sz="1150" dirty="0"/>
           </a:p>
           <a:p>
-            <a:pPr marL="342900" indent="-342900">
+            <a:pPr indent="0" marL="0">
               <a:spcAft>
-                <a:spcPts val="500"/>
+                <a:spcPts val="400"/>
               </a:spcAft>
-              <a:buSzPct val="100000"/>
-              <a:buChar char="•"/>
+              <a:buNone/>
+            </a:pPr>
+            <a:endParaRPr lang="en-US" sz="1150" dirty="0"/>
+          </a:p>
+          <a:p>
+            <a:pPr indent="0" marL="0">
+              <a:spcAft>
+                <a:spcPts val="400"/>
+              </a:spcAft>
+              <a:buNone/>
             </a:pPr>
             <a:r>
               <a:rPr lang="en-US" sz="1150" dirty="0">
@@ -9242,7 +9671,7 @@
                 <a:ea typeface="Calibri" pitchFamily="34" charset="-122"/>
                 <a:cs typeface="Calibri" pitchFamily="34" charset="-120"/>
               </a:rPr>
-              <a:t>Data da consulta: ____/____/2026   ·   Ano de publicação do artigo: 2022</a:t>
+              <a:t>Publicado em 07/11/2022  ·  1.539 downloads na ACM  ·  239.381 apps analisados</a:t>
             </a:r>
             <a:endParaRPr lang="en-US" sz="1150" dirty="0"/>
           </a:p>
@@ -9308,7 +9737,7 @@
                 <a:ea typeface="Calibri" pitchFamily="34" charset="-122"/>
                 <a:cs typeface="Calibri" pitchFamily="34" charset="-120"/>
               </a:rPr>
-              <a:t>O que comentar sobre os números</a:t>
+              <a:t>Por que 42 &lt; 52 &lt; 99</a:t>
             </a:r>
             <a:endParaRPr lang="en-US" sz="1300" dirty="0"/>
           </a:p>
@@ -9350,7 +9779,7 @@
                 <a:ea typeface="Calibri" pitchFamily="34" charset="-122"/>
                 <a:cs typeface="Calibri" pitchFamily="34" charset="-120"/>
               </a:rPr>
-              <a:t>Divergência entre as bases é esperada e vale explicar: cada uma indexa um conjunto diferente de veículos.</a:t>
+              <a:t>É a hierarquia de cobertura das bases.</a:t>
             </a:r>
             <a:endParaRPr lang="en-US" sz="1150" dirty="0"/>
           </a:p>
@@ -9379,7 +9808,7 @@
                 <a:ea typeface="Calibri" pitchFamily="34" charset="-122"/>
                 <a:cs typeface="Calibri" pitchFamily="34" charset="-120"/>
               </a:rPr>
-              <a:t>Cite sempre a base e a data junto do número.</a:t>
+              <a:t>A ACM conta só o próprio acervo. O Scopus acrescenta IEEE, Springer e Elsevier. O Scholar agrupa 9 versões do trabalho e ainda conta teses e relatórios.</a:t>
             </a:r>
             <a:endParaRPr lang="en-US" sz="1150" dirty="0"/>
           </a:p>
@@ -10943,7 +11372,7 @@
                 <a:ea typeface="Calibri" pitchFamily="34" charset="-122"/>
                 <a:cs typeface="Calibri" pitchFamily="34" charset="-120"/>
               </a:rPr>
-              <a:t>Reproduza o sumário do artigo e marque a função de cada seção.</a:t>
+              <a:t>As 8 seções do artigo e a função de cada uma. 15 páginas.</a:t>
             </a:r>
             <a:endParaRPr lang="en-US" sz="1200" dirty="0"/>
           </a:p>
@@ -10966,13 +11395,13 @@
             </a:avLst>
           </a:prstGeom>
           <a:solidFill>
-            <a:srgbClr val="FDF4E0"/>
+            <a:srgbClr val="F4F6F9"/>
           </a:solidFill>
           <a:ln w="12700">
             <a:solidFill>
-              <a:srgbClr val="C8860D"/>
+              <a:srgbClr val="2E86A8"/>
             </a:solidFill>
-            <a:prstDash val="dash"/>
+            <a:prstDash val="solid"/>
           </a:ln>
         </p:spPr>
       </p:sp>
@@ -10984,79 +11413,143 @@
         </p:nvSpPr>
         <p:spPr>
           <a:xfrm>
-            <a:off x="685800" y="1389888"/>
-            <a:ext cx="5166360" cy="237744"/>
-          </a:xfrm>
-          <a:prstGeom prst="rect">
-            <a:avLst/>
-          </a:prstGeom>
-          <a:noFill/>
-          <a:ln/>
-        </p:spPr>
-        <p:txBody>
-          <a:bodyPr wrap="square" lIns="0" tIns="0" rIns="0" bIns="0" rtlCol="0" anchor="ctr"/>
-          <a:lstStyle/>
-          <a:p>
-            <a:pPr indent="0" marL="0">
-              <a:buNone/>
-            </a:pPr>
-            <a:r>
-              <a:rPr lang="en-US" sz="1000" b="1" spc="100" kern="0" dirty="0">
-                <a:solidFill>
-                  <a:srgbClr val="C8860D"/>
-                </a:solidFill>
-                <a:latin typeface="Calibri" pitchFamily="34" charset="0"/>
-                <a:ea typeface="Calibri" pitchFamily="34" charset="-122"/>
-                <a:cs typeface="Calibri" pitchFamily="34" charset="-120"/>
-              </a:rPr>
-              <a:t>A PREENCHER  ·  cole aqui o texto do artigo</a:t>
-            </a:r>
-            <a:endParaRPr lang="en-US" sz="1000" dirty="0"/>
+            <a:off x="667512" y="1371600"/>
+            <a:ext cx="5212080" cy="2011680"/>
+          </a:xfrm>
+          <a:prstGeom prst="rect">
+            <a:avLst/>
+          </a:prstGeom>
+          <a:noFill/>
+          <a:ln/>
+        </p:spPr>
+        <p:txBody>
+          <a:bodyPr wrap="square" lIns="0" tIns="0" rIns="0" bIns="0" rtlCol="0" anchor="t"/>
+          <a:lstStyle/>
+          <a:p>
+            <a:pPr indent="0" marL="0">
+              <a:lnSpc>
+                <a:spcPct val="122000"/>
+              </a:lnSpc>
+              <a:buNone/>
+            </a:pPr>
+            <a:r>
+              <a:rPr lang="en-US" sz="950" dirty="0">
+                <a:solidFill>
+                  <a:srgbClr val="1B2A4A"/>
+                </a:solidFill>
+                <a:latin typeface="Consolas" pitchFamily="34" charset="0"/>
+                <a:ea typeface="Consolas" pitchFamily="34" charset="-122"/>
+                <a:cs typeface="Consolas" pitchFamily="34" charset="-120"/>
+              </a:rPr>
+              <a:t>1  Introduction  (p.1-3)   contextualiza, 3 questões de pesquisa, contribuições</a:t>
+            </a:r>
+            <a:endParaRPr lang="en-US" sz="950" dirty="0"/>
+          </a:p>
+          <a:p>
+            <a:pPr indent="0" marL="0">
+              <a:lnSpc>
+                <a:spcPct val="122000"/>
+              </a:lnSpc>
+              <a:buNone/>
+            </a:pPr>
+            <a:r>
+              <a:rPr lang="en-US" sz="950" dirty="0">
+                <a:solidFill>
+                  <a:srgbClr val="1B2A4A"/>
+                </a:solidFill>
+                <a:latin typeface="Consolas" pitchFamily="34" charset="0"/>
+                <a:ea typeface="Consolas" pitchFamily="34" charset="-122"/>
+                <a:cs typeface="Consolas" pitchFamily="34" charset="-120"/>
+              </a:rPr>
+              <a:t>2  Legal Background of GDPR Consent  (p.3-4)   define juridicamente as 4 violações</a:t>
+            </a:r>
+            <a:endParaRPr lang="en-US" sz="950" dirty="0"/>
+          </a:p>
+          <a:p>
+            <a:pPr indent="0" marL="0">
+              <a:lnSpc>
+                <a:spcPct val="122000"/>
+              </a:lnSpc>
+              <a:buNone/>
+            </a:pPr>
+            <a:r>
+              <a:rPr lang="en-US" sz="950" dirty="0">
+                <a:solidFill>
+                  <a:srgbClr val="1B2A4A"/>
+                </a:solidFill>
+                <a:latin typeface="Consolas" pitchFamily="34" charset="0"/>
+                <a:ea typeface="Consolas" pitchFamily="34" charset="-122"/>
+                <a:cs typeface="Consolas" pitchFamily="34" charset="-120"/>
+              </a:rPr>
+              <a:t>3  Methodology  (p.4-6)   como identificar os avisos de consentimento</a:t>
+            </a:r>
+            <a:endParaRPr lang="en-US" sz="950" dirty="0"/>
+          </a:p>
+          <a:p>
+            <a:pPr indent="0" marL="0">
+              <a:lnSpc>
+                <a:spcPct val="122000"/>
+              </a:lnSpc>
+              <a:buNone/>
+            </a:pPr>
+            <a:r>
+              <a:rPr lang="en-US" sz="950" dirty="0">
+                <a:solidFill>
+                  <a:srgbClr val="1B2A4A"/>
+                </a:solidFill>
+                <a:latin typeface="Consolas" pitchFamily="34" charset="0"/>
+                <a:ea typeface="Consolas" pitchFamily="34" charset="-122"/>
+                <a:cs typeface="Consolas" pitchFamily="34" charset="-120"/>
+              </a:rPr>
+              <a:t>4  Large-Scale Analysis  (p.6-11)   aplicação em escala + resultados</a:t>
+            </a:r>
+            <a:endParaRPr lang="en-US" sz="950" dirty="0"/>
+          </a:p>
+          <a:p>
+            <a:pPr indent="0" marL="0">
+              <a:lnSpc>
+                <a:spcPct val="122000"/>
+              </a:lnSpc>
+              <a:buNone/>
+            </a:pPr>
+            <a:r>
+              <a:rPr lang="en-US" sz="950" dirty="0">
+                <a:solidFill>
+                  <a:srgbClr val="1B2A4A"/>
+                </a:solidFill>
+                <a:latin typeface="Consolas" pitchFamily="34" charset="0"/>
+                <a:ea typeface="Consolas" pitchFamily="34" charset="-122"/>
+                <a:cs typeface="Consolas" pitchFamily="34" charset="-120"/>
+              </a:rPr>
+              <a:t>5  Developer Notification  (p.11-12)   notifica devs e coleta respostas</a:t>
+            </a:r>
+            <a:endParaRPr lang="en-US" sz="950" dirty="0"/>
+          </a:p>
+          <a:p>
+            <a:pPr indent="0" marL="0">
+              <a:lnSpc>
+                <a:spcPct val="122000"/>
+              </a:lnSpc>
+              <a:buNone/>
+            </a:pPr>
+            <a:r>
+              <a:rPr lang="en-US" sz="950" dirty="0">
+                <a:solidFill>
+                  <a:srgbClr val="1B2A4A"/>
+                </a:solidFill>
+                <a:latin typeface="Consolas" pitchFamily="34" charset="0"/>
+                <a:ea typeface="Consolas" pitchFamily="34" charset="-122"/>
+                <a:cs typeface="Consolas" pitchFamily="34" charset="-120"/>
+              </a:rPr>
+              <a:t>6  Discussion  (p.12-13)   ·  7  Related Work  (p.13)  ·  8  Conclusion  (p.13)</a:t>
+            </a:r>
+            <a:endParaRPr lang="en-US" sz="950" dirty="0"/>
           </a:p>
         </p:txBody>
       </p:sp>
       <p:sp>
         <p:nvSpPr>
           <p:cNvPr id="7" name="Text 5"/>
-          <p:cNvSpPr txBox="1"/>
-          <p:nvPr/>
-        </p:nvSpPr>
-        <p:spPr>
-          <a:xfrm>
-            <a:off x="685800" y="1691640"/>
-            <a:ext cx="5166360" cy="640080"/>
-          </a:xfrm>
-          <a:prstGeom prst="rect">
-            <a:avLst/>
-          </a:prstGeom>
-          <a:noFill/>
-          <a:ln/>
-        </p:spPr>
-        <p:txBody>
-          <a:bodyPr wrap="square" lIns="0" tIns="0" rIns="0" bIns="0" rtlCol="0" anchor="t"/>
-          <a:lstStyle/>
-          <a:p>
-            <a:pPr indent="0" marL="0">
-              <a:buNone/>
-            </a:pPr>
-            <a:r>
-              <a:rPr lang="en-US" sz="1100" i="1" dirty="0">
-                <a:solidFill>
-                  <a:srgbClr val="5A6472"/>
-                </a:solidFill>
-                <a:latin typeface="Calibri" pitchFamily="34" charset="0"/>
-                <a:ea typeface="Calibri" pitchFamily="34" charset="-122"/>
-                <a:cs typeface="Calibri" pitchFamily="34" charset="-120"/>
-              </a:rPr>
-              <a:t>Transcreva o trecho real do artigo e posicione os rótulos ao lado, ligando cada anotação ao parágrafo correspondente — como nos dois exemplos fornecidos pela professora.</a:t>
-            </a:r>
-            <a:endParaRPr lang="en-US" sz="1100" dirty="0"/>
-          </a:p>
-        </p:txBody>
-      </p:sp>
-      <p:sp>
-        <p:nvSpPr>
-          <p:cNvPr id="8" name="Text 6"/>
           <p:cNvSpPr txBox="1"/>
           <p:nvPr/>
         </p:nvSpPr>
@@ -11095,7 +11588,7 @@
       </p:sp>
       <p:sp>
         <p:nvSpPr>
-          <p:cNvPr id="9" name="Text 7"/>
+          <p:cNvPr id="8" name="Text 6"/>
           <p:cNvSpPr txBox="1"/>
           <p:nvPr/>
         </p:nvSpPr>
@@ -11130,7 +11623,7 @@
                 <a:ea typeface="Calibri" pitchFamily="34" charset="-122"/>
                 <a:cs typeface="Calibri" pitchFamily="34" charset="-120"/>
               </a:rPr>
-              <a:t>Contextualização</a:t>
+              <a:t>Related Work é a seção 7, NÃO a 2</a:t>
             </a:r>
             <a:endParaRPr lang="en-US" sz="1100" dirty="0"/>
           </a:p>
@@ -11151,7 +11644,7 @@
                 <a:ea typeface="Calibri" pitchFamily="34" charset="-122"/>
                 <a:cs typeface="Calibri" pitchFamily="34" charset="-120"/>
               </a:rPr>
-              <a:t>Procedimento metodológico</a:t>
+              <a:t>Método (3) separado da aplicação (4)</a:t>
             </a:r>
             <a:endParaRPr lang="en-US" sz="1100" dirty="0"/>
           </a:p>
@@ -11172,7 +11665,7 @@
                 <a:ea typeface="Calibri" pitchFamily="34" charset="-122"/>
                 <a:cs typeface="Calibri" pitchFamily="34" charset="-120"/>
               </a:rPr>
-              <a:t>Desenvolvimento do trabalho</a:t>
+              <a:t>Seções 3+4 = 7,5 de 15 páginas</a:t>
             </a:r>
             <a:endParaRPr lang="en-US" sz="1100" dirty="0"/>
           </a:p>
@@ -11193,36 +11686,15 @@
                 <a:ea typeface="Calibri" pitchFamily="34" charset="-122"/>
                 <a:cs typeface="Calibri" pitchFamily="34" charset="-120"/>
               </a:rPr>
-              <a:t>Resultados obtidos</a:t>
+              <a:t>NÃO há seção de Limitações nem de Ética</a:t>
             </a:r>
             <a:endParaRPr lang="en-US" sz="1100" dirty="0"/>
           </a:p>
-          <a:p>
-            <a:pPr marL="342900" indent="-342900">
-              <a:spcAft>
-                <a:spcPts val="700"/>
-              </a:spcAft>
-              <a:buSzPct val="100000"/>
-              <a:buChar char="•"/>
-            </a:pPr>
-            <a:r>
-              <a:rPr lang="en-US" sz="1100" dirty="0">
-                <a:solidFill>
-                  <a:srgbClr val="1B2A4A"/>
-                </a:solidFill>
-                <a:latin typeface="Calibri" pitchFamily="34" charset="0"/>
-                <a:ea typeface="Calibri" pitchFamily="34" charset="-122"/>
-                <a:cs typeface="Calibri" pitchFamily="34" charset="-120"/>
-              </a:rPr>
-              <a:t>Infere a partir dos dados obtidos</a:t>
-            </a:r>
-            <a:endParaRPr lang="en-US" sz="1100" dirty="0"/>
-          </a:p>
-        </p:txBody>
-      </p:sp>
-      <p:sp>
-        <p:nvSpPr>
-          <p:cNvPr id="10" name="Shape 8"/>
+        </p:txBody>
+      </p:sp>
+      <p:sp>
+        <p:nvSpPr>
+          <p:cNvPr id="9" name="Shape 7"/>
           <p:cNvSpPr/>
           <p:nvPr/>
         </p:nvSpPr>
@@ -11249,7 +11721,7 @@
       </p:sp>
       <p:sp>
         <p:nvSpPr>
-          <p:cNvPr id="11" name="Text 9"/>
+          <p:cNvPr id="10" name="Text 8"/>
           <p:cNvSpPr txBox="1"/>
           <p:nvPr/>
         </p:nvSpPr>
@@ -11288,7 +11760,7 @@
       </p:sp>
       <p:sp>
         <p:nvSpPr>
-          <p:cNvPr id="12" name="Text 10"/>
+          <p:cNvPr id="11" name="Text 9"/>
           <p:cNvSpPr txBox="1"/>
           <p:nvPr/>
         </p:nvSpPr>
@@ -11322,7 +11794,7 @@
                 <a:ea typeface="Calibri" pitchFamily="34" charset="-122"/>
                 <a:cs typeface="Calibri" pitchFamily="34" charset="-120"/>
               </a:rPr>
-              <a:t>No artigo do ACSAC, a estrutura é organizada POR TIPO DE SOLUÇÃO analisada (rede, Android, Windows, extensões), não na sequência clássica. Comente isso: método e resultados aparecem entrelaçados dentro de cada bloco.</a:t>
+              <a:t>Metodologia detalhada é CONSEQUÊNCIA da escala. No exemplo da professora o avaliador teve de reconstruir o método; com 239 mil apps isso seria impossível.</a:t>
             </a:r>
             <a:endParaRPr lang="en-US" sz="1150" dirty="0"/>
           </a:p>
@@ -11330,7 +11802,7 @@
       </p:sp>
       <p:sp>
         <p:nvSpPr>
-          <p:cNvPr id="13" name="Text 11"/>
+          <p:cNvPr id="12" name="Text 10"/>
           <p:cNvSpPr txBox="1"/>
           <p:nvPr/>
         </p:nvSpPr>

--- a/seminario/seminario-analise-de-artigo.pptx
+++ b/seminario/seminario-analise-de-artigo.pptx
@@ -1397,7 +1397,7 @@
           <a:p>
             <a:r>
               <a:rPr lang="en-US" dirty="0"/>
-              <a:t>Se você fizer a busca sem anotar, este slide fica impossível. Anote em um arquivo enquanto pesquisa.</a:t>
+              <a:t>A busca encontrou o Kollnig et al. SOUPS 2021, que e a alternativa mais seria. Se perguntarem se voce avaliou outras opcoes, a resposta esta no proprio print: 34 citacoes contra 52, um ano mais velho, e SOUPS e CORE B contra A* do CCS.</a:t>
             </a:r>
             <a:endParaRPr lang="en-US" dirty="0"/>
           </a:p>
@@ -8445,8 +8445,8 @@
         </p:nvSpPr>
         <p:spPr>
           <a:xfrm>
-            <a:off x="502920" y="914400"/>
-            <a:ext cx="8138160" cy="292608"/>
+            <a:off x="502920" y="896112"/>
+            <a:ext cx="8138160" cy="274320"/>
           </a:xfrm>
           <a:prstGeom prst="rect">
             <a:avLst/>
@@ -8470,7 +8470,7 @@
                 <a:ea typeface="Calibri" pitchFamily="34" charset="-122"/>
                 <a:cs typeface="Calibri" pitchFamily="34" charset="-120"/>
               </a:rPr>
-              <a:t>A atividade pede o processo, não só o resultado. Anote enquanto pesquisa — depois é irrecuperável.</a:t>
+              <a:t>Scopus, via portal da CAPES / CAFe  ·  21 de setembro de 2026  ·  prints de cada tela</a:t>
             </a:r>
             <a:endParaRPr lang="en-US" sz="1200" dirty="0"/>
           </a:p>
@@ -8484,22 +8484,22 @@
         </p:nvSpPr>
         <p:spPr>
           <a:xfrm>
-            <a:off x="502920" y="1325880"/>
-            <a:ext cx="3954780" cy="3154680"/>
+            <a:off x="502920" y="1243584"/>
+            <a:ext cx="3968496" cy="1371600"/>
           </a:xfrm>
           <a:prstGeom prst="roundRect">
             <a:avLst>
-              <a:gd name="adj" fmla="val 1739"/>
+              <a:gd name="adj" fmla="val 4000"/>
             </a:avLst>
           </a:prstGeom>
           <a:solidFill>
-            <a:srgbClr val="FDF4E0"/>
+            <a:srgbClr val="F4F6F9"/>
           </a:solidFill>
           <a:ln w="12700">
             <a:solidFill>
-              <a:srgbClr val="C8860D"/>
+              <a:srgbClr val="DDE3EA"/>
             </a:solidFill>
-            <a:prstDash val="dash"/>
+            <a:prstDash val="solid"/>
           </a:ln>
         </p:spPr>
       </p:sp>
@@ -8511,8 +8511,8 @@
         </p:nvSpPr>
         <p:spPr>
           <a:xfrm>
-            <a:off x="667512" y="1435608"/>
-            <a:ext cx="3625596" cy="237744"/>
+            <a:off x="685800" y="1371600"/>
+            <a:ext cx="3602736" cy="274320"/>
           </a:xfrm>
           <a:prstGeom prst="rect">
             <a:avLst/>
@@ -8528,17 +8528,17 @@
               <a:buNone/>
             </a:pPr>
             <a:r>
-              <a:rPr lang="en-US" sz="1000" b="1" spc="100" kern="0" dirty="0">
-                <a:solidFill>
-                  <a:srgbClr val="C8860D"/>
-                </a:solidFill>
-                <a:latin typeface="Calibri" pitchFamily="34" charset="0"/>
-                <a:ea typeface="Calibri" pitchFamily="34" charset="-122"/>
-                <a:cs typeface="Calibri" pitchFamily="34" charset="-120"/>
-              </a:rPr>
-              <a:t>A PREENCHER  ·  registre a sua busca</a:t>
-            </a:r>
-            <a:endParaRPr lang="en-US" sz="1000" dirty="0"/>
+              <a:rPr lang="en-US" sz="1300" b="1" dirty="0">
+                <a:solidFill>
+                  <a:srgbClr val="1B2A4A"/>
+                </a:solidFill>
+                <a:latin typeface="Calibri" pitchFamily="34" charset="0"/>
+                <a:ea typeface="Calibri" pitchFamily="34" charset="-122"/>
+                <a:cs typeface="Calibri" pitchFamily="34" charset="-120"/>
+              </a:rPr>
+              <a:t>Tentativa 1 — expressão exata</a:t>
+            </a:r>
+            <a:endParaRPr lang="en-US" sz="1300" dirty="0"/>
           </a:p>
         </p:txBody>
       </p:sp>
@@ -8550,8 +8550,8 @@
         </p:nvSpPr>
         <p:spPr>
           <a:xfrm>
-            <a:off x="667512" y="1709928"/>
-            <a:ext cx="3625596" cy="2642616"/>
+            <a:off x="685800" y="1682496"/>
+            <a:ext cx="3602736" cy="786384"/>
           </a:xfrm>
           <a:prstGeom prst="rect">
             <a:avLst/>
@@ -8563,12 +8563,11 @@
           <a:bodyPr wrap="square" lIns="0" tIns="0" rIns="0" bIns="0" rtlCol="0" anchor="t"/>
           <a:lstStyle/>
           <a:p>
-            <a:pPr marL="342900" indent="-342900">
+            <a:pPr indent="0" marL="0">
               <a:spcAft>
-                <a:spcPts val="500"/>
+                <a:spcPts val="400"/>
               </a:spcAft>
-              <a:buSzPct val="100000"/>
-              <a:buChar char="•"/>
+              <a:buNone/>
             </a:pPr>
             <a:r>
               <a:rPr lang="en-US" sz="1150" dirty="0">
@@ -8579,17 +8578,16 @@
                 <a:ea typeface="Calibri" pitchFamily="34" charset="-122"/>
                 <a:cs typeface="Calibri" pitchFamily="34" charset="-120"/>
               </a:rPr>
-              <a:t>Base(s) usada(s) via CAFe: ACM DL, IEEE Xplore, Scopus, Web of Science…</a:t>
+              <a:t>"third-party tracking" AND consent AND android</a:t>
             </a:r>
             <a:endParaRPr lang="en-US" sz="1150" dirty="0"/>
           </a:p>
           <a:p>
-            <a:pPr marL="342900" indent="-342900">
+            <a:pPr indent="0" marL="0">
               <a:spcAft>
-                <a:spcPts val="500"/>
+                <a:spcPts val="400"/>
               </a:spcAft>
-              <a:buSzPct val="100000"/>
-              <a:buChar char="•"/>
+              <a:buNone/>
             </a:pPr>
             <a:r>
               <a:rPr lang="en-US" sz="1150" dirty="0">
@@ -8600,17 +8598,25 @@
                 <a:ea typeface="Calibri" pitchFamily="34" charset="-122"/>
                 <a:cs typeface="Calibri" pitchFamily="34" charset="-120"/>
               </a:rPr>
-              <a:t>String de busca exata, com os operadores booleanos</a:t>
+              <a:t>campo: Article title, Abstract, Keywords</a:t>
             </a:r>
             <a:endParaRPr lang="en-US" sz="1150" dirty="0"/>
           </a:p>
           <a:p>
-            <a:pPr marL="342900" indent="-342900">
+            <a:pPr indent="0" marL="0">
               <a:spcAft>
-                <a:spcPts val="500"/>
+                <a:spcPts val="400"/>
               </a:spcAft>
-              <a:buSzPct val="100000"/>
-              <a:buChar char="•"/>
+              <a:buNone/>
+            </a:pPr>
+            <a:endParaRPr lang="en-US" sz="1150" dirty="0"/>
+          </a:p>
+          <a:p>
+            <a:pPr indent="0" marL="0">
+              <a:spcAft>
+                <a:spcPts val="400"/>
+              </a:spcAft>
+              <a:buNone/>
             </a:pPr>
             <a:r>
               <a:rPr lang="en-US" sz="1150" dirty="0">
@@ -8621,112 +8627,7 @@
                 <a:ea typeface="Calibri" pitchFamily="34" charset="-122"/>
                 <a:cs typeface="Calibri" pitchFamily="34" charset="-120"/>
               </a:rPr>
-              <a:t>Filtros: período, tipo de documento, idioma, área</a:t>
-            </a:r>
-            <a:endParaRPr lang="en-US" sz="1150" dirty="0"/>
-          </a:p>
-          <a:p>
-            <a:pPr marL="342900" indent="-342900">
-              <a:spcAft>
-                <a:spcPts val="500"/>
-              </a:spcAft>
-              <a:buSzPct val="100000"/>
-              <a:buChar char="•"/>
-            </a:pPr>
-            <a:r>
-              <a:rPr lang="en-US" sz="1150" dirty="0">
-                <a:solidFill>
-                  <a:srgbClr val="5A6472"/>
-                </a:solidFill>
-                <a:latin typeface="Calibri" pitchFamily="34" charset="0"/>
-                <a:ea typeface="Calibri" pitchFamily="34" charset="-122"/>
-                <a:cs typeface="Calibri" pitchFamily="34" charset="-120"/>
-              </a:rPr>
-              <a:t>Nº de resultados retornados</a:t>
-            </a:r>
-            <a:endParaRPr lang="en-US" sz="1150" dirty="0"/>
-          </a:p>
-          <a:p>
-            <a:pPr marL="342900" indent="-342900">
-              <a:spcAft>
-                <a:spcPts val="500"/>
-              </a:spcAft>
-              <a:buSzPct val="100000"/>
-              <a:buChar char="•"/>
-            </a:pPr>
-            <a:r>
-              <a:rPr lang="en-US" sz="1150" dirty="0">
-                <a:solidFill>
-                  <a:srgbClr val="5A6472"/>
-                </a:solidFill>
-                <a:latin typeface="Calibri" pitchFamily="34" charset="0"/>
-                <a:ea typeface="Calibri" pitchFamily="34" charset="-122"/>
-                <a:cs typeface="Calibri" pitchFamily="34" charset="-120"/>
-              </a:rPr>
-              <a:t>Nº após leitura de título e resumo</a:t>
-            </a:r>
-            <a:endParaRPr lang="en-US" sz="1150" dirty="0"/>
-          </a:p>
-          <a:p>
-            <a:pPr marL="342900" indent="-342900">
-              <a:spcAft>
-                <a:spcPts val="500"/>
-              </a:spcAft>
-              <a:buSzPct val="100000"/>
-              <a:buChar char="•"/>
-            </a:pPr>
-            <a:r>
-              <a:rPr lang="en-US" sz="1150" dirty="0">
-                <a:solidFill>
-                  <a:srgbClr val="5A6472"/>
-                </a:solidFill>
-                <a:latin typeface="Calibri" pitchFamily="34" charset="0"/>
-                <a:ea typeface="Calibri" pitchFamily="34" charset="-122"/>
-                <a:cs typeface="Calibri" pitchFamily="34" charset="-120"/>
-              </a:rPr>
-              <a:t>Nº após leitura do texto completo</a:t>
-            </a:r>
-            <a:endParaRPr lang="en-US" sz="1150" dirty="0"/>
-          </a:p>
-          <a:p>
-            <a:pPr marL="342900" indent="-342900">
-              <a:spcAft>
-                <a:spcPts val="500"/>
-              </a:spcAft>
-              <a:buSzPct val="100000"/>
-              <a:buChar char="•"/>
-            </a:pPr>
-            <a:r>
-              <a:rPr lang="en-US" sz="1150" dirty="0">
-                <a:solidFill>
-                  <a:srgbClr val="5A6472"/>
-                </a:solidFill>
-                <a:latin typeface="Calibri" pitchFamily="34" charset="0"/>
-                <a:ea typeface="Calibri" pitchFamily="34" charset="-122"/>
-                <a:cs typeface="Calibri" pitchFamily="34" charset="-120"/>
-              </a:rPr>
-              <a:t>Critérios de inclusão e exclusão aplicados</a:t>
-            </a:r>
-            <a:endParaRPr lang="en-US" sz="1150" dirty="0"/>
-          </a:p>
-          <a:p>
-            <a:pPr marL="342900" indent="-342900">
-              <a:spcAft>
-                <a:spcPts val="500"/>
-              </a:spcAft>
-              <a:buSzPct val="100000"/>
-              <a:buChar char="•"/>
-            </a:pPr>
-            <a:r>
-              <a:rPr lang="en-US" sz="1150" dirty="0">
-                <a:solidFill>
-                  <a:srgbClr val="5A6472"/>
-                </a:solidFill>
-                <a:latin typeface="Calibri" pitchFamily="34" charset="0"/>
-                <a:ea typeface="Calibri" pitchFamily="34" charset="-122"/>
-                <a:cs typeface="Calibri" pitchFamily="34" charset="-120"/>
-              </a:rPr>
-              <a:t>Data da consulta</a:t>
+              <a:t>→ 4 documentos</a:t>
             </a:r>
             <a:endParaRPr lang="en-US" sz="1150" dirty="0"/>
           </a:p>
@@ -8740,22 +8641,22 @@
         </p:nvSpPr>
         <p:spPr>
           <a:xfrm>
-            <a:off x="4686300" y="1325880"/>
-            <a:ext cx="3954780" cy="3154680"/>
+            <a:off x="4672584" y="1243584"/>
+            <a:ext cx="3968496" cy="1371600"/>
           </a:xfrm>
           <a:prstGeom prst="roundRect">
             <a:avLst>
-              <a:gd name="adj" fmla="val 1739"/>
+              <a:gd name="adj" fmla="val 4000"/>
             </a:avLst>
           </a:prstGeom>
           <a:solidFill>
-            <a:srgbClr val="FDF4E0"/>
+            <a:srgbClr val="F4F6F9"/>
           </a:solidFill>
           <a:ln w="12700">
             <a:solidFill>
-              <a:srgbClr val="C8860D"/>
+              <a:srgbClr val="DDE3EA"/>
             </a:solidFill>
-            <a:prstDash val="dash"/>
+            <a:prstDash val="solid"/>
           </a:ln>
         </p:spPr>
       </p:sp>
@@ -8767,8 +8668,8 @@
         </p:nvSpPr>
         <p:spPr>
           <a:xfrm>
-            <a:off x="4850892" y="1435608"/>
-            <a:ext cx="3625596" cy="237744"/>
+            <a:off x="4855464" y="1371600"/>
+            <a:ext cx="3602736" cy="274320"/>
           </a:xfrm>
           <a:prstGeom prst="rect">
             <a:avLst/>
@@ -8784,17 +8685,17 @@
               <a:buNone/>
             </a:pPr>
             <a:r>
-              <a:rPr lang="en-US" sz="1000" b="1" spc="100" kern="0" dirty="0">
-                <a:solidFill>
-                  <a:srgbClr val="C8860D"/>
-                </a:solidFill>
-                <a:latin typeface="Calibri" pitchFamily="34" charset="0"/>
-                <a:ea typeface="Calibri" pitchFamily="34" charset="-122"/>
-                <a:cs typeface="Calibri" pitchFamily="34" charset="-120"/>
-              </a:rPr>
-              <a:t>A PREENCHER  ·  por que este e não outro</a:t>
-            </a:r>
-            <a:endParaRPr lang="en-US" sz="1000" dirty="0"/>
+              <a:rPr lang="en-US" sz="1300" b="1" dirty="0">
+                <a:solidFill>
+                  <a:srgbClr val="2E86A8"/>
+                </a:solidFill>
+                <a:latin typeface="Calibri" pitchFamily="34" charset="0"/>
+                <a:ea typeface="Calibri" pitchFamily="34" charset="-122"/>
+                <a:cs typeface="Calibri" pitchFamily="34" charset="-120"/>
+              </a:rPr>
+              <a:t>Tentativa 2 — ampliada</a:t>
+            </a:r>
+            <a:endParaRPr lang="en-US" sz="1300" dirty="0"/>
           </a:p>
         </p:txBody>
       </p:sp>
@@ -8806,8 +8707,8 @@
         </p:nvSpPr>
         <p:spPr>
           <a:xfrm>
-            <a:off x="4850892" y="1709928"/>
-            <a:ext cx="3625596" cy="2642616"/>
+            <a:off x="4855464" y="1682496"/>
+            <a:ext cx="3602736" cy="786384"/>
           </a:xfrm>
           <a:prstGeom prst="rect">
             <a:avLst/>
@@ -8819,12 +8720,11 @@
           <a:bodyPr wrap="square" lIns="0" tIns="0" rIns="0" bIns="0" rtlCol="0" anchor="t"/>
           <a:lstStyle/>
           <a:p>
-            <a:pPr marL="342900" indent="-342900">
+            <a:pPr indent="0" marL="0">
               <a:spcAft>
-                <a:spcPts val="500"/>
+                <a:spcPts val="400"/>
               </a:spcAft>
-              <a:buSzPct val="100000"/>
-              <a:buChar char="•"/>
+              <a:buNone/>
             </a:pPr>
             <a:r>
               <a:rPr lang="en-US" sz="1150" dirty="0">
@@ -8835,17 +8735,25 @@
                 <a:ea typeface="Calibri" pitchFamily="34" charset="-122"/>
                 <a:cs typeface="Calibri" pitchFamily="34" charset="-120"/>
               </a:rPr>
-              <a:t>Por que é artigo ORIGINAL e não revisão — aponte no texto onde isso fica claro (coleta própria, experimento, dados novos)</a:t>
+              <a:t>"third party" AND tracking AND android AND (consent OR GDPR)</a:t>
             </a:r>
             <a:endParaRPr lang="en-US" sz="1150" dirty="0"/>
           </a:p>
           <a:p>
-            <a:pPr marL="342900" indent="-342900">
+            <a:pPr indent="0" marL="0">
               <a:spcAft>
-                <a:spcPts val="500"/>
+                <a:spcPts val="400"/>
               </a:spcAft>
-              <a:buSzPct val="100000"/>
-              <a:buChar char="•"/>
+              <a:buNone/>
+            </a:pPr>
+            <a:endParaRPr lang="en-US" sz="1150" dirty="0"/>
+          </a:p>
+          <a:p>
+            <a:pPr indent="0" marL="0">
+              <a:spcAft>
+                <a:spcPts val="400"/>
+              </a:spcAft>
+              <a:buNone/>
             </a:pPr>
             <a:r>
               <a:rPr lang="en-US" sz="1150" dirty="0">
@@ -8856,17 +8764,16 @@
                 <a:ea typeface="Calibri" pitchFamily="34" charset="-122"/>
                 <a:cs typeface="Calibri" pitchFamily="34" charset="-120"/>
               </a:rPr>
-              <a:t>Quais candidatos você descartou e por quê</a:t>
+              <a:t>→ 12 documentos</a:t>
             </a:r>
             <a:endParaRPr lang="en-US" sz="1150" dirty="0"/>
           </a:p>
           <a:p>
-            <a:pPr marL="342900" indent="-342900">
+            <a:pPr indent="0" marL="0">
               <a:spcAft>
-                <a:spcPts val="500"/>
+                <a:spcPts val="400"/>
               </a:spcAft>
-              <a:buSzPct val="100000"/>
-              <a:buChar char="•"/>
+              <a:buNone/>
             </a:pPr>
             <a:r>
               <a:rPr lang="en-US" sz="1150" dirty="0">
@@ -8877,7 +8784,7 @@
                 <a:ea typeface="Calibri" pitchFamily="34" charset="-122"/>
                 <a:cs typeface="Calibri" pitchFamily="34" charset="-120"/>
               </a:rPr>
-              <a:t>Print das telas de busca (guarde; ela pode pedir)</a:t>
+              <a:t>CS 11 · Eng 3 · Soc 3 · Env 2</a:t>
             </a:r>
             <a:endParaRPr lang="en-US" sz="1150" dirty="0"/>
           </a:p>
@@ -8886,6 +8793,1788 @@
       <p:sp>
         <p:nvSpPr>
           <p:cNvPr id="11" name="Text 9"/>
+          <p:cNvSpPr txBox="1"/>
+          <p:nvPr/>
+        </p:nvSpPr>
+        <p:spPr>
+          <a:xfrm>
+            <a:off x="502920" y="2697480"/>
+            <a:ext cx="8138160" cy="237744"/>
+          </a:xfrm>
+          <a:prstGeom prst="rect">
+            <a:avLst/>
+          </a:prstGeom>
+          <a:noFill/>
+          <a:ln/>
+        </p:spPr>
+        <p:txBody>
+          <a:bodyPr wrap="square" lIns="0" tIns="0" rIns="0" bIns="0" rtlCol="0" anchor="ctr"/>
+          <a:lstStyle/>
+          <a:p>
+            <a:pPr indent="0" marL="0">
+              <a:buNone/>
+            </a:pPr>
+            <a:r>
+              <a:rPr lang="en-US" sz="1050" i="1" dirty="0">
+                <a:solidFill>
+                  <a:srgbClr val="2E86A8"/>
+                </a:solidFill>
+                <a:latin typeface="Calibri" pitchFamily="34" charset="0"/>
+                <a:ea typeface="Calibri" pitchFamily="34" charset="-122"/>
+                <a:cs typeface="Calibri" pitchFamily="34" charset="-120"/>
+              </a:rPr>
+              <a:t>Filtros na T1: Year 2021–2025 · Computer Science · Conference paper · English   →   4 (nenhum perdido)</a:t>
+            </a:r>
+            <a:endParaRPr lang="en-US" sz="1050" dirty="0"/>
+          </a:p>
+        </p:txBody>
+      </p:sp>
+      <p:graphicFrame>
+        <p:nvGraphicFramePr>
+          <p:cNvPr id="5" name="Table 0"/>
+          <p:cNvGraphicFramePr>
+            <a:graphicFrameLocks noGrp="1"/>
+          </p:cNvGraphicFramePr>
+          <p:nvPr>
+            <p:extLst>
+              <p:ext uri="{D42A27DB-BD31-4B8C-83A1-F6EECF244321}">
+                <p14:modId xmlns:p14="http://schemas.microsoft.com/office/powerpoint/2010/main" val="1579011935"/>
+              </p:ext>
+            </p:extLst>
+          </p:nvPr>
+        </p:nvGraphicFramePr>
+        <p:xfrm>
+          <a:off x="502920" y="3017520"/>
+          <a:ext cx="8138160" cy="914400"/>
+        </p:xfrm>
+        <a:graphic>
+          <a:graphicData uri="http://schemas.openxmlformats.org/drawingml/2006/table">
+            <a:tbl>
+              <a:tblPr/>
+              <a:tblGrid>
+                <a:gridCol w="274320"/>
+                <a:gridCol w="4206240"/>
+                <a:gridCol w="502920"/>
+                <a:gridCol w="502920"/>
+                <a:gridCol w="2011680"/>
+              </a:tblGrid>
+              <a:tr h="246888">
+                <a:tc>
+                  <a:txBody>
+                    <a:bodyPr/>
+                    <a:lstStyle/>
+                    <a:p>
+                      <a:pPr indent="0" marL="0">
+                        <a:buNone/>
+                      </a:pPr>
+                      <a:r>
+                        <a:rPr lang="en-US" sz="1000" b="1" dirty="0">
+                          <a:solidFill>
+                            <a:srgbClr val="000000"/>
+                          </a:solidFill>
+                          <a:latin typeface="Calibri" pitchFamily="34" charset="0"/>
+                          <a:ea typeface="Calibri" pitchFamily="34" charset="-122"/>
+                          <a:cs typeface="Calibri" pitchFamily="34" charset="-120"/>
+                        </a:rPr>
+                        <a:t>#</a:t>
+                      </a:r>
+                      <a:endParaRPr lang="en-US" sz="1000" dirty="0">
+                        <a:latin typeface="Calibri" charset="0"/>
+                        <a:ea typeface="Calibri" charset="0"/>
+                        <a:cs typeface="Calibri" charset="0"/>
+                      </a:endParaRPr>
+                    </a:p>
+                  </a:txBody>
+                  <a:tcPr marL="91440" marR="91440" marT="45720" marB="45720" anchor="ctr">
+                    <a:lnL w="6350" cap="flat" cmpd="sng" algn="ctr">
+                      <a:solidFill>
+                        <a:srgbClr val="D8DEE6"/>
+                      </a:solidFill>
+                      <a:prstDash val="solid"/>
+                      <a:round/>
+                      <a:headEnd type="none" w="med" len="med"/>
+                      <a:tailEnd type="none" w="med" len="med"/>
+                    </a:lnL>
+                    <a:lnR w="6350" cap="flat" cmpd="sng" algn="ctr">
+                      <a:solidFill>
+                        <a:srgbClr val="D8DEE6"/>
+                      </a:solidFill>
+                      <a:prstDash val="solid"/>
+                      <a:round/>
+                      <a:headEnd type="none" w="med" len="med"/>
+                      <a:tailEnd type="none" w="med" len="med"/>
+                    </a:lnR>
+                    <a:lnT w="6350" cap="flat" cmpd="sng" algn="ctr">
+                      <a:solidFill>
+                        <a:srgbClr val="D8DEE6"/>
+                      </a:solidFill>
+                      <a:prstDash val="solid"/>
+                      <a:round/>
+                      <a:headEnd type="none" w="med" len="med"/>
+                      <a:tailEnd type="none" w="med" len="med"/>
+                    </a:lnT>
+                    <a:lnB w="6350" cap="flat" cmpd="sng" algn="ctr">
+                      <a:solidFill>
+                        <a:srgbClr val="D8DEE6"/>
+                      </a:solidFill>
+                      <a:prstDash val="solid"/>
+                      <a:round/>
+                      <a:headEnd type="none" w="med" len="med"/>
+                      <a:tailEnd type="none" w="med" len="med"/>
+                    </a:lnB>
+                    <a:solidFill>
+                      <a:srgbClr val="FFFFFF"/>
+                    </a:solidFill>
+                  </a:tcPr>
+                </a:tc>
+                <a:tc>
+                  <a:txBody>
+                    <a:bodyPr/>
+                    <a:lstStyle/>
+                    <a:p>
+                      <a:pPr indent="0" marL="0">
+                        <a:buNone/>
+                      </a:pPr>
+                      <a:r>
+                        <a:rPr lang="en-US" sz="1000" b="1" dirty="0">
+                          <a:solidFill>
+                            <a:srgbClr val="000000"/>
+                          </a:solidFill>
+                          <a:latin typeface="Calibri" pitchFamily="34" charset="0"/>
+                          <a:ea typeface="Calibri" pitchFamily="34" charset="-122"/>
+                          <a:cs typeface="Calibri" pitchFamily="34" charset="-120"/>
+                        </a:rPr>
+                        <a:t>Artigo</a:t>
+                      </a:r>
+                      <a:endParaRPr lang="en-US" sz="1000" dirty="0">
+                        <a:latin typeface="Calibri" charset="0"/>
+                        <a:ea typeface="Calibri" charset="0"/>
+                        <a:cs typeface="Calibri" charset="0"/>
+                      </a:endParaRPr>
+                    </a:p>
+                  </a:txBody>
+                  <a:tcPr marL="91440" marR="91440" marT="45720" marB="45720" anchor="ctr">
+                    <a:lnL w="6350" cap="flat" cmpd="sng" algn="ctr">
+                      <a:solidFill>
+                        <a:srgbClr val="D8DEE6"/>
+                      </a:solidFill>
+                      <a:prstDash val="solid"/>
+                      <a:round/>
+                      <a:headEnd type="none" w="med" len="med"/>
+                      <a:tailEnd type="none" w="med" len="med"/>
+                    </a:lnL>
+                    <a:lnR w="6350" cap="flat" cmpd="sng" algn="ctr">
+                      <a:solidFill>
+                        <a:srgbClr val="D8DEE6"/>
+                      </a:solidFill>
+                      <a:prstDash val="solid"/>
+                      <a:round/>
+                      <a:headEnd type="none" w="med" len="med"/>
+                      <a:tailEnd type="none" w="med" len="med"/>
+                    </a:lnR>
+                    <a:lnT w="6350" cap="flat" cmpd="sng" algn="ctr">
+                      <a:solidFill>
+                        <a:srgbClr val="D8DEE6"/>
+                      </a:solidFill>
+                      <a:prstDash val="solid"/>
+                      <a:round/>
+                      <a:headEnd type="none" w="med" len="med"/>
+                      <a:tailEnd type="none" w="med" len="med"/>
+                    </a:lnT>
+                    <a:lnB w="6350" cap="flat" cmpd="sng" algn="ctr">
+                      <a:solidFill>
+                        <a:srgbClr val="D8DEE6"/>
+                      </a:solidFill>
+                      <a:prstDash val="solid"/>
+                      <a:round/>
+                      <a:headEnd type="none" w="med" len="med"/>
+                      <a:tailEnd type="none" w="med" len="med"/>
+                    </a:lnB>
+                    <a:solidFill>
+                      <a:srgbClr val="FFFFFF"/>
+                    </a:solidFill>
+                  </a:tcPr>
+                </a:tc>
+                <a:tc>
+                  <a:txBody>
+                    <a:bodyPr/>
+                    <a:lstStyle/>
+                    <a:p>
+                      <a:pPr indent="0" marL="0">
+                        <a:buNone/>
+                      </a:pPr>
+                      <a:r>
+                        <a:rPr lang="en-US" sz="1000" b="1" dirty="0">
+                          <a:solidFill>
+                            <a:srgbClr val="000000"/>
+                          </a:solidFill>
+                          <a:latin typeface="Calibri" pitchFamily="34" charset="0"/>
+                          <a:ea typeface="Calibri" pitchFamily="34" charset="-122"/>
+                          <a:cs typeface="Calibri" pitchFamily="34" charset="-120"/>
+                        </a:rPr>
+                        <a:t>Ano</a:t>
+                      </a:r>
+                      <a:endParaRPr lang="en-US" sz="1000" dirty="0">
+                        <a:latin typeface="Calibri" charset="0"/>
+                        <a:ea typeface="Calibri" charset="0"/>
+                        <a:cs typeface="Calibri" charset="0"/>
+                      </a:endParaRPr>
+                    </a:p>
+                  </a:txBody>
+                  <a:tcPr marL="91440" marR="91440" marT="45720" marB="45720" anchor="ctr">
+                    <a:lnL w="6350" cap="flat" cmpd="sng" algn="ctr">
+                      <a:solidFill>
+                        <a:srgbClr val="D8DEE6"/>
+                      </a:solidFill>
+                      <a:prstDash val="solid"/>
+                      <a:round/>
+                      <a:headEnd type="none" w="med" len="med"/>
+                      <a:tailEnd type="none" w="med" len="med"/>
+                    </a:lnL>
+                    <a:lnR w="6350" cap="flat" cmpd="sng" algn="ctr">
+                      <a:solidFill>
+                        <a:srgbClr val="D8DEE6"/>
+                      </a:solidFill>
+                      <a:prstDash val="solid"/>
+                      <a:round/>
+                      <a:headEnd type="none" w="med" len="med"/>
+                      <a:tailEnd type="none" w="med" len="med"/>
+                    </a:lnR>
+                    <a:lnT w="6350" cap="flat" cmpd="sng" algn="ctr">
+                      <a:solidFill>
+                        <a:srgbClr val="D8DEE6"/>
+                      </a:solidFill>
+                      <a:prstDash val="solid"/>
+                      <a:round/>
+                      <a:headEnd type="none" w="med" len="med"/>
+                      <a:tailEnd type="none" w="med" len="med"/>
+                    </a:lnT>
+                    <a:lnB w="6350" cap="flat" cmpd="sng" algn="ctr">
+                      <a:solidFill>
+                        <a:srgbClr val="D8DEE6"/>
+                      </a:solidFill>
+                      <a:prstDash val="solid"/>
+                      <a:round/>
+                      <a:headEnd type="none" w="med" len="med"/>
+                      <a:tailEnd type="none" w="med" len="med"/>
+                    </a:lnB>
+                    <a:solidFill>
+                      <a:srgbClr val="FFFFFF"/>
+                    </a:solidFill>
+                  </a:tcPr>
+                </a:tc>
+                <a:tc>
+                  <a:txBody>
+                    <a:bodyPr/>
+                    <a:lstStyle/>
+                    <a:p>
+                      <a:pPr indent="0" marL="0">
+                        <a:buNone/>
+                      </a:pPr>
+                      <a:r>
+                        <a:rPr lang="en-US" sz="1000" b="1" dirty="0">
+                          <a:solidFill>
+                            <a:srgbClr val="000000"/>
+                          </a:solidFill>
+                          <a:latin typeface="Calibri" pitchFamily="34" charset="0"/>
+                          <a:ea typeface="Calibri" pitchFamily="34" charset="-122"/>
+                          <a:cs typeface="Calibri" pitchFamily="34" charset="-120"/>
+                        </a:rPr>
+                        <a:t>Cit.</a:t>
+                      </a:r>
+                      <a:endParaRPr lang="en-US" sz="1000" dirty="0">
+                        <a:latin typeface="Calibri" charset="0"/>
+                        <a:ea typeface="Calibri" charset="0"/>
+                        <a:cs typeface="Calibri" charset="0"/>
+                      </a:endParaRPr>
+                    </a:p>
+                  </a:txBody>
+                  <a:tcPr marL="91440" marR="91440" marT="45720" marB="45720" anchor="ctr">
+                    <a:lnL w="6350" cap="flat" cmpd="sng" algn="ctr">
+                      <a:solidFill>
+                        <a:srgbClr val="D8DEE6"/>
+                      </a:solidFill>
+                      <a:prstDash val="solid"/>
+                      <a:round/>
+                      <a:headEnd type="none" w="med" len="med"/>
+                      <a:tailEnd type="none" w="med" len="med"/>
+                    </a:lnL>
+                    <a:lnR w="6350" cap="flat" cmpd="sng" algn="ctr">
+                      <a:solidFill>
+                        <a:srgbClr val="D8DEE6"/>
+                      </a:solidFill>
+                      <a:prstDash val="solid"/>
+                      <a:round/>
+                      <a:headEnd type="none" w="med" len="med"/>
+                      <a:tailEnd type="none" w="med" len="med"/>
+                    </a:lnR>
+                    <a:lnT w="6350" cap="flat" cmpd="sng" algn="ctr">
+                      <a:solidFill>
+                        <a:srgbClr val="D8DEE6"/>
+                      </a:solidFill>
+                      <a:prstDash val="solid"/>
+                      <a:round/>
+                      <a:headEnd type="none" w="med" len="med"/>
+                      <a:tailEnd type="none" w="med" len="med"/>
+                    </a:lnT>
+                    <a:lnB w="6350" cap="flat" cmpd="sng" algn="ctr">
+                      <a:solidFill>
+                        <a:srgbClr val="D8DEE6"/>
+                      </a:solidFill>
+                      <a:prstDash val="solid"/>
+                      <a:round/>
+                      <a:headEnd type="none" w="med" len="med"/>
+                      <a:tailEnd type="none" w="med" len="med"/>
+                    </a:lnB>
+                    <a:solidFill>
+                      <a:srgbClr val="FFFFFF"/>
+                    </a:solidFill>
+                  </a:tcPr>
+                </a:tc>
+                <a:tc>
+                  <a:txBody>
+                    <a:bodyPr/>
+                    <a:lstStyle/>
+                    <a:p>
+                      <a:pPr indent="0" marL="0">
+                        <a:buNone/>
+                      </a:pPr>
+                      <a:r>
+                        <a:rPr lang="en-US" sz="1000" b="1" dirty="0">
+                          <a:solidFill>
+                            <a:srgbClr val="000000"/>
+                          </a:solidFill>
+                          <a:latin typeface="Calibri" pitchFamily="34" charset="0"/>
+                          <a:ea typeface="Calibri" pitchFamily="34" charset="-122"/>
+                          <a:cs typeface="Calibri" pitchFamily="34" charset="-120"/>
+                        </a:rPr>
+                        <a:t>Decisão</a:t>
+                      </a:r>
+                      <a:endParaRPr lang="en-US" sz="1000" dirty="0">
+                        <a:latin typeface="Calibri" charset="0"/>
+                        <a:ea typeface="Calibri" charset="0"/>
+                        <a:cs typeface="Calibri" charset="0"/>
+                      </a:endParaRPr>
+                    </a:p>
+                  </a:txBody>
+                  <a:tcPr marL="91440" marR="91440" marT="45720" marB="45720" anchor="ctr">
+                    <a:lnL w="6350" cap="flat" cmpd="sng" algn="ctr">
+                      <a:solidFill>
+                        <a:srgbClr val="D8DEE6"/>
+                      </a:solidFill>
+                      <a:prstDash val="solid"/>
+                      <a:round/>
+                      <a:headEnd type="none" w="med" len="med"/>
+                      <a:tailEnd type="none" w="med" len="med"/>
+                    </a:lnL>
+                    <a:lnR w="6350" cap="flat" cmpd="sng" algn="ctr">
+                      <a:solidFill>
+                        <a:srgbClr val="D8DEE6"/>
+                      </a:solidFill>
+                      <a:prstDash val="solid"/>
+                      <a:round/>
+                      <a:headEnd type="none" w="med" len="med"/>
+                      <a:tailEnd type="none" w="med" len="med"/>
+                    </a:lnR>
+                    <a:lnT w="6350" cap="flat" cmpd="sng" algn="ctr">
+                      <a:solidFill>
+                        <a:srgbClr val="D8DEE6"/>
+                      </a:solidFill>
+                      <a:prstDash val="solid"/>
+                      <a:round/>
+                      <a:headEnd type="none" w="med" len="med"/>
+                      <a:tailEnd type="none" w="med" len="med"/>
+                    </a:lnT>
+                    <a:lnB w="6350" cap="flat" cmpd="sng" algn="ctr">
+                      <a:solidFill>
+                        <a:srgbClr val="D8DEE6"/>
+                      </a:solidFill>
+                      <a:prstDash val="solid"/>
+                      <a:round/>
+                      <a:headEnd type="none" w="med" len="med"/>
+                      <a:tailEnd type="none" w="med" len="med"/>
+                    </a:lnB>
+                    <a:solidFill>
+                      <a:srgbClr val="FFFFFF"/>
+                    </a:solidFill>
+                  </a:tcPr>
+                </a:tc>
+              </a:tr>
+              <a:tr h="246888">
+                <a:tc>
+                  <a:txBody>
+                    <a:bodyPr/>
+                    <a:lstStyle/>
+                    <a:p>
+                      <a:pPr indent="0" marL="0">
+                        <a:buNone/>
+                      </a:pPr>
+                      <a:r>
+                        <a:rPr lang="en-US" sz="1000" dirty="0">
+                          <a:solidFill>
+                            <a:srgbClr val="1B2A4A"/>
+                          </a:solidFill>
+                          <a:latin typeface="Calibri" pitchFamily="34" charset="0"/>
+                          <a:ea typeface="Calibri" pitchFamily="34" charset="-122"/>
+                          <a:cs typeface="Calibri" pitchFamily="34" charset="-120"/>
+                        </a:rPr>
+                        <a:t>1</a:t>
+                      </a:r>
+                      <a:endParaRPr lang="en-US" sz="1000" dirty="0">
+                        <a:latin typeface="Calibri" charset="0"/>
+                        <a:ea typeface="Calibri" charset="0"/>
+                        <a:cs typeface="Calibri" charset="0"/>
+                      </a:endParaRPr>
+                    </a:p>
+                  </a:txBody>
+                  <a:tcPr marL="91440" marR="91440" marT="45720" marB="45720" anchor="ctr">
+                    <a:lnL w="6350" cap="flat" cmpd="sng" algn="ctr">
+                      <a:solidFill>
+                        <a:srgbClr val="D8DEE6"/>
+                      </a:solidFill>
+                      <a:prstDash val="solid"/>
+                      <a:round/>
+                      <a:headEnd type="none" w="med" len="med"/>
+                      <a:tailEnd type="none" w="med" len="med"/>
+                    </a:lnL>
+                    <a:lnR w="6350" cap="flat" cmpd="sng" algn="ctr">
+                      <a:solidFill>
+                        <a:srgbClr val="D8DEE6"/>
+                      </a:solidFill>
+                      <a:prstDash val="solid"/>
+                      <a:round/>
+                      <a:headEnd type="none" w="med" len="med"/>
+                      <a:tailEnd type="none" w="med" len="med"/>
+                    </a:lnR>
+                    <a:lnT w="6350" cap="flat" cmpd="sng" algn="ctr">
+                      <a:solidFill>
+                        <a:srgbClr val="D8DEE6"/>
+                      </a:solidFill>
+                      <a:prstDash val="solid"/>
+                      <a:round/>
+                      <a:headEnd type="none" w="med" len="med"/>
+                      <a:tailEnd type="none" w="med" len="med"/>
+                    </a:lnT>
+                    <a:lnB w="6350" cap="flat" cmpd="sng" algn="ctr">
+                      <a:solidFill>
+                        <a:srgbClr val="D8DEE6"/>
+                      </a:solidFill>
+                      <a:prstDash val="solid"/>
+                      <a:round/>
+                      <a:headEnd type="none" w="med" len="med"/>
+                      <a:tailEnd type="none" w="med" len="med"/>
+                    </a:lnB>
+                    <a:solidFill>
+                      <a:srgbClr val="FFFFFF"/>
+                    </a:solidFill>
+                  </a:tcPr>
+                </a:tc>
+                <a:tc>
+                  <a:txBody>
+                    <a:bodyPr/>
+                    <a:lstStyle/>
+                    <a:p>
+                      <a:pPr indent="0" marL="0">
+                        <a:buNone/>
+                      </a:pPr>
+                      <a:r>
+                        <a:rPr lang="en-US" sz="1000" dirty="0">
+                          <a:solidFill>
+                            <a:srgbClr val="1B2A4A"/>
+                          </a:solidFill>
+                          <a:latin typeface="Calibri" pitchFamily="34" charset="0"/>
+                          <a:ea typeface="Calibri" pitchFamily="34" charset="-122"/>
+                          <a:cs typeface="Calibri" pitchFamily="34" charset="-120"/>
+                        </a:rPr>
+                        <a:t>WhisperTest — iOS UI Automation</a:t>
+                      </a:r>
+                      <a:endParaRPr lang="en-US" sz="1000" dirty="0">
+                        <a:latin typeface="Calibri" charset="0"/>
+                        <a:ea typeface="Calibri" charset="0"/>
+                        <a:cs typeface="Calibri" charset="0"/>
+                      </a:endParaRPr>
+                    </a:p>
+                  </a:txBody>
+                  <a:tcPr marL="91440" marR="91440" marT="45720" marB="45720" anchor="ctr">
+                    <a:lnL w="6350" cap="flat" cmpd="sng" algn="ctr">
+                      <a:solidFill>
+                        <a:srgbClr val="D8DEE6"/>
+                      </a:solidFill>
+                      <a:prstDash val="solid"/>
+                      <a:round/>
+                      <a:headEnd type="none" w="med" len="med"/>
+                      <a:tailEnd type="none" w="med" len="med"/>
+                    </a:lnL>
+                    <a:lnR w="6350" cap="flat" cmpd="sng" algn="ctr">
+                      <a:solidFill>
+                        <a:srgbClr val="D8DEE6"/>
+                      </a:solidFill>
+                      <a:prstDash val="solid"/>
+                      <a:round/>
+                      <a:headEnd type="none" w="med" len="med"/>
+                      <a:tailEnd type="none" w="med" len="med"/>
+                    </a:lnR>
+                    <a:lnT w="6350" cap="flat" cmpd="sng" algn="ctr">
+                      <a:solidFill>
+                        <a:srgbClr val="D8DEE6"/>
+                      </a:solidFill>
+                      <a:prstDash val="solid"/>
+                      <a:round/>
+                      <a:headEnd type="none" w="med" len="med"/>
+                      <a:tailEnd type="none" w="med" len="med"/>
+                    </a:lnT>
+                    <a:lnB w="6350" cap="flat" cmpd="sng" algn="ctr">
+                      <a:solidFill>
+                        <a:srgbClr val="D8DEE6"/>
+                      </a:solidFill>
+                      <a:prstDash val="solid"/>
+                      <a:round/>
+                      <a:headEnd type="none" w="med" len="med"/>
+                      <a:tailEnd type="none" w="med" len="med"/>
+                    </a:lnB>
+                    <a:solidFill>
+                      <a:srgbClr val="FFFFFF"/>
+                    </a:solidFill>
+                  </a:tcPr>
+                </a:tc>
+                <a:tc>
+                  <a:txBody>
+                    <a:bodyPr/>
+                    <a:lstStyle/>
+                    <a:p>
+                      <a:pPr indent="0" marL="0">
+                        <a:buNone/>
+                      </a:pPr>
+                      <a:r>
+                        <a:rPr lang="en-US" sz="1000" dirty="0">
+                          <a:solidFill>
+                            <a:srgbClr val="1B2A4A"/>
+                          </a:solidFill>
+                          <a:latin typeface="Calibri" pitchFamily="34" charset="0"/>
+                          <a:ea typeface="Calibri" pitchFamily="34" charset="-122"/>
+                          <a:cs typeface="Calibri" pitchFamily="34" charset="-120"/>
+                        </a:rPr>
+                        <a:t>2025</a:t>
+                      </a:r>
+                      <a:endParaRPr lang="en-US" sz="1000" dirty="0">
+                        <a:latin typeface="Calibri" charset="0"/>
+                        <a:ea typeface="Calibri" charset="0"/>
+                        <a:cs typeface="Calibri" charset="0"/>
+                      </a:endParaRPr>
+                    </a:p>
+                  </a:txBody>
+                  <a:tcPr marL="91440" marR="91440" marT="45720" marB="45720" anchor="ctr">
+                    <a:lnL w="6350" cap="flat" cmpd="sng" algn="ctr">
+                      <a:solidFill>
+                        <a:srgbClr val="D8DEE6"/>
+                      </a:solidFill>
+                      <a:prstDash val="solid"/>
+                      <a:round/>
+                      <a:headEnd type="none" w="med" len="med"/>
+                      <a:tailEnd type="none" w="med" len="med"/>
+                    </a:lnL>
+                    <a:lnR w="6350" cap="flat" cmpd="sng" algn="ctr">
+                      <a:solidFill>
+                        <a:srgbClr val="D8DEE6"/>
+                      </a:solidFill>
+                      <a:prstDash val="solid"/>
+                      <a:round/>
+                      <a:headEnd type="none" w="med" len="med"/>
+                      <a:tailEnd type="none" w="med" len="med"/>
+                    </a:lnR>
+                    <a:lnT w="6350" cap="flat" cmpd="sng" algn="ctr">
+                      <a:solidFill>
+                        <a:srgbClr val="D8DEE6"/>
+                      </a:solidFill>
+                      <a:prstDash val="solid"/>
+                      <a:round/>
+                      <a:headEnd type="none" w="med" len="med"/>
+                      <a:tailEnd type="none" w="med" len="med"/>
+                    </a:lnT>
+                    <a:lnB w="6350" cap="flat" cmpd="sng" algn="ctr">
+                      <a:solidFill>
+                        <a:srgbClr val="D8DEE6"/>
+                      </a:solidFill>
+                      <a:prstDash val="solid"/>
+                      <a:round/>
+                      <a:headEnd type="none" w="med" len="med"/>
+                      <a:tailEnd type="none" w="med" len="med"/>
+                    </a:lnB>
+                    <a:solidFill>
+                      <a:srgbClr val="FFFFFF"/>
+                    </a:solidFill>
+                  </a:tcPr>
+                </a:tc>
+                <a:tc>
+                  <a:txBody>
+                    <a:bodyPr/>
+                    <a:lstStyle/>
+                    <a:p>
+                      <a:pPr indent="0" marL="0">
+                        <a:buNone/>
+                      </a:pPr>
+                      <a:r>
+                        <a:rPr lang="en-US" sz="1000" dirty="0">
+                          <a:solidFill>
+                            <a:srgbClr val="1B2A4A"/>
+                          </a:solidFill>
+                          <a:latin typeface="Calibri" pitchFamily="34" charset="0"/>
+                          <a:ea typeface="Calibri" pitchFamily="34" charset="-122"/>
+                          <a:cs typeface="Calibri" pitchFamily="34" charset="-120"/>
+                        </a:rPr>
+                        <a:t>0</a:t>
+                      </a:r>
+                      <a:endParaRPr lang="en-US" sz="1000" dirty="0">
+                        <a:latin typeface="Calibri" charset="0"/>
+                        <a:ea typeface="Calibri" charset="0"/>
+                        <a:cs typeface="Calibri" charset="0"/>
+                      </a:endParaRPr>
+                    </a:p>
+                  </a:txBody>
+                  <a:tcPr marL="91440" marR="91440" marT="45720" marB="45720" anchor="ctr">
+                    <a:lnL w="6350" cap="flat" cmpd="sng" algn="ctr">
+                      <a:solidFill>
+                        <a:srgbClr val="D8DEE6"/>
+                      </a:solidFill>
+                      <a:prstDash val="solid"/>
+                      <a:round/>
+                      <a:headEnd type="none" w="med" len="med"/>
+                      <a:tailEnd type="none" w="med" len="med"/>
+                    </a:lnL>
+                    <a:lnR w="6350" cap="flat" cmpd="sng" algn="ctr">
+                      <a:solidFill>
+                        <a:srgbClr val="D8DEE6"/>
+                      </a:solidFill>
+                      <a:prstDash val="solid"/>
+                      <a:round/>
+                      <a:headEnd type="none" w="med" len="med"/>
+                      <a:tailEnd type="none" w="med" len="med"/>
+                    </a:lnR>
+                    <a:lnT w="6350" cap="flat" cmpd="sng" algn="ctr">
+                      <a:solidFill>
+                        <a:srgbClr val="D8DEE6"/>
+                      </a:solidFill>
+                      <a:prstDash val="solid"/>
+                      <a:round/>
+                      <a:headEnd type="none" w="med" len="med"/>
+                      <a:tailEnd type="none" w="med" len="med"/>
+                    </a:lnT>
+                    <a:lnB w="6350" cap="flat" cmpd="sng" algn="ctr">
+                      <a:solidFill>
+                        <a:srgbClr val="D8DEE6"/>
+                      </a:solidFill>
+                      <a:prstDash val="solid"/>
+                      <a:round/>
+                      <a:headEnd type="none" w="med" len="med"/>
+                      <a:tailEnd type="none" w="med" len="med"/>
+                    </a:lnB>
+                    <a:solidFill>
+                      <a:srgbClr val="FFFFFF"/>
+                    </a:solidFill>
+                  </a:tcPr>
+                </a:tc>
+                <a:tc>
+                  <a:txBody>
+                    <a:bodyPr/>
+                    <a:lstStyle/>
+                    <a:p>
+                      <a:pPr indent="0" marL="0">
+                        <a:buNone/>
+                      </a:pPr>
+                      <a:r>
+                        <a:rPr lang="en-US" sz="1000" dirty="0">
+                          <a:solidFill>
+                            <a:srgbClr val="1B2A4A"/>
+                          </a:solidFill>
+                          <a:latin typeface="Calibri" pitchFamily="34" charset="0"/>
+                          <a:ea typeface="Calibri" pitchFamily="34" charset="-122"/>
+                          <a:cs typeface="Calibri" pitchFamily="34" charset="-120"/>
+                        </a:rPr>
+                        <a:t>iOS, não Android</a:t>
+                      </a:r>
+                      <a:endParaRPr lang="en-US" sz="1000" dirty="0">
+                        <a:latin typeface="Calibri" charset="0"/>
+                        <a:ea typeface="Calibri" charset="0"/>
+                        <a:cs typeface="Calibri" charset="0"/>
+                      </a:endParaRPr>
+                    </a:p>
+                  </a:txBody>
+                  <a:tcPr marL="91440" marR="91440" marT="45720" marB="45720" anchor="ctr">
+                    <a:lnL w="6350" cap="flat" cmpd="sng" algn="ctr">
+                      <a:solidFill>
+                        <a:srgbClr val="D8DEE6"/>
+                      </a:solidFill>
+                      <a:prstDash val="solid"/>
+                      <a:round/>
+                      <a:headEnd type="none" w="med" len="med"/>
+                      <a:tailEnd type="none" w="med" len="med"/>
+                    </a:lnL>
+                    <a:lnR w="6350" cap="flat" cmpd="sng" algn="ctr">
+                      <a:solidFill>
+                        <a:srgbClr val="D8DEE6"/>
+                      </a:solidFill>
+                      <a:prstDash val="solid"/>
+                      <a:round/>
+                      <a:headEnd type="none" w="med" len="med"/>
+                      <a:tailEnd type="none" w="med" len="med"/>
+                    </a:lnR>
+                    <a:lnT w="6350" cap="flat" cmpd="sng" algn="ctr">
+                      <a:solidFill>
+                        <a:srgbClr val="D8DEE6"/>
+                      </a:solidFill>
+                      <a:prstDash val="solid"/>
+                      <a:round/>
+                      <a:headEnd type="none" w="med" len="med"/>
+                      <a:tailEnd type="none" w="med" len="med"/>
+                    </a:lnT>
+                    <a:lnB w="6350" cap="flat" cmpd="sng" algn="ctr">
+                      <a:solidFill>
+                        <a:srgbClr val="D8DEE6"/>
+                      </a:solidFill>
+                      <a:prstDash val="solid"/>
+                      <a:round/>
+                      <a:headEnd type="none" w="med" len="med"/>
+                      <a:tailEnd type="none" w="med" len="med"/>
+                    </a:lnB>
+                    <a:solidFill>
+                      <a:srgbClr val="FFFFFF"/>
+                    </a:solidFill>
+                  </a:tcPr>
+                </a:tc>
+              </a:tr>
+              <a:tr h="246888">
+                <a:tc>
+                  <a:txBody>
+                    <a:bodyPr/>
+                    <a:lstStyle/>
+                    <a:p>
+                      <a:pPr indent="0" marL="0">
+                        <a:buNone/>
+                      </a:pPr>
+                      <a:r>
+                        <a:rPr lang="en-US" sz="1000" dirty="0">
+                          <a:solidFill>
+                            <a:srgbClr val="1B2A4A"/>
+                          </a:solidFill>
+                          <a:latin typeface="Calibri" pitchFamily="34" charset="0"/>
+                          <a:ea typeface="Calibri" pitchFamily="34" charset="-122"/>
+                          <a:cs typeface="Calibri" pitchFamily="34" charset="-120"/>
+                        </a:rPr>
+                        <a:t>2</a:t>
+                      </a:r>
+                      <a:endParaRPr lang="en-US" sz="1000" dirty="0">
+                        <a:latin typeface="Calibri" charset="0"/>
+                        <a:ea typeface="Calibri" charset="0"/>
+                        <a:cs typeface="Calibri" charset="0"/>
+                      </a:endParaRPr>
+                    </a:p>
+                  </a:txBody>
+                  <a:tcPr marL="91440" marR="91440" marT="45720" marB="45720" anchor="ctr">
+                    <a:lnL w="6350" cap="flat" cmpd="sng" algn="ctr">
+                      <a:solidFill>
+                        <a:srgbClr val="D8DEE6"/>
+                      </a:solidFill>
+                      <a:prstDash val="solid"/>
+                      <a:round/>
+                      <a:headEnd type="none" w="med" len="med"/>
+                      <a:tailEnd type="none" w="med" len="med"/>
+                    </a:lnL>
+                    <a:lnR w="6350" cap="flat" cmpd="sng" algn="ctr">
+                      <a:solidFill>
+                        <a:srgbClr val="D8DEE6"/>
+                      </a:solidFill>
+                      <a:prstDash val="solid"/>
+                      <a:round/>
+                      <a:headEnd type="none" w="med" len="med"/>
+                      <a:tailEnd type="none" w="med" len="med"/>
+                    </a:lnR>
+                    <a:lnT w="6350" cap="flat" cmpd="sng" algn="ctr">
+                      <a:solidFill>
+                        <a:srgbClr val="D8DEE6"/>
+                      </a:solidFill>
+                      <a:prstDash val="solid"/>
+                      <a:round/>
+                      <a:headEnd type="none" w="med" len="med"/>
+                      <a:tailEnd type="none" w="med" len="med"/>
+                    </a:lnT>
+                    <a:lnB w="6350" cap="flat" cmpd="sng" algn="ctr">
+                      <a:solidFill>
+                        <a:srgbClr val="D8DEE6"/>
+                      </a:solidFill>
+                      <a:prstDash val="solid"/>
+                      <a:round/>
+                      <a:headEnd type="none" w="med" len="med"/>
+                      <a:tailEnd type="none" w="med" len="med"/>
+                    </a:lnB>
+                    <a:solidFill>
+                      <a:srgbClr val="FFFFFF"/>
+                    </a:solidFill>
+                  </a:tcPr>
+                </a:tc>
+                <a:tc>
+                  <a:txBody>
+                    <a:bodyPr/>
+                    <a:lstStyle/>
+                    <a:p>
+                      <a:pPr indent="0" marL="0">
+                        <a:buNone/>
+                      </a:pPr>
+                      <a:r>
+                        <a:rPr lang="en-US" sz="1000" dirty="0">
+                          <a:solidFill>
+                            <a:srgbClr val="1B2A4A"/>
+                          </a:solidFill>
+                          <a:latin typeface="Calibri" pitchFamily="34" charset="0"/>
+                          <a:ea typeface="Calibri" pitchFamily="34" charset="-122"/>
+                          <a:cs typeface="Calibri" pitchFamily="34" charset="-120"/>
+                        </a:rPr>
+                        <a:t>A Comprehensive Study on 3rd-Party User Tracking</a:t>
+                      </a:r>
+                      <a:endParaRPr lang="en-US" sz="1000" dirty="0">
+                        <a:latin typeface="Calibri" charset="0"/>
+                        <a:ea typeface="Calibri" charset="0"/>
+                        <a:cs typeface="Calibri" charset="0"/>
+                      </a:endParaRPr>
+                    </a:p>
+                  </a:txBody>
+                  <a:tcPr marL="91440" marR="91440" marT="45720" marB="45720" anchor="ctr">
+                    <a:lnL w="6350" cap="flat" cmpd="sng" algn="ctr">
+                      <a:solidFill>
+                        <a:srgbClr val="D8DEE6"/>
+                      </a:solidFill>
+                      <a:prstDash val="solid"/>
+                      <a:round/>
+                      <a:headEnd type="none" w="med" len="med"/>
+                      <a:tailEnd type="none" w="med" len="med"/>
+                    </a:lnL>
+                    <a:lnR w="6350" cap="flat" cmpd="sng" algn="ctr">
+                      <a:solidFill>
+                        <a:srgbClr val="D8DEE6"/>
+                      </a:solidFill>
+                      <a:prstDash val="solid"/>
+                      <a:round/>
+                      <a:headEnd type="none" w="med" len="med"/>
+                      <a:tailEnd type="none" w="med" len="med"/>
+                    </a:lnR>
+                    <a:lnT w="6350" cap="flat" cmpd="sng" algn="ctr">
+                      <a:solidFill>
+                        <a:srgbClr val="D8DEE6"/>
+                      </a:solidFill>
+                      <a:prstDash val="solid"/>
+                      <a:round/>
+                      <a:headEnd type="none" w="med" len="med"/>
+                      <a:tailEnd type="none" w="med" len="med"/>
+                    </a:lnT>
+                    <a:lnB w="6350" cap="flat" cmpd="sng" algn="ctr">
+                      <a:solidFill>
+                        <a:srgbClr val="D8DEE6"/>
+                      </a:solidFill>
+                      <a:prstDash val="solid"/>
+                      <a:round/>
+                      <a:headEnd type="none" w="med" len="med"/>
+                      <a:tailEnd type="none" w="med" len="med"/>
+                    </a:lnB>
+                    <a:solidFill>
+                      <a:srgbClr val="FFFFFF"/>
+                    </a:solidFill>
+                  </a:tcPr>
+                </a:tc>
+                <a:tc>
+                  <a:txBody>
+                    <a:bodyPr/>
+                    <a:lstStyle/>
+                    <a:p>
+                      <a:pPr indent="0" marL="0">
+                        <a:buNone/>
+                      </a:pPr>
+                      <a:r>
+                        <a:rPr lang="en-US" sz="1000" dirty="0">
+                          <a:solidFill>
+                            <a:srgbClr val="1B2A4A"/>
+                          </a:solidFill>
+                          <a:latin typeface="Calibri" pitchFamily="34" charset="0"/>
+                          <a:ea typeface="Calibri" pitchFamily="34" charset="-122"/>
+                          <a:cs typeface="Calibri" pitchFamily="34" charset="-120"/>
+                        </a:rPr>
+                        <a:t>2023</a:t>
+                      </a:r>
+                      <a:endParaRPr lang="en-US" sz="1000" dirty="0">
+                        <a:latin typeface="Calibri" charset="0"/>
+                        <a:ea typeface="Calibri" charset="0"/>
+                        <a:cs typeface="Calibri" charset="0"/>
+                      </a:endParaRPr>
+                    </a:p>
+                  </a:txBody>
+                  <a:tcPr marL="91440" marR="91440" marT="45720" marB="45720" anchor="ctr">
+                    <a:lnL w="6350" cap="flat" cmpd="sng" algn="ctr">
+                      <a:solidFill>
+                        <a:srgbClr val="D8DEE6"/>
+                      </a:solidFill>
+                      <a:prstDash val="solid"/>
+                      <a:round/>
+                      <a:headEnd type="none" w="med" len="med"/>
+                      <a:tailEnd type="none" w="med" len="med"/>
+                    </a:lnL>
+                    <a:lnR w="6350" cap="flat" cmpd="sng" algn="ctr">
+                      <a:solidFill>
+                        <a:srgbClr val="D8DEE6"/>
+                      </a:solidFill>
+                      <a:prstDash val="solid"/>
+                      <a:round/>
+                      <a:headEnd type="none" w="med" len="med"/>
+                      <a:tailEnd type="none" w="med" len="med"/>
+                    </a:lnR>
+                    <a:lnT w="6350" cap="flat" cmpd="sng" algn="ctr">
+                      <a:solidFill>
+                        <a:srgbClr val="D8DEE6"/>
+                      </a:solidFill>
+                      <a:prstDash val="solid"/>
+                      <a:round/>
+                      <a:headEnd type="none" w="med" len="med"/>
+                      <a:tailEnd type="none" w="med" len="med"/>
+                    </a:lnT>
+                    <a:lnB w="6350" cap="flat" cmpd="sng" algn="ctr">
+                      <a:solidFill>
+                        <a:srgbClr val="D8DEE6"/>
+                      </a:solidFill>
+                      <a:prstDash val="solid"/>
+                      <a:round/>
+                      <a:headEnd type="none" w="med" len="med"/>
+                      <a:tailEnd type="none" w="med" len="med"/>
+                    </a:lnB>
+                    <a:solidFill>
+                      <a:srgbClr val="FFFFFF"/>
+                    </a:solidFill>
+                  </a:tcPr>
+                </a:tc>
+                <a:tc>
+                  <a:txBody>
+                    <a:bodyPr/>
+                    <a:lstStyle/>
+                    <a:p>
+                      <a:pPr indent="0" marL="0">
+                        <a:buNone/>
+                      </a:pPr>
+                      <a:r>
+                        <a:rPr lang="en-US" sz="1000" dirty="0">
+                          <a:solidFill>
+                            <a:srgbClr val="1B2A4A"/>
+                          </a:solidFill>
+                          <a:latin typeface="Calibri" pitchFamily="34" charset="0"/>
+                          <a:ea typeface="Calibri" pitchFamily="34" charset="-122"/>
+                          <a:cs typeface="Calibri" pitchFamily="34" charset="-120"/>
+                        </a:rPr>
+                        <a:t>10</a:t>
+                      </a:r>
+                      <a:endParaRPr lang="en-US" sz="1000" dirty="0">
+                        <a:latin typeface="Calibri" charset="0"/>
+                        <a:ea typeface="Calibri" charset="0"/>
+                        <a:cs typeface="Calibri" charset="0"/>
+                      </a:endParaRPr>
+                    </a:p>
+                  </a:txBody>
+                  <a:tcPr marL="91440" marR="91440" marT="45720" marB="45720" anchor="ctr">
+                    <a:lnL w="6350" cap="flat" cmpd="sng" algn="ctr">
+                      <a:solidFill>
+                        <a:srgbClr val="D8DEE6"/>
+                      </a:solidFill>
+                      <a:prstDash val="solid"/>
+                      <a:round/>
+                      <a:headEnd type="none" w="med" len="med"/>
+                      <a:tailEnd type="none" w="med" len="med"/>
+                    </a:lnL>
+                    <a:lnR w="6350" cap="flat" cmpd="sng" algn="ctr">
+                      <a:solidFill>
+                        <a:srgbClr val="D8DEE6"/>
+                      </a:solidFill>
+                      <a:prstDash val="solid"/>
+                      <a:round/>
+                      <a:headEnd type="none" w="med" len="med"/>
+                      <a:tailEnd type="none" w="med" len="med"/>
+                    </a:lnR>
+                    <a:lnT w="6350" cap="flat" cmpd="sng" algn="ctr">
+                      <a:solidFill>
+                        <a:srgbClr val="D8DEE6"/>
+                      </a:solidFill>
+                      <a:prstDash val="solid"/>
+                      <a:round/>
+                      <a:headEnd type="none" w="med" len="med"/>
+                      <a:tailEnd type="none" w="med" len="med"/>
+                    </a:lnT>
+                    <a:lnB w="6350" cap="flat" cmpd="sng" algn="ctr">
+                      <a:solidFill>
+                        <a:srgbClr val="D8DEE6"/>
+                      </a:solidFill>
+                      <a:prstDash val="solid"/>
+                      <a:round/>
+                      <a:headEnd type="none" w="med" len="med"/>
+                      <a:tailEnd type="none" w="med" len="med"/>
+                    </a:lnB>
+                    <a:solidFill>
+                      <a:srgbClr val="FFFFFF"/>
+                    </a:solidFill>
+                  </a:tcPr>
+                </a:tc>
+                <a:tc>
+                  <a:txBody>
+                    <a:bodyPr/>
+                    <a:lstStyle/>
+                    <a:p>
+                      <a:pPr indent="0" marL="0">
+                        <a:buNone/>
+                      </a:pPr>
+                      <a:r>
+                        <a:rPr lang="en-US" sz="1000" dirty="0">
+                          <a:solidFill>
+                            <a:srgbClr val="1B2A4A"/>
+                          </a:solidFill>
+                          <a:latin typeface="Calibri" pitchFamily="34" charset="0"/>
+                          <a:ea typeface="Calibri" pitchFamily="34" charset="-122"/>
+                          <a:cs typeface="Calibri" pitchFamily="34" charset="-120"/>
+                        </a:rPr>
+                        <a:t>menos citado</a:t>
+                      </a:r>
+                      <a:endParaRPr lang="en-US" sz="1000" dirty="0">
+                        <a:latin typeface="Calibri" charset="0"/>
+                        <a:ea typeface="Calibri" charset="0"/>
+                        <a:cs typeface="Calibri" charset="0"/>
+                      </a:endParaRPr>
+                    </a:p>
+                  </a:txBody>
+                  <a:tcPr marL="91440" marR="91440" marT="45720" marB="45720" anchor="ctr">
+                    <a:lnL w="6350" cap="flat" cmpd="sng" algn="ctr">
+                      <a:solidFill>
+                        <a:srgbClr val="D8DEE6"/>
+                      </a:solidFill>
+                      <a:prstDash val="solid"/>
+                      <a:round/>
+                      <a:headEnd type="none" w="med" len="med"/>
+                      <a:tailEnd type="none" w="med" len="med"/>
+                    </a:lnL>
+                    <a:lnR w="6350" cap="flat" cmpd="sng" algn="ctr">
+                      <a:solidFill>
+                        <a:srgbClr val="D8DEE6"/>
+                      </a:solidFill>
+                      <a:prstDash val="solid"/>
+                      <a:round/>
+                      <a:headEnd type="none" w="med" len="med"/>
+                      <a:tailEnd type="none" w="med" len="med"/>
+                    </a:lnR>
+                    <a:lnT w="6350" cap="flat" cmpd="sng" algn="ctr">
+                      <a:solidFill>
+                        <a:srgbClr val="D8DEE6"/>
+                      </a:solidFill>
+                      <a:prstDash val="solid"/>
+                      <a:round/>
+                      <a:headEnd type="none" w="med" len="med"/>
+                      <a:tailEnd type="none" w="med" len="med"/>
+                    </a:lnT>
+                    <a:lnB w="6350" cap="flat" cmpd="sng" algn="ctr">
+                      <a:solidFill>
+                        <a:srgbClr val="D8DEE6"/>
+                      </a:solidFill>
+                      <a:prstDash val="solid"/>
+                      <a:round/>
+                      <a:headEnd type="none" w="med" len="med"/>
+                      <a:tailEnd type="none" w="med" len="med"/>
+                    </a:lnB>
+                    <a:solidFill>
+                      <a:srgbClr val="FFFFFF"/>
+                    </a:solidFill>
+                  </a:tcPr>
+                </a:tc>
+              </a:tr>
+              <a:tr h="246888">
+                <a:tc>
+                  <a:txBody>
+                    <a:bodyPr/>
+                    <a:lstStyle/>
+                    <a:p>
+                      <a:pPr indent="0" marL="0">
+                        <a:buNone/>
+                      </a:pPr>
+                      <a:r>
+                        <a:rPr lang="en-US" sz="1000" b="1" dirty="0">
+                          <a:solidFill>
+                            <a:srgbClr val="1E6B3A"/>
+                          </a:solidFill>
+                          <a:latin typeface="Calibri" pitchFamily="34" charset="0"/>
+                          <a:ea typeface="Calibri" pitchFamily="34" charset="-122"/>
+                          <a:cs typeface="Calibri" pitchFamily="34" charset="-120"/>
+                        </a:rPr>
+                        <a:t>3</a:t>
+                      </a:r>
+                      <a:endParaRPr lang="en-US" sz="1000" dirty="0">
+                        <a:latin typeface="Calibri" charset="0"/>
+                        <a:ea typeface="Calibri" charset="0"/>
+                        <a:cs typeface="Calibri" charset="0"/>
+                      </a:endParaRPr>
+                    </a:p>
+                  </a:txBody>
+                  <a:tcPr marL="91440" marR="91440" marT="45720" marB="45720" anchor="ctr">
+                    <a:lnL w="6350" cap="flat" cmpd="sng" algn="ctr">
+                      <a:solidFill>
+                        <a:srgbClr val="D8DEE6"/>
+                      </a:solidFill>
+                      <a:prstDash val="solid"/>
+                      <a:round/>
+                      <a:headEnd type="none" w="med" len="med"/>
+                      <a:tailEnd type="none" w="med" len="med"/>
+                    </a:lnL>
+                    <a:lnR w="6350" cap="flat" cmpd="sng" algn="ctr">
+                      <a:solidFill>
+                        <a:srgbClr val="D8DEE6"/>
+                      </a:solidFill>
+                      <a:prstDash val="solid"/>
+                      <a:round/>
+                      <a:headEnd type="none" w="med" len="med"/>
+                      <a:tailEnd type="none" w="med" len="med"/>
+                    </a:lnR>
+                    <a:lnT w="6350" cap="flat" cmpd="sng" algn="ctr">
+                      <a:solidFill>
+                        <a:srgbClr val="D8DEE6"/>
+                      </a:solidFill>
+                      <a:prstDash val="solid"/>
+                      <a:round/>
+                      <a:headEnd type="none" w="med" len="med"/>
+                      <a:tailEnd type="none" w="med" len="med"/>
+                    </a:lnT>
+                    <a:lnB w="6350" cap="flat" cmpd="sng" algn="ctr">
+                      <a:solidFill>
+                        <a:srgbClr val="D8DEE6"/>
+                      </a:solidFill>
+                      <a:prstDash val="solid"/>
+                      <a:round/>
+                      <a:headEnd type="none" w="med" len="med"/>
+                      <a:tailEnd type="none" w="med" len="med"/>
+                    </a:lnB>
+                    <a:solidFill>
+                      <a:srgbClr val="FFFFFF"/>
+                    </a:solidFill>
+                  </a:tcPr>
+                </a:tc>
+                <a:tc>
+                  <a:txBody>
+                    <a:bodyPr/>
+                    <a:lstStyle/>
+                    <a:p>
+                      <a:pPr indent="0" marL="0">
+                        <a:buNone/>
+                      </a:pPr>
+                      <a:r>
+                        <a:rPr lang="en-US" sz="1000" b="1" dirty="0">
+                          <a:solidFill>
+                            <a:srgbClr val="1E6B3A"/>
+                          </a:solidFill>
+                          <a:latin typeface="Calibri" pitchFamily="34" charset="0"/>
+                          <a:ea typeface="Calibri" pitchFamily="34" charset="-122"/>
+                          <a:cs typeface="Calibri" pitchFamily="34" charset="-120"/>
+                        </a:rPr>
+                        <a:t>Freely Given Consent?  (Nguyen, Backes, Stock)</a:t>
+                      </a:r>
+                      <a:endParaRPr lang="en-US" sz="1000" dirty="0">
+                        <a:latin typeface="Calibri" charset="0"/>
+                        <a:ea typeface="Calibri" charset="0"/>
+                        <a:cs typeface="Calibri" charset="0"/>
+                      </a:endParaRPr>
+                    </a:p>
+                  </a:txBody>
+                  <a:tcPr marL="91440" marR="91440" marT="45720" marB="45720" anchor="ctr">
+                    <a:lnL w="6350" cap="flat" cmpd="sng" algn="ctr">
+                      <a:solidFill>
+                        <a:srgbClr val="D8DEE6"/>
+                      </a:solidFill>
+                      <a:prstDash val="solid"/>
+                      <a:round/>
+                      <a:headEnd type="none" w="med" len="med"/>
+                      <a:tailEnd type="none" w="med" len="med"/>
+                    </a:lnL>
+                    <a:lnR w="6350" cap="flat" cmpd="sng" algn="ctr">
+                      <a:solidFill>
+                        <a:srgbClr val="D8DEE6"/>
+                      </a:solidFill>
+                      <a:prstDash val="solid"/>
+                      <a:round/>
+                      <a:headEnd type="none" w="med" len="med"/>
+                      <a:tailEnd type="none" w="med" len="med"/>
+                    </a:lnR>
+                    <a:lnT w="6350" cap="flat" cmpd="sng" algn="ctr">
+                      <a:solidFill>
+                        <a:srgbClr val="D8DEE6"/>
+                      </a:solidFill>
+                      <a:prstDash val="solid"/>
+                      <a:round/>
+                      <a:headEnd type="none" w="med" len="med"/>
+                      <a:tailEnd type="none" w="med" len="med"/>
+                    </a:lnT>
+                    <a:lnB w="6350" cap="flat" cmpd="sng" algn="ctr">
+                      <a:solidFill>
+                        <a:srgbClr val="D8DEE6"/>
+                      </a:solidFill>
+                      <a:prstDash val="solid"/>
+                      <a:round/>
+                      <a:headEnd type="none" w="med" len="med"/>
+                      <a:tailEnd type="none" w="med" len="med"/>
+                    </a:lnB>
+                    <a:solidFill>
+                      <a:srgbClr val="FFFFFF"/>
+                    </a:solidFill>
+                  </a:tcPr>
+                </a:tc>
+                <a:tc>
+                  <a:txBody>
+                    <a:bodyPr/>
+                    <a:lstStyle/>
+                    <a:p>
+                      <a:pPr indent="0" marL="0">
+                        <a:buNone/>
+                      </a:pPr>
+                      <a:r>
+                        <a:rPr lang="en-US" sz="1000" b="1" dirty="0">
+                          <a:solidFill>
+                            <a:srgbClr val="1E6B3A"/>
+                          </a:solidFill>
+                          <a:latin typeface="Calibri" pitchFamily="34" charset="0"/>
+                          <a:ea typeface="Calibri" pitchFamily="34" charset="-122"/>
+                          <a:cs typeface="Calibri" pitchFamily="34" charset="-120"/>
+                        </a:rPr>
+                        <a:t>2022</a:t>
+                      </a:r>
+                      <a:endParaRPr lang="en-US" sz="1000" dirty="0">
+                        <a:latin typeface="Calibri" charset="0"/>
+                        <a:ea typeface="Calibri" charset="0"/>
+                        <a:cs typeface="Calibri" charset="0"/>
+                      </a:endParaRPr>
+                    </a:p>
+                  </a:txBody>
+                  <a:tcPr marL="91440" marR="91440" marT="45720" marB="45720" anchor="ctr">
+                    <a:lnL w="6350" cap="flat" cmpd="sng" algn="ctr">
+                      <a:solidFill>
+                        <a:srgbClr val="D8DEE6"/>
+                      </a:solidFill>
+                      <a:prstDash val="solid"/>
+                      <a:round/>
+                      <a:headEnd type="none" w="med" len="med"/>
+                      <a:tailEnd type="none" w="med" len="med"/>
+                    </a:lnL>
+                    <a:lnR w="6350" cap="flat" cmpd="sng" algn="ctr">
+                      <a:solidFill>
+                        <a:srgbClr val="D8DEE6"/>
+                      </a:solidFill>
+                      <a:prstDash val="solid"/>
+                      <a:round/>
+                      <a:headEnd type="none" w="med" len="med"/>
+                      <a:tailEnd type="none" w="med" len="med"/>
+                    </a:lnR>
+                    <a:lnT w="6350" cap="flat" cmpd="sng" algn="ctr">
+                      <a:solidFill>
+                        <a:srgbClr val="D8DEE6"/>
+                      </a:solidFill>
+                      <a:prstDash val="solid"/>
+                      <a:round/>
+                      <a:headEnd type="none" w="med" len="med"/>
+                      <a:tailEnd type="none" w="med" len="med"/>
+                    </a:lnT>
+                    <a:lnB w="6350" cap="flat" cmpd="sng" algn="ctr">
+                      <a:solidFill>
+                        <a:srgbClr val="D8DEE6"/>
+                      </a:solidFill>
+                      <a:prstDash val="solid"/>
+                      <a:round/>
+                      <a:headEnd type="none" w="med" len="med"/>
+                      <a:tailEnd type="none" w="med" len="med"/>
+                    </a:lnB>
+                    <a:solidFill>
+                      <a:srgbClr val="FFFFFF"/>
+                    </a:solidFill>
+                  </a:tcPr>
+                </a:tc>
+                <a:tc>
+                  <a:txBody>
+                    <a:bodyPr/>
+                    <a:lstStyle/>
+                    <a:p>
+                      <a:pPr indent="0" marL="0">
+                        <a:buNone/>
+                      </a:pPr>
+                      <a:r>
+                        <a:rPr lang="en-US" sz="1000" b="1" dirty="0">
+                          <a:solidFill>
+                            <a:srgbClr val="1E6B3A"/>
+                          </a:solidFill>
+                          <a:latin typeface="Calibri" pitchFamily="34" charset="0"/>
+                          <a:ea typeface="Calibri" pitchFamily="34" charset="-122"/>
+                          <a:cs typeface="Calibri" pitchFamily="34" charset="-120"/>
+                        </a:rPr>
+                        <a:t>52</a:t>
+                      </a:r>
+                      <a:endParaRPr lang="en-US" sz="1000" dirty="0">
+                        <a:latin typeface="Calibri" charset="0"/>
+                        <a:ea typeface="Calibri" charset="0"/>
+                        <a:cs typeface="Calibri" charset="0"/>
+                      </a:endParaRPr>
+                    </a:p>
+                  </a:txBody>
+                  <a:tcPr marL="91440" marR="91440" marT="45720" marB="45720" anchor="ctr">
+                    <a:lnL w="6350" cap="flat" cmpd="sng" algn="ctr">
+                      <a:solidFill>
+                        <a:srgbClr val="D8DEE6"/>
+                      </a:solidFill>
+                      <a:prstDash val="solid"/>
+                      <a:round/>
+                      <a:headEnd type="none" w="med" len="med"/>
+                      <a:tailEnd type="none" w="med" len="med"/>
+                    </a:lnL>
+                    <a:lnR w="6350" cap="flat" cmpd="sng" algn="ctr">
+                      <a:solidFill>
+                        <a:srgbClr val="D8DEE6"/>
+                      </a:solidFill>
+                      <a:prstDash val="solid"/>
+                      <a:round/>
+                      <a:headEnd type="none" w="med" len="med"/>
+                      <a:tailEnd type="none" w="med" len="med"/>
+                    </a:lnR>
+                    <a:lnT w="6350" cap="flat" cmpd="sng" algn="ctr">
+                      <a:solidFill>
+                        <a:srgbClr val="D8DEE6"/>
+                      </a:solidFill>
+                      <a:prstDash val="solid"/>
+                      <a:round/>
+                      <a:headEnd type="none" w="med" len="med"/>
+                      <a:tailEnd type="none" w="med" len="med"/>
+                    </a:lnT>
+                    <a:lnB w="6350" cap="flat" cmpd="sng" algn="ctr">
+                      <a:solidFill>
+                        <a:srgbClr val="D8DEE6"/>
+                      </a:solidFill>
+                      <a:prstDash val="solid"/>
+                      <a:round/>
+                      <a:headEnd type="none" w="med" len="med"/>
+                      <a:tailEnd type="none" w="med" len="med"/>
+                    </a:lnB>
+                    <a:solidFill>
+                      <a:srgbClr val="FFFFFF"/>
+                    </a:solidFill>
+                  </a:tcPr>
+                </a:tc>
+                <a:tc>
+                  <a:txBody>
+                    <a:bodyPr/>
+                    <a:lstStyle/>
+                    <a:p>
+                      <a:pPr indent="0" marL="0">
+                        <a:buNone/>
+                      </a:pPr>
+                      <a:r>
+                        <a:rPr lang="en-US" sz="1000" b="1" dirty="0">
+                          <a:solidFill>
+                            <a:srgbClr val="1E6B3A"/>
+                          </a:solidFill>
+                          <a:latin typeface="Calibri" pitchFamily="34" charset="0"/>
+                          <a:ea typeface="Calibri" pitchFamily="34" charset="-122"/>
+                          <a:cs typeface="Calibri" pitchFamily="34" charset="-120"/>
+                        </a:rPr>
+                        <a:t>SELECIONADO</a:t>
+                      </a:r>
+                      <a:endParaRPr lang="en-US" sz="1000" dirty="0">
+                        <a:latin typeface="Calibri" charset="0"/>
+                        <a:ea typeface="Calibri" charset="0"/>
+                        <a:cs typeface="Calibri" charset="0"/>
+                      </a:endParaRPr>
+                    </a:p>
+                  </a:txBody>
+                  <a:tcPr marL="91440" marR="91440" marT="45720" marB="45720" anchor="ctr">
+                    <a:lnL w="6350" cap="flat" cmpd="sng" algn="ctr">
+                      <a:solidFill>
+                        <a:srgbClr val="D8DEE6"/>
+                      </a:solidFill>
+                      <a:prstDash val="solid"/>
+                      <a:round/>
+                      <a:headEnd type="none" w="med" len="med"/>
+                      <a:tailEnd type="none" w="med" len="med"/>
+                    </a:lnL>
+                    <a:lnR w="6350" cap="flat" cmpd="sng" algn="ctr">
+                      <a:solidFill>
+                        <a:srgbClr val="D8DEE6"/>
+                      </a:solidFill>
+                      <a:prstDash val="solid"/>
+                      <a:round/>
+                      <a:headEnd type="none" w="med" len="med"/>
+                      <a:tailEnd type="none" w="med" len="med"/>
+                    </a:lnR>
+                    <a:lnT w="6350" cap="flat" cmpd="sng" algn="ctr">
+                      <a:solidFill>
+                        <a:srgbClr val="D8DEE6"/>
+                      </a:solidFill>
+                      <a:prstDash val="solid"/>
+                      <a:round/>
+                      <a:headEnd type="none" w="med" len="med"/>
+                      <a:tailEnd type="none" w="med" len="med"/>
+                    </a:lnT>
+                    <a:lnB w="6350" cap="flat" cmpd="sng" algn="ctr">
+                      <a:solidFill>
+                        <a:srgbClr val="D8DEE6"/>
+                      </a:solidFill>
+                      <a:prstDash val="solid"/>
+                      <a:round/>
+                      <a:headEnd type="none" w="med" len="med"/>
+                      <a:tailEnd type="none" w="med" len="med"/>
+                    </a:lnB>
+                    <a:solidFill>
+                      <a:srgbClr val="FFFFFF"/>
+                    </a:solidFill>
+                  </a:tcPr>
+                </a:tc>
+              </a:tr>
+              <a:tr h="246888">
+                <a:tc>
+                  <a:txBody>
+                    <a:bodyPr/>
+                    <a:lstStyle/>
+                    <a:p>
+                      <a:pPr indent="0" marL="0">
+                        <a:buNone/>
+                      </a:pPr>
+                      <a:r>
+                        <a:rPr lang="en-US" sz="1000" dirty="0">
+                          <a:solidFill>
+                            <a:srgbClr val="1B2A4A"/>
+                          </a:solidFill>
+                          <a:latin typeface="Calibri" pitchFamily="34" charset="0"/>
+                          <a:ea typeface="Calibri" pitchFamily="34" charset="-122"/>
+                          <a:cs typeface="Calibri" pitchFamily="34" charset="-120"/>
+                        </a:rPr>
+                        <a:t>4</a:t>
+                      </a:r>
+                      <a:endParaRPr lang="en-US" sz="1000" dirty="0">
+                        <a:latin typeface="Calibri" charset="0"/>
+                        <a:ea typeface="Calibri" charset="0"/>
+                        <a:cs typeface="Calibri" charset="0"/>
+                      </a:endParaRPr>
+                    </a:p>
+                  </a:txBody>
+                  <a:tcPr marL="91440" marR="91440" marT="45720" marB="45720" anchor="ctr">
+                    <a:lnL w="6350" cap="flat" cmpd="sng" algn="ctr">
+                      <a:solidFill>
+                        <a:srgbClr val="D8DEE6"/>
+                      </a:solidFill>
+                      <a:prstDash val="solid"/>
+                      <a:round/>
+                      <a:headEnd type="none" w="med" len="med"/>
+                      <a:tailEnd type="none" w="med" len="med"/>
+                    </a:lnL>
+                    <a:lnR w="6350" cap="flat" cmpd="sng" algn="ctr">
+                      <a:solidFill>
+                        <a:srgbClr val="D8DEE6"/>
+                      </a:solidFill>
+                      <a:prstDash val="solid"/>
+                      <a:round/>
+                      <a:headEnd type="none" w="med" len="med"/>
+                      <a:tailEnd type="none" w="med" len="med"/>
+                    </a:lnR>
+                    <a:lnT w="6350" cap="flat" cmpd="sng" algn="ctr">
+                      <a:solidFill>
+                        <a:srgbClr val="D8DEE6"/>
+                      </a:solidFill>
+                      <a:prstDash val="solid"/>
+                      <a:round/>
+                      <a:headEnd type="none" w="med" len="med"/>
+                      <a:tailEnd type="none" w="med" len="med"/>
+                    </a:lnT>
+                    <a:lnB w="6350" cap="flat" cmpd="sng" algn="ctr">
+                      <a:solidFill>
+                        <a:srgbClr val="D8DEE6"/>
+                      </a:solidFill>
+                      <a:prstDash val="solid"/>
+                      <a:round/>
+                      <a:headEnd type="none" w="med" len="med"/>
+                      <a:tailEnd type="none" w="med" len="med"/>
+                    </a:lnB>
+                    <a:solidFill>
+                      <a:srgbClr val="FFFFFF"/>
+                    </a:solidFill>
+                  </a:tcPr>
+                </a:tc>
+                <a:tc>
+                  <a:txBody>
+                    <a:bodyPr/>
+                    <a:lstStyle/>
+                    <a:p>
+                      <a:pPr indent="0" marL="0">
+                        <a:buNone/>
+                      </a:pPr>
+                      <a:r>
+                        <a:rPr lang="en-US" sz="1000" dirty="0">
+                          <a:solidFill>
+                            <a:srgbClr val="1B2A4A"/>
+                          </a:solidFill>
+                          <a:latin typeface="Calibri" pitchFamily="34" charset="0"/>
+                          <a:ea typeface="Calibri" pitchFamily="34" charset="-122"/>
+                          <a:cs typeface="Calibri" pitchFamily="34" charset="-120"/>
+                        </a:rPr>
+                        <a:t>A fait accompli?  (Kollnig, Binns)</a:t>
+                      </a:r>
+                      <a:endParaRPr lang="en-US" sz="1000" dirty="0">
+                        <a:latin typeface="Calibri" charset="0"/>
+                        <a:ea typeface="Calibri" charset="0"/>
+                        <a:cs typeface="Calibri" charset="0"/>
+                      </a:endParaRPr>
+                    </a:p>
+                  </a:txBody>
+                  <a:tcPr marL="91440" marR="91440" marT="45720" marB="45720" anchor="ctr">
+                    <a:lnL w="6350" cap="flat" cmpd="sng" algn="ctr">
+                      <a:solidFill>
+                        <a:srgbClr val="D8DEE6"/>
+                      </a:solidFill>
+                      <a:prstDash val="solid"/>
+                      <a:round/>
+                      <a:headEnd type="none" w="med" len="med"/>
+                      <a:tailEnd type="none" w="med" len="med"/>
+                    </a:lnL>
+                    <a:lnR w="6350" cap="flat" cmpd="sng" algn="ctr">
+                      <a:solidFill>
+                        <a:srgbClr val="D8DEE6"/>
+                      </a:solidFill>
+                      <a:prstDash val="solid"/>
+                      <a:round/>
+                      <a:headEnd type="none" w="med" len="med"/>
+                      <a:tailEnd type="none" w="med" len="med"/>
+                    </a:lnR>
+                    <a:lnT w="6350" cap="flat" cmpd="sng" algn="ctr">
+                      <a:solidFill>
+                        <a:srgbClr val="D8DEE6"/>
+                      </a:solidFill>
+                      <a:prstDash val="solid"/>
+                      <a:round/>
+                      <a:headEnd type="none" w="med" len="med"/>
+                      <a:tailEnd type="none" w="med" len="med"/>
+                    </a:lnT>
+                    <a:lnB w="6350" cap="flat" cmpd="sng" algn="ctr">
+                      <a:solidFill>
+                        <a:srgbClr val="D8DEE6"/>
+                      </a:solidFill>
+                      <a:prstDash val="solid"/>
+                      <a:round/>
+                      <a:headEnd type="none" w="med" len="med"/>
+                      <a:tailEnd type="none" w="med" len="med"/>
+                    </a:lnB>
+                    <a:solidFill>
+                      <a:srgbClr val="FFFFFF"/>
+                    </a:solidFill>
+                  </a:tcPr>
+                </a:tc>
+                <a:tc>
+                  <a:txBody>
+                    <a:bodyPr/>
+                    <a:lstStyle/>
+                    <a:p>
+                      <a:pPr indent="0" marL="0">
+                        <a:buNone/>
+                      </a:pPr>
+                      <a:r>
+                        <a:rPr lang="en-US" sz="1000" dirty="0">
+                          <a:solidFill>
+                            <a:srgbClr val="1B2A4A"/>
+                          </a:solidFill>
+                          <a:latin typeface="Calibri" pitchFamily="34" charset="0"/>
+                          <a:ea typeface="Calibri" pitchFamily="34" charset="-122"/>
+                          <a:cs typeface="Calibri" pitchFamily="34" charset="-120"/>
+                        </a:rPr>
+                        <a:t>2021</a:t>
+                      </a:r>
+                      <a:endParaRPr lang="en-US" sz="1000" dirty="0">
+                        <a:latin typeface="Calibri" charset="0"/>
+                        <a:ea typeface="Calibri" charset="0"/>
+                        <a:cs typeface="Calibri" charset="0"/>
+                      </a:endParaRPr>
+                    </a:p>
+                  </a:txBody>
+                  <a:tcPr marL="91440" marR="91440" marT="45720" marB="45720" anchor="ctr">
+                    <a:lnL w="6350" cap="flat" cmpd="sng" algn="ctr">
+                      <a:solidFill>
+                        <a:srgbClr val="D8DEE6"/>
+                      </a:solidFill>
+                      <a:prstDash val="solid"/>
+                      <a:round/>
+                      <a:headEnd type="none" w="med" len="med"/>
+                      <a:tailEnd type="none" w="med" len="med"/>
+                    </a:lnL>
+                    <a:lnR w="6350" cap="flat" cmpd="sng" algn="ctr">
+                      <a:solidFill>
+                        <a:srgbClr val="D8DEE6"/>
+                      </a:solidFill>
+                      <a:prstDash val="solid"/>
+                      <a:round/>
+                      <a:headEnd type="none" w="med" len="med"/>
+                      <a:tailEnd type="none" w="med" len="med"/>
+                    </a:lnR>
+                    <a:lnT w="6350" cap="flat" cmpd="sng" algn="ctr">
+                      <a:solidFill>
+                        <a:srgbClr val="D8DEE6"/>
+                      </a:solidFill>
+                      <a:prstDash val="solid"/>
+                      <a:round/>
+                      <a:headEnd type="none" w="med" len="med"/>
+                      <a:tailEnd type="none" w="med" len="med"/>
+                    </a:lnT>
+                    <a:lnB w="6350" cap="flat" cmpd="sng" algn="ctr">
+                      <a:solidFill>
+                        <a:srgbClr val="D8DEE6"/>
+                      </a:solidFill>
+                      <a:prstDash val="solid"/>
+                      <a:round/>
+                      <a:headEnd type="none" w="med" len="med"/>
+                      <a:tailEnd type="none" w="med" len="med"/>
+                    </a:lnB>
+                    <a:solidFill>
+                      <a:srgbClr val="FFFFFF"/>
+                    </a:solidFill>
+                  </a:tcPr>
+                </a:tc>
+                <a:tc>
+                  <a:txBody>
+                    <a:bodyPr/>
+                    <a:lstStyle/>
+                    <a:p>
+                      <a:pPr indent="0" marL="0">
+                        <a:buNone/>
+                      </a:pPr>
+                      <a:r>
+                        <a:rPr lang="en-US" sz="1000" dirty="0">
+                          <a:solidFill>
+                            <a:srgbClr val="1B2A4A"/>
+                          </a:solidFill>
+                          <a:latin typeface="Calibri" pitchFamily="34" charset="0"/>
+                          <a:ea typeface="Calibri" pitchFamily="34" charset="-122"/>
+                          <a:cs typeface="Calibri" pitchFamily="34" charset="-120"/>
+                        </a:rPr>
+                        <a:t>34</a:t>
+                      </a:r>
+                      <a:endParaRPr lang="en-US" sz="1000" dirty="0">
+                        <a:latin typeface="Calibri" charset="0"/>
+                        <a:ea typeface="Calibri" charset="0"/>
+                        <a:cs typeface="Calibri" charset="0"/>
+                      </a:endParaRPr>
+                    </a:p>
+                  </a:txBody>
+                  <a:tcPr marL="91440" marR="91440" marT="45720" marB="45720" anchor="ctr">
+                    <a:lnL w="6350" cap="flat" cmpd="sng" algn="ctr">
+                      <a:solidFill>
+                        <a:srgbClr val="D8DEE6"/>
+                      </a:solidFill>
+                      <a:prstDash val="solid"/>
+                      <a:round/>
+                      <a:headEnd type="none" w="med" len="med"/>
+                      <a:tailEnd type="none" w="med" len="med"/>
+                    </a:lnL>
+                    <a:lnR w="6350" cap="flat" cmpd="sng" algn="ctr">
+                      <a:solidFill>
+                        <a:srgbClr val="D8DEE6"/>
+                      </a:solidFill>
+                      <a:prstDash val="solid"/>
+                      <a:round/>
+                      <a:headEnd type="none" w="med" len="med"/>
+                      <a:tailEnd type="none" w="med" len="med"/>
+                    </a:lnR>
+                    <a:lnT w="6350" cap="flat" cmpd="sng" algn="ctr">
+                      <a:solidFill>
+                        <a:srgbClr val="D8DEE6"/>
+                      </a:solidFill>
+                      <a:prstDash val="solid"/>
+                      <a:round/>
+                      <a:headEnd type="none" w="med" len="med"/>
+                      <a:tailEnd type="none" w="med" len="med"/>
+                    </a:lnT>
+                    <a:lnB w="6350" cap="flat" cmpd="sng" algn="ctr">
+                      <a:solidFill>
+                        <a:srgbClr val="D8DEE6"/>
+                      </a:solidFill>
+                      <a:prstDash val="solid"/>
+                      <a:round/>
+                      <a:headEnd type="none" w="med" len="med"/>
+                      <a:tailEnd type="none" w="med" len="med"/>
+                    </a:lnB>
+                    <a:solidFill>
+                      <a:srgbClr val="FFFFFF"/>
+                    </a:solidFill>
+                  </a:tcPr>
+                </a:tc>
+                <a:tc>
+                  <a:txBody>
+                    <a:bodyPr/>
+                    <a:lstStyle/>
+                    <a:p>
+                      <a:pPr indent="0" marL="0">
+                        <a:buNone/>
+                      </a:pPr>
+                      <a:r>
+                        <a:rPr lang="en-US" sz="1000" dirty="0">
+                          <a:solidFill>
+                            <a:srgbClr val="1B2A4A"/>
+                          </a:solidFill>
+                          <a:latin typeface="Calibri" pitchFamily="34" charset="0"/>
+                          <a:ea typeface="Calibri" pitchFamily="34" charset="-122"/>
+                          <a:cs typeface="Calibri" pitchFamily="34" charset="-120"/>
+                        </a:rPr>
+                        <a:t>SOUPS = CORE B</a:t>
+                      </a:r>
+                      <a:endParaRPr lang="en-US" sz="1000" dirty="0">
+                        <a:latin typeface="Calibri" charset="0"/>
+                        <a:ea typeface="Calibri" charset="0"/>
+                        <a:cs typeface="Calibri" charset="0"/>
+                      </a:endParaRPr>
+                    </a:p>
+                  </a:txBody>
+                  <a:tcPr marL="91440" marR="91440" marT="45720" marB="45720" anchor="ctr">
+                    <a:lnL w="6350" cap="flat" cmpd="sng" algn="ctr">
+                      <a:solidFill>
+                        <a:srgbClr val="D8DEE6"/>
+                      </a:solidFill>
+                      <a:prstDash val="solid"/>
+                      <a:round/>
+                      <a:headEnd type="none" w="med" len="med"/>
+                      <a:tailEnd type="none" w="med" len="med"/>
+                    </a:lnL>
+                    <a:lnR w="6350" cap="flat" cmpd="sng" algn="ctr">
+                      <a:solidFill>
+                        <a:srgbClr val="D8DEE6"/>
+                      </a:solidFill>
+                      <a:prstDash val="solid"/>
+                      <a:round/>
+                      <a:headEnd type="none" w="med" len="med"/>
+                      <a:tailEnd type="none" w="med" len="med"/>
+                    </a:lnR>
+                    <a:lnT w="6350" cap="flat" cmpd="sng" algn="ctr">
+                      <a:solidFill>
+                        <a:srgbClr val="D8DEE6"/>
+                      </a:solidFill>
+                      <a:prstDash val="solid"/>
+                      <a:round/>
+                      <a:headEnd type="none" w="med" len="med"/>
+                      <a:tailEnd type="none" w="med" len="med"/>
+                    </a:lnT>
+                    <a:lnB w="6350" cap="flat" cmpd="sng" algn="ctr">
+                      <a:solidFill>
+                        <a:srgbClr val="D8DEE6"/>
+                      </a:solidFill>
+                      <a:prstDash val="solid"/>
+                      <a:round/>
+                      <a:headEnd type="none" w="med" len="med"/>
+                      <a:tailEnd type="none" w="med" len="med"/>
+                    </a:lnB>
+                    <a:solidFill>
+                      <a:srgbClr val="FFFFFF"/>
+                    </a:solidFill>
+                  </a:tcPr>
+                </a:tc>
+              </a:tr>
+            </a:tbl>
+          </a:graphicData>
+        </a:graphic>
+      </p:graphicFrame>
+      <p:sp>
+        <p:nvSpPr>
+          <p:cNvPr id="13" name="Text 10"/>
           <p:cNvSpPr txBox="1"/>
           <p:nvPr/>
         </p:nvSpPr>
@@ -8916,7 +10605,7 @@
                 <a:ea typeface="Calibri" pitchFamily="34" charset="-122"/>
                 <a:cs typeface="Calibri" pitchFamily="34" charset="-120"/>
               </a:rPr>
-              <a:t>2 minutos</a:t>
+              <a:t>2 minutos  ·  4 encontrados  →  3 avaliados  →  1 selecionado</a:t>
             </a:r>
             <a:endParaRPr lang="en-US" sz="950" dirty="0"/>
           </a:p>

--- a/seminario/seminario-analise-de-artigo.pptx
+++ b/seminario/seminario-analise-de-artigo.pptx
@@ -1309,7 +1309,7 @@
           <a:p>
             <a:r>
               <a:rPr lang="en-US" dirty="0"/>
-              <a:t>Trinta segundos no máximo por tema descartado. O objetivo é mostrar que a escolha foi testada, não contar a história inteira.</a:t>
+              <a:t>1 minuto. Trinta segundos no maximo por tema. O objetivo e mostrar que a escolha foi testada, nao contar a historia inteira. Se alguem perguntar detalhe de algum deles, o registro completo esta no repositorio.</a:t>
             </a:r>
             <a:endParaRPr lang="en-US" dirty="0"/>
           </a:p>
@@ -2487,7 +2487,7 @@
                 <a:ea typeface="Cambria" pitchFamily="34" charset="-122"/>
                 <a:cs typeface="Cambria" pitchFamily="34" charset="-120"/>
               </a:rPr>
-              <a:t>Análise do resumo</a:t>
+              <a:t>O resumo</a:t>
             </a:r>
             <a:endParaRPr lang="en-US" sz="2500" dirty="0"/>
           </a:p>
@@ -2526,7 +2526,7 @@
                 <a:ea typeface="Calibri" pitchFamily="34" charset="-122"/>
                 <a:cs typeface="Calibri" pitchFamily="34" charset="-120"/>
               </a:rPr>
-              <a:t>Seis movimentos, cada um em uma ou duas frases.</a:t>
+              <a:t>Seis movimentos, um por frase. É modelo de como escrever o meu.</a:t>
             </a:r>
             <a:endParaRPr lang="en-US" sz="1200" dirty="0"/>
           </a:p>
@@ -2595,7 +2595,7 @@
                 <a:ea typeface="Consolas" pitchFamily="34" charset="-122"/>
                 <a:cs typeface="Consolas" pitchFamily="34" charset="-120"/>
               </a:rPr>
-              <a:t>Contextualiza:  "Adopted in May 2018, the GDPR requires the consent... to be freely given"</a:t>
+              <a:t>CONTEXTO      o GDPR exige consentimento livre, específico e informado</a:t>
             </a:r>
             <a:endParaRPr lang="en-US" sz="950" dirty="0"/>
           </a:p>
@@ -2615,7 +2615,7 @@
                 <a:ea typeface="Consolas" pitchFamily="34" charset="-122"/>
                 <a:cs typeface="Consolas" pitchFamily="34" charset="-120"/>
               </a:rPr>
-              <a:t>Lacuna:  "no research has systematically studied how consent notices are implemented"</a:t>
+              <a:t>LACUNA        ninguém estudou como os avisos são de fato implementados</a:t>
             </a:r>
             <a:endParaRPr lang="en-US" sz="950" dirty="0"/>
           </a:p>
@@ -2635,7 +2635,7 @@
                 <a:ea typeface="Consolas" pitchFamily="34" charset="-122"/>
                 <a:cs typeface="Consolas" pitchFamily="34" charset="-120"/>
               </a:rPr>
-              <a:t>Objetivo:  "we perform the first large-scale study into consent notices"</a:t>
+              <a:t>OBJETIVO      primeiro estudo em larga escala sobre esses avisos</a:t>
             </a:r>
             <a:endParaRPr lang="en-US" sz="950" dirty="0"/>
           </a:p>
@@ -2655,7 +2655,7 @@
                 <a:ea typeface="Consolas" pitchFamily="34" charset="-122"/>
                 <a:cs typeface="Consolas" pitchFamily="34" charset="-120"/>
               </a:rPr>
-              <a:t>Método:  "a mostly automated and scalable approach... 239,381 Android apps"</a:t>
+              <a:t>MÉTODO        abordagem automatizada aplicada a 239.381 aplicativos</a:t>
             </a:r>
             <a:endParaRPr lang="en-US" sz="950" dirty="0"/>
           </a:p>
@@ -2675,7 +2675,7 @@
                 <a:ea typeface="Consolas" pitchFamily="34" charset="-122"/>
                 <a:cs typeface="Consolas" pitchFamily="34" charset="-120"/>
               </a:rPr>
-              <a:t>Resultados:  4 mecanismos · 13.082 apps · 30.160 sem aviso · 2.688 (20,54%) violam</a:t>
+              <a:t>RESULTADO     30.160 sem aviso nenhum; 2.688 dos que têm, violam a lei</a:t>
             </a:r>
             <a:endParaRPr lang="en-US" sz="950" dirty="0"/>
           </a:p>
@@ -2695,7 +2695,36 @@
                 <a:ea typeface="Consolas" pitchFamily="34" charset="-122"/>
                 <a:cs typeface="Consolas" pitchFamily="34" charset="-120"/>
               </a:rPr>
-              <a:t>Palavras-chave:  Android Security; Consent; GDPR; User Privacy</a:t>
+              <a:t>IMPLICAÇÃO    falta transparência e falta apoio aos desenvolvedores</a:t>
+            </a:r>
+            <a:endParaRPr lang="en-US" sz="950" dirty="0"/>
+          </a:p>
+          <a:p>
+            <a:pPr indent="0" marL="0">
+              <a:lnSpc>
+                <a:spcPct val="122000"/>
+              </a:lnSpc>
+              <a:buNone/>
+            </a:pPr>
+            <a:endParaRPr lang="en-US" sz="950" dirty="0"/>
+          </a:p>
+          <a:p>
+            <a:pPr indent="0" marL="0">
+              <a:lnSpc>
+                <a:spcPct val="122000"/>
+              </a:lnSpc>
+              <a:buNone/>
+            </a:pPr>
+            <a:r>
+              <a:rPr lang="en-US" sz="950" dirty="0">
+                <a:solidFill>
+                  <a:srgbClr val="1B2A4A"/>
+                </a:solidFill>
+                <a:latin typeface="Consolas" pitchFamily="34" charset="0"/>
+                <a:ea typeface="Consolas" pitchFamily="34" charset="-122"/>
+                <a:cs typeface="Consolas" pitchFamily="34" charset="-120"/>
+              </a:rPr>
+              <a:t>Palavras-chave: Android Security, Consent, GDPR, User Privacy</a:t>
             </a:r>
             <a:endParaRPr lang="en-US" sz="950" dirty="0"/>
           </a:p>
@@ -2777,7 +2806,7 @@
                 <a:ea typeface="Calibri" pitchFamily="34" charset="-122"/>
                 <a:cs typeface="Calibri" pitchFamily="34" charset="-120"/>
               </a:rPr>
-              <a:t>Contextualiza</a:t>
+              <a:t>Cada movimento cabe em uma frase</a:t>
             </a:r>
             <a:endParaRPr lang="en-US" sz="1100" dirty="0"/>
           </a:p>
@@ -2798,7 +2827,7 @@
                 <a:ea typeface="Calibri" pitchFamily="34" charset="-122"/>
                 <a:cs typeface="Calibri" pitchFamily="34" charset="-120"/>
               </a:rPr>
-              <a:t>Declara a lacuna</a:t>
+              <a:t>As palavras-chave trazem Consent e GDPR</a:t>
             </a:r>
             <a:endParaRPr lang="en-US" sz="1100" dirty="0"/>
           </a:p>
@@ -2819,7 +2848,7 @@
                 <a:ea typeface="Calibri" pitchFamily="34" charset="-122"/>
                 <a:cs typeface="Calibri" pitchFamily="34" charset="-120"/>
               </a:rPr>
-              <a:t>Objetivo</a:t>
+              <a:t>mas não trazem tracking nem third-party,</a:t>
             </a:r>
             <a:endParaRPr lang="en-US" sz="1100" dirty="0"/>
           </a:p>
@@ -2840,49 +2869,7 @@
                 <a:ea typeface="Calibri" pitchFamily="34" charset="-122"/>
                 <a:cs typeface="Calibri" pitchFamily="34" charset="-120"/>
               </a:rPr>
-              <a:t>Método empregado</a:t>
-            </a:r>
-            <a:endParaRPr lang="en-US" sz="1100" dirty="0"/>
-          </a:p>
-          <a:p>
-            <a:pPr marL="342900" indent="-342900">
-              <a:spcAft>
-                <a:spcPts val="700"/>
-              </a:spcAft>
-              <a:buSzPct val="100000"/>
-              <a:buChar char="•"/>
-            </a:pPr>
-            <a:r>
-              <a:rPr lang="en-US" sz="1100" dirty="0">
-                <a:solidFill>
-                  <a:srgbClr val="1B2A4A"/>
-                </a:solidFill>
-                <a:latin typeface="Calibri" pitchFamily="34" charset="0"/>
-                <a:ea typeface="Calibri" pitchFamily="34" charset="-122"/>
-                <a:cs typeface="Calibri" pitchFamily="34" charset="-120"/>
-              </a:rPr>
-              <a:t>Resultados</a:t>
-            </a:r>
-            <a:endParaRPr lang="en-US" sz="1100" dirty="0"/>
-          </a:p>
-          <a:p>
-            <a:pPr marL="342900" indent="-342900">
-              <a:spcAft>
-                <a:spcPts val="700"/>
-              </a:spcAft>
-              <a:buSzPct val="100000"/>
-              <a:buChar char="•"/>
-            </a:pPr>
-            <a:r>
-              <a:rPr lang="en-US" sz="1100" dirty="0">
-                <a:solidFill>
-                  <a:srgbClr val="1B2A4A"/>
-                </a:solidFill>
-                <a:latin typeface="Calibri" pitchFamily="34" charset="0"/>
-                <a:ea typeface="Calibri" pitchFamily="34" charset="-122"/>
-                <a:cs typeface="Calibri" pitchFamily="34" charset="-120"/>
-              </a:rPr>
-              <a:t>Implicação</a:t>
+              <a:t>que estão no título do artigo</a:t>
             </a:r>
             <a:endParaRPr lang="en-US" sz="1100" dirty="0"/>
           </a:p>
@@ -2990,48 +2977,9 @@
                 <a:ea typeface="Calibri" pitchFamily="34" charset="-122"/>
                 <a:cs typeface="Calibri" pitchFamily="34" charset="-120"/>
               </a:rPr>
-              <a:t>As palavras-chave trazem Consent e GDPR, mas NÃO trazem tracking nem third-party — que estão no título. Isso diz como os autores querem ser encontrados.</a:t>
+              <a:t>As palavras-chave mostram como os autores querem ser encontrados. Compare com os termos que eu usei na minha busca.</a:t>
             </a:r>
             <a:endParaRPr lang="en-US" sz="1150" dirty="0"/>
-          </a:p>
-        </p:txBody>
-      </p:sp>
-      <p:sp>
-        <p:nvSpPr>
-          <p:cNvPr id="12" name="Text 10"/>
-          <p:cNvSpPr txBox="1"/>
-          <p:nvPr/>
-        </p:nvSpPr>
-        <p:spPr>
-          <a:xfrm>
-            <a:off x="502920" y="4718304"/>
-            <a:ext cx="8138160" cy="237744"/>
-          </a:xfrm>
-          <a:prstGeom prst="rect">
-            <a:avLst/>
-          </a:prstGeom>
-          <a:noFill/>
-          <a:ln/>
-        </p:spPr>
-        <p:txBody>
-          <a:bodyPr wrap="square" lIns="0" tIns="0" rIns="0" bIns="0" rtlCol="0" anchor="ctr"/>
-          <a:lstStyle/>
-          <a:p>
-            <a:pPr algn="l" indent="0" marL="0">
-              <a:buNone/>
-            </a:pPr>
-            <a:r>
-              <a:rPr lang="en-US" sz="950" dirty="0">
-                <a:solidFill>
-                  <a:srgbClr val="98A2B3"/>
-                </a:solidFill>
-                <a:latin typeface="Calibri" pitchFamily="34" charset="0"/>
-                <a:ea typeface="Calibri" pitchFamily="34" charset="-122"/>
-                <a:cs typeface="Calibri" pitchFamily="34" charset="-120"/>
-              </a:rPr>
-              <a:t>~50 segundos por slide  ·  a análise da estrutura vale 5 dos 15 minutos</a:t>
-            </a:r>
-            <a:endParaRPr lang="en-US" sz="950" dirty="0"/>
           </a:p>
         </p:txBody>
       </p:sp>
@@ -3132,7 +3080,7 @@
                 <a:ea typeface="Cambria" pitchFamily="34" charset="-122"/>
                 <a:cs typeface="Cambria" pitchFamily="34" charset="-120"/>
               </a:rPr>
-              <a:t>Análise da introdução</a:t>
+              <a:t>A introdução</a:t>
             </a:r>
             <a:endParaRPr lang="en-US" sz="2500" dirty="0"/>
           </a:p>
@@ -3171,7 +3119,7 @@
                 <a:ea typeface="Calibri" pitchFamily="34" charset="-122"/>
                 <a:cs typeface="Calibri" pitchFamily="34" charset="-120"/>
               </a:rPr>
-              <a:t>Abre pelo fenômeno cotidiano, não pela técnica. E declara 3 questões.</a:t>
+              <a:t>Abre pelo que acontece com o usuário, não pela técnica.</a:t>
             </a:r>
             <a:endParaRPr lang="en-US" sz="1200" dirty="0"/>
           </a:p>
@@ -3240,7 +3188,7 @@
                 <a:ea typeface="Consolas" pitchFamily="34" charset="-122"/>
                 <a:cs typeface="Consolas" pitchFamily="34" charset="-120"/>
               </a:rPr>
-              <a:t>"Every time we load a page... information about us will be broadcast to large</a:t>
+              <a:t>"Toda vez que abrimos uma página ou usamos um aplicativo, informação</a:t>
             </a:r>
             <a:endParaRPr lang="en-US" sz="950" dirty="0"/>
           </a:p>
@@ -3260,7 +3208,7 @@
                 <a:ea typeface="Consolas" pitchFamily="34" charset="-122"/>
                 <a:cs typeface="Consolas" pitchFamily="34" charset="-120"/>
               </a:rPr>
-              <a:t>numbers of companies, most notably for advertising purposes."</a:t>
+              <a:t> sobre nós é transmitida a um grande número de empresas."</a:t>
             </a:r>
             <a:endParaRPr lang="en-US" sz="950" dirty="0"/>
           </a:p>
@@ -3289,7 +3237,7 @@
                 <a:ea typeface="Consolas" pitchFamily="34" charset="-122"/>
                 <a:cs typeface="Consolas" pitchFamily="34" charset="-120"/>
               </a:rPr>
-              <a:t>Q1  Do mobile apps implement any form of consent notices?</a:t>
+              <a:t>Depois declara três perguntas de pesquisa:</a:t>
             </a:r>
             <a:endParaRPr lang="en-US" sz="950" dirty="0"/>
           </a:p>
@@ -3300,6 +3248,15 @@
               </a:lnSpc>
               <a:buNone/>
             </a:pPr>
+            <a:endParaRPr lang="en-US" sz="950" dirty="0"/>
+          </a:p>
+          <a:p>
+            <a:pPr indent="0" marL="0">
+              <a:lnSpc>
+                <a:spcPct val="122000"/>
+              </a:lnSpc>
+              <a:buNone/>
+            </a:pPr>
             <a:r>
               <a:rPr lang="en-US" sz="950" dirty="0">
                 <a:solidFill>
@@ -3309,7 +3266,7 @@
                 <a:ea typeface="Consolas" pitchFamily="34" charset="-122"/>
                 <a:cs typeface="Consolas" pitchFamily="34" charset="-120"/>
               </a:rPr>
-              <a:t>Q2  Can these consent notices be legally justified under GDPR?</a:t>
+              <a:t>  1  os aplicativos implementam algum tipo de aviso de consentimento?</a:t>
             </a:r>
             <a:endParaRPr lang="en-US" sz="950" dirty="0"/>
           </a:p>
@@ -3329,7 +3286,27 @@
                 <a:ea typeface="Consolas" pitchFamily="34" charset="-122"/>
                 <a:cs typeface="Consolas" pitchFamily="34" charset="-120"/>
               </a:rPr>
-              <a:t>Q3  Are developers aware of the requirements and of their own violations?</a:t>
+              <a:t>  2  esses avisos se justificam juridicamente sob o GDPR?</a:t>
+            </a:r>
+            <a:endParaRPr lang="en-US" sz="950" dirty="0"/>
+          </a:p>
+          <a:p>
+            <a:pPr indent="0" marL="0">
+              <a:lnSpc>
+                <a:spcPct val="122000"/>
+              </a:lnSpc>
+              <a:buNone/>
+            </a:pPr>
+            <a:r>
+              <a:rPr lang="en-US" sz="950" dirty="0">
+                <a:solidFill>
+                  <a:srgbClr val="1B2A4A"/>
+                </a:solidFill>
+                <a:latin typeface="Consolas" pitchFamily="34" charset="0"/>
+                <a:ea typeface="Consolas" pitchFamily="34" charset="-122"/>
+                <a:cs typeface="Consolas" pitchFamily="34" charset="-120"/>
+              </a:rPr>
+              <a:t>  3  os desenvolvedores sabem que estão em violação?</a:t>
             </a:r>
             <a:endParaRPr lang="en-US" sz="950" dirty="0"/>
           </a:p>
@@ -3432,7 +3409,7 @@
                 <a:ea typeface="Calibri" pitchFamily="34" charset="-122"/>
                 <a:cs typeface="Calibri" pitchFamily="34" charset="-120"/>
               </a:rPr>
-              <a:t>Descreve a problemática</a:t>
+              <a:t>Descreve o problema</a:t>
             </a:r>
             <a:endParaRPr lang="en-US" sz="1100" dirty="0"/>
           </a:p>
@@ -3453,7 +3430,7 @@
                 <a:ea typeface="Calibri" pitchFamily="34" charset="-122"/>
                 <a:cs typeface="Calibri" pitchFamily="34" charset="-120"/>
               </a:rPr>
-              <a:t>Posiciona na literatura</a:t>
+              <a:t>Aponta a lacuna</a:t>
             </a:r>
             <a:endParaRPr lang="en-US" sz="1100" dirty="0"/>
           </a:p>
@@ -3474,7 +3451,7 @@
                 <a:ea typeface="Calibri" pitchFamily="34" charset="-122"/>
                 <a:cs typeface="Calibri" pitchFamily="34" charset="-120"/>
               </a:rPr>
-              <a:t>Questões de pesquisa</a:t>
+              <a:t>Declara objetivo e contribuições</a:t>
             </a:r>
             <a:endParaRPr lang="en-US" sz="1100" dirty="0"/>
           </a:p>
@@ -3495,7 +3472,7 @@
                 <a:ea typeface="Calibri" pitchFamily="34" charset="-122"/>
                 <a:cs typeface="Calibri" pitchFamily="34" charset="-120"/>
               </a:rPr>
-              <a:t>Contribuições em lista</a:t>
+              <a:t>As 3 perguntas são respondíveis por medição</a:t>
             </a:r>
             <a:endParaRPr lang="en-US" sz="1100" dirty="0"/>
           </a:p>
@@ -3603,48 +3580,9 @@
                 <a:ea typeface="Calibri" pitchFamily="34" charset="-122"/>
                 <a:cs typeface="Calibri" pitchFamily="34" charset="-120"/>
               </a:rPr>
-              <a:t>Nota de rodapé 1: eles chamam de violação POTENCIAL de propósito, para não emitir juízo jurídico — que seria consultoria legal regulada. Mesmo cuidado que a LGPD exige de mim.</a:t>
+              <a:t>Na nota de rodapé 1 eles explicam que dizem violação POTENCIAL de propósito, para não emitir juízo jurídico. Mesmo cuidado que a LGPD vai exigir de mim.</a:t>
             </a:r>
             <a:endParaRPr lang="en-US" sz="1150" dirty="0"/>
-          </a:p>
-        </p:txBody>
-      </p:sp>
-      <p:sp>
-        <p:nvSpPr>
-          <p:cNvPr id="12" name="Text 10"/>
-          <p:cNvSpPr txBox="1"/>
-          <p:nvPr/>
-        </p:nvSpPr>
-        <p:spPr>
-          <a:xfrm>
-            <a:off x="502920" y="4718304"/>
-            <a:ext cx="8138160" cy="237744"/>
-          </a:xfrm>
-          <a:prstGeom prst="rect">
-            <a:avLst/>
-          </a:prstGeom>
-          <a:noFill/>
-          <a:ln/>
-        </p:spPr>
-        <p:txBody>
-          <a:bodyPr wrap="square" lIns="0" tIns="0" rIns="0" bIns="0" rtlCol="0" anchor="ctr"/>
-          <a:lstStyle/>
-          <a:p>
-            <a:pPr algn="l" indent="0" marL="0">
-              <a:buNone/>
-            </a:pPr>
-            <a:r>
-              <a:rPr lang="en-US" sz="950" dirty="0">
-                <a:solidFill>
-                  <a:srgbClr val="98A2B3"/>
-                </a:solidFill>
-                <a:latin typeface="Calibri" pitchFamily="34" charset="0"/>
-                <a:ea typeface="Calibri" pitchFamily="34" charset="-122"/>
-                <a:cs typeface="Calibri" pitchFamily="34" charset="-120"/>
-              </a:rPr>
-              <a:t>~50 segundos por slide  ·  a análise da estrutura vale 5 dos 15 minutos</a:t>
-            </a:r>
-            <a:endParaRPr lang="en-US" sz="950" dirty="0"/>
           </a:p>
         </p:txBody>
       </p:sp>
@@ -3745,7 +3683,7 @@
                 <a:ea typeface="Cambria" pitchFamily="34" charset="-122"/>
                 <a:cs typeface="Cambria" pitchFamily="34" charset="-120"/>
               </a:rPr>
-              <a:t>Análise do método — o funil</a:t>
+              <a:t>O método, e o funil</a:t>
             </a:r>
             <a:endParaRPr lang="en-US" sz="2500" dirty="0"/>
           </a:p>
@@ -3784,7 +3722,7 @@
                 <a:ea typeface="Calibri" pitchFamily="34" charset="-122"/>
                 <a:cs typeface="Calibri" pitchFamily="34" charset="-120"/>
               </a:rPr>
-              <a:t>Corpus do AndroZoo, três critérios de inclusão, dois instrumentos.</a:t>
+              <a:t>Corpus vindo do AndroZoo, três critérios de entrada, dois instrumentos.</a:t>
             </a:r>
             <a:endParaRPr lang="en-US" sz="1200" dirty="0"/>
           </a:p>
@@ -3853,7 +3791,7 @@
                 <a:ea typeface="Consolas" pitchFamily="34" charset="-122"/>
                 <a:cs typeface="Consolas" pitchFamily="34" charset="-120"/>
               </a:rPr>
-              <a:t>5.800.000   nomes de apps na lista do AndroZoo</a:t>
+              <a:t>5.800.000   nomes de aplicativos na lista do AndroZoo</a:t>
             </a:r>
             <a:endParaRPr lang="en-US" sz="950" dirty="0"/>
           </a:p>
@@ -3873,7 +3811,7 @@
                 <a:ea typeface="Consolas" pitchFamily="34" charset="-122"/>
                 <a:cs typeface="Consolas" pitchFamily="34" charset="-120"/>
               </a:rPr>
-              <a:t>      ↓     ≥10k downloads · permissão sensível · atualizado após maio/2018</a:t>
+              <a:t>      ↓     mais de 10 mil downloads, pede permissão sensível,</a:t>
             </a:r>
             <a:endParaRPr lang="en-US" sz="950" dirty="0"/>
           </a:p>
@@ -3893,7 +3831,7 @@
                 <a:ea typeface="Consolas" pitchFamily="34" charset="-122"/>
                 <a:cs typeface="Consolas" pitchFamily="34" charset="-120"/>
               </a:rPr>
-              <a:t>  250.972   aplicativos obtidos</a:t>
+              <a:t>            atualizado depois de maio de 2018</a:t>
             </a:r>
             <a:endParaRPr lang="en-US" sz="950" dirty="0"/>
           </a:p>
@@ -3913,7 +3851,7 @@
                 <a:ea typeface="Consolas" pitchFamily="34" charset="-122"/>
                 <a:cs typeface="Consolas" pitchFamily="34" charset="-120"/>
               </a:rPr>
-              <a:t>      ↓     análise dinâmica bem-sucedida em 95,38%</a:t>
+              <a:t>  250.972   aplicativos obtidos</a:t>
             </a:r>
             <a:endParaRPr lang="en-US" sz="950" dirty="0"/>
           </a:p>
@@ -3933,7 +3871,7 @@
                 <a:ea typeface="Consolas" pitchFamily="34" charset="-122"/>
                 <a:cs typeface="Consolas" pitchFamily="34" charset="-120"/>
               </a:rPr>
-              <a:t>  239.381   analisados  →  13.082 com aviso  →  2.688 (20,54%) violam</a:t>
+              <a:t>      ↓     a análise funcionou em 95,38% deles</a:t>
             </a:r>
             <a:endParaRPr lang="en-US" sz="950" dirty="0"/>
           </a:p>
@@ -3953,7 +3891,47 @@
                 <a:ea typeface="Consolas" pitchFamily="34" charset="-122"/>
                 <a:cs typeface="Consolas" pitchFamily="34" charset="-120"/>
               </a:rPr>
-              <a:t>   30.160   não tentam sequer implementar aviso  ·  1.127 devs notificados</a:t>
+              <a:t>  239.381   analisados</a:t>
+            </a:r>
+            <a:endParaRPr lang="en-US" sz="950" dirty="0"/>
+          </a:p>
+          <a:p>
+            <a:pPr indent="0" marL="0">
+              <a:lnSpc>
+                <a:spcPct val="122000"/>
+              </a:lnSpc>
+              <a:buNone/>
+            </a:pPr>
+            <a:r>
+              <a:rPr lang="en-US" sz="950" dirty="0">
+                <a:solidFill>
+                  <a:srgbClr val="1B2A4A"/>
+                </a:solidFill>
+                <a:latin typeface="Consolas" pitchFamily="34" charset="0"/>
+                <a:ea typeface="Consolas" pitchFamily="34" charset="-122"/>
+                <a:cs typeface="Consolas" pitchFamily="34" charset="-120"/>
+              </a:rPr>
+              <a:t>   13.082   têm aviso de consentimento   →   2.688 violam a lei</a:t>
+            </a:r>
+            <a:endParaRPr lang="en-US" sz="950" dirty="0"/>
+          </a:p>
+          <a:p>
+            <a:pPr indent="0" marL="0">
+              <a:lnSpc>
+                <a:spcPct val="122000"/>
+              </a:lnSpc>
+              <a:buNone/>
+            </a:pPr>
+            <a:r>
+              <a:rPr lang="en-US" sz="950" dirty="0">
+                <a:solidFill>
+                  <a:srgbClr val="1B2A4A"/>
+                </a:solidFill>
+                <a:latin typeface="Consolas" pitchFamily="34" charset="0"/>
+                <a:ea typeface="Consolas" pitchFamily="34" charset="-122"/>
+                <a:cs typeface="Consolas" pitchFamily="34" charset="-120"/>
+              </a:rPr>
+              <a:t>   30.160   não têm aviso nenhum</a:t>
             </a:r>
             <a:endParaRPr lang="en-US" sz="950" dirty="0"/>
           </a:p>
@@ -4035,7 +4013,7 @@
                 <a:ea typeface="Calibri" pitchFamily="34" charset="-122"/>
                 <a:cs typeface="Calibri" pitchFamily="34" charset="-120"/>
               </a:rPr>
-              <a:t>Fonte: AndroZoo — a MESMA do meu TCC</a:t>
+              <a:t>O AndroZoo é a mesma fonte que eu vou usar</a:t>
             </a:r>
             <a:endParaRPr lang="en-US" sz="1100" dirty="0"/>
           </a:p>
@@ -4056,7 +4034,7 @@
                 <a:ea typeface="Calibri" pitchFamily="34" charset="-122"/>
                 <a:cs typeface="Calibri" pitchFamily="34" charset="-120"/>
               </a:rPr>
-              <a:t>3 critérios de inclusão explícitos</a:t>
+              <a:t>Três critérios de entrada declarados</a:t>
             </a:r>
             <a:endParaRPr lang="en-US" sz="1100" dirty="0"/>
           </a:p>
@@ -4077,7 +4055,7 @@
                 <a:ea typeface="Calibri" pitchFamily="34" charset="-122"/>
                 <a:cs typeface="Calibri" pitchFamily="34" charset="-120"/>
               </a:rPr>
-              <a:t>OCR + PLN + clustering + verificação manual</a:t>
+              <a:t>Dois instrumentos: a tela e o tráfego de rede</a:t>
             </a:r>
             <a:endParaRPr lang="en-US" sz="1100" dirty="0"/>
           </a:p>
@@ -4098,28 +4076,7 @@
                 <a:ea typeface="Calibri" pitchFamily="34" charset="-122"/>
                 <a:cs typeface="Calibri" pitchFamily="34" charset="-120"/>
               </a:rPr>
-              <a:t>Análise dinâmica de tráfego</a:t>
-            </a:r>
-            <a:endParaRPr lang="en-US" sz="1100" dirty="0"/>
-          </a:p>
-          <a:p>
-            <a:pPr marL="342900" indent="-342900">
-              <a:spcAft>
-                <a:spcPts val="700"/>
-              </a:spcAft>
-              <a:buSzPct val="100000"/>
-              <a:buChar char="•"/>
-            </a:pPr>
-            <a:r>
-              <a:rPr lang="en-US" sz="1100" dirty="0">
-                <a:solidFill>
-                  <a:srgbClr val="1B2A4A"/>
-                </a:solidFill>
-                <a:latin typeface="Calibri" pitchFamily="34" charset="0"/>
-                <a:ea typeface="Calibri" pitchFamily="34" charset="-122"/>
-                <a:cs typeface="Calibri" pitchFamily="34" charset="-120"/>
-              </a:rPr>
-              <a:t>Reportam a taxa de sucesso, não só o total</a:t>
+              <a:t>Reportam quanto NÃO conseguiram analisar</a:t>
             </a:r>
             <a:endParaRPr lang="en-US" sz="1100" dirty="0"/>
           </a:p>
@@ -4227,48 +4184,9 @@
                 <a:ea typeface="Calibri" pitchFamily="34" charset="-122"/>
                 <a:cs typeface="Calibri" pitchFamily="34" charset="-120"/>
               </a:rPr>
-              <a:t>O denominador MUDA no meio: os 20,54% são sobre os 13.082 que têm mecanismo, não sobre os 239.381. E os 30.160 são categoria separada — não têm mecanismo nenhum.</a:t>
+              <a:t>O denominador muda no meio do funil: os 2.688 são sobre os 13.082 que têm aviso, não sobre os 239 mil. E os 30.160 são outra categoria, não têm aviso nenhum.</a:t>
             </a:r>
             <a:endParaRPr lang="en-US" sz="1150" dirty="0"/>
-          </a:p>
-        </p:txBody>
-      </p:sp>
-      <p:sp>
-        <p:nvSpPr>
-          <p:cNvPr id="12" name="Text 10"/>
-          <p:cNvSpPr txBox="1"/>
-          <p:nvPr/>
-        </p:nvSpPr>
-        <p:spPr>
-          <a:xfrm>
-            <a:off x="502920" y="4718304"/>
-            <a:ext cx="8138160" cy="237744"/>
-          </a:xfrm>
-          <a:prstGeom prst="rect">
-            <a:avLst/>
-          </a:prstGeom>
-          <a:noFill/>
-          <a:ln/>
-        </p:spPr>
-        <p:txBody>
-          <a:bodyPr wrap="square" lIns="0" tIns="0" rIns="0" bIns="0" rtlCol="0" anchor="ctr"/>
-          <a:lstStyle/>
-          <a:p>
-            <a:pPr algn="l" indent="0" marL="0">
-              <a:buNone/>
-            </a:pPr>
-            <a:r>
-              <a:rPr lang="en-US" sz="950" dirty="0">
-                <a:solidFill>
-                  <a:srgbClr val="98A2B3"/>
-                </a:solidFill>
-                <a:latin typeface="Calibri" pitchFamily="34" charset="0"/>
-                <a:ea typeface="Calibri" pitchFamily="34" charset="-122"/>
-                <a:cs typeface="Calibri" pitchFamily="34" charset="-120"/>
-              </a:rPr>
-              <a:t>~50 segundos por slide  ·  a análise da estrutura vale 5 dos 15 minutos</a:t>
-            </a:r>
-            <a:endParaRPr lang="en-US" sz="950" dirty="0"/>
           </a:p>
         </p:txBody>
       </p:sp>
@@ -4369,7 +4287,7 @@
                 <a:ea typeface="Cambria" pitchFamily="34" charset="-122"/>
                 <a:cs typeface="Cambria" pitchFamily="34" charset="-120"/>
               </a:rPr>
-              <a:t>Análise dos resultados</a:t>
+              <a:t>Os resultados</a:t>
             </a:r>
             <a:endParaRPr lang="en-US" sz="2500" dirty="0"/>
           </a:p>
@@ -4408,7 +4326,7 @@
                 <a:ea typeface="Calibri" pitchFamily="34" charset="-122"/>
                 <a:cs typeface="Calibri" pitchFamily="34" charset="-120"/>
               </a:rPr>
-              <a:t>Dois instrumentos independentes validam cada afirmação.</a:t>
+              <a:t>Cada afirmação é sustentada por dois instrumentos independentes.</a:t>
             </a:r>
             <a:endParaRPr lang="en-US" sz="1200" dirty="0"/>
           </a:p>
@@ -4477,7 +4395,7 @@
                 <a:ea typeface="Consolas" pitchFamily="34" charset="-122"/>
                 <a:cs typeface="Consolas" pitchFamily="34" charset="-120"/>
               </a:rPr>
-              <a:t>2.181  (16,67%)  enviaram dado ANTES do consentimento explícito</a:t>
+              <a:t>2.181   mandaram dado ANTES de o usuário consentir</a:t>
             </a:r>
             <a:endParaRPr lang="en-US" sz="950" dirty="0"/>
           </a:p>
@@ -4497,7 +4415,7 @@
                 <a:ea typeface="Consolas" pitchFamily="34" charset="-122"/>
                 <a:cs typeface="Consolas" pitchFamily="34" charset="-120"/>
               </a:rPr>
-              <a:t>1.084  ( 8,28%)  sem qualquer forma de recusar</a:t>
+              <a:t>1.084   não oferecem nenhuma forma de recusar</a:t>
             </a:r>
             <a:endParaRPr lang="en-US" sz="950" dirty="0"/>
           </a:p>
@@ -4517,7 +4435,7 @@
                 <a:ea typeface="Consolas" pitchFamily="34" charset="-122"/>
                 <a:cs typeface="Consolas" pitchFamily="34" charset="-120"/>
               </a:rPr>
-              <a:t>  134            enviaram dado DEPOIS do opt-out explícito</a:t>
+              <a:t>  134   mandaram dado DEPOIS de o usuário recusar</a:t>
             </a:r>
             <a:endParaRPr lang="en-US" sz="950" dirty="0"/>
           </a:p>
@@ -4528,6 +4446,15 @@
               </a:lnSpc>
               <a:buNone/>
             </a:pPr>
+            <a:endParaRPr lang="en-US" sz="950" dirty="0"/>
+          </a:p>
+          <a:p>
+            <a:pPr indent="0" marL="0">
+              <a:lnSpc>
+                <a:spcPct val="122000"/>
+              </a:lnSpc>
+              <a:buNone/>
+            </a:pPr>
             <a:r>
               <a:rPr lang="en-US" sz="950" dirty="0">
                 <a:solidFill>
@@ -4537,7 +4464,7 @@
                 <a:ea typeface="Consolas" pitchFamily="34" charset="-122"/>
                 <a:cs typeface="Consolas" pitchFamily="34" charset="-120"/>
               </a:rPr>
-              <a:t>  ~99%           das violações envolvem o Android Advertising ID (AAID)</a:t>
+              <a:t>Quase todas as violações envolvem o identificador de anúncio do Android.</a:t>
             </a:r>
             <a:endParaRPr lang="en-US" sz="950" dirty="0"/>
           </a:p>
@@ -4566,7 +4493,27 @@
                 <a:ea typeface="Consolas" pitchFamily="34" charset="-122"/>
                 <a:cs typeface="Consolas" pitchFamily="34" charset="-120"/>
               </a:rPr>
-              <a:t>Validação:  a tela prova que o aviso existe; o tráfego prova que o dado saiu.</a:t>
+              <a:t>A tela prova que o aviso existe. O tráfego prova que o dado saiu.</a:t>
+            </a:r>
+            <a:endParaRPr lang="en-US" sz="950" dirty="0"/>
+          </a:p>
+          <a:p>
+            <a:pPr indent="0" marL="0">
+              <a:lnSpc>
+                <a:spcPct val="122000"/>
+              </a:lnSpc>
+              <a:buNone/>
+            </a:pPr>
+            <a:r>
+              <a:rPr lang="en-US" sz="950" dirty="0">
+                <a:solidFill>
+                  <a:srgbClr val="1B2A4A"/>
+                </a:solidFill>
+                <a:latin typeface="Consolas" pitchFamily="34" charset="0"/>
+                <a:ea typeface="Consolas" pitchFamily="34" charset="-122"/>
+                <a:cs typeface="Consolas" pitchFamily="34" charset="-120"/>
+              </a:rPr>
+              <a:t>Um sozinho não sustenta a afirmação.</a:t>
             </a:r>
             <a:endParaRPr lang="en-US" sz="950" dirty="0"/>
           </a:p>
@@ -4648,7 +4595,7 @@
                 <a:ea typeface="Calibri" pitchFamily="34" charset="-122"/>
                 <a:cs typeface="Calibri" pitchFamily="34" charset="-120"/>
               </a:rPr>
-              <a:t>SEM intervalo de confiança</a:t>
+              <a:t>Não tem intervalo de confiança</a:t>
             </a:r>
             <a:endParaRPr lang="en-US" sz="1100" dirty="0"/>
           </a:p>
@@ -4669,7 +4616,7 @@
                 <a:ea typeface="Calibri" pitchFamily="34" charset="-122"/>
                 <a:cs typeface="Calibri" pitchFamily="34" charset="-120"/>
               </a:rPr>
-              <a:t>SEM tamanho de efeito</a:t>
+              <a:t>Não tem tamanho de efeito</a:t>
             </a:r>
             <a:endParaRPr lang="en-US" sz="1100" dirty="0"/>
           </a:p>
@@ -4690,7 +4637,7 @@
                 <a:ea typeface="Calibri" pitchFamily="34" charset="-122"/>
                 <a:cs typeface="Calibri" pitchFamily="34" charset="-120"/>
               </a:rPr>
-              <a:t>SEM grupo de controle ← minha lacuna</a:t>
+              <a:t>Não tem grupo de controle</a:t>
             </a:r>
             <a:endParaRPr lang="en-US" sz="1100" dirty="0"/>
           </a:p>
@@ -4711,7 +4658,7 @@
                 <a:ea typeface="Calibri" pitchFamily="34" charset="-122"/>
                 <a:cs typeface="Calibri" pitchFamily="34" charset="-120"/>
               </a:rPr>
-              <a:t>COM artefato público</a:t>
+              <a:t>e essa é a minha lacuna</a:t>
             </a:r>
             <a:endParaRPr lang="en-US" sz="1100" dirty="0"/>
           </a:p>
@@ -4819,48 +4766,9 @@
                 <a:ea typeface="Calibri" pitchFamily="34" charset="-122"/>
                 <a:cs typeface="Calibri" pitchFamily="34" charset="-120"/>
               </a:rPr>
-              <a:t>Presença não é transmissão. É o mesmo par estático+dinâmico que eu vou precisar no meu trabalho: detectar o SDK não prova que ele enviou dado.</a:t>
+              <a:t>Presença não é transmissão. E o mesmo par de instrumentos que eu vou precisar: detectar o SDK no aplicativo nao prova que ele enviou dado.</a:t>
             </a:r>
             <a:endParaRPr lang="en-US" sz="1150" dirty="0"/>
-          </a:p>
-        </p:txBody>
-      </p:sp>
-      <p:sp>
-        <p:nvSpPr>
-          <p:cNvPr id="12" name="Text 10"/>
-          <p:cNvSpPr txBox="1"/>
-          <p:nvPr/>
-        </p:nvSpPr>
-        <p:spPr>
-          <a:xfrm>
-            <a:off x="502920" y="4718304"/>
-            <a:ext cx="8138160" cy="237744"/>
-          </a:xfrm>
-          <a:prstGeom prst="rect">
-            <a:avLst/>
-          </a:prstGeom>
-          <a:noFill/>
-          <a:ln/>
-        </p:spPr>
-        <p:txBody>
-          <a:bodyPr wrap="square" lIns="0" tIns="0" rIns="0" bIns="0" rtlCol="0" anchor="ctr"/>
-          <a:lstStyle/>
-          <a:p>
-            <a:pPr algn="l" indent="0" marL="0">
-              <a:buNone/>
-            </a:pPr>
-            <a:r>
-              <a:rPr lang="en-US" sz="950" dirty="0">
-                <a:solidFill>
-                  <a:srgbClr val="98A2B3"/>
-                </a:solidFill>
-                <a:latin typeface="Calibri" pitchFamily="34" charset="0"/>
-                <a:ea typeface="Calibri" pitchFamily="34" charset="-122"/>
-                <a:cs typeface="Calibri" pitchFamily="34" charset="-120"/>
-              </a:rPr>
-              <a:t>~50 segundos por slide  ·  a análise da estrutura vale 5 dos 15 minutos</a:t>
-            </a:r>
-            <a:endParaRPr lang="en-US" sz="950" dirty="0"/>
           </a:p>
         </p:txBody>
       </p:sp>
@@ -4961,7 +4869,7 @@
                 <a:ea typeface="Cambria" pitchFamily="34" charset="-122"/>
                 <a:cs typeface="Cambria" pitchFamily="34" charset="-120"/>
               </a:rPr>
-              <a:t>Análise da discussão</a:t>
+              <a:t>A discussão</a:t>
             </a:r>
             <a:endParaRPr lang="en-US" sz="2500" dirty="0"/>
           </a:p>
@@ -5000,7 +4908,7 @@
                 <a:ea typeface="Calibri" pitchFamily="34" charset="-122"/>
                 <a:cs typeface="Calibri" pitchFamily="34" charset="-120"/>
               </a:rPr>
-              <a:t>Seção 6, autônoma, com três subseções.</a:t>
+              <a:t>Existe seção própria, com três subseções.</a:t>
             </a:r>
             <a:endParaRPr lang="en-US" sz="1200" dirty="0"/>
           </a:p>
@@ -5069,7 +4977,7 @@
                 <a:ea typeface="Consolas" pitchFamily="34" charset="-122"/>
                 <a:cs typeface="Consolas" pitchFamily="34" charset="-120"/>
               </a:rPr>
-              <a:t>6.1  Widespread Violation of GDPR Consent   →  não é caso isolado, é prática difundida</a:t>
+              <a:t>6.1   a violação é generalizada, não é caso isolado</a:t>
             </a:r>
             <a:endParaRPr lang="en-US" sz="950" dirty="0"/>
           </a:p>
@@ -5089,7 +4997,7 @@
                 <a:ea typeface="Consolas" pitchFamily="34" charset="-122"/>
                 <a:cs typeface="Consolas" pitchFamily="34" charset="-120"/>
               </a:rPr>
-              <a:t>6.2  Transparency of Processing Users' Data  →  o problema não é só ilegalidade, é opacidade</a:t>
+              <a:t>6.2   o problema não é só ilegalidade, é falta de transparência</a:t>
             </a:r>
             <a:endParaRPr lang="en-US" sz="950" dirty="0"/>
           </a:p>
@@ -5109,7 +5017,7 @@
                 <a:ea typeface="Consolas" pitchFamily="34" charset="-122"/>
                 <a:cs typeface="Consolas" pitchFamily="34" charset="-120"/>
               </a:rPr>
-              <a:t>6.3  Lack of Support for Developers          →  falta ferramenta e orientação, não sobra má-fé</a:t>
+              <a:t>6.3   falta ferramenta e orientação para o desenvolvedor cumprir a lei</a:t>
             </a:r>
             <a:endParaRPr lang="en-US" sz="950" dirty="0"/>
           </a:p>
@@ -5138,7 +5046,7 @@
                 <a:ea typeface="Consolas" pitchFamily="34" charset="-122"/>
                 <a:cs typeface="Consolas" pitchFamily="34" charset="-120"/>
               </a:rPr>
-              <a:t>Depois de medir 2.688 violações, eles NÃO concluem que os devs agem de má-fé.</a:t>
+              <a:t>Depois de encontrar 2.688 violações, eles NÃO concluem que</a:t>
             </a:r>
             <a:endParaRPr lang="en-US" sz="950" dirty="0"/>
           </a:p>
@@ -5158,7 +5066,27 @@
                 <a:ea typeface="Consolas" pitchFamily="34" charset="-122"/>
                 <a:cs typeface="Consolas" pitchFamily="34" charset="-120"/>
               </a:rPr>
-              <a:t>Usam as respostas coletadas na Seção 5 para reenquadrar a causa.</a:t>
+              <a:t>os desenvolvedores agem de má-fé. Usam as respostas que</a:t>
+            </a:r>
+            <a:endParaRPr lang="en-US" sz="950" dirty="0"/>
+          </a:p>
+          <a:p>
+            <a:pPr indent="0" marL="0">
+              <a:lnSpc>
+                <a:spcPct val="122000"/>
+              </a:lnSpc>
+              <a:buNone/>
+            </a:pPr>
+            <a:r>
+              <a:rPr lang="en-US" sz="950" dirty="0">
+                <a:solidFill>
+                  <a:srgbClr val="1B2A4A"/>
+                </a:solidFill>
+                <a:latin typeface="Consolas" pitchFamily="34" charset="0"/>
+                <a:ea typeface="Consolas" pitchFamily="34" charset="-122"/>
+                <a:cs typeface="Consolas" pitchFamily="34" charset="-120"/>
+              </a:rPr>
+              <a:t>coletaram na seção 5 para deslocar a causa.</a:t>
             </a:r>
             <a:endParaRPr lang="en-US" sz="950" dirty="0"/>
           </a:p>
@@ -5282,7 +5210,7 @@
                 <a:ea typeface="Calibri" pitchFamily="34" charset="-122"/>
                 <a:cs typeface="Calibri" pitchFamily="34" charset="-120"/>
               </a:rPr>
-              <a:t>Implicação normativa</a:t>
+              <a:t>Tira implicação prática</a:t>
             </a:r>
             <a:endParaRPr lang="en-US" sz="1100" dirty="0"/>
           </a:p>
@@ -5411,48 +5339,9 @@
                 <a:ea typeface="Calibri" pitchFamily="34" charset="-122"/>
                 <a:cs typeface="Calibri" pitchFamily="34" charset="-120"/>
               </a:rPr>
-              <a:t>É o movimento que o MEU resultado pede: 0 de 396 apps de governo com anúncio. Se houver rastreador, não é monetização — é dependência técnica.</a:t>
+              <a:t>E o mesmo movimento que o meu resultado pede: nenhum dos 396 apps de governo tem anuncio. Se houver rastreador, nao e para ganhar dinheiro, e dependencia tecnica.</a:t>
             </a:r>
             <a:endParaRPr lang="en-US" sz="1150" dirty="0"/>
-          </a:p>
-        </p:txBody>
-      </p:sp>
-      <p:sp>
-        <p:nvSpPr>
-          <p:cNvPr id="12" name="Text 10"/>
-          <p:cNvSpPr txBox="1"/>
-          <p:nvPr/>
-        </p:nvSpPr>
-        <p:spPr>
-          <a:xfrm>
-            <a:off x="502920" y="4718304"/>
-            <a:ext cx="8138160" cy="237744"/>
-          </a:xfrm>
-          <a:prstGeom prst="rect">
-            <a:avLst/>
-          </a:prstGeom>
-          <a:noFill/>
-          <a:ln/>
-        </p:spPr>
-        <p:txBody>
-          <a:bodyPr wrap="square" lIns="0" tIns="0" rIns="0" bIns="0" rtlCol="0" anchor="ctr"/>
-          <a:lstStyle/>
-          <a:p>
-            <a:pPr algn="l" indent="0" marL="0">
-              <a:buNone/>
-            </a:pPr>
-            <a:r>
-              <a:rPr lang="en-US" sz="950" dirty="0">
-                <a:solidFill>
-                  <a:srgbClr val="98A2B3"/>
-                </a:solidFill>
-                <a:latin typeface="Calibri" pitchFamily="34" charset="0"/>
-                <a:ea typeface="Calibri" pitchFamily="34" charset="-122"/>
-                <a:cs typeface="Calibri" pitchFamily="34" charset="-120"/>
-              </a:rPr>
-              <a:t>~50 segundos por slide  ·  a análise da estrutura vale 5 dos 15 minutos</a:t>
-            </a:r>
-            <a:endParaRPr lang="en-US" sz="950" dirty="0"/>
           </a:p>
         </p:txBody>
       </p:sp>
@@ -5553,7 +5442,7 @@
                 <a:ea typeface="Cambria" pitchFamily="34" charset="-122"/>
                 <a:cs typeface="Cambria" pitchFamily="34" charset="-120"/>
               </a:rPr>
-              <a:t>Análise da conclusão</a:t>
+              <a:t>A conclusão</a:t>
             </a:r>
             <a:endParaRPr lang="en-US" sz="2500" dirty="0"/>
           </a:p>
@@ -5592,7 +5481,7 @@
                 <a:ea typeface="Calibri" pitchFamily="34" charset="-122"/>
                 <a:cs typeface="Calibri" pitchFamily="34" charset="-120"/>
               </a:rPr>
-              <a:t>Repete o resumo quase palavra por palavra — com UMA diferença.</a:t>
+              <a:t>Repete o resumo quase palavra por palavra. Com uma diferença.</a:t>
             </a:r>
             <a:endParaRPr lang="en-US" sz="1200" dirty="0"/>
           </a:p>
@@ -5661,7 +5550,7 @@
                 <a:ea typeface="Consolas" pitchFamily="34" charset="-122"/>
                 <a:cs typeface="Consolas" pitchFamily="34" charset="-120"/>
               </a:rPr>
-              <a:t>RESUMO:      "2,688 (20.54%) apps VIOLATE at least one..."</a:t>
+              <a:t>NO RESUMO:      2.688 aplicativos VIOLAM ao menos um requisito</a:t>
             </a:r>
             <a:endParaRPr lang="en-US" sz="950" dirty="0"/>
           </a:p>
@@ -5672,6 +5561,15 @@
               </a:lnSpc>
               <a:buNone/>
             </a:pPr>
+            <a:endParaRPr lang="en-US" sz="950" dirty="0"/>
+          </a:p>
+          <a:p>
+            <a:pPr indent="0" marL="0">
+              <a:lnSpc>
+                <a:spcPct val="122000"/>
+              </a:lnSpc>
+              <a:buNone/>
+            </a:pPr>
             <a:r>
               <a:rPr lang="en-US" sz="950" dirty="0">
                 <a:solidFill>
@@ -5681,7 +5579,7 @@
                 <a:ea typeface="Consolas" pitchFamily="34" charset="-122"/>
                 <a:cs typeface="Consolas" pitchFamily="34" charset="-120"/>
               </a:rPr>
-              <a:t>CONCLUSÃO:   "2,688 (20.54%) apps POTENTIALLY VIOLATE at least one..."</a:t>
+              <a:t>NA CONCLUSÃO:   2.688 aplicativos POTENCIALMENTE VIOLAM</a:t>
             </a:r>
             <a:endParaRPr lang="en-US" sz="950" dirty="0"/>
           </a:p>
@@ -5710,7 +5608,7 @@
                 <a:ea typeface="Consolas" pitchFamily="34" charset="-122"/>
                 <a:cs typeface="Consolas" pitchFamily="34" charset="-120"/>
               </a:rPr>
-              <a:t>A nota de rodapé 1 explica que "potencial" foi escolha deliberada, para não</a:t>
+              <a:t>A nota de rodapé 1 diz que "potencialmente" foi escolha deliberada,</a:t>
             </a:r>
             <a:endParaRPr lang="en-US" sz="950" dirty="0"/>
           </a:p>
@@ -5730,7 +5628,36 @@
                 <a:ea typeface="Consolas" pitchFamily="34" charset="-122"/>
                 <a:cs typeface="Consolas" pitchFamily="34" charset="-120"/>
               </a:rPr>
-              <a:t>emitir juízo jurídico. Logo a CONCLUSÃO está correta e o RESUMO escorrega.</a:t>
+              <a:t>para não emitir juízo jurídico.</a:t>
+            </a:r>
+            <a:endParaRPr lang="en-US" sz="950" dirty="0"/>
+          </a:p>
+          <a:p>
+            <a:pPr indent="0" marL="0">
+              <a:lnSpc>
+                <a:spcPct val="122000"/>
+              </a:lnSpc>
+              <a:buNone/>
+            </a:pPr>
+            <a:endParaRPr lang="en-US" sz="950" dirty="0"/>
+          </a:p>
+          <a:p>
+            <a:pPr indent="0" marL="0">
+              <a:lnSpc>
+                <a:spcPct val="122000"/>
+              </a:lnSpc>
+              <a:buNone/>
+            </a:pPr>
+            <a:r>
+              <a:rPr lang="en-US" sz="950" dirty="0">
+                <a:solidFill>
+                  <a:srgbClr val="1B2A4A"/>
+                </a:solidFill>
+                <a:latin typeface="Consolas" pitchFamily="34" charset="0"/>
+                <a:ea typeface="Consolas" pitchFamily="34" charset="-122"/>
+                <a:cs typeface="Consolas" pitchFamily="34" charset="-120"/>
+              </a:rPr>
+              <a:t>Logo a conclusão está certa e o resumo escorrega.</a:t>
             </a:r>
             <a:endParaRPr lang="en-US" sz="950" dirty="0"/>
           </a:p>
@@ -5854,7 +5781,7 @@
                 <a:ea typeface="Calibri" pitchFamily="34" charset="-122"/>
                 <a:cs typeface="Calibri" pitchFamily="34" charset="-120"/>
               </a:rPr>
-              <a:t>Retoma a 3ª questão de pesquisa</a:t>
+              <a:t>Responde a terceira pergunta</a:t>
             </a:r>
             <a:endParaRPr lang="en-US" sz="1100" dirty="0"/>
           </a:p>
@@ -5875,7 +5802,7 @@
                 <a:ea typeface="Calibri" pitchFamily="34" charset="-122"/>
                 <a:cs typeface="Calibri" pitchFamily="34" charset="-120"/>
               </a:rPr>
-              <a:t>Implicação normativa</a:t>
+              <a:t>Tira implicação</a:t>
             </a:r>
             <a:endParaRPr lang="en-US" sz="1100" dirty="0"/>
           </a:p>
@@ -5983,48 +5910,9 @@
                 <a:ea typeface="Calibri" pitchFamily="34" charset="-122"/>
                 <a:cs typeface="Calibri" pitchFamily="34" charset="-120"/>
               </a:rPr>
-              <a:t>Comparar o que o resumo promete com o que a conclusão entrega é análise crítica de verdade — e aqui ela encontra uma inconsistência real num artigo A*.</a:t>
+              <a:t>Comparar o que o resumo promete com o que a conclusao entrega e analise critica de verdade. Aqui ela encontra uma inconsistencia real num artigo de conferencia A*.</a:t>
             </a:r>
             <a:endParaRPr lang="en-US" sz="1150" dirty="0"/>
-          </a:p>
-        </p:txBody>
-      </p:sp>
-      <p:sp>
-        <p:nvSpPr>
-          <p:cNvPr id="12" name="Text 10"/>
-          <p:cNvSpPr txBox="1"/>
-          <p:nvPr/>
-        </p:nvSpPr>
-        <p:spPr>
-          <a:xfrm>
-            <a:off x="502920" y="4718304"/>
-            <a:ext cx="8138160" cy="237744"/>
-          </a:xfrm>
-          <a:prstGeom prst="rect">
-            <a:avLst/>
-          </a:prstGeom>
-          <a:noFill/>
-          <a:ln/>
-        </p:spPr>
-        <p:txBody>
-          <a:bodyPr wrap="square" lIns="0" tIns="0" rIns="0" bIns="0" rtlCol="0" anchor="ctr"/>
-          <a:lstStyle/>
-          <a:p>
-            <a:pPr algn="l" indent="0" marL="0">
-              <a:buNone/>
-            </a:pPr>
-            <a:r>
-              <a:rPr lang="en-US" sz="950" dirty="0">
-                <a:solidFill>
-                  <a:srgbClr val="98A2B3"/>
-                </a:solidFill>
-                <a:latin typeface="Calibri" pitchFamily="34" charset="0"/>
-                <a:ea typeface="Calibri" pitchFamily="34" charset="-122"/>
-                <a:cs typeface="Calibri" pitchFamily="34" charset="-120"/>
-              </a:rPr>
-              <a:t>~50 segundos por slide  ·  a análise da estrutura vale 5 dos 15 minutos</a:t>
-            </a:r>
-            <a:endParaRPr lang="en-US" sz="950" dirty="0"/>
           </a:p>
         </p:txBody>
       </p:sp>
@@ -6387,7 +6275,7 @@
                 <a:ea typeface="Calibri" pitchFamily="34" charset="-122"/>
                 <a:cs typeface="Calibri" pitchFamily="34" charset="-120"/>
               </a:rPr>
-              <a:t>Aplico ao parque governamental brasileiro, que o artigo não cobre — com grupo de controle comercial pareado.</a:t>
+              <a:t>Aplico ao parque governamental brasileiro, que o artigo não cobre, e acrescento grupo de controle comercial pareado.</a:t>
             </a:r>
             <a:endParaRPr lang="en-US" sz="1250" dirty="0"/>
           </a:p>
@@ -6744,7 +6632,7 @@
                 <a:ea typeface="Cambria" pitchFamily="34" charset="-122"/>
                 <a:cs typeface="Cambria" pitchFamily="34" charset="-120"/>
               </a:rPr>
-              <a:t>Cibersegurança — medição empírica</a:t>
+              <a:t>Cibersegurança, na vertente de medição</a:t>
             </a:r>
             <a:endParaRPr lang="en-US" sz="2100" dirty="0"/>
           </a:p>
@@ -7134,7 +7022,7 @@
                 <a:ea typeface="Calibri" pitchFamily="34" charset="-122"/>
                 <a:cs typeface="Calibri" pitchFamily="34" charset="-120"/>
               </a:rPr>
-              <a:t>Dado sensível — Art. 11</a:t>
+              <a:t>Dado sensível, Art. 11</a:t>
             </a:r>
             <a:endParaRPr lang="en-US" sz="1300" dirty="0"/>
           </a:p>
@@ -7524,45 +7412,6 @@
               <a:t>17/09/2026</a:t>
             </a:r>
             <a:endParaRPr lang="en-US" sz="1150" dirty="0"/>
-          </a:p>
-        </p:txBody>
-      </p:sp>
-      <p:sp>
-        <p:nvSpPr>
-          <p:cNvPr id="22" name="Text 20"/>
-          <p:cNvSpPr txBox="1"/>
-          <p:nvPr/>
-        </p:nvSpPr>
-        <p:spPr>
-          <a:xfrm>
-            <a:off x="502920" y="4718304"/>
-            <a:ext cx="8138160" cy="237744"/>
-          </a:xfrm>
-          <a:prstGeom prst="rect">
-            <a:avLst/>
-          </a:prstGeom>
-          <a:noFill/>
-          <a:ln/>
-        </p:spPr>
-        <p:txBody>
-          <a:bodyPr wrap="square" lIns="0" tIns="0" rIns="0" bIns="0" rtlCol="0" anchor="ctr"/>
-          <a:lstStyle/>
-          <a:p>
-            <a:pPr algn="l" indent="0" marL="0">
-              <a:buNone/>
-            </a:pPr>
-            <a:r>
-              <a:rPr lang="en-US" sz="950" dirty="0">
-                <a:solidFill>
-                  <a:srgbClr val="98A2B3"/>
-                </a:solidFill>
-                <a:latin typeface="Calibri" pitchFamily="34" charset="0"/>
-                <a:ea typeface="Calibri" pitchFamily="34" charset="-122"/>
-                <a:cs typeface="Calibri" pitchFamily="34" charset="-120"/>
-              </a:rPr>
-              <a:t>1 minuto</a:t>
-            </a:r>
-            <a:endParaRPr lang="en-US" sz="950" dirty="0"/>
           </a:p>
         </p:txBody>
       </p:sp>
@@ -7694,7 +7543,7 @@
               <a:buNone/>
             </a:pPr>
             <a:r>
-              <a:rPr lang="en-US" sz="1250" dirty="0">
+              <a:rPr lang="en-US" sz="1300" dirty="0">
                 <a:solidFill>
                   <a:srgbClr val="5A6472"/>
                 </a:solidFill>
@@ -7702,9 +7551,9 @@
                 <a:ea typeface="Calibri" pitchFamily="34" charset="-122"/>
                 <a:cs typeface="Calibri" pitchFamily="34" charset="-120"/>
               </a:rPr>
-              <a:t>Seis temas passaram por teste de viabilidade antes de virar projeto. Três caíram, um ficou inconclusivo.</a:t>
-            </a:r>
-            <a:endParaRPr lang="en-US" sz="1250" dirty="0"/>
+              <a:t>Testei quatro temas antes de escolher. Três não sobreviveram aos dados.</a:t>
+            </a:r>
+            <a:endParaRPr lang="en-US" sz="1300" dirty="0"/>
           </a:p>
         </p:txBody>
       </p:sp>
@@ -7768,7 +7617,7 @@
                 <a:ea typeface="Calibri" pitchFamily="34" charset="-122"/>
                 <a:cs typeface="Calibri" pitchFamily="34" charset="-120"/>
               </a:rPr>
-              <a:t>Descartado — ICS exposta</a:t>
+              <a:t>Infraestrutura industrial</a:t>
             </a:r>
             <a:endParaRPr lang="en-US" sz="1300" dirty="0"/>
           </a:p>
@@ -7810,7 +7659,7 @@
                 <a:ea typeface="Calibri" pitchFamily="34" charset="-122"/>
                 <a:cs typeface="Calibri" pitchFamily="34" charset="-120"/>
               </a:rPr>
-              <a:t>Os mesmos hosts respondiam em Modbus, IEC-104 e EtherNet/IP ao mesmo tempo — equipamento industrial real não faz isso.</a:t>
+              <a:t>Queria medir equipamento de indústria exposto na internet.</a:t>
             </a:r>
             <a:endParaRPr lang="en-US" sz="1150" dirty="0"/>
           </a:p>
@@ -7839,7 +7688,7 @@
                 <a:ea typeface="Calibri" pitchFamily="34" charset="-122"/>
                 <a:cs typeface="Calibri" pitchFamily="34" charset="-120"/>
               </a:rPr>
-              <a:t>A variável independente (o setor do operador) era inobservável.</a:t>
+              <a:t>Os endereços que achei respondiam a três protocolos ao mesmo tempo. Equipamento de verdade não faz isso: eram armadilhas e servidores de nuvem.</a:t>
             </a:r>
             <a:endParaRPr lang="en-US" sz="1150" dirty="0"/>
           </a:p>
@@ -7905,7 +7754,7 @@
                 <a:ea typeface="Calibri" pitchFamily="34" charset="-122"/>
                 <a:cs typeface="Calibri" pitchFamily="34" charset="-120"/>
               </a:rPr>
-              <a:t>Descartado — abuso de marca</a:t>
+              <a:t>Sites que imitam bancos</a:t>
             </a:r>
             <a:endParaRPr lang="en-US" sz="1300" dirty="0"/>
           </a:p>
@@ -7947,7 +7796,7 @@
                 <a:ea typeface="Calibri" pitchFamily="34" charset="-122"/>
                 <a:cs typeface="Calibri" pitchFamily="34" charset="-120"/>
               </a:rPr>
-              <a:t>20.007 entradas de log de Certificate Transparency analisadas.</a:t>
+              <a:t>Procurei endereços falsos em 20 mil registros de certificado digital.</a:t>
             </a:r>
             <a:endParaRPr lang="en-US" sz="1150" dirty="0"/>
           </a:p>
@@ -7976,7 +7825,7 @@
                 <a:ea typeface="Calibri" pitchFamily="34" charset="-122"/>
                 <a:cs typeface="Calibri" pitchFamily="34" charset="-120"/>
               </a:rPr>
-              <a:t>Nenhuma imitação real encontrada: phishing moderno raramente põe a marca no domínio, o que impõe teto de recall.</a:t>
+              <a:t>Não achei nenhum. Golpe hoje quase nunca põe o nome do banco no endereço do site.</a:t>
             </a:r>
             <a:endParaRPr lang="en-US" sz="1150" dirty="0"/>
           </a:p>
@@ -8042,7 +7891,7 @@
                 <a:ea typeface="Calibri" pitchFamily="34" charset="-122"/>
                 <a:cs typeface="Calibri" pitchFamily="34" charset="-120"/>
               </a:rPr>
-              <a:t>Inconclusivo — malware bancário</a:t>
+              <a:t>Vírus de banco brasileiro</a:t>
             </a:r>
             <a:endParaRPr lang="en-US" sz="1300" dirty="0"/>
           </a:p>
@@ -8084,7 +7933,7 @@
                 <a:ea typeface="Calibri" pitchFamily="34" charset="-122"/>
                 <a:cs typeface="Calibri" pitchFamily="34" charset="-120"/>
               </a:rPr>
-              <a:t>O repositório rotula a CAMPANHA, não o payload.</a:t>
+              <a:t>Quis medir o parentesco entre famílias de vírus.</a:t>
             </a:r>
             <a:endParaRPr lang="en-US" sz="1150" dirty="0"/>
           </a:p>
@@ -8113,7 +7962,7 @@
                 <a:ea typeface="Calibri" pitchFamily="34" charset="-122"/>
                 <a:cs typeface="Calibri" pitchFamily="34" charset="-120"/>
               </a:rPr>
-              <a:t>85% do acervo brasileiro são containers, onde a métrica que eu usava nem existe. Erro meu, registrado.</a:t>
+              <a:t>Descobri que o repositório identifica a campanha do golpe, não o programa. Eu estava medindo a coisa errada. Registrei o erro.</a:t>
             </a:r>
             <a:endParaRPr lang="en-US" sz="1150" dirty="0"/>
           </a:p>
@@ -8179,7 +8028,7 @@
                 <a:ea typeface="Calibri" pitchFamily="34" charset="-122"/>
                 <a:cs typeface="Calibri" pitchFamily="34" charset="-120"/>
               </a:rPr>
-              <a:t>Confirmado — apps de governo</a:t>
+              <a:t>Apps de governo   ✓</a:t>
             </a:r>
             <a:endParaRPr lang="en-US" sz="1300" dirty="0"/>
           </a:p>
@@ -8221,7 +8070,7 @@
                 <a:ea typeface="Calibri" pitchFamily="34" charset="-122"/>
                 <a:cs typeface="Calibri" pitchFamily="34" charset="-120"/>
               </a:rPr>
-              <a:t>396 aplicativos, 71 publicadores públicos, três esferas.</a:t>
+              <a:t>396 aplicativos de 71 órgãos públicos, nas três esferas.</a:t>
             </a:r>
             <a:endParaRPr lang="en-US" sz="1150" dirty="0"/>
           </a:p>
@@ -8250,7 +8099,7 @@
                 <a:ea typeface="Calibri" pitchFamily="34" charset="-122"/>
                 <a:cs typeface="Calibri" pitchFamily="34" charset="-120"/>
               </a:rPr>
-              <a:t>Publicador identificado na origem: sem trabalho de atribuição — que foi o que matou o primeiro tema.</a:t>
+              <a:t>A loja diz quem publicou cada um. Não preciso descobrir de quem é o app, que foi justamente o que faltou nos outros três.</a:t>
             </a:r>
             <a:endParaRPr lang="en-US" sz="1150" dirty="0"/>
           </a:p>
@@ -8289,48 +8138,9 @@
                 <a:ea typeface="Calibri" pitchFamily="34" charset="-122"/>
                 <a:cs typeface="Calibri" pitchFamily="34" charset="-120"/>
               </a:rPr>
-              <a:t>Descartar com evidência é parte do método (Aula 04 — maturidade em pesquisa; Aula 07 — evitar o fundamento vazio).</a:t>
+              <a:t>Descartar com evidência faz parte do método. É o que as aulas 04 e 07 chamam de maturidade em pesquisa.</a:t>
             </a:r>
             <a:endParaRPr lang="en-US" sz="1150" dirty="0"/>
-          </a:p>
-        </p:txBody>
-      </p:sp>
-      <p:sp>
-        <p:nvSpPr>
-          <p:cNvPr id="18" name="Text 16"/>
-          <p:cNvSpPr txBox="1"/>
-          <p:nvPr/>
-        </p:nvSpPr>
-        <p:spPr>
-          <a:xfrm>
-            <a:off x="502920" y="4718304"/>
-            <a:ext cx="8138160" cy="237744"/>
-          </a:xfrm>
-          <a:prstGeom prst="rect">
-            <a:avLst/>
-          </a:prstGeom>
-          <a:noFill/>
-          <a:ln/>
-        </p:spPr>
-        <p:txBody>
-          <a:bodyPr wrap="square" lIns="0" tIns="0" rIns="0" bIns="0" rtlCol="0" anchor="ctr"/>
-          <a:lstStyle/>
-          <a:p>
-            <a:pPr algn="l" indent="0" marL="0">
-              <a:buNone/>
-            </a:pPr>
-            <a:r>
-              <a:rPr lang="en-US" sz="950" dirty="0">
-                <a:solidFill>
-                  <a:srgbClr val="98A2B3"/>
-                </a:solidFill>
-                <a:latin typeface="Calibri" pitchFamily="34" charset="0"/>
-                <a:ea typeface="Calibri" pitchFamily="34" charset="-122"/>
-                <a:cs typeface="Calibri" pitchFamily="34" charset="-120"/>
-              </a:rPr>
-              <a:t>1 minuto  ·  não se alongue aqui — é contexto, não o conteúdo principal</a:t>
-            </a:r>
-            <a:endParaRPr lang="en-US" sz="950" dirty="0"/>
           </a:p>
         </p:txBody>
       </p:sp>
@@ -8431,7 +8241,7 @@
                 <a:ea typeface="Cambria" pitchFamily="34" charset="-122"/>
                 <a:cs typeface="Cambria" pitchFamily="34" charset="-120"/>
               </a:rPr>
-              <a:t>Passo a passo da seleção</a:t>
+              <a:t>Como cheguei até este artigo</a:t>
             </a:r>
             <a:endParaRPr lang="en-US" sz="2500" dirty="0"/>
           </a:p>
@@ -8446,7 +8256,7 @@
         <p:spPr>
           <a:xfrm>
             <a:off x="502920" y="896112"/>
-            <a:ext cx="8138160" cy="274320"/>
+            <a:ext cx="8138160" cy="256032"/>
           </a:xfrm>
           <a:prstGeom prst="rect">
             <a:avLst/>
@@ -8462,7 +8272,7 @@
               <a:buNone/>
             </a:pPr>
             <a:r>
-              <a:rPr lang="en-US" sz="1200" dirty="0">
+              <a:rPr lang="en-US" sz="1250" dirty="0">
                 <a:solidFill>
                   <a:srgbClr val="5A6472"/>
                 </a:solidFill>
@@ -8470,49 +8280,46 @@
                 <a:ea typeface="Calibri" pitchFamily="34" charset="-122"/>
                 <a:cs typeface="Calibri" pitchFamily="34" charset="-120"/>
               </a:rPr>
-              <a:t>Scopus, via portal da CAPES / CAFe  ·  21 de setembro de 2026  ·  prints de cada tela</a:t>
-            </a:r>
-            <a:endParaRPr lang="en-US" sz="1200" dirty="0"/>
-          </a:p>
-        </p:txBody>
-      </p:sp>
-      <p:sp>
-        <p:nvSpPr>
-          <p:cNvPr id="5" name="Shape 3"/>
-          <p:cNvSpPr/>
-          <p:nvPr/>
-        </p:nvSpPr>
-        <p:spPr>
-          <a:xfrm>
-            <a:off x="502920" y="1243584"/>
-            <a:ext cx="3968496" cy="1371600"/>
-          </a:xfrm>
-          <a:prstGeom prst="roundRect">
-            <a:avLst>
-              <a:gd name="adj" fmla="val 4000"/>
-            </a:avLst>
-          </a:prstGeom>
-          <a:solidFill>
-            <a:srgbClr val="F4F6F9"/>
-          </a:solidFill>
-          <a:ln w="12700">
-            <a:solidFill>
-              <a:srgbClr val="DDE3EA"/>
-            </a:solidFill>
-            <a:prstDash val="solid"/>
-          </a:ln>
-        </p:spPr>
-      </p:sp>
-      <p:sp>
-        <p:nvSpPr>
-          <p:cNvPr id="6" name="Text 4"/>
-          <p:cNvSpPr txBox="1"/>
-          <p:nvPr/>
-        </p:nvSpPr>
-        <p:spPr>
-          <a:xfrm>
-            <a:off x="685800" y="1371600"/>
-            <a:ext cx="3602736" cy="274320"/>
+              <a:t>Scopus, pelo portal da CAPES via CAFe, em 21 de setembro de 2026.</a:t>
+            </a:r>
+            <a:endParaRPr lang="en-US" sz="1250" dirty="0"/>
+          </a:p>
+        </p:txBody>
+      </p:sp>
+      <p:pic>
+        <p:nvPicPr>
+          <p:cNvPr id="5" name="Image 0" descr="/home/user/TCC/seminario/pesquisa/busca-scopus-resultados.jpg">    </p:cNvPr>
+          <p:cNvPicPr>
+            <a:picLocks noChangeAspect="1"/>
+          </p:cNvPicPr>
+          <p:nvPr/>
+        </p:nvPicPr>
+        <p:blipFill>
+          <a:blip r:embed="rId1"/>
+          <a:stretch>
+            <a:fillRect/>
+          </a:stretch>
+        </p:blipFill>
+        <p:spPr>
+          <a:xfrm>
+            <a:off x="502920" y="1207008"/>
+            <a:ext cx="5074920" cy="2935224"/>
+          </a:xfrm>
+          <a:prstGeom prst="rect">
+            <a:avLst/>
+          </a:prstGeom>
+        </p:spPr>
+      </p:pic>
+      <p:sp>
+        <p:nvSpPr>
+          <p:cNvPr id="6" name="Text 3"/>
+          <p:cNvSpPr txBox="1"/>
+          <p:nvPr/>
+        </p:nvSpPr>
+        <p:spPr>
+          <a:xfrm>
+            <a:off x="5349240" y="1207008"/>
+            <a:ext cx="3291840" cy="237744"/>
           </a:xfrm>
           <a:prstGeom prst="rect">
             <a:avLst/>
@@ -8528,7 +8335,7 @@
               <a:buNone/>
             </a:pPr>
             <a:r>
-              <a:rPr lang="en-US" sz="1300" b="1" dirty="0">
+              <a:rPr lang="en-US" sz="1050" b="1" dirty="0">
                 <a:solidFill>
                   <a:srgbClr val="1B2A4A"/>
                 </a:solidFill>
@@ -8536,22 +8343,22 @@
                 <a:ea typeface="Calibri" pitchFamily="34" charset="-122"/>
                 <a:cs typeface="Calibri" pitchFamily="34" charset="-120"/>
               </a:rPr>
-              <a:t>Tentativa 1 — expressão exata</a:t>
-            </a:r>
-            <a:endParaRPr lang="en-US" sz="1300" dirty="0"/>
-          </a:p>
-        </p:txBody>
-      </p:sp>
-      <p:sp>
-        <p:nvSpPr>
-          <p:cNvPr id="7" name="Text 5"/>
-          <p:cNvSpPr txBox="1"/>
-          <p:nvPr/>
-        </p:nvSpPr>
-        <p:spPr>
-          <a:xfrm>
-            <a:off x="685800" y="1682496"/>
-            <a:ext cx="3602736" cy="786384"/>
+              <a:t>Duas buscas, no campo título, resumo e palavras-chave:</a:t>
+            </a:r>
+            <a:endParaRPr lang="en-US" sz="1050" dirty="0"/>
+          </a:p>
+        </p:txBody>
+      </p:sp>
+      <p:sp>
+        <p:nvSpPr>
+          <p:cNvPr id="7" name="Text 4"/>
+          <p:cNvSpPr txBox="1"/>
+          <p:nvPr/>
+        </p:nvSpPr>
+        <p:spPr>
+          <a:xfrm>
+            <a:off x="5349240" y="1499616"/>
+            <a:ext cx="3291840" cy="1051560"/>
           </a:xfrm>
           <a:prstGeom prst="rect">
             <a:avLst/>
@@ -8564,268 +8371,94 @@
           <a:lstStyle/>
           <a:p>
             <a:pPr indent="0" marL="0">
-              <a:spcAft>
-                <a:spcPts val="400"/>
-              </a:spcAft>
-              <a:buNone/>
-            </a:pPr>
-            <a:r>
-              <a:rPr lang="en-US" sz="1150" dirty="0">
-                <a:solidFill>
-                  <a:srgbClr val="5A6472"/>
-                </a:solidFill>
-                <a:latin typeface="Calibri" pitchFamily="34" charset="0"/>
-                <a:ea typeface="Calibri" pitchFamily="34" charset="-122"/>
-                <a:cs typeface="Calibri" pitchFamily="34" charset="-120"/>
-              </a:rPr>
-              <a:t>"third-party tracking" AND consent AND android</a:t>
-            </a:r>
-            <a:endParaRPr lang="en-US" sz="1150" dirty="0"/>
-          </a:p>
-          <a:p>
-            <a:pPr indent="0" marL="0">
-              <a:spcAft>
-                <a:spcPts val="400"/>
-              </a:spcAft>
-              <a:buNone/>
-            </a:pPr>
-            <a:r>
-              <a:rPr lang="en-US" sz="1150" dirty="0">
-                <a:solidFill>
-                  <a:srgbClr val="5A6472"/>
-                </a:solidFill>
-                <a:latin typeface="Calibri" pitchFamily="34" charset="0"/>
-                <a:ea typeface="Calibri" pitchFamily="34" charset="-122"/>
-                <a:cs typeface="Calibri" pitchFamily="34" charset="-120"/>
-              </a:rPr>
-              <a:t>campo: Article title, Abstract, Keywords</a:t>
-            </a:r>
-            <a:endParaRPr lang="en-US" sz="1150" dirty="0"/>
-          </a:p>
-          <a:p>
-            <a:pPr indent="0" marL="0">
-              <a:spcAft>
-                <a:spcPts val="400"/>
-              </a:spcAft>
-              <a:buNone/>
-            </a:pPr>
-            <a:endParaRPr lang="en-US" sz="1150" dirty="0"/>
-          </a:p>
-          <a:p>
-            <a:pPr indent="0" marL="0">
-              <a:spcAft>
-                <a:spcPts val="400"/>
-              </a:spcAft>
-              <a:buNone/>
-            </a:pPr>
-            <a:r>
-              <a:rPr lang="en-US" sz="1150" dirty="0">
-                <a:solidFill>
-                  <a:srgbClr val="5A6472"/>
-                </a:solidFill>
-                <a:latin typeface="Calibri" pitchFamily="34" charset="0"/>
-                <a:ea typeface="Calibri" pitchFamily="34" charset="-122"/>
-                <a:cs typeface="Calibri" pitchFamily="34" charset="-120"/>
-              </a:rPr>
-              <a:t>→ 4 documentos</a:t>
-            </a:r>
-            <a:endParaRPr lang="en-US" sz="1150" dirty="0"/>
-          </a:p>
-        </p:txBody>
-      </p:sp>
-      <p:sp>
-        <p:nvSpPr>
-          <p:cNvPr id="8" name="Shape 6"/>
-          <p:cNvSpPr/>
-          <p:nvPr/>
-        </p:nvSpPr>
-        <p:spPr>
-          <a:xfrm>
-            <a:off x="4672584" y="1243584"/>
-            <a:ext cx="3968496" cy="1371600"/>
-          </a:xfrm>
-          <a:prstGeom prst="roundRect">
-            <a:avLst>
-              <a:gd name="adj" fmla="val 4000"/>
-            </a:avLst>
-          </a:prstGeom>
-          <a:solidFill>
-            <a:srgbClr val="F4F6F9"/>
-          </a:solidFill>
-          <a:ln w="12700">
-            <a:solidFill>
-              <a:srgbClr val="DDE3EA"/>
-            </a:solidFill>
-            <a:prstDash val="solid"/>
-          </a:ln>
-        </p:spPr>
-      </p:sp>
-      <p:sp>
-        <p:nvSpPr>
-          <p:cNvPr id="9" name="Text 7"/>
-          <p:cNvSpPr txBox="1"/>
-          <p:nvPr/>
-        </p:nvSpPr>
-        <p:spPr>
-          <a:xfrm>
-            <a:off x="4855464" y="1371600"/>
-            <a:ext cx="3602736" cy="274320"/>
-          </a:xfrm>
-          <a:prstGeom prst="rect">
-            <a:avLst/>
-          </a:prstGeom>
-          <a:noFill/>
-          <a:ln/>
-        </p:spPr>
-        <p:txBody>
-          <a:bodyPr wrap="square" lIns="0" tIns="0" rIns="0" bIns="0" rtlCol="0" anchor="ctr"/>
-          <a:lstStyle/>
-          <a:p>
-            <a:pPr indent="0" marL="0">
-              <a:buNone/>
-            </a:pPr>
-            <a:r>
-              <a:rPr lang="en-US" sz="1300" b="1" dirty="0">
+              <a:buNone/>
+            </a:pPr>
+            <a:r>
+              <a:rPr lang="en-US" sz="900" dirty="0">
+                <a:solidFill>
+                  <a:srgbClr val="1B2A4A"/>
+                </a:solidFill>
+                <a:latin typeface="Consolas" pitchFamily="34" charset="0"/>
+                <a:ea typeface="Consolas" pitchFamily="34" charset="-122"/>
+                <a:cs typeface="Consolas" pitchFamily="34" charset="-120"/>
+              </a:rPr>
+              <a:t>1.  "third-party tracking" AND consent AND android</a:t>
+            </a:r>
+            <a:endParaRPr lang="en-US" sz="900" dirty="0"/>
+          </a:p>
+          <a:p>
+            <a:pPr indent="0" marL="0">
+              <a:buNone/>
+            </a:pPr>
+            <a:r>
+              <a:rPr lang="en-US" sz="900" b="1" dirty="0">
                 <a:solidFill>
                   <a:srgbClr val="2E86A8"/>
                 </a:solidFill>
-                <a:latin typeface="Calibri" pitchFamily="34" charset="0"/>
-                <a:ea typeface="Calibri" pitchFamily="34" charset="-122"/>
-                <a:cs typeface="Calibri" pitchFamily="34" charset="-120"/>
-              </a:rPr>
-              <a:t>Tentativa 2 — ampliada</a:t>
-            </a:r>
-            <a:endParaRPr lang="en-US" sz="1300" dirty="0"/>
-          </a:p>
-        </p:txBody>
-      </p:sp>
-      <p:sp>
-        <p:nvSpPr>
-          <p:cNvPr id="10" name="Text 8"/>
-          <p:cNvSpPr txBox="1"/>
-          <p:nvPr/>
-        </p:nvSpPr>
-        <p:spPr>
-          <a:xfrm>
-            <a:off x="4855464" y="1682496"/>
-            <a:ext cx="3602736" cy="786384"/>
-          </a:xfrm>
-          <a:prstGeom prst="rect">
-            <a:avLst/>
-          </a:prstGeom>
-          <a:noFill/>
-          <a:ln/>
-        </p:spPr>
-        <p:txBody>
-          <a:bodyPr wrap="square" lIns="0" tIns="0" rIns="0" bIns="0" rtlCol="0" anchor="t"/>
-          <a:lstStyle/>
-          <a:p>
-            <a:pPr indent="0" marL="0">
-              <a:spcAft>
-                <a:spcPts val="400"/>
-              </a:spcAft>
-              <a:buNone/>
-            </a:pPr>
-            <a:r>
-              <a:rPr lang="en-US" sz="1150" dirty="0">
-                <a:solidFill>
-                  <a:srgbClr val="5A6472"/>
-                </a:solidFill>
-                <a:latin typeface="Calibri" pitchFamily="34" charset="0"/>
-                <a:ea typeface="Calibri" pitchFamily="34" charset="-122"/>
-                <a:cs typeface="Calibri" pitchFamily="34" charset="-120"/>
-              </a:rPr>
-              <a:t>"third party" AND tracking AND android AND (consent OR GDPR)</a:t>
-            </a:r>
-            <a:endParaRPr lang="en-US" sz="1150" dirty="0"/>
-          </a:p>
-          <a:p>
-            <a:pPr indent="0" marL="0">
-              <a:spcAft>
-                <a:spcPts val="400"/>
-              </a:spcAft>
-              <a:buNone/>
-            </a:pPr>
-            <a:endParaRPr lang="en-US" sz="1150" dirty="0"/>
-          </a:p>
-          <a:p>
-            <a:pPr indent="0" marL="0">
-              <a:spcAft>
-                <a:spcPts val="400"/>
-              </a:spcAft>
-              <a:buNone/>
-            </a:pPr>
-            <a:r>
-              <a:rPr lang="en-US" sz="1150" dirty="0">
-                <a:solidFill>
-                  <a:srgbClr val="5A6472"/>
-                </a:solidFill>
-                <a:latin typeface="Calibri" pitchFamily="34" charset="0"/>
-                <a:ea typeface="Calibri" pitchFamily="34" charset="-122"/>
-                <a:cs typeface="Calibri" pitchFamily="34" charset="-120"/>
-              </a:rPr>
-              <a:t>→ 12 documentos</a:t>
-            </a:r>
-            <a:endParaRPr lang="en-US" sz="1150" dirty="0"/>
-          </a:p>
-          <a:p>
-            <a:pPr indent="0" marL="0">
-              <a:spcAft>
-                <a:spcPts val="400"/>
-              </a:spcAft>
-              <a:buNone/>
-            </a:pPr>
-            <a:r>
-              <a:rPr lang="en-US" sz="1150" dirty="0">
-                <a:solidFill>
-                  <a:srgbClr val="5A6472"/>
-                </a:solidFill>
-                <a:latin typeface="Calibri" pitchFamily="34" charset="0"/>
-                <a:ea typeface="Calibri" pitchFamily="34" charset="-122"/>
-                <a:cs typeface="Calibri" pitchFamily="34" charset="-120"/>
-              </a:rPr>
-              <a:t>CS 11 · Eng 3 · Soc 3 · Env 2</a:t>
-            </a:r>
-            <a:endParaRPr lang="en-US" sz="1150" dirty="0"/>
-          </a:p>
-        </p:txBody>
-      </p:sp>
-      <p:sp>
-        <p:nvSpPr>
-          <p:cNvPr id="11" name="Text 9"/>
-          <p:cNvSpPr txBox="1"/>
-          <p:nvPr/>
-        </p:nvSpPr>
-        <p:spPr>
-          <a:xfrm>
-            <a:off x="502920" y="2697480"/>
-            <a:ext cx="8138160" cy="237744"/>
-          </a:xfrm>
-          <a:prstGeom prst="rect">
-            <a:avLst/>
-          </a:prstGeom>
-          <a:noFill/>
-          <a:ln/>
-        </p:spPr>
-        <p:txBody>
-          <a:bodyPr wrap="square" lIns="0" tIns="0" rIns="0" bIns="0" rtlCol="0" anchor="ctr"/>
-          <a:lstStyle/>
-          <a:p>
-            <a:pPr indent="0" marL="0">
-              <a:buNone/>
-            </a:pPr>
-            <a:r>
-              <a:rPr lang="en-US" sz="1050" i="1" dirty="0">
+                <a:latin typeface="Consolas" pitchFamily="34" charset="0"/>
+                <a:ea typeface="Consolas" pitchFamily="34" charset="-122"/>
+                <a:cs typeface="Consolas" pitchFamily="34" charset="-120"/>
+              </a:rPr>
+              <a:t>     4 resultados</a:t>
+            </a:r>
+            <a:endParaRPr lang="en-US" sz="900" dirty="0"/>
+          </a:p>
+          <a:p>
+            <a:pPr indent="0" marL="0">
+              <a:buNone/>
+            </a:pPr>
+            <a:endParaRPr lang="en-US" sz="900" dirty="0"/>
+          </a:p>
+          <a:p>
+            <a:pPr indent="0" marL="0">
+              <a:buNone/>
+            </a:pPr>
+            <a:r>
+              <a:rPr lang="en-US" sz="900" dirty="0">
+                <a:solidFill>
+                  <a:srgbClr val="1B2A4A"/>
+                </a:solidFill>
+                <a:latin typeface="Consolas" pitchFamily="34" charset="0"/>
+                <a:ea typeface="Consolas" pitchFamily="34" charset="-122"/>
+                <a:cs typeface="Consolas" pitchFamily="34" charset="-120"/>
+              </a:rPr>
+              <a:t>2.  "third party" AND tracking AND android AND</a:t>
+            </a:r>
+            <a:endParaRPr lang="en-US" sz="900" dirty="0"/>
+          </a:p>
+          <a:p>
+            <a:pPr indent="0" marL="0">
+              <a:buNone/>
+            </a:pPr>
+            <a:r>
+              <a:rPr lang="en-US" sz="900" dirty="0">
+                <a:solidFill>
+                  <a:srgbClr val="1B2A4A"/>
+                </a:solidFill>
+                <a:latin typeface="Consolas" pitchFamily="34" charset="0"/>
+                <a:ea typeface="Consolas" pitchFamily="34" charset="-122"/>
+                <a:cs typeface="Consolas" pitchFamily="34" charset="-120"/>
+              </a:rPr>
+              <a:t>     (consent OR GDPR)</a:t>
+            </a:r>
+            <a:endParaRPr lang="en-US" sz="900" dirty="0"/>
+          </a:p>
+          <a:p>
+            <a:pPr indent="0" marL="0">
+              <a:buNone/>
+            </a:pPr>
+            <a:r>
+              <a:rPr lang="en-US" sz="900" b="1" dirty="0">
                 <a:solidFill>
                   <a:srgbClr val="2E86A8"/>
                 </a:solidFill>
-                <a:latin typeface="Calibri" pitchFamily="34" charset="0"/>
-                <a:ea typeface="Calibri" pitchFamily="34" charset="-122"/>
-                <a:cs typeface="Calibri" pitchFamily="34" charset="-120"/>
-              </a:rPr>
-              <a:t>Filtros na T1: Year 2021–2025 · Computer Science · Conference paper · English   →   4 (nenhum perdido)</a:t>
-            </a:r>
-            <a:endParaRPr lang="en-US" sz="1050" dirty="0"/>
+                <a:latin typeface="Consolas" pitchFamily="34" charset="0"/>
+                <a:ea typeface="Consolas" pitchFamily="34" charset="-122"/>
+                <a:cs typeface="Consolas" pitchFamily="34" charset="-120"/>
+              </a:rPr>
+              <a:t>     12 resultados</a:t>
+            </a:r>
+            <a:endParaRPr lang="en-US" sz="900" dirty="0"/>
           </a:p>
         </p:txBody>
       </p:sp>
@@ -8844,21 +8477,20 @@
           </p:nvPr>
         </p:nvGraphicFramePr>
         <p:xfrm>
-          <a:off x="502920" y="3017520"/>
-          <a:ext cx="8138160" cy="914400"/>
+          <a:off x="5349240" y="2697480"/>
+          <a:ext cx="3291840" cy="914400"/>
         </p:xfrm>
         <a:graphic>
           <a:graphicData uri="http://schemas.openxmlformats.org/drawingml/2006/table">
             <a:tbl>
               <a:tblPr/>
               <a:tblGrid>
-                <a:gridCol w="274320"/>
-                <a:gridCol w="4206240"/>
-                <a:gridCol w="502920"/>
-                <a:gridCol w="502920"/>
-                <a:gridCol w="2011680"/>
+                <a:gridCol w="1600200"/>
+                <a:gridCol w="384048"/>
+                <a:gridCol w="384048"/>
+                <a:gridCol w="914400"/>
               </a:tblGrid>
-              <a:tr h="246888">
+              <a:tr h="219456">
                 <a:tc>
                   <a:txBody>
                     <a:bodyPr/>
@@ -8868,7 +8500,7 @@
                         <a:buNone/>
                       </a:pPr>
                       <a:r>
-                        <a:rPr lang="en-US" sz="1000" b="1" dirty="0">
+                        <a:rPr lang="en-US" sz="900" b="1" dirty="0">
                           <a:solidFill>
                             <a:srgbClr val="000000"/>
                           </a:solidFill>
@@ -8876,9 +8508,9 @@
                           <a:ea typeface="Calibri" pitchFamily="34" charset="-122"/>
                           <a:cs typeface="Calibri" pitchFamily="34" charset="-120"/>
                         </a:rPr>
-                        <a:t>#</a:t>
+                        <a:t>Candidato</a:t>
                       </a:r>
-                      <a:endParaRPr lang="en-US" sz="1000" dirty="0">
+                      <a:endParaRPr lang="en-US" sz="900" dirty="0">
                         <a:latin typeface="Calibri" charset="0"/>
                         <a:ea typeface="Calibri" charset="0"/>
                         <a:cs typeface="Calibri" charset="0"/>
@@ -8936,7 +8568,7 @@
                         <a:buNone/>
                       </a:pPr>
                       <a:r>
-                        <a:rPr lang="en-US" sz="1000" b="1" dirty="0">
+                        <a:rPr lang="en-US" sz="900" b="1" dirty="0">
                           <a:solidFill>
                             <a:srgbClr val="000000"/>
                           </a:solidFill>
@@ -8944,9 +8576,9 @@
                           <a:ea typeface="Calibri" pitchFamily="34" charset="-122"/>
                           <a:cs typeface="Calibri" pitchFamily="34" charset="-120"/>
                         </a:rPr>
-                        <a:t>Artigo</a:t>
+                        <a:t>Ano</a:t>
                       </a:r>
-                      <a:endParaRPr lang="en-US" sz="1000" dirty="0">
+                      <a:endParaRPr lang="en-US" sz="900" dirty="0">
                         <a:latin typeface="Calibri" charset="0"/>
                         <a:ea typeface="Calibri" charset="0"/>
                         <a:cs typeface="Calibri" charset="0"/>
@@ -9004,7 +8636,7 @@
                         <a:buNone/>
                       </a:pPr>
                       <a:r>
-                        <a:rPr lang="en-US" sz="1000" b="1" dirty="0">
+                        <a:rPr lang="en-US" sz="900" b="1" dirty="0">
                           <a:solidFill>
                             <a:srgbClr val="000000"/>
                           </a:solidFill>
@@ -9012,9 +8644,136 @@
                           <a:ea typeface="Calibri" pitchFamily="34" charset="-122"/>
                           <a:cs typeface="Calibri" pitchFamily="34" charset="-120"/>
                         </a:rPr>
-                        <a:t>Ano</a:t>
+                        <a:t>Cit.</a:t>
                       </a:r>
-                      <a:endParaRPr lang="en-US" sz="1000" dirty="0">
+                      <a:endParaRPr lang="en-US" sz="900" dirty="0">
+                        <a:latin typeface="Calibri" charset="0"/>
+                        <a:ea typeface="Calibri" charset="0"/>
+                        <a:cs typeface="Calibri" charset="0"/>
+                      </a:endParaRPr>
+                    </a:p>
+                  </a:txBody>
+                  <a:tcPr marL="91440" marR="91440" marT="45720" marB="45720" anchor="ctr">
+                    <a:lnL w="6350" cap="flat" cmpd="sng" algn="ctr">
+                      <a:solidFill>
+                        <a:srgbClr val="D8DEE6"/>
+                      </a:solidFill>
+                      <a:prstDash val="solid"/>
+                      <a:round/>
+                      <a:headEnd type="none" w="med" len="med"/>
+                      <a:tailEnd type="none" w="med" len="med"/>
+                    </a:lnL>
+                    <a:lnR w="6350" cap="flat" cmpd="sng" algn="ctr">
+                      <a:solidFill>
+                        <a:srgbClr val="D8DEE6"/>
+                      </a:solidFill>
+                      <a:prstDash val="solid"/>
+                      <a:round/>
+                      <a:headEnd type="none" w="med" len="med"/>
+                      <a:tailEnd type="none" w="med" len="med"/>
+                    </a:lnR>
+                    <a:lnT w="6350" cap="flat" cmpd="sng" algn="ctr">
+                      <a:solidFill>
+                        <a:srgbClr val="D8DEE6"/>
+                      </a:solidFill>
+                      <a:prstDash val="solid"/>
+                      <a:round/>
+                      <a:headEnd type="none" w="med" len="med"/>
+                      <a:tailEnd type="none" w="med" len="med"/>
+                    </a:lnT>
+                    <a:lnB w="6350" cap="flat" cmpd="sng" algn="ctr">
+                      <a:solidFill>
+                        <a:srgbClr val="D8DEE6"/>
+                      </a:solidFill>
+                      <a:prstDash val="solid"/>
+                      <a:round/>
+                      <a:headEnd type="none" w="med" len="med"/>
+                      <a:tailEnd type="none" w="med" len="med"/>
+                    </a:lnB>
+                    <a:solidFill>
+                      <a:srgbClr val="FFFFFF"/>
+                    </a:solidFill>
+                  </a:tcPr>
+                </a:tc>
+                <a:tc>
+                  <a:txBody>
+                    <a:bodyPr/>
+                    <a:lstStyle/>
+                    <a:p>
+                      <a:pPr indent="0" marL="0">
+                        <a:buNone/>
+                      </a:pPr>
+                      <a:endParaRPr lang="en-US" sz="900" dirty="0">
+                        <a:latin typeface="Calibri" charset="0"/>
+                        <a:ea typeface="Calibri" charset="0"/>
+                        <a:cs typeface="Calibri" charset="0"/>
+                      </a:endParaRPr>
+                    </a:p>
+                  </a:txBody>
+                  <a:tcPr marL="91440" marR="91440" marT="45720" marB="45720" anchor="ctr">
+                    <a:lnL w="6350" cap="flat" cmpd="sng" algn="ctr">
+                      <a:solidFill>
+                        <a:srgbClr val="D8DEE6"/>
+                      </a:solidFill>
+                      <a:prstDash val="solid"/>
+                      <a:round/>
+                      <a:headEnd type="none" w="med" len="med"/>
+                      <a:tailEnd type="none" w="med" len="med"/>
+                    </a:lnL>
+                    <a:lnR w="6350" cap="flat" cmpd="sng" algn="ctr">
+                      <a:solidFill>
+                        <a:srgbClr val="D8DEE6"/>
+                      </a:solidFill>
+                      <a:prstDash val="solid"/>
+                      <a:round/>
+                      <a:headEnd type="none" w="med" len="med"/>
+                      <a:tailEnd type="none" w="med" len="med"/>
+                    </a:lnR>
+                    <a:lnT w="6350" cap="flat" cmpd="sng" algn="ctr">
+                      <a:solidFill>
+                        <a:srgbClr val="D8DEE6"/>
+                      </a:solidFill>
+                      <a:prstDash val="solid"/>
+                      <a:round/>
+                      <a:headEnd type="none" w="med" len="med"/>
+                      <a:tailEnd type="none" w="med" len="med"/>
+                    </a:lnT>
+                    <a:lnB w="6350" cap="flat" cmpd="sng" algn="ctr">
+                      <a:solidFill>
+                        <a:srgbClr val="D8DEE6"/>
+                      </a:solidFill>
+                      <a:prstDash val="solid"/>
+                      <a:round/>
+                      <a:headEnd type="none" w="med" len="med"/>
+                      <a:tailEnd type="none" w="med" len="med"/>
+                    </a:lnB>
+                    <a:solidFill>
+                      <a:srgbClr val="FFFFFF"/>
+                    </a:solidFill>
+                  </a:tcPr>
+                </a:tc>
+              </a:tr>
+              <a:tr h="219456">
+                <a:tc>
+                  <a:txBody>
+                    <a:bodyPr/>
+                    <a:lstStyle/>
+                    <a:p>
+                      <a:pPr indent="0" marL="0">
+                        <a:buNone/>
+                      </a:pPr>
+                      <a:r>
+                        <a:rPr lang="en-US" sz="900" dirty="0">
+                          <a:solidFill>
+                            <a:srgbClr val="1B2A4A"/>
+                          </a:solidFill>
+                          <a:latin typeface="Calibri" pitchFamily="34" charset="0"/>
+                          <a:ea typeface="Calibri" pitchFamily="34" charset="-122"/>
+                          <a:cs typeface="Calibri" pitchFamily="34" charset="-120"/>
+                        </a:rPr>
+                        <a:t>WhisperTest</a:t>
+                      </a:r>
+                      <a:endParaRPr lang="en-US" sz="900" dirty="0">
                         <a:latin typeface="Calibri" charset="0"/>
                         <a:ea typeface="Calibri" charset="0"/>
                         <a:cs typeface="Calibri" charset="0"/>
@@ -9072,17 +8831,17 @@
                         <a:buNone/>
                       </a:pPr>
                       <a:r>
-                        <a:rPr lang="en-US" sz="1000" b="1" dirty="0">
+                        <a:rPr lang="en-US" sz="900" dirty="0">
                           <a:solidFill>
-                            <a:srgbClr val="000000"/>
+                            <a:srgbClr val="1B2A4A"/>
                           </a:solidFill>
                           <a:latin typeface="Calibri" pitchFamily="34" charset="0"/>
                           <a:ea typeface="Calibri" pitchFamily="34" charset="-122"/>
                           <a:cs typeface="Calibri" pitchFamily="34" charset="-120"/>
                         </a:rPr>
-                        <a:t>Cit.</a:t>
+                        <a:t>2025</a:t>
                       </a:r>
-                      <a:endParaRPr lang="en-US" sz="1000" dirty="0">
+                      <a:endParaRPr lang="en-US" sz="900" dirty="0">
                         <a:latin typeface="Calibri" charset="0"/>
                         <a:ea typeface="Calibri" charset="0"/>
                         <a:cs typeface="Calibri" charset="0"/>
@@ -9140,77 +8899,7 @@
                         <a:buNone/>
                       </a:pPr>
                       <a:r>
-                        <a:rPr lang="en-US" sz="1000" b="1" dirty="0">
-                          <a:solidFill>
-                            <a:srgbClr val="000000"/>
-                          </a:solidFill>
-                          <a:latin typeface="Calibri" pitchFamily="34" charset="0"/>
-                          <a:ea typeface="Calibri" pitchFamily="34" charset="-122"/>
-                          <a:cs typeface="Calibri" pitchFamily="34" charset="-120"/>
-                        </a:rPr>
-                        <a:t>Decisão</a:t>
-                      </a:r>
-                      <a:endParaRPr lang="en-US" sz="1000" dirty="0">
-                        <a:latin typeface="Calibri" charset="0"/>
-                        <a:ea typeface="Calibri" charset="0"/>
-                        <a:cs typeface="Calibri" charset="0"/>
-                      </a:endParaRPr>
-                    </a:p>
-                  </a:txBody>
-                  <a:tcPr marL="91440" marR="91440" marT="45720" marB="45720" anchor="ctr">
-                    <a:lnL w="6350" cap="flat" cmpd="sng" algn="ctr">
-                      <a:solidFill>
-                        <a:srgbClr val="D8DEE6"/>
-                      </a:solidFill>
-                      <a:prstDash val="solid"/>
-                      <a:round/>
-                      <a:headEnd type="none" w="med" len="med"/>
-                      <a:tailEnd type="none" w="med" len="med"/>
-                    </a:lnL>
-                    <a:lnR w="6350" cap="flat" cmpd="sng" algn="ctr">
-                      <a:solidFill>
-                        <a:srgbClr val="D8DEE6"/>
-                      </a:solidFill>
-                      <a:prstDash val="solid"/>
-                      <a:round/>
-                      <a:headEnd type="none" w="med" len="med"/>
-                      <a:tailEnd type="none" w="med" len="med"/>
-                    </a:lnR>
-                    <a:lnT w="6350" cap="flat" cmpd="sng" algn="ctr">
-                      <a:solidFill>
-                        <a:srgbClr val="D8DEE6"/>
-                      </a:solidFill>
-                      <a:prstDash val="solid"/>
-                      <a:round/>
-                      <a:headEnd type="none" w="med" len="med"/>
-                      <a:tailEnd type="none" w="med" len="med"/>
-                    </a:lnT>
-                    <a:lnB w="6350" cap="flat" cmpd="sng" algn="ctr">
-                      <a:solidFill>
-                        <a:srgbClr val="D8DEE6"/>
-                      </a:solidFill>
-                      <a:prstDash val="solid"/>
-                      <a:round/>
-                      <a:headEnd type="none" w="med" len="med"/>
-                      <a:tailEnd type="none" w="med" len="med"/>
-                    </a:lnB>
-                    <a:solidFill>
-                      <a:srgbClr val="FFFFFF"/>
-                    </a:solidFill>
-                  </a:tcPr>
-                </a:tc>
-              </a:tr>
-              <a:tr h="246888">
-                <a:tc>
-                  <a:txBody>
-                    <a:bodyPr/>
-                    <a:lstStyle/>
-                    <a:p>
-                      <a:pPr indent="0" marL="0">
-                        <a:buNone/>
-                      </a:pPr>
-                      <a:r>
-                        <a:rPr lang="en-US" sz="1000" dirty="0">
+                        <a:rPr lang="en-US" sz="900" dirty="0">
                           <a:solidFill>
                             <a:srgbClr val="1B2A4A"/>
                           </a:solidFill>
@@ -9218,9 +8907,9 @@
                           <a:ea typeface="Calibri" pitchFamily="34" charset="-122"/>
                           <a:cs typeface="Calibri" pitchFamily="34" charset="-120"/>
                         </a:rPr>
-                        <a:t>1</a:t>
+                        <a:t>0</a:t>
                       </a:r>
-                      <a:endParaRPr lang="en-US" sz="1000" dirty="0">
+                      <a:endParaRPr lang="en-US" sz="900" dirty="0">
                         <a:latin typeface="Calibri" charset="0"/>
                         <a:ea typeface="Calibri" charset="0"/>
                         <a:cs typeface="Calibri" charset="0"/>
@@ -9278,7 +8967,7 @@
                         <a:buNone/>
                       </a:pPr>
                       <a:r>
-                        <a:rPr lang="en-US" sz="1000" dirty="0">
+                        <a:rPr lang="en-US" sz="900" dirty="0">
                           <a:solidFill>
                             <a:srgbClr val="1B2A4A"/>
                           </a:solidFill>
@@ -9286,9 +8975,79 @@
                           <a:ea typeface="Calibri" pitchFamily="34" charset="-122"/>
                           <a:cs typeface="Calibri" pitchFamily="34" charset="-120"/>
                         </a:rPr>
-                        <a:t>WhisperTest — iOS UI Automation</a:t>
+                        <a:t>é iOS</a:t>
                       </a:r>
-                      <a:endParaRPr lang="en-US" sz="1000" dirty="0">
+                      <a:endParaRPr lang="en-US" sz="900" dirty="0">
+                        <a:latin typeface="Calibri" charset="0"/>
+                        <a:ea typeface="Calibri" charset="0"/>
+                        <a:cs typeface="Calibri" charset="0"/>
+                      </a:endParaRPr>
+                    </a:p>
+                  </a:txBody>
+                  <a:tcPr marL="91440" marR="91440" marT="45720" marB="45720" anchor="ctr">
+                    <a:lnL w="6350" cap="flat" cmpd="sng" algn="ctr">
+                      <a:solidFill>
+                        <a:srgbClr val="D8DEE6"/>
+                      </a:solidFill>
+                      <a:prstDash val="solid"/>
+                      <a:round/>
+                      <a:headEnd type="none" w="med" len="med"/>
+                      <a:tailEnd type="none" w="med" len="med"/>
+                    </a:lnL>
+                    <a:lnR w="6350" cap="flat" cmpd="sng" algn="ctr">
+                      <a:solidFill>
+                        <a:srgbClr val="D8DEE6"/>
+                      </a:solidFill>
+                      <a:prstDash val="solid"/>
+                      <a:round/>
+                      <a:headEnd type="none" w="med" len="med"/>
+                      <a:tailEnd type="none" w="med" len="med"/>
+                    </a:lnR>
+                    <a:lnT w="6350" cap="flat" cmpd="sng" algn="ctr">
+                      <a:solidFill>
+                        <a:srgbClr val="D8DEE6"/>
+                      </a:solidFill>
+                      <a:prstDash val="solid"/>
+                      <a:round/>
+                      <a:headEnd type="none" w="med" len="med"/>
+                      <a:tailEnd type="none" w="med" len="med"/>
+                    </a:lnT>
+                    <a:lnB w="6350" cap="flat" cmpd="sng" algn="ctr">
+                      <a:solidFill>
+                        <a:srgbClr val="D8DEE6"/>
+                      </a:solidFill>
+                      <a:prstDash val="solid"/>
+                      <a:round/>
+                      <a:headEnd type="none" w="med" len="med"/>
+                      <a:tailEnd type="none" w="med" len="med"/>
+                    </a:lnB>
+                    <a:solidFill>
+                      <a:srgbClr val="FFFFFF"/>
+                    </a:solidFill>
+                  </a:tcPr>
+                </a:tc>
+              </a:tr>
+              <a:tr h="219456">
+                <a:tc>
+                  <a:txBody>
+                    <a:bodyPr/>
+                    <a:lstStyle/>
+                    <a:p>
+                      <a:pPr indent="0" marL="0">
+                        <a:buNone/>
+                      </a:pPr>
+                      <a:r>
+                        <a:rPr lang="en-US" sz="900" dirty="0">
+                          <a:solidFill>
+                            <a:srgbClr val="1B2A4A"/>
+                          </a:solidFill>
+                          <a:latin typeface="Calibri" pitchFamily="34" charset="0"/>
+                          <a:ea typeface="Calibri" pitchFamily="34" charset="-122"/>
+                          <a:cs typeface="Calibri" pitchFamily="34" charset="-120"/>
+                        </a:rPr>
+                        <a:t>Third-Party User Tracking</a:t>
+                      </a:r>
+                      <a:endParaRPr lang="en-US" sz="900" dirty="0">
                         <a:latin typeface="Calibri" charset="0"/>
                         <a:ea typeface="Calibri" charset="0"/>
                         <a:cs typeface="Calibri" charset="0"/>
@@ -9346,7 +9105,7 @@
                         <a:buNone/>
                       </a:pPr>
                       <a:r>
-                        <a:rPr lang="en-US" sz="1000" dirty="0">
+                        <a:rPr lang="en-US" sz="900" dirty="0">
                           <a:solidFill>
                             <a:srgbClr val="1B2A4A"/>
                           </a:solidFill>
@@ -9354,9 +9113,9 @@
                           <a:ea typeface="Calibri" pitchFamily="34" charset="-122"/>
                           <a:cs typeface="Calibri" pitchFamily="34" charset="-120"/>
                         </a:rPr>
-                        <a:t>2025</a:t>
+                        <a:t>2023</a:t>
                       </a:r>
-                      <a:endParaRPr lang="en-US" sz="1000" dirty="0">
+                      <a:endParaRPr lang="en-US" sz="900" dirty="0">
                         <a:latin typeface="Calibri" charset="0"/>
                         <a:ea typeface="Calibri" charset="0"/>
                         <a:cs typeface="Calibri" charset="0"/>
@@ -9414,7 +9173,7 @@
                         <a:buNone/>
                       </a:pPr>
                       <a:r>
-                        <a:rPr lang="en-US" sz="1000" dirty="0">
+                        <a:rPr lang="en-US" sz="900" dirty="0">
                           <a:solidFill>
                             <a:srgbClr val="1B2A4A"/>
                           </a:solidFill>
@@ -9422,9 +9181,9 @@
                           <a:ea typeface="Calibri" pitchFamily="34" charset="-122"/>
                           <a:cs typeface="Calibri" pitchFamily="34" charset="-120"/>
                         </a:rPr>
-                        <a:t>0</a:t>
+                        <a:t>10</a:t>
                       </a:r>
-                      <a:endParaRPr lang="en-US" sz="1000" dirty="0">
+                      <a:endParaRPr lang="en-US" sz="900" dirty="0">
                         <a:latin typeface="Calibri" charset="0"/>
                         <a:ea typeface="Calibri" charset="0"/>
                         <a:cs typeface="Calibri" charset="0"/>
@@ -9482,7 +9241,7 @@
                         <a:buNone/>
                       </a:pPr>
                       <a:r>
-                        <a:rPr lang="en-US" sz="1000" dirty="0">
+                        <a:rPr lang="en-US" sz="900" dirty="0">
                           <a:solidFill>
                             <a:srgbClr val="1B2A4A"/>
                           </a:solidFill>
@@ -9490,9 +9249,9 @@
                           <a:ea typeface="Calibri" pitchFamily="34" charset="-122"/>
                           <a:cs typeface="Calibri" pitchFamily="34" charset="-120"/>
                         </a:rPr>
-                        <a:t>iOS, não Android</a:t>
+                        <a:t>menos citado</a:t>
                       </a:r>
-                      <a:endParaRPr lang="en-US" sz="1000" dirty="0">
+                      <a:endParaRPr lang="en-US" sz="900" dirty="0">
                         <a:latin typeface="Calibri" charset="0"/>
                         <a:ea typeface="Calibri" charset="0"/>
                         <a:cs typeface="Calibri" charset="0"/>
@@ -9542,7 +9301,7 @@
                   </a:tcPr>
                 </a:tc>
               </a:tr>
-              <a:tr h="246888">
+              <a:tr h="219456">
                 <a:tc>
                   <a:txBody>
                     <a:bodyPr/>
@@ -9552,17 +9311,17 @@
                         <a:buNone/>
                       </a:pPr>
                       <a:r>
-                        <a:rPr lang="en-US" sz="1000" dirty="0">
+                        <a:rPr lang="en-US" sz="900" b="1" dirty="0">
                           <a:solidFill>
-                            <a:srgbClr val="1B2A4A"/>
+                            <a:srgbClr val="1E6B3A"/>
                           </a:solidFill>
                           <a:latin typeface="Calibri" pitchFamily="34" charset="0"/>
                           <a:ea typeface="Calibri" pitchFamily="34" charset="-122"/>
                           <a:cs typeface="Calibri" pitchFamily="34" charset="-120"/>
                         </a:rPr>
-                        <a:t>2</a:t>
+                        <a:t>Freely Given Consent?</a:t>
                       </a:r>
-                      <a:endParaRPr lang="en-US" sz="1000" dirty="0">
+                      <a:endParaRPr lang="en-US" sz="900" dirty="0">
                         <a:latin typeface="Calibri" charset="0"/>
                         <a:ea typeface="Calibri" charset="0"/>
                         <a:cs typeface="Calibri" charset="0"/>
@@ -9620,17 +9379,17 @@
                         <a:buNone/>
                       </a:pPr>
                       <a:r>
-                        <a:rPr lang="en-US" sz="1000" dirty="0">
+                        <a:rPr lang="en-US" sz="900" b="1" dirty="0">
                           <a:solidFill>
-                            <a:srgbClr val="1B2A4A"/>
+                            <a:srgbClr val="1E6B3A"/>
                           </a:solidFill>
                           <a:latin typeface="Calibri" pitchFamily="34" charset="0"/>
                           <a:ea typeface="Calibri" pitchFamily="34" charset="-122"/>
                           <a:cs typeface="Calibri" pitchFamily="34" charset="-120"/>
                         </a:rPr>
-                        <a:t>A Comprehensive Study on 3rd-Party User Tracking</a:t>
+                        <a:t>2022</a:t>
                       </a:r>
-                      <a:endParaRPr lang="en-US" sz="1000" dirty="0">
+                      <a:endParaRPr lang="en-US" sz="900" dirty="0">
                         <a:latin typeface="Calibri" charset="0"/>
                         <a:ea typeface="Calibri" charset="0"/>
                         <a:cs typeface="Calibri" charset="0"/>
@@ -9688,17 +9447,17 @@
                         <a:buNone/>
                       </a:pPr>
                       <a:r>
-                        <a:rPr lang="en-US" sz="1000" dirty="0">
+                        <a:rPr lang="en-US" sz="900" b="1" dirty="0">
                           <a:solidFill>
-                            <a:srgbClr val="1B2A4A"/>
+                            <a:srgbClr val="1E6B3A"/>
                           </a:solidFill>
                           <a:latin typeface="Calibri" pitchFamily="34" charset="0"/>
                           <a:ea typeface="Calibri" pitchFamily="34" charset="-122"/>
                           <a:cs typeface="Calibri" pitchFamily="34" charset="-120"/>
                         </a:rPr>
-                        <a:t>2023</a:t>
+                        <a:t>52</a:t>
                       </a:r>
-                      <a:endParaRPr lang="en-US" sz="1000" dirty="0">
+                      <a:endParaRPr lang="en-US" sz="900" dirty="0">
                         <a:latin typeface="Calibri" charset="0"/>
                         <a:ea typeface="Calibri" charset="0"/>
                         <a:cs typeface="Calibri" charset="0"/>
@@ -9756,7 +9515,77 @@
                         <a:buNone/>
                       </a:pPr>
                       <a:r>
-                        <a:rPr lang="en-US" sz="1000" dirty="0">
+                        <a:rPr lang="en-US" sz="900" b="1" dirty="0">
+                          <a:solidFill>
+                            <a:srgbClr val="1E6B3A"/>
+                          </a:solidFill>
+                          <a:latin typeface="Calibri" pitchFamily="34" charset="0"/>
+                          <a:ea typeface="Calibri" pitchFamily="34" charset="-122"/>
+                          <a:cs typeface="Calibri" pitchFamily="34" charset="-120"/>
+                        </a:rPr>
+                        <a:t>escolhido</a:t>
+                      </a:r>
+                      <a:endParaRPr lang="en-US" sz="900" dirty="0">
+                        <a:latin typeface="Calibri" charset="0"/>
+                        <a:ea typeface="Calibri" charset="0"/>
+                        <a:cs typeface="Calibri" charset="0"/>
+                      </a:endParaRPr>
+                    </a:p>
+                  </a:txBody>
+                  <a:tcPr marL="91440" marR="91440" marT="45720" marB="45720" anchor="ctr">
+                    <a:lnL w="6350" cap="flat" cmpd="sng" algn="ctr">
+                      <a:solidFill>
+                        <a:srgbClr val="D8DEE6"/>
+                      </a:solidFill>
+                      <a:prstDash val="solid"/>
+                      <a:round/>
+                      <a:headEnd type="none" w="med" len="med"/>
+                      <a:tailEnd type="none" w="med" len="med"/>
+                    </a:lnL>
+                    <a:lnR w="6350" cap="flat" cmpd="sng" algn="ctr">
+                      <a:solidFill>
+                        <a:srgbClr val="D8DEE6"/>
+                      </a:solidFill>
+                      <a:prstDash val="solid"/>
+                      <a:round/>
+                      <a:headEnd type="none" w="med" len="med"/>
+                      <a:tailEnd type="none" w="med" len="med"/>
+                    </a:lnR>
+                    <a:lnT w="6350" cap="flat" cmpd="sng" algn="ctr">
+                      <a:solidFill>
+                        <a:srgbClr val="D8DEE6"/>
+                      </a:solidFill>
+                      <a:prstDash val="solid"/>
+                      <a:round/>
+                      <a:headEnd type="none" w="med" len="med"/>
+                      <a:tailEnd type="none" w="med" len="med"/>
+                    </a:lnT>
+                    <a:lnB w="6350" cap="flat" cmpd="sng" algn="ctr">
+                      <a:solidFill>
+                        <a:srgbClr val="D8DEE6"/>
+                      </a:solidFill>
+                      <a:prstDash val="solid"/>
+                      <a:round/>
+                      <a:headEnd type="none" w="med" len="med"/>
+                      <a:tailEnd type="none" w="med" len="med"/>
+                    </a:lnB>
+                    <a:solidFill>
+                      <a:srgbClr val="FFFFFF"/>
+                    </a:solidFill>
+                  </a:tcPr>
+                </a:tc>
+              </a:tr>
+              <a:tr h="219456">
+                <a:tc>
+                  <a:txBody>
+                    <a:bodyPr/>
+                    <a:lstStyle/>
+                    <a:p>
+                      <a:pPr indent="0" marL="0">
+                        <a:buNone/>
+                      </a:pPr>
+                      <a:r>
+                        <a:rPr lang="en-US" sz="900" dirty="0">
                           <a:solidFill>
                             <a:srgbClr val="1B2A4A"/>
                           </a:solidFill>
@@ -9764,9 +9593,9 @@
                           <a:ea typeface="Calibri" pitchFamily="34" charset="-122"/>
                           <a:cs typeface="Calibri" pitchFamily="34" charset="-120"/>
                         </a:rPr>
-                        <a:t>10</a:t>
+                        <a:t>A fait accompli?</a:t>
                       </a:r>
-                      <a:endParaRPr lang="en-US" sz="1000" dirty="0">
+                      <a:endParaRPr lang="en-US" sz="900" dirty="0">
                         <a:latin typeface="Calibri" charset="0"/>
                         <a:ea typeface="Calibri" charset="0"/>
                         <a:cs typeface="Calibri" charset="0"/>
@@ -9824,7 +9653,7 @@
                         <a:buNone/>
                       </a:pPr>
                       <a:r>
-                        <a:rPr lang="en-US" sz="1000" dirty="0">
+                        <a:rPr lang="en-US" sz="900" dirty="0">
                           <a:solidFill>
                             <a:srgbClr val="1B2A4A"/>
                           </a:solidFill>
@@ -9832,79 +9661,9 @@
                           <a:ea typeface="Calibri" pitchFamily="34" charset="-122"/>
                           <a:cs typeface="Calibri" pitchFamily="34" charset="-120"/>
                         </a:rPr>
-                        <a:t>menos citado</a:t>
+                        <a:t>2021</a:t>
                       </a:r>
-                      <a:endParaRPr lang="en-US" sz="1000" dirty="0">
-                        <a:latin typeface="Calibri" charset="0"/>
-                        <a:ea typeface="Calibri" charset="0"/>
-                        <a:cs typeface="Calibri" charset="0"/>
-                      </a:endParaRPr>
-                    </a:p>
-                  </a:txBody>
-                  <a:tcPr marL="91440" marR="91440" marT="45720" marB="45720" anchor="ctr">
-                    <a:lnL w="6350" cap="flat" cmpd="sng" algn="ctr">
-                      <a:solidFill>
-                        <a:srgbClr val="D8DEE6"/>
-                      </a:solidFill>
-                      <a:prstDash val="solid"/>
-                      <a:round/>
-                      <a:headEnd type="none" w="med" len="med"/>
-                      <a:tailEnd type="none" w="med" len="med"/>
-                    </a:lnL>
-                    <a:lnR w="6350" cap="flat" cmpd="sng" algn="ctr">
-                      <a:solidFill>
-                        <a:srgbClr val="D8DEE6"/>
-                      </a:solidFill>
-                      <a:prstDash val="solid"/>
-                      <a:round/>
-                      <a:headEnd type="none" w="med" len="med"/>
-                      <a:tailEnd type="none" w="med" len="med"/>
-                    </a:lnR>
-                    <a:lnT w="6350" cap="flat" cmpd="sng" algn="ctr">
-                      <a:solidFill>
-                        <a:srgbClr val="D8DEE6"/>
-                      </a:solidFill>
-                      <a:prstDash val="solid"/>
-                      <a:round/>
-                      <a:headEnd type="none" w="med" len="med"/>
-                      <a:tailEnd type="none" w="med" len="med"/>
-                    </a:lnT>
-                    <a:lnB w="6350" cap="flat" cmpd="sng" algn="ctr">
-                      <a:solidFill>
-                        <a:srgbClr val="D8DEE6"/>
-                      </a:solidFill>
-                      <a:prstDash val="solid"/>
-                      <a:round/>
-                      <a:headEnd type="none" w="med" len="med"/>
-                      <a:tailEnd type="none" w="med" len="med"/>
-                    </a:lnB>
-                    <a:solidFill>
-                      <a:srgbClr val="FFFFFF"/>
-                    </a:solidFill>
-                  </a:tcPr>
-                </a:tc>
-              </a:tr>
-              <a:tr h="246888">
-                <a:tc>
-                  <a:txBody>
-                    <a:bodyPr/>
-                    <a:lstStyle/>
-                    <a:p>
-                      <a:pPr indent="0" marL="0">
-                        <a:buNone/>
-                      </a:pPr>
-                      <a:r>
-                        <a:rPr lang="en-US" sz="1000" b="1" dirty="0">
-                          <a:solidFill>
-                            <a:srgbClr val="1E6B3A"/>
-                          </a:solidFill>
-                          <a:latin typeface="Calibri" pitchFamily="34" charset="0"/>
-                          <a:ea typeface="Calibri" pitchFamily="34" charset="-122"/>
-                          <a:cs typeface="Calibri" pitchFamily="34" charset="-120"/>
-                        </a:rPr>
-                        <a:t>3</a:t>
-                      </a:r>
-                      <a:endParaRPr lang="en-US" sz="1000" dirty="0">
+                      <a:endParaRPr lang="en-US" sz="900" dirty="0">
                         <a:latin typeface="Calibri" charset="0"/>
                         <a:ea typeface="Calibri" charset="0"/>
                         <a:cs typeface="Calibri" charset="0"/>
@@ -9962,17 +9721,17 @@
                         <a:buNone/>
                       </a:pPr>
                       <a:r>
-                        <a:rPr lang="en-US" sz="1000" b="1" dirty="0">
+                        <a:rPr lang="en-US" sz="900" dirty="0">
                           <a:solidFill>
-                            <a:srgbClr val="1E6B3A"/>
+                            <a:srgbClr val="1B2A4A"/>
                           </a:solidFill>
                           <a:latin typeface="Calibri" pitchFamily="34" charset="0"/>
                           <a:ea typeface="Calibri" pitchFamily="34" charset="-122"/>
                           <a:cs typeface="Calibri" pitchFamily="34" charset="-120"/>
                         </a:rPr>
-                        <a:t>Freely Given Consent?  (Nguyen, Backes, Stock)</a:t>
+                        <a:t>34</a:t>
                       </a:r>
-                      <a:endParaRPr lang="en-US" sz="1000" dirty="0">
+                      <a:endParaRPr lang="en-US" sz="900" dirty="0">
                         <a:latin typeface="Calibri" charset="0"/>
                         <a:ea typeface="Calibri" charset="0"/>
                         <a:cs typeface="Calibri" charset="0"/>
@@ -10030,213 +9789,7 @@
                         <a:buNone/>
                       </a:pPr>
                       <a:r>
-                        <a:rPr lang="en-US" sz="1000" b="1" dirty="0">
-                          <a:solidFill>
-                            <a:srgbClr val="1E6B3A"/>
-                          </a:solidFill>
-                          <a:latin typeface="Calibri" pitchFamily="34" charset="0"/>
-                          <a:ea typeface="Calibri" pitchFamily="34" charset="-122"/>
-                          <a:cs typeface="Calibri" pitchFamily="34" charset="-120"/>
-                        </a:rPr>
-                        <a:t>2022</a:t>
-                      </a:r>
-                      <a:endParaRPr lang="en-US" sz="1000" dirty="0">
-                        <a:latin typeface="Calibri" charset="0"/>
-                        <a:ea typeface="Calibri" charset="0"/>
-                        <a:cs typeface="Calibri" charset="0"/>
-                      </a:endParaRPr>
-                    </a:p>
-                  </a:txBody>
-                  <a:tcPr marL="91440" marR="91440" marT="45720" marB="45720" anchor="ctr">
-                    <a:lnL w="6350" cap="flat" cmpd="sng" algn="ctr">
-                      <a:solidFill>
-                        <a:srgbClr val="D8DEE6"/>
-                      </a:solidFill>
-                      <a:prstDash val="solid"/>
-                      <a:round/>
-                      <a:headEnd type="none" w="med" len="med"/>
-                      <a:tailEnd type="none" w="med" len="med"/>
-                    </a:lnL>
-                    <a:lnR w="6350" cap="flat" cmpd="sng" algn="ctr">
-                      <a:solidFill>
-                        <a:srgbClr val="D8DEE6"/>
-                      </a:solidFill>
-                      <a:prstDash val="solid"/>
-                      <a:round/>
-                      <a:headEnd type="none" w="med" len="med"/>
-                      <a:tailEnd type="none" w="med" len="med"/>
-                    </a:lnR>
-                    <a:lnT w="6350" cap="flat" cmpd="sng" algn="ctr">
-                      <a:solidFill>
-                        <a:srgbClr val="D8DEE6"/>
-                      </a:solidFill>
-                      <a:prstDash val="solid"/>
-                      <a:round/>
-                      <a:headEnd type="none" w="med" len="med"/>
-                      <a:tailEnd type="none" w="med" len="med"/>
-                    </a:lnT>
-                    <a:lnB w="6350" cap="flat" cmpd="sng" algn="ctr">
-                      <a:solidFill>
-                        <a:srgbClr val="D8DEE6"/>
-                      </a:solidFill>
-                      <a:prstDash val="solid"/>
-                      <a:round/>
-                      <a:headEnd type="none" w="med" len="med"/>
-                      <a:tailEnd type="none" w="med" len="med"/>
-                    </a:lnB>
-                    <a:solidFill>
-                      <a:srgbClr val="FFFFFF"/>
-                    </a:solidFill>
-                  </a:tcPr>
-                </a:tc>
-                <a:tc>
-                  <a:txBody>
-                    <a:bodyPr/>
-                    <a:lstStyle/>
-                    <a:p>
-                      <a:pPr indent="0" marL="0">
-                        <a:buNone/>
-                      </a:pPr>
-                      <a:r>
-                        <a:rPr lang="en-US" sz="1000" b="1" dirty="0">
-                          <a:solidFill>
-                            <a:srgbClr val="1E6B3A"/>
-                          </a:solidFill>
-                          <a:latin typeface="Calibri" pitchFamily="34" charset="0"/>
-                          <a:ea typeface="Calibri" pitchFamily="34" charset="-122"/>
-                          <a:cs typeface="Calibri" pitchFamily="34" charset="-120"/>
-                        </a:rPr>
-                        <a:t>52</a:t>
-                      </a:r>
-                      <a:endParaRPr lang="en-US" sz="1000" dirty="0">
-                        <a:latin typeface="Calibri" charset="0"/>
-                        <a:ea typeface="Calibri" charset="0"/>
-                        <a:cs typeface="Calibri" charset="0"/>
-                      </a:endParaRPr>
-                    </a:p>
-                  </a:txBody>
-                  <a:tcPr marL="91440" marR="91440" marT="45720" marB="45720" anchor="ctr">
-                    <a:lnL w="6350" cap="flat" cmpd="sng" algn="ctr">
-                      <a:solidFill>
-                        <a:srgbClr val="D8DEE6"/>
-                      </a:solidFill>
-                      <a:prstDash val="solid"/>
-                      <a:round/>
-                      <a:headEnd type="none" w="med" len="med"/>
-                      <a:tailEnd type="none" w="med" len="med"/>
-                    </a:lnL>
-                    <a:lnR w="6350" cap="flat" cmpd="sng" algn="ctr">
-                      <a:solidFill>
-                        <a:srgbClr val="D8DEE6"/>
-                      </a:solidFill>
-                      <a:prstDash val="solid"/>
-                      <a:round/>
-                      <a:headEnd type="none" w="med" len="med"/>
-                      <a:tailEnd type="none" w="med" len="med"/>
-                    </a:lnR>
-                    <a:lnT w="6350" cap="flat" cmpd="sng" algn="ctr">
-                      <a:solidFill>
-                        <a:srgbClr val="D8DEE6"/>
-                      </a:solidFill>
-                      <a:prstDash val="solid"/>
-                      <a:round/>
-                      <a:headEnd type="none" w="med" len="med"/>
-                      <a:tailEnd type="none" w="med" len="med"/>
-                    </a:lnT>
-                    <a:lnB w="6350" cap="flat" cmpd="sng" algn="ctr">
-                      <a:solidFill>
-                        <a:srgbClr val="D8DEE6"/>
-                      </a:solidFill>
-                      <a:prstDash val="solid"/>
-                      <a:round/>
-                      <a:headEnd type="none" w="med" len="med"/>
-                      <a:tailEnd type="none" w="med" len="med"/>
-                    </a:lnB>
-                    <a:solidFill>
-                      <a:srgbClr val="FFFFFF"/>
-                    </a:solidFill>
-                  </a:tcPr>
-                </a:tc>
-                <a:tc>
-                  <a:txBody>
-                    <a:bodyPr/>
-                    <a:lstStyle/>
-                    <a:p>
-                      <a:pPr indent="0" marL="0">
-                        <a:buNone/>
-                      </a:pPr>
-                      <a:r>
-                        <a:rPr lang="en-US" sz="1000" b="1" dirty="0">
-                          <a:solidFill>
-                            <a:srgbClr val="1E6B3A"/>
-                          </a:solidFill>
-                          <a:latin typeface="Calibri" pitchFamily="34" charset="0"/>
-                          <a:ea typeface="Calibri" pitchFamily="34" charset="-122"/>
-                          <a:cs typeface="Calibri" pitchFamily="34" charset="-120"/>
-                        </a:rPr>
-                        <a:t>SELECIONADO</a:t>
-                      </a:r>
-                      <a:endParaRPr lang="en-US" sz="1000" dirty="0">
-                        <a:latin typeface="Calibri" charset="0"/>
-                        <a:ea typeface="Calibri" charset="0"/>
-                        <a:cs typeface="Calibri" charset="0"/>
-                      </a:endParaRPr>
-                    </a:p>
-                  </a:txBody>
-                  <a:tcPr marL="91440" marR="91440" marT="45720" marB="45720" anchor="ctr">
-                    <a:lnL w="6350" cap="flat" cmpd="sng" algn="ctr">
-                      <a:solidFill>
-                        <a:srgbClr val="D8DEE6"/>
-                      </a:solidFill>
-                      <a:prstDash val="solid"/>
-                      <a:round/>
-                      <a:headEnd type="none" w="med" len="med"/>
-                      <a:tailEnd type="none" w="med" len="med"/>
-                    </a:lnL>
-                    <a:lnR w="6350" cap="flat" cmpd="sng" algn="ctr">
-                      <a:solidFill>
-                        <a:srgbClr val="D8DEE6"/>
-                      </a:solidFill>
-                      <a:prstDash val="solid"/>
-                      <a:round/>
-                      <a:headEnd type="none" w="med" len="med"/>
-                      <a:tailEnd type="none" w="med" len="med"/>
-                    </a:lnR>
-                    <a:lnT w="6350" cap="flat" cmpd="sng" algn="ctr">
-                      <a:solidFill>
-                        <a:srgbClr val="D8DEE6"/>
-                      </a:solidFill>
-                      <a:prstDash val="solid"/>
-                      <a:round/>
-                      <a:headEnd type="none" w="med" len="med"/>
-                      <a:tailEnd type="none" w="med" len="med"/>
-                    </a:lnT>
-                    <a:lnB w="6350" cap="flat" cmpd="sng" algn="ctr">
-                      <a:solidFill>
-                        <a:srgbClr val="D8DEE6"/>
-                      </a:solidFill>
-                      <a:prstDash val="solid"/>
-                      <a:round/>
-                      <a:headEnd type="none" w="med" len="med"/>
-                      <a:tailEnd type="none" w="med" len="med"/>
-                    </a:lnB>
-                    <a:solidFill>
-                      <a:srgbClr val="FFFFFF"/>
-                    </a:solidFill>
-                  </a:tcPr>
-                </a:tc>
-              </a:tr>
-              <a:tr h="246888">
-                <a:tc>
-                  <a:txBody>
-                    <a:bodyPr/>
-                    <a:lstStyle/>
-                    <a:p>
-                      <a:pPr indent="0" marL="0">
-                        <a:buNone/>
-                      </a:pPr>
-                      <a:r>
-                        <a:rPr lang="en-US" sz="1000" dirty="0">
+                        <a:rPr lang="en-US" sz="900" dirty="0">
                           <a:solidFill>
                             <a:srgbClr val="1B2A4A"/>
                           </a:solidFill>
@@ -10244,281 +9797,9 @@
                           <a:ea typeface="Calibri" pitchFamily="34" charset="-122"/>
                           <a:cs typeface="Calibri" pitchFamily="34" charset="-120"/>
                         </a:rPr>
-                        <a:t>4</a:t>
+                        <a:t>veículo menor</a:t>
                       </a:r>
-                      <a:endParaRPr lang="en-US" sz="1000" dirty="0">
-                        <a:latin typeface="Calibri" charset="0"/>
-                        <a:ea typeface="Calibri" charset="0"/>
-                        <a:cs typeface="Calibri" charset="0"/>
-                      </a:endParaRPr>
-                    </a:p>
-                  </a:txBody>
-                  <a:tcPr marL="91440" marR="91440" marT="45720" marB="45720" anchor="ctr">
-                    <a:lnL w="6350" cap="flat" cmpd="sng" algn="ctr">
-                      <a:solidFill>
-                        <a:srgbClr val="D8DEE6"/>
-                      </a:solidFill>
-                      <a:prstDash val="solid"/>
-                      <a:round/>
-                      <a:headEnd type="none" w="med" len="med"/>
-                      <a:tailEnd type="none" w="med" len="med"/>
-                    </a:lnL>
-                    <a:lnR w="6350" cap="flat" cmpd="sng" algn="ctr">
-                      <a:solidFill>
-                        <a:srgbClr val="D8DEE6"/>
-                      </a:solidFill>
-                      <a:prstDash val="solid"/>
-                      <a:round/>
-                      <a:headEnd type="none" w="med" len="med"/>
-                      <a:tailEnd type="none" w="med" len="med"/>
-                    </a:lnR>
-                    <a:lnT w="6350" cap="flat" cmpd="sng" algn="ctr">
-                      <a:solidFill>
-                        <a:srgbClr val="D8DEE6"/>
-                      </a:solidFill>
-                      <a:prstDash val="solid"/>
-                      <a:round/>
-                      <a:headEnd type="none" w="med" len="med"/>
-                      <a:tailEnd type="none" w="med" len="med"/>
-                    </a:lnT>
-                    <a:lnB w="6350" cap="flat" cmpd="sng" algn="ctr">
-                      <a:solidFill>
-                        <a:srgbClr val="D8DEE6"/>
-                      </a:solidFill>
-                      <a:prstDash val="solid"/>
-                      <a:round/>
-                      <a:headEnd type="none" w="med" len="med"/>
-                      <a:tailEnd type="none" w="med" len="med"/>
-                    </a:lnB>
-                    <a:solidFill>
-                      <a:srgbClr val="FFFFFF"/>
-                    </a:solidFill>
-                  </a:tcPr>
-                </a:tc>
-                <a:tc>
-                  <a:txBody>
-                    <a:bodyPr/>
-                    <a:lstStyle/>
-                    <a:p>
-                      <a:pPr indent="0" marL="0">
-                        <a:buNone/>
-                      </a:pPr>
-                      <a:r>
-                        <a:rPr lang="en-US" sz="1000" dirty="0">
-                          <a:solidFill>
-                            <a:srgbClr val="1B2A4A"/>
-                          </a:solidFill>
-                          <a:latin typeface="Calibri" pitchFamily="34" charset="0"/>
-                          <a:ea typeface="Calibri" pitchFamily="34" charset="-122"/>
-                          <a:cs typeface="Calibri" pitchFamily="34" charset="-120"/>
-                        </a:rPr>
-                        <a:t>A fait accompli?  (Kollnig, Binns)</a:t>
-                      </a:r>
-                      <a:endParaRPr lang="en-US" sz="1000" dirty="0">
-                        <a:latin typeface="Calibri" charset="0"/>
-                        <a:ea typeface="Calibri" charset="0"/>
-                        <a:cs typeface="Calibri" charset="0"/>
-                      </a:endParaRPr>
-                    </a:p>
-                  </a:txBody>
-                  <a:tcPr marL="91440" marR="91440" marT="45720" marB="45720" anchor="ctr">
-                    <a:lnL w="6350" cap="flat" cmpd="sng" algn="ctr">
-                      <a:solidFill>
-                        <a:srgbClr val="D8DEE6"/>
-                      </a:solidFill>
-                      <a:prstDash val="solid"/>
-                      <a:round/>
-                      <a:headEnd type="none" w="med" len="med"/>
-                      <a:tailEnd type="none" w="med" len="med"/>
-                    </a:lnL>
-                    <a:lnR w="6350" cap="flat" cmpd="sng" algn="ctr">
-                      <a:solidFill>
-                        <a:srgbClr val="D8DEE6"/>
-                      </a:solidFill>
-                      <a:prstDash val="solid"/>
-                      <a:round/>
-                      <a:headEnd type="none" w="med" len="med"/>
-                      <a:tailEnd type="none" w="med" len="med"/>
-                    </a:lnR>
-                    <a:lnT w="6350" cap="flat" cmpd="sng" algn="ctr">
-                      <a:solidFill>
-                        <a:srgbClr val="D8DEE6"/>
-                      </a:solidFill>
-                      <a:prstDash val="solid"/>
-                      <a:round/>
-                      <a:headEnd type="none" w="med" len="med"/>
-                      <a:tailEnd type="none" w="med" len="med"/>
-                    </a:lnT>
-                    <a:lnB w="6350" cap="flat" cmpd="sng" algn="ctr">
-                      <a:solidFill>
-                        <a:srgbClr val="D8DEE6"/>
-                      </a:solidFill>
-                      <a:prstDash val="solid"/>
-                      <a:round/>
-                      <a:headEnd type="none" w="med" len="med"/>
-                      <a:tailEnd type="none" w="med" len="med"/>
-                    </a:lnB>
-                    <a:solidFill>
-                      <a:srgbClr val="FFFFFF"/>
-                    </a:solidFill>
-                  </a:tcPr>
-                </a:tc>
-                <a:tc>
-                  <a:txBody>
-                    <a:bodyPr/>
-                    <a:lstStyle/>
-                    <a:p>
-                      <a:pPr indent="0" marL="0">
-                        <a:buNone/>
-                      </a:pPr>
-                      <a:r>
-                        <a:rPr lang="en-US" sz="1000" dirty="0">
-                          <a:solidFill>
-                            <a:srgbClr val="1B2A4A"/>
-                          </a:solidFill>
-                          <a:latin typeface="Calibri" pitchFamily="34" charset="0"/>
-                          <a:ea typeface="Calibri" pitchFamily="34" charset="-122"/>
-                          <a:cs typeface="Calibri" pitchFamily="34" charset="-120"/>
-                        </a:rPr>
-                        <a:t>2021</a:t>
-                      </a:r>
-                      <a:endParaRPr lang="en-US" sz="1000" dirty="0">
-                        <a:latin typeface="Calibri" charset="0"/>
-                        <a:ea typeface="Calibri" charset="0"/>
-                        <a:cs typeface="Calibri" charset="0"/>
-                      </a:endParaRPr>
-                    </a:p>
-                  </a:txBody>
-                  <a:tcPr marL="91440" marR="91440" marT="45720" marB="45720" anchor="ctr">
-                    <a:lnL w="6350" cap="flat" cmpd="sng" algn="ctr">
-                      <a:solidFill>
-                        <a:srgbClr val="D8DEE6"/>
-                      </a:solidFill>
-                      <a:prstDash val="solid"/>
-                      <a:round/>
-                      <a:headEnd type="none" w="med" len="med"/>
-                      <a:tailEnd type="none" w="med" len="med"/>
-                    </a:lnL>
-                    <a:lnR w="6350" cap="flat" cmpd="sng" algn="ctr">
-                      <a:solidFill>
-                        <a:srgbClr val="D8DEE6"/>
-                      </a:solidFill>
-                      <a:prstDash val="solid"/>
-                      <a:round/>
-                      <a:headEnd type="none" w="med" len="med"/>
-                      <a:tailEnd type="none" w="med" len="med"/>
-                    </a:lnR>
-                    <a:lnT w="6350" cap="flat" cmpd="sng" algn="ctr">
-                      <a:solidFill>
-                        <a:srgbClr val="D8DEE6"/>
-                      </a:solidFill>
-                      <a:prstDash val="solid"/>
-                      <a:round/>
-                      <a:headEnd type="none" w="med" len="med"/>
-                      <a:tailEnd type="none" w="med" len="med"/>
-                    </a:lnT>
-                    <a:lnB w="6350" cap="flat" cmpd="sng" algn="ctr">
-                      <a:solidFill>
-                        <a:srgbClr val="D8DEE6"/>
-                      </a:solidFill>
-                      <a:prstDash val="solid"/>
-                      <a:round/>
-                      <a:headEnd type="none" w="med" len="med"/>
-                      <a:tailEnd type="none" w="med" len="med"/>
-                    </a:lnB>
-                    <a:solidFill>
-                      <a:srgbClr val="FFFFFF"/>
-                    </a:solidFill>
-                  </a:tcPr>
-                </a:tc>
-                <a:tc>
-                  <a:txBody>
-                    <a:bodyPr/>
-                    <a:lstStyle/>
-                    <a:p>
-                      <a:pPr indent="0" marL="0">
-                        <a:buNone/>
-                      </a:pPr>
-                      <a:r>
-                        <a:rPr lang="en-US" sz="1000" dirty="0">
-                          <a:solidFill>
-                            <a:srgbClr val="1B2A4A"/>
-                          </a:solidFill>
-                          <a:latin typeface="Calibri" pitchFamily="34" charset="0"/>
-                          <a:ea typeface="Calibri" pitchFamily="34" charset="-122"/>
-                          <a:cs typeface="Calibri" pitchFamily="34" charset="-120"/>
-                        </a:rPr>
-                        <a:t>34</a:t>
-                      </a:r>
-                      <a:endParaRPr lang="en-US" sz="1000" dirty="0">
-                        <a:latin typeface="Calibri" charset="0"/>
-                        <a:ea typeface="Calibri" charset="0"/>
-                        <a:cs typeface="Calibri" charset="0"/>
-                      </a:endParaRPr>
-                    </a:p>
-                  </a:txBody>
-                  <a:tcPr marL="91440" marR="91440" marT="45720" marB="45720" anchor="ctr">
-                    <a:lnL w="6350" cap="flat" cmpd="sng" algn="ctr">
-                      <a:solidFill>
-                        <a:srgbClr val="D8DEE6"/>
-                      </a:solidFill>
-                      <a:prstDash val="solid"/>
-                      <a:round/>
-                      <a:headEnd type="none" w="med" len="med"/>
-                      <a:tailEnd type="none" w="med" len="med"/>
-                    </a:lnL>
-                    <a:lnR w="6350" cap="flat" cmpd="sng" algn="ctr">
-                      <a:solidFill>
-                        <a:srgbClr val="D8DEE6"/>
-                      </a:solidFill>
-                      <a:prstDash val="solid"/>
-                      <a:round/>
-                      <a:headEnd type="none" w="med" len="med"/>
-                      <a:tailEnd type="none" w="med" len="med"/>
-                    </a:lnR>
-                    <a:lnT w="6350" cap="flat" cmpd="sng" algn="ctr">
-                      <a:solidFill>
-                        <a:srgbClr val="D8DEE6"/>
-                      </a:solidFill>
-                      <a:prstDash val="solid"/>
-                      <a:round/>
-                      <a:headEnd type="none" w="med" len="med"/>
-                      <a:tailEnd type="none" w="med" len="med"/>
-                    </a:lnT>
-                    <a:lnB w="6350" cap="flat" cmpd="sng" algn="ctr">
-                      <a:solidFill>
-                        <a:srgbClr val="D8DEE6"/>
-                      </a:solidFill>
-                      <a:prstDash val="solid"/>
-                      <a:round/>
-                      <a:headEnd type="none" w="med" len="med"/>
-                      <a:tailEnd type="none" w="med" len="med"/>
-                    </a:lnB>
-                    <a:solidFill>
-                      <a:srgbClr val="FFFFFF"/>
-                    </a:solidFill>
-                  </a:tcPr>
-                </a:tc>
-                <a:tc>
-                  <a:txBody>
-                    <a:bodyPr/>
-                    <a:lstStyle/>
-                    <a:p>
-                      <a:pPr indent="0" marL="0">
-                        <a:buNone/>
-                      </a:pPr>
-                      <a:r>
-                        <a:rPr lang="en-US" sz="1000" dirty="0">
-                          <a:solidFill>
-                            <a:srgbClr val="1B2A4A"/>
-                          </a:solidFill>
-                          <a:latin typeface="Calibri" pitchFamily="34" charset="0"/>
-                          <a:ea typeface="Calibri" pitchFamily="34" charset="-122"/>
-                          <a:cs typeface="Calibri" pitchFamily="34" charset="-120"/>
-                        </a:rPr>
-                        <a:t>SOUPS = CORE B</a:t>
-                      </a:r>
-                      <a:endParaRPr lang="en-US" sz="1000" dirty="0">
+                      <a:endParaRPr lang="en-US" sz="900" dirty="0">
                         <a:latin typeface="Calibri" charset="0"/>
                         <a:ea typeface="Calibri" charset="0"/>
                         <a:cs typeface="Calibri" charset="0"/>
@@ -10574,38 +9855,38 @@
       </p:graphicFrame>
       <p:sp>
         <p:nvSpPr>
-          <p:cNvPr id="13" name="Text 10"/>
-          <p:cNvSpPr txBox="1"/>
-          <p:nvPr/>
-        </p:nvSpPr>
-        <p:spPr>
-          <a:xfrm>
-            <a:off x="502920" y="4718304"/>
-            <a:ext cx="8138160" cy="237744"/>
-          </a:xfrm>
-          <a:prstGeom prst="rect">
-            <a:avLst/>
-          </a:prstGeom>
-          <a:noFill/>
-          <a:ln/>
-        </p:spPr>
-        <p:txBody>
-          <a:bodyPr wrap="square" lIns="0" tIns="0" rIns="0" bIns="0" rtlCol="0" anchor="ctr"/>
-          <a:lstStyle/>
-          <a:p>
-            <a:pPr algn="l" indent="0" marL="0">
-              <a:buNone/>
-            </a:pPr>
-            <a:r>
-              <a:rPr lang="en-US" sz="950" dirty="0">
-                <a:solidFill>
-                  <a:srgbClr val="98A2B3"/>
-                </a:solidFill>
-                <a:latin typeface="Calibri" pitchFamily="34" charset="0"/>
-                <a:ea typeface="Calibri" pitchFamily="34" charset="-122"/>
-                <a:cs typeface="Calibri" pitchFamily="34" charset="-120"/>
-              </a:rPr>
-              <a:t>2 minutos  ·  4 encontrados  →  3 avaliados  →  1 selecionado</a:t>
+          <p:cNvPr id="9" name="Text 5"/>
+          <p:cNvSpPr txBox="1"/>
+          <p:nvPr/>
+        </p:nvSpPr>
+        <p:spPr>
+          <a:xfrm>
+            <a:off x="5349240" y="3950208"/>
+            <a:ext cx="3291840" cy="274320"/>
+          </a:xfrm>
+          <a:prstGeom prst="rect">
+            <a:avLst/>
+          </a:prstGeom>
+          <a:noFill/>
+          <a:ln/>
+        </p:spPr>
+        <p:txBody>
+          <a:bodyPr wrap="square" lIns="0" tIns="0" rIns="0" bIns="0" rtlCol="0" anchor="t"/>
+          <a:lstStyle/>
+          <a:p>
+            <a:pPr indent="0" marL="0">
+              <a:buNone/>
+            </a:pPr>
+            <a:r>
+              <a:rPr lang="en-US" sz="950" i="1" dirty="0">
+                <a:solidFill>
+                  <a:srgbClr val="2E86A8"/>
+                </a:solidFill>
+                <a:latin typeface="Calibri" pitchFamily="34" charset="0"/>
+                <a:ea typeface="Calibri" pitchFamily="34" charset="-122"/>
+                <a:cs typeface="Calibri" pitchFamily="34" charset="-120"/>
+              </a:rPr>
+              <a:t>A busca também encontrou a alternativa que eu considerei e descartei.</a:t>
             </a:r>
             <a:endParaRPr lang="en-US" sz="950" dirty="0"/>
           </a:p>
@@ -10808,7 +10089,7 @@
                 <a:ea typeface="Calibri" pitchFamily="34" charset="-122"/>
                 <a:cs typeface="Calibri" pitchFamily="34" charset="-120"/>
               </a:rPr>
-              <a:t>NGUYEN, Trung Tin; BACKES, Michael; STOCK, Ben.   In: CCS '22 — Proceedings of the 2022 ACM SIGSAC Conference on Computer and Communications Security. Los Angeles, 7–11 nov. 2022, p. 2369–2383.   DOI: 10.1145/3548606.3560564</a:t>
+              <a:t>NGUYEN, Trung Tin; BACKES, Michael; STOCK, Ben.   In: CCS '22, Proceedings of the 2022 ACM SIGSAC Conference on Computer and Communications Security. Los Angeles, 7–11 nov. 2022, p. 2369–2383.   DOI: 10.1145/3548606.3560564</a:t>
             </a:r>
             <a:endParaRPr lang="en-US" sz="1150" dirty="0"/>
           </a:p>
@@ -11084,45 +10365,6 @@
               <a:t>O próprio artigo:  corpus e ferramenta construídos pelos autores</a:t>
             </a:r>
             <a:endParaRPr lang="en-US" sz="1150" dirty="0"/>
-          </a:p>
-        </p:txBody>
-      </p:sp>
-      <p:sp>
-        <p:nvSpPr>
-          <p:cNvPr id="13" name="Text 11"/>
-          <p:cNvSpPr txBox="1"/>
-          <p:nvPr/>
-        </p:nvSpPr>
-        <p:spPr>
-          <a:xfrm>
-            <a:off x="502920" y="4718304"/>
-            <a:ext cx="8138160" cy="237744"/>
-          </a:xfrm>
-          <a:prstGeom prst="rect">
-            <a:avLst/>
-          </a:prstGeom>
-          <a:noFill/>
-          <a:ln/>
-        </p:spPr>
-        <p:txBody>
-          <a:bodyPr wrap="square" lIns="0" tIns="0" rIns="0" bIns="0" rtlCol="0" anchor="ctr"/>
-          <a:lstStyle/>
-          <a:p>
-            <a:pPr algn="l" indent="0" marL="0">
-              <a:buNone/>
-            </a:pPr>
-            <a:r>
-              <a:rPr lang="en-US" sz="950" dirty="0">
-                <a:solidFill>
-                  <a:srgbClr val="98A2B3"/>
-                </a:solidFill>
-                <a:latin typeface="Calibri" pitchFamily="34" charset="0"/>
-                <a:ea typeface="Calibri" pitchFamily="34" charset="-122"/>
-                <a:cs typeface="Calibri" pitchFamily="34" charset="-120"/>
-              </a:rPr>
-              <a:t>1 minuto  ·  CCS é CONFERÊNCIA — use h5 + Qualis + CORE Rank</a:t>
-            </a:r>
-            <a:endParaRPr lang="en-US" sz="950" dirty="0"/>
           </a:p>
         </p:txBody>
       </p:sp>
@@ -11223,7 +10465,7 @@
                 <a:ea typeface="Cambria" pitchFamily="34" charset="-122"/>
                 <a:cs typeface="Cambria" pitchFamily="34" charset="-120"/>
               </a:rPr>
-              <a:t>Relevância — critérios quantitativos</a:t>
+              <a:t>Por que este artigo importa: os números</a:t>
             </a:r>
             <a:endParaRPr lang="en-US" sz="2500" dirty="0"/>
           </a:p>
@@ -11289,7 +10531,7 @@
                 <a:ea typeface="Calibri" pitchFamily="34" charset="-122"/>
                 <a:cs typeface="Calibri" pitchFamily="34" charset="-120"/>
               </a:rPr>
-              <a:t>CITAÇÕES — levantadas em 17/09/2026, as três nas bases</a:t>
+              <a:t>CITAÇÕES levantadas nas três bases em 17/09/2026</a:t>
             </a:r>
             <a:endParaRPr lang="en-US" sz="1300" dirty="0"/>
           </a:p>
@@ -11634,48 +10876,9 @@
                 <a:ea typeface="Calibri" pitchFamily="34" charset="-122"/>
                 <a:cs typeface="Calibri" pitchFamily="34" charset="-120"/>
               </a:rPr>
-              <a:t>2022 em CCS é o ponto de equilíbrio — e 239 mil apps é critério quantitativo por si só.</a:t>
+              <a:t>2022 em CCS é o ponto de equilíbrio, e 239 mil apps já é critério quantitativo por si só.</a:t>
             </a:r>
             <a:endParaRPr lang="en-US" sz="1150" dirty="0"/>
-          </a:p>
-        </p:txBody>
-      </p:sp>
-      <p:sp>
-        <p:nvSpPr>
-          <p:cNvPr id="13" name="Text 11"/>
-          <p:cNvSpPr txBox="1"/>
-          <p:nvPr/>
-        </p:nvSpPr>
-        <p:spPr>
-          <a:xfrm>
-            <a:off x="502920" y="4718304"/>
-            <a:ext cx="8138160" cy="237744"/>
-          </a:xfrm>
-          <a:prstGeom prst="rect">
-            <a:avLst/>
-          </a:prstGeom>
-          <a:noFill/>
-          <a:ln/>
-        </p:spPr>
-        <p:txBody>
-          <a:bodyPr wrap="square" lIns="0" tIns="0" rIns="0" bIns="0" rtlCol="0" anchor="ctr"/>
-          <a:lstStyle/>
-          <a:p>
-            <a:pPr algn="l" indent="0" marL="0">
-              <a:buNone/>
-            </a:pPr>
-            <a:r>
-              <a:rPr lang="en-US" sz="950" dirty="0">
-                <a:solidFill>
-                  <a:srgbClr val="98A2B3"/>
-                </a:solidFill>
-                <a:latin typeface="Calibri" pitchFamily="34" charset="0"/>
-                <a:ea typeface="Calibri" pitchFamily="34" charset="-122"/>
-                <a:cs typeface="Calibri" pitchFamily="34" charset="-120"/>
-              </a:rPr>
-              <a:t>1,5 minuto</a:t>
-            </a:r>
-            <a:endParaRPr lang="en-US" sz="950" dirty="0"/>
           </a:p>
         </p:txBody>
       </p:sp>
@@ -11776,7 +10979,7 @@
                 <a:ea typeface="Cambria" pitchFamily="34" charset="-122"/>
                 <a:cs typeface="Cambria" pitchFamily="34" charset="-120"/>
               </a:rPr>
-              <a:t>Relevância — critérios qualitativos</a:t>
+              <a:t>Por que este artigo importa: o conteúdo</a:t>
             </a:r>
             <a:endParaRPr lang="en-US" sz="2500" dirty="0"/>
           </a:p>
@@ -12021,7 +11224,7 @@
                 <a:ea typeface="Calibri" pitchFamily="34" charset="-122"/>
                 <a:cs typeface="Calibri" pitchFamily="34" charset="-120"/>
               </a:rPr>
-              <a:t>Corpus de apps comerciais de controle parental.</a:t>
+              <a:t>Corpus de aplicativos comerciais, estudados sob o GDPR.</a:t>
             </a:r>
             <a:endParaRPr lang="en-US" sz="1150" dirty="0"/>
           </a:p>
@@ -12050,7 +11253,7 @@
                 <a:ea typeface="Calibri" pitchFamily="34" charset="-122"/>
                 <a:cs typeface="Calibri" pitchFamily="34" charset="-120"/>
               </a:rPr>
-              <a:t>Sem recorte governamental, sem grupo de controle pareado e sem contexto brasileiro — exatamente onde meu trabalho entra.</a:t>
+              <a:t>Sem recorte governamental, sem grupo de controle pareado e sem contexto brasileiro. É onde o meu trabalho entra.</a:t>
             </a:r>
             <a:endParaRPr lang="en-US" sz="1150" dirty="0"/>
           </a:p>
@@ -12187,7 +11390,7 @@
                 <a:ea typeface="Calibri" pitchFamily="34" charset="-122"/>
                 <a:cs typeface="Calibri" pitchFamily="34" charset="-120"/>
               </a:rPr>
-              <a:t>IC95% [0,000; 0,010] contra [0,269; 0,401] — não se sobrepõem.</a:t>
+              <a:t>IC95% [0,000; 0,010] contra [0,269; 0,401]. Não se sobrepõem.</a:t>
             </a:r>
             <a:endParaRPr lang="en-US" sz="1150" dirty="0"/>
           </a:p>
@@ -12248,48 +11451,9 @@
                 <a:ea typeface="Cambria" pitchFamily="34" charset="-122"/>
                 <a:cs typeface="Cambria" pitchFamily="34" charset="-120"/>
               </a:rPr>
-              <a:t>Se o app de governo não monetiza, o rastreador que houver não é de publicidade — é dependência técnica. Isso muda a pergunta.</a:t>
+              <a:t>Se o app de governo não monetiza, o rastreador que houver não é de publicidade. é dependência técnica. Isso muda a pergunta.</a:t>
             </a:r>
             <a:endParaRPr lang="en-US" sz="1450" dirty="0"/>
-          </a:p>
-        </p:txBody>
-      </p:sp>
-      <p:sp>
-        <p:nvSpPr>
-          <p:cNvPr id="15" name="Text 13"/>
-          <p:cNvSpPr txBox="1"/>
-          <p:nvPr/>
-        </p:nvSpPr>
-        <p:spPr>
-          <a:xfrm>
-            <a:off x="502920" y="4718304"/>
-            <a:ext cx="8138160" cy="237744"/>
-          </a:xfrm>
-          <a:prstGeom prst="rect">
-            <a:avLst/>
-          </a:prstGeom>
-          <a:noFill/>
-          <a:ln/>
-        </p:spPr>
-        <p:txBody>
-          <a:bodyPr wrap="square" lIns="0" tIns="0" rIns="0" bIns="0" rtlCol="0" anchor="ctr"/>
-          <a:lstStyle/>
-          <a:p>
-            <a:pPr algn="l" indent="0" marL="0">
-              <a:buNone/>
-            </a:pPr>
-            <a:r>
-              <a:rPr lang="en-US" sz="950" dirty="0">
-                <a:solidFill>
-                  <a:srgbClr val="98A2B3"/>
-                </a:solidFill>
-                <a:latin typeface="Calibri" pitchFamily="34" charset="0"/>
-                <a:ea typeface="Calibri" pitchFamily="34" charset="-122"/>
-                <a:cs typeface="Calibri" pitchFamily="34" charset="-120"/>
-              </a:rPr>
-              <a:t>1,5 minuto  ·  este é o slide mais forte da sua justificativa</a:t>
-            </a:r>
-            <a:endParaRPr lang="en-US" sz="950" dirty="0"/>
           </a:p>
         </p:txBody>
       </p:sp>
@@ -12456,7 +11620,7 @@
                 <a:ea typeface="Calibri" pitchFamily="34" charset="-122"/>
                 <a:cs typeface="Calibri" pitchFamily="34" charset="-120"/>
               </a:rPr>
-              <a:t>OS TRÊS OBRIGATÓRIOS — todos levantados em 17/09/2026</a:t>
+              <a:t>OS TRÊS OBRIGATÓRIOS, levantados em 17/09/2026</a:t>
             </a:r>
             <a:endParaRPr lang="en-US" sz="1300" dirty="0"/>
           </a:p>
@@ -12518,7 +11682,7 @@
                 <a:ea typeface="Calibri" pitchFamily="34" charset="-122"/>
                 <a:cs typeface="Calibri" pitchFamily="34" charset="-120"/>
               </a:rPr>
-              <a:t>     (posição 19 = AsiaCCS, h5 41 — outro evento; conferido)</a:t>
+              <a:t>     (posição 19 é a AsiaCCS, h5 41, outro evento)</a:t>
             </a:r>
             <a:endParaRPr lang="en-US" sz="1150" dirty="0"/>
           </a:p>
@@ -12666,7 +11830,7 @@
                 <a:ea typeface="Calibri" pitchFamily="34" charset="-122"/>
                 <a:cs typeface="Calibri" pitchFamily="34" charset="-120"/>
               </a:rPr>
-              <a:t>Com N=20 o percentil dá 75 (A2) — mas 20 é lista TRUNCADA, não população. Esse 75 é PISO: universo maior só empurra para cima.</a:t>
+              <a:t>Com N=20 o percentil dá 75, que seria A2. Mas 20 é lista TRUNCADA, não população. Esse 75 é PISO: universo maior só empurra para cima.</a:t>
             </a:r>
             <a:endParaRPr lang="en-US" sz="1150" dirty="0"/>
           </a:p>
@@ -12715,7 +11879,7 @@
                 <a:ea typeface="Calibri" pitchFamily="34" charset="-122"/>
                 <a:cs typeface="Calibri" pitchFamily="34" charset="-120"/>
               </a:rPr>
-              <a:t>Basta a área ter 40 veículos. Tem centenas. Logo A1 — limite, não estimativa.</a:t>
+              <a:t>Basta a área ter 40 veículos. Tem centenas. Logo A1. É limite, não estimativa.</a:t>
             </a:r>
             <a:endParaRPr lang="en-US" sz="1150" dirty="0"/>
           </a:p>
@@ -12880,48 +12044,9 @@
                 <a:ea typeface="Calibri" pitchFamily="34" charset="-122"/>
                 <a:cs typeface="Calibri" pitchFamily="34" charset="-120"/>
               </a:rPr>
-              <a:t>As áreas podem ajustar até 30% dos estratos — o valor publicado pode divergir da tabela.</a:t>
+              <a:t>As áreas podem ajustar até 30% dos estratos, então o valor publicado pode divergir da tabela.</a:t>
             </a:r>
             <a:endParaRPr lang="en-US" sz="1050" dirty="0"/>
-          </a:p>
-        </p:txBody>
-      </p:sp>
-      <p:sp>
-        <p:nvSpPr>
-          <p:cNvPr id="13" name="Text 10"/>
-          <p:cNvSpPr txBox="1"/>
-          <p:nvPr/>
-        </p:nvSpPr>
-        <p:spPr>
-          <a:xfrm>
-            <a:off x="502920" y="4718304"/>
-            <a:ext cx="8138160" cy="237744"/>
-          </a:xfrm>
-          <a:prstGeom prst="rect">
-            <a:avLst/>
-          </a:prstGeom>
-          <a:noFill/>
-          <a:ln/>
-        </p:spPr>
-        <p:txBody>
-          <a:bodyPr wrap="square" lIns="0" tIns="0" rIns="0" bIns="0" rtlCol="0" anchor="ctr"/>
-          <a:lstStyle/>
-          <a:p>
-            <a:pPr algn="l" indent="0" marL="0">
-              <a:buNone/>
-            </a:pPr>
-            <a:r>
-              <a:rPr lang="en-US" sz="950" dirty="0">
-                <a:solidFill>
-                  <a:srgbClr val="98A2B3"/>
-                </a:solidFill>
-                <a:latin typeface="Calibri" pitchFamily="34" charset="0"/>
-                <a:ea typeface="Calibri" pitchFamily="34" charset="-122"/>
-                <a:cs typeface="Calibri" pitchFamily="34" charset="-120"/>
-              </a:rPr>
-              <a:t>2 minutos  ·  use a figura original no slide — é fonte primária</a:t>
-            </a:r>
-            <a:endParaRPr lang="en-US" sz="950" dirty="0"/>
           </a:p>
         </p:txBody>
       </p:sp>
@@ -13022,7 +12147,7 @@
                 <a:ea typeface="Cambria" pitchFamily="34" charset="-122"/>
                 <a:cs typeface="Cambria" pitchFamily="34" charset="-120"/>
               </a:rPr>
-              <a:t>Análise da estrutura</a:t>
+              <a:t>A estrutura do artigo</a:t>
             </a:r>
             <a:endParaRPr lang="en-US" sz="2500" dirty="0"/>
           </a:p>
@@ -13061,7 +12186,7 @@
                 <a:ea typeface="Calibri" pitchFamily="34" charset="-122"/>
                 <a:cs typeface="Calibri" pitchFamily="34" charset="-120"/>
               </a:rPr>
-              <a:t>As 8 seções do artigo e a função de cada uma. 15 páginas.</a:t>
+              <a:t>Oito seções em quinze páginas. À direita, o que chama atenção.</a:t>
             </a:r>
             <a:endParaRPr lang="en-US" sz="1200" dirty="0"/>
           </a:p>
@@ -13130,7 +12255,7 @@
                 <a:ea typeface="Consolas" pitchFamily="34" charset="-122"/>
                 <a:cs typeface="Consolas" pitchFamily="34" charset="-120"/>
               </a:rPr>
-              <a:t>1  Introduction  (p.1-3)   contextualiza, 3 questões de pesquisa, contribuições</a:t>
+              <a:t>1  Introduction            p.1-3    contexto, 3 perguntas, contribuições</a:t>
             </a:r>
             <a:endParaRPr lang="en-US" sz="950" dirty="0"/>
           </a:p>
@@ -13150,7 +12275,7 @@
                 <a:ea typeface="Consolas" pitchFamily="34" charset="-122"/>
                 <a:cs typeface="Consolas" pitchFamily="34" charset="-120"/>
               </a:rPr>
-              <a:t>2  Legal Background of GDPR Consent  (p.3-4)   define juridicamente as 4 violações</a:t>
+              <a:t>2  Legal Background        p.3-4    define na lei as 4 violações que vai medir</a:t>
             </a:r>
             <a:endParaRPr lang="en-US" sz="950" dirty="0"/>
           </a:p>
@@ -13170,7 +12295,7 @@
                 <a:ea typeface="Consolas" pitchFamily="34" charset="-122"/>
                 <a:cs typeface="Consolas" pitchFamily="34" charset="-120"/>
               </a:rPr>
-              <a:t>3  Methodology  (p.4-6)   como identificar os avisos de consentimento</a:t>
+              <a:t>3  Methodology             p.4-6    como achar os avisos de consentimento</a:t>
             </a:r>
             <a:endParaRPr lang="en-US" sz="950" dirty="0"/>
           </a:p>
@@ -13190,7 +12315,7 @@
                 <a:ea typeface="Consolas" pitchFamily="34" charset="-122"/>
                 <a:cs typeface="Consolas" pitchFamily="34" charset="-120"/>
               </a:rPr>
-              <a:t>4  Large-Scale Analysis  (p.6-11)   aplicação em escala + resultados</a:t>
+              <a:t>4  Large-Scale Analysis    p.6-11   aplica em escala e mostra os resultados</a:t>
             </a:r>
             <a:endParaRPr lang="en-US" sz="950" dirty="0"/>
           </a:p>
@@ -13210,7 +12335,7 @@
                 <a:ea typeface="Consolas" pitchFamily="34" charset="-122"/>
                 <a:cs typeface="Consolas" pitchFamily="34" charset="-120"/>
               </a:rPr>
-              <a:t>5  Developer Notification  (p.11-12)   notifica devs e coleta respostas</a:t>
+              <a:t>5  Developer Notification  p.11-12  avisa os desenvolvedores, coleta respostas</a:t>
             </a:r>
             <a:endParaRPr lang="en-US" sz="950" dirty="0"/>
           </a:p>
@@ -13230,7 +12355,47 @@
                 <a:ea typeface="Consolas" pitchFamily="34" charset="-122"/>
                 <a:cs typeface="Consolas" pitchFamily="34" charset="-120"/>
               </a:rPr>
-              <a:t>6  Discussion  (p.12-13)   ·  7  Related Work  (p.13)  ·  8  Conclusion  (p.13)</a:t>
+              <a:t>6  Discussion              p.12-13  interpreta</a:t>
+            </a:r>
+            <a:endParaRPr lang="en-US" sz="950" dirty="0"/>
+          </a:p>
+          <a:p>
+            <a:pPr indent="0" marL="0">
+              <a:lnSpc>
+                <a:spcPct val="122000"/>
+              </a:lnSpc>
+              <a:buNone/>
+            </a:pPr>
+            <a:r>
+              <a:rPr lang="en-US" sz="950" dirty="0">
+                <a:solidFill>
+                  <a:srgbClr val="1B2A4A"/>
+                </a:solidFill>
+                <a:latin typeface="Consolas" pitchFamily="34" charset="0"/>
+                <a:ea typeface="Consolas" pitchFamily="34" charset="-122"/>
+                <a:cs typeface="Consolas" pitchFamily="34" charset="-120"/>
+              </a:rPr>
+              <a:t>7  Related Work            p.13     revisão da literatura</a:t>
+            </a:r>
+            <a:endParaRPr lang="en-US" sz="950" dirty="0"/>
+          </a:p>
+          <a:p>
+            <a:pPr indent="0" marL="0">
+              <a:lnSpc>
+                <a:spcPct val="122000"/>
+              </a:lnSpc>
+              <a:buNone/>
+            </a:pPr>
+            <a:r>
+              <a:rPr lang="en-US" sz="950" dirty="0">
+                <a:solidFill>
+                  <a:srgbClr val="1B2A4A"/>
+                </a:solidFill>
+                <a:latin typeface="Consolas" pitchFamily="34" charset="0"/>
+                <a:ea typeface="Consolas" pitchFamily="34" charset="-122"/>
+                <a:cs typeface="Consolas" pitchFamily="34" charset="-120"/>
+              </a:rPr>
+              <a:t>8  Conclusion              p.13     fecha</a:t>
             </a:r>
             <a:endParaRPr lang="en-US" sz="950" dirty="0"/>
           </a:p>
@@ -13312,7 +12477,7 @@
                 <a:ea typeface="Calibri" pitchFamily="34" charset="-122"/>
                 <a:cs typeface="Calibri" pitchFamily="34" charset="-120"/>
               </a:rPr>
-              <a:t>Related Work é a seção 7, NÃO a 2</a:t>
+              <a:t>A revisão da literatura é a seção 7, não a 2</a:t>
             </a:r>
             <a:endParaRPr lang="en-US" sz="1100" dirty="0"/>
           </a:p>
@@ -13333,7 +12498,7 @@
                 <a:ea typeface="Calibri" pitchFamily="34" charset="-122"/>
                 <a:cs typeface="Calibri" pitchFamily="34" charset="-120"/>
               </a:rPr>
-              <a:t>Método (3) separado da aplicação (4)</a:t>
+              <a:t>Método (3) vem separado da aplicação (4)</a:t>
             </a:r>
             <a:endParaRPr lang="en-US" sz="1100" dirty="0"/>
           </a:p>
@@ -13354,7 +12519,7 @@
                 <a:ea typeface="Calibri" pitchFamily="34" charset="-122"/>
                 <a:cs typeface="Calibri" pitchFamily="34" charset="-120"/>
               </a:rPr>
-              <a:t>Seções 3+4 = 7,5 de 15 páginas</a:t>
+              <a:t>As seções 3 e 4 ocupam metade do artigo</a:t>
             </a:r>
             <a:endParaRPr lang="en-US" sz="1100" dirty="0"/>
           </a:p>
@@ -13375,7 +12540,7 @@
                 <a:ea typeface="Calibri" pitchFamily="34" charset="-122"/>
                 <a:cs typeface="Calibri" pitchFamily="34" charset="-120"/>
               </a:rPr>
-              <a:t>NÃO há seção de Limitações nem de Ética</a:t>
+              <a:t>Não existe seção de Limitações nem de Ética</a:t>
             </a:r>
             <a:endParaRPr lang="en-US" sz="1100" dirty="0"/>
           </a:p>
@@ -13483,48 +12648,9 @@
                 <a:ea typeface="Calibri" pitchFamily="34" charset="-122"/>
                 <a:cs typeface="Calibri" pitchFamily="34" charset="-120"/>
               </a:rPr>
-              <a:t>Metodologia detalhada é CONSEQUÊNCIA da escala. No exemplo da professora o avaliador teve de reconstruir o método; com 239 mil apps isso seria impossível.</a:t>
+              <a:t>Num estudo de 239 mil aplicativos, método detalhado é consequência da escala. No exemplo da professora o avaliador teve que reconstruir o método porque não havia seção.</a:t>
             </a:r>
             <a:endParaRPr lang="en-US" sz="1150" dirty="0"/>
-          </a:p>
-        </p:txBody>
-      </p:sp>
-      <p:sp>
-        <p:nvSpPr>
-          <p:cNvPr id="12" name="Text 10"/>
-          <p:cNvSpPr txBox="1"/>
-          <p:nvPr/>
-        </p:nvSpPr>
-        <p:spPr>
-          <a:xfrm>
-            <a:off x="502920" y="4718304"/>
-            <a:ext cx="8138160" cy="237744"/>
-          </a:xfrm>
-          <a:prstGeom prst="rect">
-            <a:avLst/>
-          </a:prstGeom>
-          <a:noFill/>
-          <a:ln/>
-        </p:spPr>
-        <p:txBody>
-          <a:bodyPr wrap="square" lIns="0" tIns="0" rIns="0" bIns="0" rtlCol="0" anchor="ctr"/>
-          <a:lstStyle/>
-          <a:p>
-            <a:pPr algn="l" indent="0" marL="0">
-              <a:buNone/>
-            </a:pPr>
-            <a:r>
-              <a:rPr lang="en-US" sz="950" dirty="0">
-                <a:solidFill>
-                  <a:srgbClr val="98A2B3"/>
-                </a:solidFill>
-                <a:latin typeface="Calibri" pitchFamily="34" charset="0"/>
-                <a:ea typeface="Calibri" pitchFamily="34" charset="-122"/>
-                <a:cs typeface="Calibri" pitchFamily="34" charset="-120"/>
-              </a:rPr>
-              <a:t>~50 segundos por slide  ·  a análise da estrutura vale 5 dos 15 minutos</a:t>
-            </a:r>
-            <a:endParaRPr lang="en-US" sz="950" dirty="0"/>
           </a:p>
         </p:txBody>
       </p:sp>

--- a/seminario/seminario-analise-de-artigo.pptx
+++ b/seminario/seminario-analise-de-artigo.pptx
@@ -8343,7 +8343,7 @@
                 <a:ea typeface="Calibri" pitchFamily="34" charset="-122"/>
                 <a:cs typeface="Calibri" pitchFamily="34" charset="-120"/>
               </a:rPr>
-              <a:t>Duas buscas, no campo título, resumo e palavras-chave:</a:t>
+              <a:t>Três buscas, no campo título, resumo e palavras-chave:</a:t>
             </a:r>
             <a:endParaRPr lang="en-US" sz="1050" dirty="0"/>
           </a:p>
@@ -8358,7 +8358,7 @@
         <p:spPr>
           <a:xfrm>
             <a:off x="5349240" y="1499616"/>
-            <a:ext cx="3291840" cy="1051560"/>
+            <a:ext cx="3291840" cy="685800"/>
           </a:xfrm>
           <a:prstGeom prst="rect">
             <a:avLst/>
@@ -8374,7 +8374,7 @@
               <a:buNone/>
             </a:pPr>
             <a:r>
-              <a:rPr lang="en-US" sz="900" dirty="0">
+              <a:rPr lang="en-US" sz="800" dirty="0">
                 <a:solidFill>
                   <a:srgbClr val="1B2A4A"/>
                 </a:solidFill>
@@ -8382,39 +8382,33 @@
                 <a:ea typeface="Consolas" pitchFamily="34" charset="-122"/>
                 <a:cs typeface="Consolas" pitchFamily="34" charset="-120"/>
               </a:rPr>
-              <a:t>1.  "third-party tracking" AND consent AND android</a:t>
-            </a:r>
-            <a:endParaRPr lang="en-US" sz="900" dirty="0"/>
-          </a:p>
-          <a:p>
-            <a:pPr indent="0" marL="0">
-              <a:buNone/>
-            </a:pPr>
-            <a:r>
-              <a:rPr lang="en-US" sz="900" b="1" dirty="0">
-                <a:solidFill>
-                  <a:srgbClr val="2E86A8"/>
+              <a:t>1.  "third-party tracking" AND consent AND android      4</a:t>
+            </a:r>
+            <a:endParaRPr lang="en-US" sz="800" dirty="0"/>
+          </a:p>
+          <a:p>
+            <a:pPr indent="0" marL="0">
+              <a:buNone/>
+            </a:pPr>
+            <a:r>
+              <a:rPr lang="en-US" sz="800" dirty="0">
+                <a:solidFill>
+                  <a:srgbClr val="1B2A4A"/>
                 </a:solidFill>
                 <a:latin typeface="Consolas" pitchFamily="34" charset="0"/>
                 <a:ea typeface="Consolas" pitchFamily="34" charset="-122"/>
                 <a:cs typeface="Consolas" pitchFamily="34" charset="-120"/>
               </a:rPr>
-              <a:t>     4 resultados</a:t>
-            </a:r>
-            <a:endParaRPr lang="en-US" sz="900" dirty="0"/>
-          </a:p>
-          <a:p>
-            <a:pPr indent="0" marL="0">
-              <a:buNone/>
-            </a:pPr>
-            <a:endParaRPr lang="en-US" sz="900" dirty="0"/>
-          </a:p>
-          <a:p>
-            <a:pPr indent="0" marL="0">
-              <a:buNone/>
-            </a:pPr>
-            <a:r>
-              <a:rPr lang="en-US" sz="900" dirty="0">
+              <a:t>2.  "third party" AND tracking AND android AND</a:t>
+            </a:r>
+            <a:endParaRPr lang="en-US" sz="800" dirty="0"/>
+          </a:p>
+          <a:p>
+            <a:pPr indent="0" marL="0">
+              <a:buNone/>
+            </a:pPr>
+            <a:r>
+              <a:rPr lang="en-US" sz="800" dirty="0">
                 <a:solidFill>
                   <a:srgbClr val="1B2A4A"/>
                 </a:solidFill>
@@ -8422,16 +8416,16 @@
                 <a:ea typeface="Consolas" pitchFamily="34" charset="-122"/>
                 <a:cs typeface="Consolas" pitchFamily="34" charset="-120"/>
               </a:rPr>
-              <a:t>2.  "third party" AND tracking AND android AND</a:t>
-            </a:r>
-            <a:endParaRPr lang="en-US" sz="900" dirty="0"/>
-          </a:p>
-          <a:p>
-            <a:pPr indent="0" marL="0">
-              <a:buNone/>
-            </a:pPr>
-            <a:r>
-              <a:rPr lang="en-US" sz="900" dirty="0">
+              <a:t>    (consent OR GDPR)                                  12</a:t>
+            </a:r>
+            <a:endParaRPr lang="en-US" sz="800" dirty="0"/>
+          </a:p>
+          <a:p>
+            <a:pPr indent="0" marL="0">
+              <a:buNone/>
+            </a:pPr>
+            <a:r>
+              <a:rPr lang="en-US" sz="800" b="1" dirty="0">
                 <a:solidFill>
                   <a:srgbClr val="1B2A4A"/>
                 </a:solidFill>
@@ -8439,16 +8433,38 @@
                 <a:ea typeface="Consolas" pitchFamily="34" charset="-122"/>
                 <a:cs typeface="Consolas" pitchFamily="34" charset="-120"/>
               </a:rPr>
-              <a:t>     (consent OR GDPR)</a:t>
-            </a:r>
-            <a:endParaRPr lang="en-US" sz="900" dirty="0"/>
-          </a:p>
-          <a:p>
-            <a:pPr indent="0" marL="0">
-              <a:buNone/>
-            </a:pPr>
-            <a:r>
-              <a:rPr lang="en-US" sz="900" b="1" dirty="0">
+              <a:t>3.  "third-party tracking"                            131</a:t>
+            </a:r>
+            <a:endParaRPr lang="en-US" sz="800" dirty="0"/>
+          </a:p>
+        </p:txBody>
+      </p:sp>
+      <p:sp>
+        <p:nvSpPr>
+          <p:cNvPr id="8" name="Text 5"/>
+          <p:cNvSpPr txBox="1"/>
+          <p:nvPr/>
+        </p:nvSpPr>
+        <p:spPr>
+          <a:xfrm>
+            <a:off x="5349240" y="2240280"/>
+            <a:ext cx="3291840" cy="685800"/>
+          </a:xfrm>
+          <a:prstGeom prst="rect">
+            <a:avLst/>
+          </a:prstGeom>
+          <a:noFill/>
+          <a:ln/>
+        </p:spPr>
+        <p:txBody>
+          <a:bodyPr wrap="square" lIns="0" tIns="0" rIns="0" bIns="0" rtlCol="0" anchor="t"/>
+          <a:lstStyle/>
+          <a:p>
+            <a:pPr indent="0" marL="0">
+              <a:buNone/>
+            </a:pPr>
+            <a:r>
+              <a:rPr lang="en-US" sz="950" b="1" dirty="0">
                 <a:solidFill>
                   <a:srgbClr val="2E86A8"/>
                 </a:solidFill>
@@ -8456,9 +8472,116 @@
                 <a:ea typeface="Consolas" pitchFamily="34" charset="-122"/>
                 <a:cs typeface="Consolas" pitchFamily="34" charset="-120"/>
               </a:rPr>
-              <a:t>     12 resultados</a:t>
-            </a:r>
-            <a:endParaRPr lang="en-US" sz="900" dirty="0"/>
+              <a:t>131</a:t>
+            </a:r>
+            <a:pPr indent="0" marL="0">
+              <a:buNone/>
+            </a:pPr>
+            <a:r>
+              <a:rPr lang="en-US" sz="950" dirty="0">
+                <a:solidFill>
+                  <a:srgbClr val="1B2A4A"/>
+                </a:solidFill>
+                <a:latin typeface="Consolas" pitchFamily="34" charset="0"/>
+                <a:ea typeface="Consolas" pitchFamily="34" charset="-122"/>
+                <a:cs typeface="Consolas" pitchFamily="34" charset="-120"/>
+              </a:rPr>
+              <a:t>  expressão exata</a:t>
+            </a:r>
+            <a:endParaRPr lang="en-US" sz="950" dirty="0"/>
+          </a:p>
+          <a:p>
+            <a:pPr indent="0" marL="0">
+              <a:buNone/>
+            </a:pPr>
+            <a:r>
+              <a:rPr lang="en-US" sz="950" b="1" dirty="0">
+                <a:solidFill>
+                  <a:srgbClr val="2E86A8"/>
+                </a:solidFill>
+                <a:latin typeface="Consolas" pitchFamily="34" charset="0"/>
+                <a:ea typeface="Consolas" pitchFamily="34" charset="-122"/>
+                <a:cs typeface="Consolas" pitchFamily="34" charset="-120"/>
+              </a:rPr>
+              <a:t> 70</a:t>
+            </a:r>
+            <a:pPr indent="0" marL="0">
+              <a:buNone/>
+            </a:pPr>
+            <a:r>
+              <a:rPr lang="en-US" sz="950" dirty="0">
+                <a:solidFill>
+                  <a:srgbClr val="1B2A4A"/>
+                </a:solidFill>
+                <a:latin typeface="Consolas" pitchFamily="34" charset="0"/>
+                <a:ea typeface="Consolas" pitchFamily="34" charset="-122"/>
+                <a:cs typeface="Consolas" pitchFamily="34" charset="-120"/>
+              </a:rPr>
+              <a:t>  ano, área e tipo de documento</a:t>
+            </a:r>
+            <a:endParaRPr lang="en-US" sz="950" dirty="0"/>
+          </a:p>
+          <a:p>
+            <a:pPr indent="0" marL="0">
+              <a:buNone/>
+            </a:pPr>
+            <a:r>
+              <a:rPr lang="en-US" sz="950" b="1" dirty="0">
+                <a:solidFill>
+                  <a:srgbClr val="2E86A8"/>
+                </a:solidFill>
+                <a:latin typeface="Consolas" pitchFamily="34" charset="0"/>
+                <a:ea typeface="Consolas" pitchFamily="34" charset="-122"/>
+                <a:cs typeface="Consolas" pitchFamily="34" charset="-120"/>
+              </a:rPr>
+              <a:t>  5</a:t>
+            </a:r>
+            <a:pPr indent="0" marL="0">
+              <a:buNone/>
+            </a:pPr>
+            <a:r>
+              <a:rPr lang="en-US" sz="950" dirty="0">
+                <a:solidFill>
+                  <a:srgbClr val="1B2A4A"/>
+                </a:solidFill>
+                <a:latin typeface="Consolas" pitchFamily="34" charset="0"/>
+                <a:ea typeface="Consolas" pitchFamily="34" charset="-122"/>
+                <a:cs typeface="Consolas" pitchFamily="34" charset="-120"/>
+              </a:rPr>
+              <a:t>  palavras-chave</a:t>
+            </a:r>
+            <a:endParaRPr lang="en-US" sz="950" dirty="0"/>
+          </a:p>
+          <a:p>
+            <a:pPr indent="0" marL="0">
+              <a:buNone/>
+            </a:pPr>
+            <a:r>
+              <a:rPr lang="en-US" sz="950" b="1" dirty="0">
+                <a:solidFill>
+                  <a:srgbClr val="1E6B3A"/>
+                </a:solidFill>
+                <a:latin typeface="Consolas" pitchFamily="34" charset="0"/>
+                <a:ea typeface="Consolas" pitchFamily="34" charset="-122"/>
+                <a:cs typeface="Consolas" pitchFamily="34" charset="-120"/>
+              </a:rPr>
+              <a:t>  1</a:t>
+            </a:r>
+            <a:pPr indent="0" marL="0">
+              <a:buNone/>
+            </a:pPr>
+            <a:r>
+              <a:rPr lang="en-US" sz="950" dirty="0">
+                <a:solidFill>
+                  <a:srgbClr val="1B2A4A"/>
+                </a:solidFill>
+                <a:latin typeface="Consolas" pitchFamily="34" charset="0"/>
+                <a:ea typeface="Consolas" pitchFamily="34" charset="-122"/>
+                <a:cs typeface="Consolas" pitchFamily="34" charset="-120"/>
+              </a:rPr>
+              <a:t>  selecionado</a:t>
+            </a:r>
+            <a:endParaRPr lang="en-US" sz="950" dirty="0"/>
           </a:p>
         </p:txBody>
       </p:sp>
@@ -8477,7 +8600,7 @@
           </p:nvPr>
         </p:nvGraphicFramePr>
         <p:xfrm>
-          <a:off x="5349240" y="2697480"/>
+          <a:off x="5349240" y="2999232"/>
           <a:ext cx="3291840" cy="914400"/>
         </p:xfrm>
         <a:graphic>
@@ -9855,13 +9978,13 @@
       </p:graphicFrame>
       <p:sp>
         <p:nvSpPr>
-          <p:cNvPr id="9" name="Text 5"/>
-          <p:cNvSpPr txBox="1"/>
-          <p:nvPr/>
-        </p:nvSpPr>
-        <p:spPr>
-          <a:xfrm>
-            <a:off x="5349240" y="3950208"/>
+          <p:cNvPr id="10" name="Text 6"/>
+          <p:cNvSpPr txBox="1"/>
+          <p:nvPr/>
+        </p:nvSpPr>
+        <p:spPr>
+          <a:xfrm>
+            <a:off x="5349240" y="4160520"/>
             <a:ext cx="3291840" cy="274320"/>
           </a:xfrm>
           <a:prstGeom prst="rect">
@@ -9886,7 +10009,7 @@
                 <a:ea typeface="Calibri" pitchFamily="34" charset="-122"/>
                 <a:cs typeface="Calibri" pitchFamily="34" charset="-120"/>
               </a:rPr>
-              <a:t>A busca também encontrou a alternativa que eu considerei e descartei.</a:t>
+              <a:t>Apareceu também um artigo de 2026 no IEEE S&amp;P, com 0 citações.</a:t>
             </a:r>
             <a:endParaRPr lang="en-US" sz="950" dirty="0"/>
           </a:p>
